--- a/content/busi1763/files/Unilever_Group_EN.pptx
+++ b/content/busi1763/files/Unilever_Group_EN.pptx
@@ -184,7 +184,7 @@
           </c:spPr>
           <c:invertIfNegative val="0"/>
           <c:dLbls>
-            <c:numFmt formatCode="#,##0" sourceLinked="0"/>
+            <c:numFmt formatCode="0.0" sourceLinked="0"/>
             <c:txPr>
               <a:bodyPr/>
               <a:lstStyle/>
@@ -264,7 +264,283 @@
           </c:val>
         </c:ser>
         <c:dLbls>
-          <c:numFmt formatCode="#,##0" sourceLinked="0"/>
+          <c:numFmt formatCode="0.0" sourceLinked="0"/>
+          <c:txPr>
+            <a:bodyPr/>
+            <a:lstStyle/>
+            <a:p>
+              <a:pPr>
+                <a:defRPr b="0" i="0" strike="noStrike" sz="1000" u="none">
+                  <a:solidFill>
+                    <a:srgbClr val="1A1F36"/>
+                  </a:solidFill>
+                  <a:latin typeface="Arial"/>
+                </a:defRPr>
+              </a:pPr>
+            </a:p>
+          </c:txPr>
+          <c:showLegendKey val="0"/>
+          <c:showVal val="1"/>
+          <c:showCatName val="0"/>
+          <c:showSerName val="0"/>
+          <c:showPercent val="0"/>
+          <c:showBubbleSize val="0"/>
+          <c:showLeaderLines val="0"/>
+        </c:dLbls>
+        <c:gapWidth val="150"/>
+        <c:overlap val="0"/>
+        <c:axId val="2094734554"/>
+        <c:axId val="2094734552"/>
+        <c:axId val="2094734556"/>
+      </c:barChart>
+      <c:catAx>
+        <c:axId val="2094734554"/>
+        <c:scaling>
+          <c:orientation val="minMax"/>
+        </c:scaling>
+        <c:delete val="0"/>
+        <c:axPos val="b"/>
+        <c:numFmt formatCode="General" sourceLinked="1"/>
+        <c:majorTickMark val="out"/>
+        <c:minorTickMark val="none"/>
+        <c:tickLblPos val="low"/>
+        <c:spPr>
+          <a:ln w="12700" cap="flat">
+            <a:solidFill>
+              <a:srgbClr val="888888"/>
+            </a:solidFill>
+            <a:prstDash val="solid"/>
+            <a:round/>
+          </a:ln>
+        </c:spPr>
+        <c:txPr>
+          <a:bodyPr/>
+          <a:lstStyle/>
+          <a:p>
+            <a:pPr>
+              <a:defRPr sz="1100" b="0" i="0" u="none" strike="noStrike">
+                <a:solidFill>
+                  <a:srgbClr val="1A1F36"/>
+                </a:solidFill>
+                <a:latin typeface="Arial"/>
+              </a:defRPr>
+            </a:pPr>
+            <a:endParaRPr lang="en-US"/>
+          </a:p>
+        </c:txPr>
+        <c:crossAx val="2094734552"/>
+        <c:crosses val="autoZero"/>
+        <c:auto val="1"/>
+        <c:lblAlgn val="ctr"/>
+        <c:noMultiLvlLbl val="1"/>
+      </c:catAx>
+      <c:valAx>
+        <c:axId val="2094734552"/>
+        <c:scaling>
+          <c:orientation val="minMax"/>
+        </c:scaling>
+        <c:delete val="1"/>
+        <c:axPos val="l"/>
+        <c:numFmt formatCode="General" sourceLinked="0"/>
+        <c:majorTickMark val="out"/>
+        <c:minorTickMark val="none"/>
+        <c:tickLblPos val="nextTo"/>
+        <c:spPr>
+          <a:ln w="12700" cap="flat">
+            <a:solidFill>
+              <a:srgbClr val="888888"/>
+            </a:solidFill>
+            <a:prstDash val="solid"/>
+            <a:round/>
+          </a:ln>
+        </c:spPr>
+        <c:txPr>
+          <a:bodyPr/>
+          <a:lstStyle/>
+          <a:p>
+            <a:pPr>
+              <a:defRPr sz="1200" b="0" i="0" u="none" strike="noStrike">
+                <a:solidFill>
+                  <a:srgbClr val="000000"/>
+                </a:solidFill>
+                <a:latin typeface="Arial"/>
+              </a:defRPr>
+            </a:pPr>
+            <a:endParaRPr lang="en-US"/>
+          </a:p>
+        </c:txPr>
+        <c:crossAx val="2094734554"/>
+        <c:crosses val="autoZero"/>
+        <c:crossBetween val="between"/>
+      </c:valAx>
+      <c:spPr>
+        <a:noFill/>
+        <a:ln>
+          <a:noFill/>
+        </a:ln>
+        <a:effectLst/>
+      </c:spPr>
+    </c:plotArea>
+    <c:plotVisOnly val="1"/>
+    <c:dispBlanksAs val="span"/>
+  </c:chart>
+  <c:spPr>
+    <a:noFill/>
+    <a:ln>
+      <a:noFill/>
+    </a:ln>
+    <a:effectLst/>
+  </c:spPr>
+  <c:externalData r:id="rId1">
+    <c:autoUpdate val="0"/>
+  </c:externalData>
+</c:chartSpace>
+</file>
+
+<file path=ppt/charts/chart2.xml><?xml version="1.0" encoding="utf-8"?>
+<c:chartSpace xmlns:c="http://schemas.openxmlformats.org/drawingml/2006/chart" xmlns:a="http://schemas.openxmlformats.org/drawingml/2006/main" xmlns:r="http://schemas.openxmlformats.org/officeDocument/2006/relationships">
+  <c:date1904 val="0"/>
+  <c:roundedCorners val="1"/>
+  <c:chart>
+    <c:title>
+      <c:tx>
+        <c:rich>
+          <a:bodyPr/>
+          <a:lstStyle/>
+          <a:p>
+            <a:pPr>
+              <a:defRPr sz="1200" b="0" i="0" u="none" strike="noStrike">
+                <a:solidFill>
+                  <a:srgbClr val="1A1F36"/>
+                </a:solidFill>
+                <a:latin typeface="Arial"/>
+              </a:defRPr>
+            </a:pPr>
+            <a:r>
+              <a:rPr sz="1200" b="0" i="0" u="none" strike="noStrike">
+                <a:solidFill>
+                  <a:srgbClr val="1A1F36"/>
+                </a:solidFill>
+                <a:latin typeface="Arial"/>
+              </a:rPr>
+              <a:t>Unilever turnover in the US, € billion</a:t>
+            </a:r>
+          </a:p>
+        </c:rich>
+      </c:tx>
+      <c:layout/>
+      <c:overlay val="0"/>
+    </c:title>
+    <c:autoTitleDeleted val="0"/>
+    <c:plotArea>
+      <c:layout/>
+      <c:barChart>
+        <c:barDir val="col"/>
+        <c:grouping val="clustered"/>
+        <c:varyColors val="0"/>
+        <c:ser>
+          <c:idx val="0"/>
+          <c:order val="0"/>
+          <c:tx>
+            <c:strRef>
+              <c:f>Sheet1!$B$1</c:f>
+              <c:strCache>
+                <c:ptCount val="1"/>
+                <c:pt idx="0">
+                  <c:v>US turnover (€bn)</c:v>
+                </c:pt>
+              </c:strCache>
+            </c:strRef>
+          </c:tx>
+          <c:spPr>
+            <a:solidFill>
+              <a:srgbClr val="7C3AED"/>
+            </a:solidFill>
+            <a:effectLst/>
+          </c:spPr>
+          <c:invertIfNegative val="0"/>
+          <c:dLbls>
+            <c:numFmt formatCode="0.0" sourceLinked="0"/>
+            <c:txPr>
+              <a:bodyPr/>
+              <a:lstStyle/>
+              <a:p>
+                <a:pPr>
+                  <a:defRPr b="0" i="0" strike="noStrike" sz="1000" u="none">
+                    <a:solidFill>
+                      <a:srgbClr val="1A1F36"/>
+                    </a:solidFill>
+                    <a:latin typeface="Arial"/>
+                  </a:defRPr>
+                </a:pPr>
+              </a:p>
+            </c:txPr>
+            <c:showLegendKey val="0"/>
+            <c:showVal val="1"/>
+            <c:showCatName val="0"/>
+            <c:showSerName val="0"/>
+            <c:showPercent val="0"/>
+            <c:showBubbleSize val="0"/>
+            <c:showLeaderLines val="0"/>
+          </c:dLbls>
+          <c:cat>
+            <c:multiLvlStrRef>
+              <c:f>Sheet1!$A$2:$A$7</c:f>
+              <c:multiLvlStrCache>
+                <c:ptCount val="6"/>
+                <c:lvl>
+                  <c:pt idx="0">
+                    <c:v>2020</c:v>
+                  </c:pt>
+                  <c:pt idx="1">
+                    <c:v>2021</c:v>
+                  </c:pt>
+                  <c:pt idx="2">
+                    <c:v>2022</c:v>
+                  </c:pt>
+                  <c:pt idx="3">
+                    <c:v>2023</c:v>
+                  </c:pt>
+                  <c:pt idx="4">
+                    <c:v>2024</c:v>
+                  </c:pt>
+                  <c:pt idx="5">
+                    <c:v>2025*</c:v>
+                  </c:pt>
+                </c:lvl>
+              </c:multiLvlStrCache>
+            </c:multiLvlStrRef>
+          </c:cat>
+          <c:val>
+            <c:numRef>
+              <c:f>Sheet1!$B$2:$B$7</c:f>
+              <c:numCache>
+                <c:formatCode>General</c:formatCode>
+                <c:ptCount val="6"/>
+                <c:pt idx="0">
+                  <c:v>9.4</c:v>
+                </c:pt>
+                <c:pt idx="1">
+                  <c:v>9.9</c:v>
+                </c:pt>
+                <c:pt idx="2">
+                  <c:v>12.1</c:v>
+                </c:pt>
+                <c:pt idx="3">
+                  <c:v>12.3</c:v>
+                </c:pt>
+                <c:pt idx="4">
+                  <c:v>12.5</c:v>
+                </c:pt>
+                <c:pt idx="5">
+                  <c:v>10.5</c:v>
+                </c:pt>
+              </c:numCache>
+            </c:numRef>
+          </c:val>
+        </c:ser>
+        <c:dLbls>
+          <c:numFmt formatCode="0.0" sourceLinked="0"/>
           <c:txPr>
             <a:bodyPr/>
             <a:lstStyle/>
@@ -880,7 +1156,7 @@
           <a:p>
             <a:r>
               <a:rPr lang="en-US" dirty="0"/>
-              <a:t>Thank you. My theory is FDI, foreign direct investment. FDI means a company owns and controls a business in another country. There are two ways: greenfield, which means building something new, and M&amp;A, which means buying a company. Dunning's OLI model explains why companies do FDI. O is ownership advantage, like brands. L is location advantage, like a big market or low costs. I is internalisation: doing it yourself is better than licensing. There are four motives: market-seeking, resource-seeking, efficiency-seeking and strategic asset-seeking.</a:t>
+              <a:t>Thank you. My theory is FDI, foreign direct investment, and my country is the United States. FDI means a company owns and controls a business in another country. It can build something new, which is greenfield, or buy a company, which is M&amp;A. Dunning's OLI model explains why companies do FDI: ownership advantages, location advantages and internalisation advantages. There are four motives: market-seeking, resource-seeking, efficiency-seeking and strategic asset-seeking.</a:t>
             </a:r>
             <a:endParaRPr lang="en-US" dirty="0"/>
           </a:p>
@@ -968,7 +1244,7 @@
           <a:p>
             <a:r>
               <a:rPr lang="en-US" dirty="0"/>
-              <a:t>Now, Unilever. First, building new: greenfield. In June 2020, Unilever invested 100 million euros in its ice cream factory in Taicang, China. The new factory opened in April 2022. This is market-seeking. In February 2023, Unilever announced a new factory in Mexico, and in April 2025 it doubled the investment to 800 million dollars. It will create 850 jobs and mainly export to the US and Canada. This is market-seeking and efficiency-seeking. Second, buying: M&amp;A. In August 2021, Unilever bought Paula's Choice, an American skincare brand, for 1.8 billion euros. In 2022, it helped Prestige Beauty grow by double digits. In September 2025, it bought Dr. Squatch for 1.2 billion euros, to move into premium, high-growth men's care. These deals are strategic asset-seeking: Unilever buys brands and online skills. But there is risk: when the US premium beauty market slowed in 2024, Paula's Choice slowed too.</a:t>
+              <a:t>Why the United States? The US is the world's largest FDI host. In 2024, it received 279 billion dollars. For Unilever, the US is its biggest market. Its US turnover grew from 9.4 billion euros in 2020 to 12.5 billion in 2024, about one fifth of the group. Using OLI: O, Unilever has global brands, money and distribution. L, the US is the biggest market, with many premium and online shoppers. I, Unilever buys and owns these brands, so it controls them and can take them to other countries. For example, it launched Nutrafol in Canada in 2023.</a:t>
             </a:r>
             <a:endParaRPr lang="en-US" dirty="0"/>
           </a:p>
@@ -1056,7 +1332,7 @@
           <a:p>
             <a:r>
               <a:rPr lang="en-US" dirty="0"/>
-              <a:t>Third, Unilever also sells. In July 2022, it sold its tea business for 4.6 billion euros. It made a gain of 2.3 billion euros and reduced its debt, but its turnover in 2023 was 1.7 percent lower. In October 2024, it sold its Russian business. Together with three other sales that year, this gave a net loss of 406 million euros. In December 2025, it demerged its ice cream business, Magnum. On the new basis, its 2024 turnover is 52.5 billion euros, not 60.8. But the demerger gave a gain of 3.4 billion euros, and Unilever kept 19.85 percent of Magnum. My conclusion: Unilever's FDI follows the OLI model. Its ownership advantage is its brands. It builds in big markets, buys beauty brands, and sells slower businesses. So it became smaller, but more focused.</a:t>
+              <a:t>Unilever's FDI in the US was mainly M&amp;A. This is strategic asset-seeking: it buys brands, customers and online skills. In August 2021, it bought Paula's Choice, a skincare brand that sells online, for 1.8 billion euros. In 2022, Prestige Beauty grew by double digits. In July 2022, it raised its stake in Nutrafol to 80 percent. In 2025, Nutrafol led double-digit growth in Wellbeing. In February 2024, it bought K18, which grew by double digits that year. In September 2025, it bought Dr. Squatch for 1.2 billion euros. What are the benefits for Unilever? First, faster growth: by 2024, 70 percent of its US Beauty and Wellbeing sales came from these premium brands. Second, a stronger position: its long-term assets in the US grew from 12.9 billion euros in 2020 to 19.7 billion in 2024. Third, results: in 2025, North America grew 5.3 percent, and Unilever recovered much of its lost market share in the US. But there is risk: in 2024, the US premium beauty market slowed, and Paula's Choice slowed too. My conclusion: Unilever's FDI in the US follows the OLI model. By buying American premium brands, it gained growth, online skills and a stronger position in its biggest market.</a:t>
             </a:r>
             <a:endParaRPr lang="en-US" dirty="0"/>
           </a:p>
@@ -1144,7 +1420,7 @@
           <a:p>
             <a:r>
               <a:rPr lang="en-US" dirty="0"/>
-              <a:t>To conclude: Unilever is global, it works through regions, it uses its advantages as a British MNE, and it grows through FDI. Thank you for listening. We are happy to take your questions.</a:t>
+              <a:t>To conclude: Unilever is global, it uses regional trade deals like USMCA, it uses its advantages as a British MNE, and it grows through FDI in its biggest market. Thank you for listening. We are happy to take your questions.</a:t>
             </a:r>
             <a:endParaRPr lang="en-US" dirty="0"/>
           </a:p>
@@ -1760,7 +2036,7 @@
           <a:p>
             <a:r>
               <a:rPr lang="en-US" dirty="0"/>
-              <a:t>Thank you. My theory is regional integration. Countries can integrate at five levels: free trade area, customs union, common market, economic union and political union. Each level goes deeper. Integration can create trade, because tariffs between members fall. But it can also divert trade, from a cheaper country outside to a member country. Only the EU has gone very far.</a:t>
+              <a:t>Thank you. My theory is regional integration, and my country is Mexico. Countries can integrate at five levels: free trade area, customs union, common market, economic union and political union. Each level goes deeper. Integration can create trade, because tariffs between members fall. But it can also divert trade, from a cheaper country outside to a member country. Mexico is in USMCA, the trade agreement with the US and Canada. It replaced NAFTA in July 2020. USMCA is a free trade area, the first level. Goods that meet its rules of origin can cross the borders with no tariffs. In 2023, Mexico became the United States' largest trading partner, with almost 800 billion dollars of goods trade.</a:t>
             </a:r>
             <a:endParaRPr lang="en-US" dirty="0"/>
           </a:p>
@@ -1848,7 +2124,7 @@
           <a:p>
             <a:r>
               <a:rPr lang="en-US" dirty="0"/>
-              <a:t>Unilever is a good example, because it is organised by region: Asia Pacific and Africa, the Americas, and Europe. First, its own structure. Until 2020, Unilever had two parent companies, one British and one Dutch. In November 2020, it became one company, Unilever PLC, based in London. UNCTAD counted this as a cross-border merger worth 81 billion dollars. Unilever said this gives it more flexibility to buy and sell businesses, and it used this later, for example to demerge its ice cream business in December 2025. In December 2020, the UK also left the EU single market. So now Unilever's head office is outside the EU, but many of its factories and customers are inside it. Second, the Americas. USMCA, the trade agreement between the US, Mexico and Canada, started in July 2020. In February 2023, Unilever announced a new factory in Mexico, and in April 2025 it doubled the investment to 800 million dollars. This plant will mainly export to the US and Canada. This is trade creation inside the region. Third, Asia and Africa. RCEP started in January 2022, and Indonesia joined in January 2023. Unilever owns 85 percent of Unilever Indonesia. In Africa, AfCFTA trading started in January 2021, and Unilever owns 76 percent of Unilever Nigeria. These agreements can help Unilever supply many countries from one regional factory. But there are limits. Most of these agreements are only free trade areas, the first level. And Unilever has not said how they affect it, so this is our own analysis. My conclusion: regional integration helps Unilever build regional supply hubs, but most regions are still shallow. Next, my teammate will explain Unilever as an MNE from an advanced economy.</a:t>
+              <a:t>Now, Unilever in Mexico. Mexico is one of Unilever's ten largest markets, and it has more than 7,000 employees there. In February 2023, Unilever announced a new beauty and personal care factory in Nuevo León, near the US border, for 400 million dollars. In April 2025, it doubled the investment to 800 million dollars. The plant will mainly export to the US and Canada, and it will create 850 direct jobs. In May 2025, Unilever announced an even bigger plan: 30 billion pesos, about 1.5 billion dollars, for Mexico from 2025 to 2028. So what are the benefits for Unilever? First, market access. Products that meet USMCA rules can enter the US with no tariffs, and the US is Unilever's biggest market, with 10.5 billion euros of turnover in 2025. Second, protection from tariffs. In March 2025, the US put a 25 percent tariff on Mexico, but goods that qualify under USMCA were exempted. One month later, Unilever doubled its investment. Third, lower costs and speed. Making products next to the US is cheaper and faster than shipping them from far away. This is trade creation inside North America. But there are limits. Only about half of US imports from Mexico qualified for USMCA in 2024, and US trade policy can change quickly. Unilever has not said publicly that USMCA is the reason for its investment, so this is our own analysis. My conclusion: through USMCA, Mexico gives Unilever a low-cost base with tariff-free access to its biggest market. But the benefit depends on the rules of origin and on US politics. Next, my teammate will explain Unilever as an MNE from an advanced economy.</a:t>
             </a:r>
             <a:endParaRPr lang="en-US" dirty="0"/>
           </a:p>
@@ -2024,7 +2300,7 @@
           <a:p>
             <a:r>
               <a:rPr lang="en-US" dirty="0"/>
-              <a:t>Unilever is a British MNE. Its advantages come from an advanced economy: strong brands, money and research. Its 30 Power Brands make 78 percent of turnover, and it spends between 800 million and nearly 1 billion euros a year on research and development. Host countries also gain. Look at India. Unilever owns 61.9 percent of Hindustan Unilever, which is listed in India. So Indian investors share the profits, and the company employs local people. In April 2025, Hindustan Unilever completed buying 90.5 percent of Minimalist, an Indian skincare brand, for about 2,670 crore rupees. This moves it into faster-growing beauty in India. But there are also conflicts. First, jobs. In March 2024, Unilever announced it would cut about 7,500 office jobs to save about 800 million euros over three years. By the end of 2024, 4,300 jobs had gone. This helps profits, but it goes against the host country's goal of employment. Second, politics. Unilever stayed in Russia from March 2022 until October 2024, when it finally sold the business. This shows how the MNE's goal of protecting its assets can clash with political goals. My conclusion: Unilever's advantages come from being an advanced-economy MNE, and it shares benefits with host countries like India. But it must balance profit with jobs and politics. Next, our last speaker will explain how Unilever invests abroad through FDI.</a:t>
+              <a:t>Unilever is a British MNE. Its advantages come from an advanced economy: strong brands, money and research. Its 30 Power Brands make 78 percent of turnover, and it spends between 800 million and nearly 1 billion euros a year on research and development. Host countries also gain. Look at India. Unilever owns 61.9 percent of Hindustan Unilever, which is listed in India. So Indian investors share the profits, and the company employs local people. In April 2025, Hindustan Unilever completed buying 90.5 percent of Minimalist, an Indian skincare brand, for about 2,670 crore rupees. This moves it into faster-growing beauty in India. But there are also conflicts. First, jobs. In March 2024, Unilever announced it would cut about 7,500 office jobs to save about 800 million euros over three years. By the end of 2024, 4,300 jobs had gone. This helps profits, but it goes against the host country's goal of employment. Second, politics. Unilever stayed in Russia from March 2022 until October 2024, when it finally sold the business. This shows how the MNE's goal of protecting its assets can clash with political goals. My conclusion: Unilever's advantages come from being an advanced-economy MNE, and it shares benefits with host countries like India. But it must balance profit with jobs and politics. Next, our last speaker will explain Unilever's FDI in the United States.</a:t>
             </a:r>
             <a:endParaRPr lang="en-US" dirty="0"/>
           </a:p>
@@ -2982,7 +3258,7 @@
                 <a:ea typeface="Calibri" pitchFamily="34" charset="-122"/>
                 <a:cs typeface="Calibri" pitchFamily="34" charset="-120"/>
               </a:rPr>
-              <a:t>Lecture 3 · World FDI: $1.0tn in 2020 (−35%) → $1.6tn in 2025 (UNCTAD)</a:t>
+              <a:t>Lecture 3 · Focus country: United States</a:t>
             </a:r>
             <a:endParaRPr lang="en-US" sz="1300" dirty="0"/>
           </a:p>
@@ -3147,7 +3423,7 @@
                 <a:ea typeface="Calibri" pitchFamily="34" charset="-122"/>
                 <a:cs typeface="Calibri" pitchFamily="34" charset="-120"/>
               </a:rPr>
-              <a:t>O – Ownership: brands, technology</a:t>
+              <a:t>O – Ownership: brands, technology, money</a:t>
             </a:r>
             <a:endParaRPr lang="en-US" sz="1150" dirty="0"/>
           </a:p>
@@ -3481,7 +3757,7 @@
                 <a:ea typeface="Calibri" pitchFamily="34" charset="-122"/>
                 <a:cs typeface="Calibri" pitchFamily="34" charset="-120"/>
               </a:rPr>
-              <a:t>M&amp;A: buy; faster, but integration is hard</a:t>
+              <a:t>M&amp;A: buy; faster, but expensive and hard to integrate</a:t>
             </a:r>
             <a:endParaRPr lang="en-US" sz="1150" dirty="0"/>
           </a:p>
@@ -3520,7 +3796,7 @@
                 <a:ea typeface="Calibri" pitchFamily="34" charset="-122"/>
                 <a:cs typeface="Calibri" pitchFamily="34" charset="-120"/>
               </a:rPr>
-              <a:t>Sources: Dunning (1988); University of Greenwich (2026d); UNCTAD (2021; 2026).</a:t>
+              <a:t>Sources: Dunning (1988); University of Greenwich (2026d).</a:t>
             </a:r>
             <a:endParaRPr lang="en-US" sz="800" dirty="0"/>
           </a:p>
@@ -3643,7 +3919,7 @@
                 <a:ea typeface="Calibri" pitchFamily="34" charset="-122"/>
                 <a:cs typeface="Calibri" pitchFamily="34" charset="-120"/>
               </a:rPr>
-              <a:t>Unilever FDI ①: build and buy</a:t>
+              <a:t>Why the United States? Unilever and OLI</a:t>
             </a:r>
             <a:endParaRPr lang="en-US" sz="2500" dirty="0"/>
           </a:p>
@@ -3682,7 +3958,7 @@
                 <a:ea typeface="Calibri" pitchFamily="34" charset="-122"/>
                 <a:cs typeface="Calibri" pitchFamily="34" charset="-120"/>
               </a:rPr>
-              <a:t>Greenfield in big markets, M&amp;A for beauty and wellbeing brands</a:t>
+              <a:t>The US: world's largest FDI host ($279bn in 2024) and Unilever's biggest market</a:t>
             </a:r>
             <a:endParaRPr lang="en-US" sz="1300" dirty="0"/>
           </a:p>
@@ -3690,1514 +3966,91 @@
       </p:sp>
       <p:graphicFrame>
         <p:nvGraphicFramePr>
-          <p:cNvPr id="12" name="Table 0"/>
-          <p:cNvGraphicFramePr>
-            <a:graphicFrameLocks noGrp="1"/>
-          </p:cNvGraphicFramePr>
-          <p:nvPr>
-            <p:extLst>
-              <p:ext uri="{D42A27DB-BD31-4B8C-83A1-F6EECF244321}">
-                <p14:modId xmlns:p14="http://schemas.microsoft.com/office/powerpoint/2010/main" val="1579011935"/>
-              </p:ext>
-            </p:extLst>
-          </p:nvPr>
+          <p:cNvPr id="6" name="Chart 0" descr=""/>
+          <p:cNvGraphicFramePr/>
+          <p:nvPr/>
         </p:nvGraphicFramePr>
         <p:xfrm>
           <a:off x="411480" y="1188720"/>
-          <a:ext cx="8321040" cy="914400"/>
+          <a:ext cx="4480560" cy="3246120"/>
         </p:xfrm>
-        <a:graphic>
-          <a:graphicData uri="http://schemas.openxmlformats.org/drawingml/2006/table">
-            <a:tbl>
-              <a:tblPr/>
-              <a:tblGrid>
-                <a:gridCol w="914400"/>
-                <a:gridCol w="3429000"/>
-                <a:gridCol w="3977640"/>
-              </a:tblGrid>
-              <a:tr h="0">
-                <a:tc>
-                  <a:txBody>
-                    <a:bodyPr/>
-                    <a:lstStyle/>
-                    <a:p>
-                      <a:pPr indent="0" marL="0">
-                        <a:buNone/>
-                      </a:pPr>
-                      <a:r>
-                        <a:rPr lang="en-US" sz="950" b="1" dirty="0">
-                          <a:solidFill>
-                            <a:srgbClr val="FFFFFF"/>
-                          </a:solidFill>
-                          <a:latin typeface="Calibri" pitchFamily="34" charset="0"/>
-                          <a:ea typeface="Calibri" pitchFamily="34" charset="-122"/>
-                          <a:cs typeface="Calibri" pitchFamily="34" charset="-120"/>
-                        </a:rPr>
-                        <a:t>Date</a:t>
-                      </a:r>
-                      <a:endParaRPr lang="en-US" sz="950" dirty="0">
-                        <a:latin typeface="Calibri" charset="0"/>
-                        <a:ea typeface="Calibri" charset="0"/>
-                        <a:cs typeface="Calibri" charset="0"/>
-                      </a:endParaRPr>
-                    </a:p>
-                  </a:txBody>
-                  <a:tcPr marL="63500" marR="63500" marT="38100" marB="38100" anchor="ctr">
-                    <a:lnL w="6350" cap="flat" cmpd="sng" algn="ctr">
-                      <a:solidFill>
-                        <a:srgbClr val="D1D5DB"/>
-                      </a:solidFill>
-                      <a:prstDash val="solid"/>
-                      <a:round/>
-                      <a:headEnd type="none" w="med" len="med"/>
-                      <a:tailEnd type="none" w="med" len="med"/>
-                    </a:lnL>
-                    <a:lnR w="6350" cap="flat" cmpd="sng" algn="ctr">
-                      <a:solidFill>
-                        <a:srgbClr val="D1D5DB"/>
-                      </a:solidFill>
-                      <a:prstDash val="solid"/>
-                      <a:round/>
-                      <a:headEnd type="none" w="med" len="med"/>
-                      <a:tailEnd type="none" w="med" len="med"/>
-                    </a:lnR>
-                    <a:lnT w="6350" cap="flat" cmpd="sng" algn="ctr">
-                      <a:solidFill>
-                        <a:srgbClr val="D1D5DB"/>
-                      </a:solidFill>
-                      <a:prstDash val="solid"/>
-                      <a:round/>
-                      <a:headEnd type="none" w="med" len="med"/>
-                      <a:tailEnd type="none" w="med" len="med"/>
-                    </a:lnT>
-                    <a:lnB w="6350" cap="flat" cmpd="sng" algn="ctr">
-                      <a:solidFill>
-                        <a:srgbClr val="D1D5DB"/>
-                      </a:solidFill>
-                      <a:prstDash val="solid"/>
-                      <a:round/>
-                      <a:headEnd type="none" w="med" len="med"/>
-                      <a:tailEnd type="none" w="med" len="med"/>
-                    </a:lnB>
-                    <a:solidFill>
-                      <a:srgbClr val="7C3AED"/>
-                    </a:solidFill>
-                  </a:tcPr>
-                </a:tc>
-                <a:tc>
-                  <a:txBody>
-                    <a:bodyPr/>
-                    <a:lstStyle/>
-                    <a:p>
-                      <a:pPr indent="0" marL="0">
-                        <a:buNone/>
-                      </a:pPr>
-                      <a:r>
-                        <a:rPr lang="en-US" sz="950" b="1" dirty="0">
-                          <a:solidFill>
-                            <a:srgbClr val="FFFFFF"/>
-                          </a:solidFill>
-                          <a:latin typeface="Calibri" pitchFamily="34" charset="0"/>
-                          <a:ea typeface="Calibri" pitchFamily="34" charset="-122"/>
-                          <a:cs typeface="Calibri" pitchFamily="34" charset="-120"/>
-                        </a:rPr>
-                        <a:t>What happened</a:t>
-                      </a:r>
-                      <a:endParaRPr lang="en-US" sz="950" dirty="0">
-                        <a:latin typeface="Calibri" charset="0"/>
-                        <a:ea typeface="Calibri" charset="0"/>
-                        <a:cs typeface="Calibri" charset="0"/>
-                      </a:endParaRPr>
-                    </a:p>
-                  </a:txBody>
-                  <a:tcPr marL="63500" marR="63500" marT="38100" marB="38100" anchor="ctr">
-                    <a:lnL w="6350" cap="flat" cmpd="sng" algn="ctr">
-                      <a:solidFill>
-                        <a:srgbClr val="D1D5DB"/>
-                      </a:solidFill>
-                      <a:prstDash val="solid"/>
-                      <a:round/>
-                      <a:headEnd type="none" w="med" len="med"/>
-                      <a:tailEnd type="none" w="med" len="med"/>
-                    </a:lnL>
-                    <a:lnR w="6350" cap="flat" cmpd="sng" algn="ctr">
-                      <a:solidFill>
-                        <a:srgbClr val="D1D5DB"/>
-                      </a:solidFill>
-                      <a:prstDash val="solid"/>
-                      <a:round/>
-                      <a:headEnd type="none" w="med" len="med"/>
-                      <a:tailEnd type="none" w="med" len="med"/>
-                    </a:lnR>
-                    <a:lnT w="6350" cap="flat" cmpd="sng" algn="ctr">
-                      <a:solidFill>
-                        <a:srgbClr val="D1D5DB"/>
-                      </a:solidFill>
-                      <a:prstDash val="solid"/>
-                      <a:round/>
-                      <a:headEnd type="none" w="med" len="med"/>
-                      <a:tailEnd type="none" w="med" len="med"/>
-                    </a:lnT>
-                    <a:lnB w="6350" cap="flat" cmpd="sng" algn="ctr">
-                      <a:solidFill>
-                        <a:srgbClr val="D1D5DB"/>
-                      </a:solidFill>
-                      <a:prstDash val="solid"/>
-                      <a:round/>
-                      <a:headEnd type="none" w="med" len="med"/>
-                      <a:tailEnd type="none" w="med" len="med"/>
-                    </a:lnB>
-                    <a:solidFill>
-                      <a:srgbClr val="7C3AED"/>
-                    </a:solidFill>
-                  </a:tcPr>
-                </a:tc>
-                <a:tc>
-                  <a:txBody>
-                    <a:bodyPr/>
-                    <a:lstStyle/>
-                    <a:p>
-                      <a:pPr indent="0" marL="0">
-                        <a:buNone/>
-                      </a:pPr>
-                      <a:r>
-                        <a:rPr lang="en-US" sz="950" b="1" dirty="0">
-                          <a:solidFill>
-                            <a:srgbClr val="FFFFFF"/>
-                          </a:solidFill>
-                          <a:latin typeface="Calibri" pitchFamily="34" charset="0"/>
-                          <a:ea typeface="Calibri" pitchFamily="34" charset="-122"/>
-                          <a:cs typeface="Calibri" pitchFamily="34" charset="-120"/>
-                        </a:rPr>
-                        <a:t>Impact on Unilever</a:t>
-                      </a:r>
-                      <a:endParaRPr lang="en-US" sz="950" dirty="0">
-                        <a:latin typeface="Calibri" charset="0"/>
-                        <a:ea typeface="Calibri" charset="0"/>
-                        <a:cs typeface="Calibri" charset="0"/>
-                      </a:endParaRPr>
-                    </a:p>
-                  </a:txBody>
-                  <a:tcPr marL="63500" marR="63500" marT="38100" marB="38100" anchor="ctr">
-                    <a:lnL w="6350" cap="flat" cmpd="sng" algn="ctr">
-                      <a:solidFill>
-                        <a:srgbClr val="D1D5DB"/>
-                      </a:solidFill>
-                      <a:prstDash val="solid"/>
-                      <a:round/>
-                      <a:headEnd type="none" w="med" len="med"/>
-                      <a:tailEnd type="none" w="med" len="med"/>
-                    </a:lnL>
-                    <a:lnR w="6350" cap="flat" cmpd="sng" algn="ctr">
-                      <a:solidFill>
-                        <a:srgbClr val="D1D5DB"/>
-                      </a:solidFill>
-                      <a:prstDash val="solid"/>
-                      <a:round/>
-                      <a:headEnd type="none" w="med" len="med"/>
-                      <a:tailEnd type="none" w="med" len="med"/>
-                    </a:lnR>
-                    <a:lnT w="6350" cap="flat" cmpd="sng" algn="ctr">
-                      <a:solidFill>
-                        <a:srgbClr val="D1D5DB"/>
-                      </a:solidFill>
-                      <a:prstDash val="solid"/>
-                      <a:round/>
-                      <a:headEnd type="none" w="med" len="med"/>
-                      <a:tailEnd type="none" w="med" len="med"/>
-                    </a:lnT>
-                    <a:lnB w="6350" cap="flat" cmpd="sng" algn="ctr">
-                      <a:solidFill>
-                        <a:srgbClr val="D1D5DB"/>
-                      </a:solidFill>
-                      <a:prstDash val="solid"/>
-                      <a:round/>
-                      <a:headEnd type="none" w="med" len="med"/>
-                      <a:tailEnd type="none" w="med" len="med"/>
-                    </a:lnB>
-                    <a:solidFill>
-                      <a:srgbClr val="7C3AED"/>
-                    </a:solidFill>
-                  </a:tcPr>
-                </a:tc>
-              </a:tr>
-              <a:tr h="0">
-                <a:tc>
-                  <a:txBody>
-                    <a:bodyPr/>
-                    <a:lstStyle/>
-                    <a:p>
-                      <a:pPr indent="0" marL="0">
-                        <a:buNone/>
-                      </a:pPr>
-                      <a:r>
-                        <a:rPr lang="en-US" sz="950" b="1" dirty="0">
-                          <a:solidFill>
-                            <a:srgbClr val="7C3AED"/>
-                          </a:solidFill>
-                          <a:latin typeface="Calibri" pitchFamily="34" charset="0"/>
-                          <a:ea typeface="Calibri" pitchFamily="34" charset="-122"/>
-                          <a:cs typeface="Calibri" pitchFamily="34" charset="-120"/>
-                        </a:rPr>
-                        <a:t>Jun 2020</a:t>
-                      </a:r>
-                      <a:endParaRPr lang="en-US" sz="950" dirty="0">
-                        <a:latin typeface="Calibri" charset="0"/>
-                        <a:ea typeface="Calibri" charset="0"/>
-                        <a:cs typeface="Calibri" charset="0"/>
-                      </a:endParaRPr>
-                    </a:p>
-                  </a:txBody>
-                  <a:tcPr marL="63500" marR="63500" marT="38100" marB="38100" anchor="ctr">
-                    <a:lnL w="6350" cap="flat" cmpd="sng" algn="ctr">
-                      <a:solidFill>
-                        <a:srgbClr val="D1D5DB"/>
-                      </a:solidFill>
-                      <a:prstDash val="solid"/>
-                      <a:round/>
-                      <a:headEnd type="none" w="med" len="med"/>
-                      <a:tailEnd type="none" w="med" len="med"/>
-                    </a:lnL>
-                    <a:lnR w="6350" cap="flat" cmpd="sng" algn="ctr">
-                      <a:solidFill>
-                        <a:srgbClr val="D1D5DB"/>
-                      </a:solidFill>
-                      <a:prstDash val="solid"/>
-                      <a:round/>
-                      <a:headEnd type="none" w="med" len="med"/>
-                      <a:tailEnd type="none" w="med" len="med"/>
-                    </a:lnR>
-                    <a:lnT w="6350" cap="flat" cmpd="sng" algn="ctr">
-                      <a:solidFill>
-                        <a:srgbClr val="D1D5DB"/>
-                      </a:solidFill>
-                      <a:prstDash val="solid"/>
-                      <a:round/>
-                      <a:headEnd type="none" w="med" len="med"/>
-                      <a:tailEnd type="none" w="med" len="med"/>
-                    </a:lnT>
-                    <a:lnB w="6350" cap="flat" cmpd="sng" algn="ctr">
-                      <a:solidFill>
-                        <a:srgbClr val="D1D5DB"/>
-                      </a:solidFill>
-                      <a:prstDash val="solid"/>
-                      <a:round/>
-                      <a:headEnd type="none" w="med" len="med"/>
-                      <a:tailEnd type="none" w="med" len="med"/>
-                    </a:lnB>
-                    <a:solidFill>
-                      <a:srgbClr val="FFFFFF"/>
-                    </a:solidFill>
-                  </a:tcPr>
-                </a:tc>
-                <a:tc>
-                  <a:txBody>
-                    <a:bodyPr/>
-                    <a:lstStyle/>
-                    <a:p>
-                      <a:pPr indent="0" marL="0">
-                        <a:buNone/>
-                      </a:pPr>
-                      <a:r>
-                        <a:rPr lang="en-US" sz="950" dirty="0">
-                          <a:solidFill>
-                            <a:srgbClr val="1A1F36"/>
-                          </a:solidFill>
-                          <a:latin typeface="Calibri" pitchFamily="34" charset="0"/>
-                          <a:ea typeface="Calibri" pitchFamily="34" charset="-122"/>
-                          <a:cs typeface="Calibri" pitchFamily="34" charset="-120"/>
-                        </a:rPr>
-                        <a:t>Greenfield: €100m Taicang ice cream plant, China (150,000 t a year)</a:t>
-                      </a:r>
-                      <a:endParaRPr lang="en-US" sz="950" dirty="0">
-                        <a:latin typeface="Calibri" charset="0"/>
-                        <a:ea typeface="Calibri" charset="0"/>
-                        <a:cs typeface="Calibri" charset="0"/>
-                      </a:endParaRPr>
-                    </a:p>
-                  </a:txBody>
-                  <a:tcPr marL="63500" marR="63500" marT="38100" marB="38100" anchor="ctr">
-                    <a:lnL w="6350" cap="flat" cmpd="sng" algn="ctr">
-                      <a:solidFill>
-                        <a:srgbClr val="D1D5DB"/>
-                      </a:solidFill>
-                      <a:prstDash val="solid"/>
-                      <a:round/>
-                      <a:headEnd type="none" w="med" len="med"/>
-                      <a:tailEnd type="none" w="med" len="med"/>
-                    </a:lnL>
-                    <a:lnR w="6350" cap="flat" cmpd="sng" algn="ctr">
-                      <a:solidFill>
-                        <a:srgbClr val="D1D5DB"/>
-                      </a:solidFill>
-                      <a:prstDash val="solid"/>
-                      <a:round/>
-                      <a:headEnd type="none" w="med" len="med"/>
-                      <a:tailEnd type="none" w="med" len="med"/>
-                    </a:lnR>
-                    <a:lnT w="6350" cap="flat" cmpd="sng" algn="ctr">
-                      <a:solidFill>
-                        <a:srgbClr val="D1D5DB"/>
-                      </a:solidFill>
-                      <a:prstDash val="solid"/>
-                      <a:round/>
-                      <a:headEnd type="none" w="med" len="med"/>
-                      <a:tailEnd type="none" w="med" len="med"/>
-                    </a:lnT>
-                    <a:lnB w="6350" cap="flat" cmpd="sng" algn="ctr">
-                      <a:solidFill>
-                        <a:srgbClr val="D1D5DB"/>
-                      </a:solidFill>
-                      <a:prstDash val="solid"/>
-                      <a:round/>
-                      <a:headEnd type="none" w="med" len="med"/>
-                      <a:tailEnd type="none" w="med" len="med"/>
-                    </a:lnB>
-                    <a:solidFill>
-                      <a:srgbClr val="FFFFFF"/>
-                    </a:solidFill>
-                  </a:tcPr>
-                </a:tc>
-                <a:tc>
-                  <a:txBody>
-                    <a:bodyPr/>
-                    <a:lstStyle/>
-                    <a:p>
-                      <a:pPr indent="0" marL="0">
-                        <a:buNone/>
-                      </a:pPr>
-                      <a:r>
-                        <a:rPr lang="en-US" sz="950" dirty="0">
-                          <a:solidFill>
-                            <a:srgbClr val="1A1F36"/>
-                          </a:solidFill>
-                          <a:latin typeface="Calibri" pitchFamily="34" charset="0"/>
-                          <a:ea typeface="Calibri" pitchFamily="34" charset="-122"/>
-                          <a:cs typeface="Calibri" pitchFamily="34" charset="-120"/>
-                        </a:rPr>
-                        <a:t>Largest recent food investment; WEF "lighthouse" factory (Sep 2021); opened Apr 2022 · market-seeking</a:t>
-                      </a:r>
-                      <a:endParaRPr lang="en-US" sz="950" dirty="0">
-                        <a:latin typeface="Calibri" charset="0"/>
-                        <a:ea typeface="Calibri" charset="0"/>
-                        <a:cs typeface="Calibri" charset="0"/>
-                      </a:endParaRPr>
-                    </a:p>
-                  </a:txBody>
-                  <a:tcPr marL="63500" marR="63500" marT="38100" marB="38100" anchor="ctr">
-                    <a:lnL w="6350" cap="flat" cmpd="sng" algn="ctr">
-                      <a:solidFill>
-                        <a:srgbClr val="D1D5DB"/>
-                      </a:solidFill>
-                      <a:prstDash val="solid"/>
-                      <a:round/>
-                      <a:headEnd type="none" w="med" len="med"/>
-                      <a:tailEnd type="none" w="med" len="med"/>
-                    </a:lnL>
-                    <a:lnR w="6350" cap="flat" cmpd="sng" algn="ctr">
-                      <a:solidFill>
-                        <a:srgbClr val="D1D5DB"/>
-                      </a:solidFill>
-                      <a:prstDash val="solid"/>
-                      <a:round/>
-                      <a:headEnd type="none" w="med" len="med"/>
-                      <a:tailEnd type="none" w="med" len="med"/>
-                    </a:lnR>
-                    <a:lnT w="6350" cap="flat" cmpd="sng" algn="ctr">
-                      <a:solidFill>
-                        <a:srgbClr val="D1D5DB"/>
-                      </a:solidFill>
-                      <a:prstDash val="solid"/>
-                      <a:round/>
-                      <a:headEnd type="none" w="med" len="med"/>
-                      <a:tailEnd type="none" w="med" len="med"/>
-                    </a:lnT>
-                    <a:lnB w="6350" cap="flat" cmpd="sng" algn="ctr">
-                      <a:solidFill>
-                        <a:srgbClr val="D1D5DB"/>
-                      </a:solidFill>
-                      <a:prstDash val="solid"/>
-                      <a:round/>
-                      <a:headEnd type="none" w="med" len="med"/>
-                      <a:tailEnd type="none" w="med" len="med"/>
-                    </a:lnB>
-                    <a:solidFill>
-                      <a:srgbClr val="FFFFFF"/>
-                    </a:solidFill>
-                  </a:tcPr>
-                </a:tc>
-              </a:tr>
-              <a:tr h="0">
-                <a:tc>
-                  <a:txBody>
-                    <a:bodyPr/>
-                    <a:lstStyle/>
-                    <a:p>
-                      <a:pPr indent="0" marL="0">
-                        <a:buNone/>
-                      </a:pPr>
-                      <a:r>
-                        <a:rPr lang="en-US" sz="950" b="1" dirty="0">
-                          <a:solidFill>
-                            <a:srgbClr val="7C3AED"/>
-                          </a:solidFill>
-                          <a:latin typeface="Calibri" pitchFamily="34" charset="0"/>
-                          <a:ea typeface="Calibri" pitchFamily="34" charset="-122"/>
-                          <a:cs typeface="Calibri" pitchFamily="34" charset="-120"/>
-                        </a:rPr>
-                        <a:t>Aug 2021</a:t>
-                      </a:r>
-                      <a:endParaRPr lang="en-US" sz="950" dirty="0">
-                        <a:latin typeface="Calibri" charset="0"/>
-                        <a:ea typeface="Calibri" charset="0"/>
-                        <a:cs typeface="Calibri" charset="0"/>
-                      </a:endParaRPr>
-                    </a:p>
-                  </a:txBody>
-                  <a:tcPr marL="63500" marR="63500" marT="38100" marB="38100" anchor="ctr">
-                    <a:lnL w="6350" cap="flat" cmpd="sng" algn="ctr">
-                      <a:solidFill>
-                        <a:srgbClr val="D1D5DB"/>
-                      </a:solidFill>
-                      <a:prstDash val="solid"/>
-                      <a:round/>
-                      <a:headEnd type="none" w="med" len="med"/>
-                      <a:tailEnd type="none" w="med" len="med"/>
-                    </a:lnL>
-                    <a:lnR w="6350" cap="flat" cmpd="sng" algn="ctr">
-                      <a:solidFill>
-                        <a:srgbClr val="D1D5DB"/>
-                      </a:solidFill>
-                      <a:prstDash val="solid"/>
-                      <a:round/>
-                      <a:headEnd type="none" w="med" len="med"/>
-                      <a:tailEnd type="none" w="med" len="med"/>
-                    </a:lnR>
-                    <a:lnT w="6350" cap="flat" cmpd="sng" algn="ctr">
-                      <a:solidFill>
-                        <a:srgbClr val="D1D5DB"/>
-                      </a:solidFill>
-                      <a:prstDash val="solid"/>
-                      <a:round/>
-                      <a:headEnd type="none" w="med" len="med"/>
-                      <a:tailEnd type="none" w="med" len="med"/>
-                    </a:lnT>
-                    <a:lnB w="6350" cap="flat" cmpd="sng" algn="ctr">
-                      <a:solidFill>
-                        <a:srgbClr val="D1D5DB"/>
-                      </a:solidFill>
-                      <a:prstDash val="solid"/>
-                      <a:round/>
-                      <a:headEnd type="none" w="med" len="med"/>
-                      <a:tailEnd type="none" w="med" len="med"/>
-                    </a:lnB>
-                    <a:solidFill>
-                      <a:srgbClr val="FFFFFF"/>
-                    </a:solidFill>
-                  </a:tcPr>
-                </a:tc>
-                <a:tc>
-                  <a:txBody>
-                    <a:bodyPr/>
-                    <a:lstStyle/>
-                    <a:p>
-                      <a:pPr indent="0" marL="0">
-                        <a:buNone/>
-                      </a:pPr>
-                      <a:r>
-                        <a:rPr lang="en-US" sz="950" dirty="0">
-                          <a:solidFill>
-                            <a:srgbClr val="1A1F36"/>
-                          </a:solidFill>
-                          <a:latin typeface="Calibri" pitchFamily="34" charset="0"/>
-                          <a:ea typeface="Calibri" pitchFamily="34" charset="-122"/>
-                          <a:cs typeface="Calibri" pitchFamily="34" charset="-120"/>
-                        </a:rPr>
-                        <a:t>M&amp;A: Paula's Choice (US skincare), 100%, €1.83bn</a:t>
-                      </a:r>
-                      <a:endParaRPr lang="en-US" sz="950" dirty="0">
-                        <a:latin typeface="Calibri" charset="0"/>
-                        <a:ea typeface="Calibri" charset="0"/>
-                        <a:cs typeface="Calibri" charset="0"/>
-                      </a:endParaRPr>
-                    </a:p>
-                  </a:txBody>
-                  <a:tcPr marL="63500" marR="63500" marT="38100" marB="38100" anchor="ctr">
-                    <a:lnL w="6350" cap="flat" cmpd="sng" algn="ctr">
-                      <a:solidFill>
-                        <a:srgbClr val="D1D5DB"/>
-                      </a:solidFill>
-                      <a:prstDash val="solid"/>
-                      <a:round/>
-                      <a:headEnd type="none" w="med" len="med"/>
-                      <a:tailEnd type="none" w="med" len="med"/>
-                    </a:lnL>
-                    <a:lnR w="6350" cap="flat" cmpd="sng" algn="ctr">
-                      <a:solidFill>
-                        <a:srgbClr val="D1D5DB"/>
-                      </a:solidFill>
-                      <a:prstDash val="solid"/>
-                      <a:round/>
-                      <a:headEnd type="none" w="med" len="med"/>
-                      <a:tailEnd type="none" w="med" len="med"/>
-                    </a:lnR>
-                    <a:lnT w="6350" cap="flat" cmpd="sng" algn="ctr">
-                      <a:solidFill>
-                        <a:srgbClr val="D1D5DB"/>
-                      </a:solidFill>
-                      <a:prstDash val="solid"/>
-                      <a:round/>
-                      <a:headEnd type="none" w="med" len="med"/>
-                      <a:tailEnd type="none" w="med" len="med"/>
-                    </a:lnT>
-                    <a:lnB w="6350" cap="flat" cmpd="sng" algn="ctr">
-                      <a:solidFill>
-                        <a:srgbClr val="D1D5DB"/>
-                      </a:solidFill>
-                      <a:prstDash val="solid"/>
-                      <a:round/>
-                      <a:headEnd type="none" w="med" len="med"/>
-                      <a:tailEnd type="none" w="med" len="med"/>
-                    </a:lnB>
-                    <a:solidFill>
-                      <a:srgbClr val="FFFFFF"/>
-                    </a:solidFill>
-                  </a:tcPr>
-                </a:tc>
-                <a:tc>
-                  <a:txBody>
-                    <a:bodyPr/>
-                    <a:lstStyle/>
-                    <a:p>
-                      <a:pPr indent="0" marL="0">
-                        <a:buNone/>
-                      </a:pPr>
-                      <a:r>
-                        <a:rPr lang="en-US" sz="950" dirty="0">
-                          <a:solidFill>
-                            <a:srgbClr val="1A1F36"/>
-                          </a:solidFill>
-                          <a:latin typeface="Calibri" pitchFamily="34" charset="0"/>
-                          <a:ea typeface="Calibri" pitchFamily="34" charset="-122"/>
-                          <a:cs typeface="Calibri" pitchFamily="34" charset="-120"/>
-                        </a:rPr>
-                        <a:t>Prestige Beauty double-digit growth in 2022; slowed with US premium beauty in 2024; back to growth H2 2025</a:t>
-                      </a:r>
-                      <a:endParaRPr lang="en-US" sz="950" dirty="0">
-                        <a:latin typeface="Calibri" charset="0"/>
-                        <a:ea typeface="Calibri" charset="0"/>
-                        <a:cs typeface="Calibri" charset="0"/>
-                      </a:endParaRPr>
-                    </a:p>
-                  </a:txBody>
-                  <a:tcPr marL="63500" marR="63500" marT="38100" marB="38100" anchor="ctr">
-                    <a:lnL w="6350" cap="flat" cmpd="sng" algn="ctr">
-                      <a:solidFill>
-                        <a:srgbClr val="D1D5DB"/>
-                      </a:solidFill>
-                      <a:prstDash val="solid"/>
-                      <a:round/>
-                      <a:headEnd type="none" w="med" len="med"/>
-                      <a:tailEnd type="none" w="med" len="med"/>
-                    </a:lnL>
-                    <a:lnR w="6350" cap="flat" cmpd="sng" algn="ctr">
-                      <a:solidFill>
-                        <a:srgbClr val="D1D5DB"/>
-                      </a:solidFill>
-                      <a:prstDash val="solid"/>
-                      <a:round/>
-                      <a:headEnd type="none" w="med" len="med"/>
-                      <a:tailEnd type="none" w="med" len="med"/>
-                    </a:lnR>
-                    <a:lnT w="6350" cap="flat" cmpd="sng" algn="ctr">
-                      <a:solidFill>
-                        <a:srgbClr val="D1D5DB"/>
-                      </a:solidFill>
-                      <a:prstDash val="solid"/>
-                      <a:round/>
-                      <a:headEnd type="none" w="med" len="med"/>
-                      <a:tailEnd type="none" w="med" len="med"/>
-                    </a:lnT>
-                    <a:lnB w="6350" cap="flat" cmpd="sng" algn="ctr">
-                      <a:solidFill>
-                        <a:srgbClr val="D1D5DB"/>
-                      </a:solidFill>
-                      <a:prstDash val="solid"/>
-                      <a:round/>
-                      <a:headEnd type="none" w="med" len="med"/>
-                      <a:tailEnd type="none" w="med" len="med"/>
-                    </a:lnB>
-                    <a:solidFill>
-                      <a:srgbClr val="FFFFFF"/>
-                    </a:solidFill>
-                  </a:tcPr>
-                </a:tc>
-              </a:tr>
-              <a:tr h="0">
-                <a:tc>
-                  <a:txBody>
-                    <a:bodyPr/>
-                    <a:lstStyle/>
-                    <a:p>
-                      <a:pPr indent="0" marL="0">
-                        <a:buNone/>
-                      </a:pPr>
-                      <a:r>
-                        <a:rPr lang="en-US" sz="950" b="1" dirty="0">
-                          <a:solidFill>
-                            <a:srgbClr val="7C3AED"/>
-                          </a:solidFill>
-                          <a:latin typeface="Calibri" pitchFamily="34" charset="0"/>
-                          <a:ea typeface="Calibri" pitchFamily="34" charset="-122"/>
-                          <a:cs typeface="Calibri" pitchFamily="34" charset="-120"/>
-                        </a:rPr>
-                        <a:t>Jul 2022</a:t>
-                      </a:r>
-                      <a:endParaRPr lang="en-US" sz="950" dirty="0">
-                        <a:latin typeface="Calibri" charset="0"/>
-                        <a:ea typeface="Calibri" charset="0"/>
-                        <a:cs typeface="Calibri" charset="0"/>
-                      </a:endParaRPr>
-                    </a:p>
-                  </a:txBody>
-                  <a:tcPr marL="63500" marR="63500" marT="38100" marB="38100" anchor="ctr">
-                    <a:lnL w="6350" cap="flat" cmpd="sng" algn="ctr">
-                      <a:solidFill>
-                        <a:srgbClr val="D1D5DB"/>
-                      </a:solidFill>
-                      <a:prstDash val="solid"/>
-                      <a:round/>
-                      <a:headEnd type="none" w="med" len="med"/>
-                      <a:tailEnd type="none" w="med" len="med"/>
-                    </a:lnL>
-                    <a:lnR w="6350" cap="flat" cmpd="sng" algn="ctr">
-                      <a:solidFill>
-                        <a:srgbClr val="D1D5DB"/>
-                      </a:solidFill>
-                      <a:prstDash val="solid"/>
-                      <a:round/>
-                      <a:headEnd type="none" w="med" len="med"/>
-                      <a:tailEnd type="none" w="med" len="med"/>
-                    </a:lnR>
-                    <a:lnT w="6350" cap="flat" cmpd="sng" algn="ctr">
-                      <a:solidFill>
-                        <a:srgbClr val="D1D5DB"/>
-                      </a:solidFill>
-                      <a:prstDash val="solid"/>
-                      <a:round/>
-                      <a:headEnd type="none" w="med" len="med"/>
-                      <a:tailEnd type="none" w="med" len="med"/>
-                    </a:lnT>
-                    <a:lnB w="6350" cap="flat" cmpd="sng" algn="ctr">
-                      <a:solidFill>
-                        <a:srgbClr val="D1D5DB"/>
-                      </a:solidFill>
-                      <a:prstDash val="solid"/>
-                      <a:round/>
-                      <a:headEnd type="none" w="med" len="med"/>
-                      <a:tailEnd type="none" w="med" len="med"/>
-                    </a:lnB>
-                    <a:solidFill>
-                      <a:srgbClr val="FFFFFF"/>
-                    </a:solidFill>
-                  </a:tcPr>
-                </a:tc>
-                <a:tc>
-                  <a:txBody>
-                    <a:bodyPr/>
-                    <a:lstStyle/>
-                    <a:p>
-                      <a:pPr indent="0" marL="0">
-                        <a:buNone/>
-                      </a:pPr>
-                      <a:r>
-                        <a:rPr lang="en-US" sz="950" dirty="0">
-                          <a:solidFill>
-                            <a:srgbClr val="1A1F36"/>
-                          </a:solidFill>
-                          <a:latin typeface="Calibri" pitchFamily="34" charset="0"/>
-                          <a:ea typeface="Calibri" pitchFamily="34" charset="-122"/>
-                          <a:cs typeface="Calibri" pitchFamily="34" charset="-120"/>
-                        </a:rPr>
-                        <a:t>M&amp;A: Nutrafol (US hair wellness), stake raised to 80% for €811m</a:t>
-                      </a:r>
-                      <a:endParaRPr lang="en-US" sz="950" dirty="0">
-                        <a:latin typeface="Calibri" charset="0"/>
-                        <a:ea typeface="Calibri" charset="0"/>
-                        <a:cs typeface="Calibri" charset="0"/>
-                      </a:endParaRPr>
-                    </a:p>
-                  </a:txBody>
-                  <a:tcPr marL="63500" marR="63500" marT="38100" marB="38100" anchor="ctr">
-                    <a:lnL w="6350" cap="flat" cmpd="sng" algn="ctr">
-                      <a:solidFill>
-                        <a:srgbClr val="D1D5DB"/>
-                      </a:solidFill>
-                      <a:prstDash val="solid"/>
-                      <a:round/>
-                      <a:headEnd type="none" w="med" len="med"/>
-                      <a:tailEnd type="none" w="med" len="med"/>
-                    </a:lnL>
-                    <a:lnR w="6350" cap="flat" cmpd="sng" algn="ctr">
-                      <a:solidFill>
-                        <a:srgbClr val="D1D5DB"/>
-                      </a:solidFill>
-                      <a:prstDash val="solid"/>
-                      <a:round/>
-                      <a:headEnd type="none" w="med" len="med"/>
-                      <a:tailEnd type="none" w="med" len="med"/>
-                    </a:lnR>
-                    <a:lnT w="6350" cap="flat" cmpd="sng" algn="ctr">
-                      <a:solidFill>
-                        <a:srgbClr val="D1D5DB"/>
-                      </a:solidFill>
-                      <a:prstDash val="solid"/>
-                      <a:round/>
-                      <a:headEnd type="none" w="med" len="med"/>
-                      <a:tailEnd type="none" w="med" len="med"/>
-                    </a:lnT>
-                    <a:lnB w="6350" cap="flat" cmpd="sng" algn="ctr">
-                      <a:solidFill>
-                        <a:srgbClr val="D1D5DB"/>
-                      </a:solidFill>
-                      <a:prstDash val="solid"/>
-                      <a:round/>
-                      <a:headEnd type="none" w="med" len="med"/>
-                      <a:tailEnd type="none" w="med" len="med"/>
-                    </a:lnB>
-                    <a:solidFill>
-                      <a:srgbClr val="FFFFFF"/>
-                    </a:solidFill>
-                  </a:tcPr>
-                </a:tc>
-                <a:tc>
-                  <a:txBody>
-                    <a:bodyPr/>
-                    <a:lstStyle/>
-                    <a:p>
-                      <a:pPr indent="0" marL="0">
-                        <a:buNone/>
-                      </a:pPr>
-                      <a:r>
-                        <a:rPr lang="en-US" sz="950" dirty="0">
-                          <a:solidFill>
-                            <a:srgbClr val="1A1F36"/>
-                          </a:solidFill>
-                          <a:latin typeface="Calibri" pitchFamily="34" charset="0"/>
-                          <a:ea typeface="Calibri" pitchFamily="34" charset="-122"/>
-                          <a:cs typeface="Calibri" pitchFamily="34" charset="-120"/>
-                        </a:rPr>
-                        <a:t>Led double-digit Wellbeing growth in 2025; first launch outside the US (Canada, 2023)</a:t>
-                      </a:r>
-                      <a:endParaRPr lang="en-US" sz="950" dirty="0">
-                        <a:latin typeface="Calibri" charset="0"/>
-                        <a:ea typeface="Calibri" charset="0"/>
-                        <a:cs typeface="Calibri" charset="0"/>
-                      </a:endParaRPr>
-                    </a:p>
-                  </a:txBody>
-                  <a:tcPr marL="63500" marR="63500" marT="38100" marB="38100" anchor="ctr">
-                    <a:lnL w="6350" cap="flat" cmpd="sng" algn="ctr">
-                      <a:solidFill>
-                        <a:srgbClr val="D1D5DB"/>
-                      </a:solidFill>
-                      <a:prstDash val="solid"/>
-                      <a:round/>
-                      <a:headEnd type="none" w="med" len="med"/>
-                      <a:tailEnd type="none" w="med" len="med"/>
-                    </a:lnL>
-                    <a:lnR w="6350" cap="flat" cmpd="sng" algn="ctr">
-                      <a:solidFill>
-                        <a:srgbClr val="D1D5DB"/>
-                      </a:solidFill>
-                      <a:prstDash val="solid"/>
-                      <a:round/>
-                      <a:headEnd type="none" w="med" len="med"/>
-                      <a:tailEnd type="none" w="med" len="med"/>
-                    </a:lnR>
-                    <a:lnT w="6350" cap="flat" cmpd="sng" algn="ctr">
-                      <a:solidFill>
-                        <a:srgbClr val="D1D5DB"/>
-                      </a:solidFill>
-                      <a:prstDash val="solid"/>
-                      <a:round/>
-                      <a:headEnd type="none" w="med" len="med"/>
-                      <a:tailEnd type="none" w="med" len="med"/>
-                    </a:lnT>
-                    <a:lnB w="6350" cap="flat" cmpd="sng" algn="ctr">
-                      <a:solidFill>
-                        <a:srgbClr val="D1D5DB"/>
-                      </a:solidFill>
-                      <a:prstDash val="solid"/>
-                      <a:round/>
-                      <a:headEnd type="none" w="med" len="med"/>
-                      <a:tailEnd type="none" w="med" len="med"/>
-                    </a:lnB>
-                    <a:solidFill>
-                      <a:srgbClr val="FFFFFF"/>
-                    </a:solidFill>
-                  </a:tcPr>
-                </a:tc>
-              </a:tr>
-              <a:tr h="0">
-                <a:tc>
-                  <a:txBody>
-                    <a:bodyPr/>
-                    <a:lstStyle/>
-                    <a:p>
-                      <a:pPr indent="0" marL="0">
-                        <a:buNone/>
-                      </a:pPr>
-                      <a:r>
-                        <a:rPr lang="en-US" sz="950" b="1" dirty="0">
-                          <a:solidFill>
-                            <a:srgbClr val="7C3AED"/>
-                          </a:solidFill>
-                          <a:latin typeface="Calibri" pitchFamily="34" charset="0"/>
-                          <a:ea typeface="Calibri" pitchFamily="34" charset="-122"/>
-                          <a:cs typeface="Calibri" pitchFamily="34" charset="-120"/>
-                        </a:rPr>
-                        <a:t>Feb 2024</a:t>
-                      </a:r>
-                      <a:endParaRPr lang="en-US" sz="950" dirty="0">
-                        <a:latin typeface="Calibri" charset="0"/>
-                        <a:ea typeface="Calibri" charset="0"/>
-                        <a:cs typeface="Calibri" charset="0"/>
-                      </a:endParaRPr>
-                    </a:p>
-                  </a:txBody>
-                  <a:tcPr marL="63500" marR="63500" marT="38100" marB="38100" anchor="ctr">
-                    <a:lnL w="6350" cap="flat" cmpd="sng" algn="ctr">
-                      <a:solidFill>
-                        <a:srgbClr val="D1D5DB"/>
-                      </a:solidFill>
-                      <a:prstDash val="solid"/>
-                      <a:round/>
-                      <a:headEnd type="none" w="med" len="med"/>
-                      <a:tailEnd type="none" w="med" len="med"/>
-                    </a:lnL>
-                    <a:lnR w="6350" cap="flat" cmpd="sng" algn="ctr">
-                      <a:solidFill>
-                        <a:srgbClr val="D1D5DB"/>
-                      </a:solidFill>
-                      <a:prstDash val="solid"/>
-                      <a:round/>
-                      <a:headEnd type="none" w="med" len="med"/>
-                      <a:tailEnd type="none" w="med" len="med"/>
-                    </a:lnR>
-                    <a:lnT w="6350" cap="flat" cmpd="sng" algn="ctr">
-                      <a:solidFill>
-                        <a:srgbClr val="D1D5DB"/>
-                      </a:solidFill>
-                      <a:prstDash val="solid"/>
-                      <a:round/>
-                      <a:headEnd type="none" w="med" len="med"/>
-                      <a:tailEnd type="none" w="med" len="med"/>
-                    </a:lnT>
-                    <a:lnB w="6350" cap="flat" cmpd="sng" algn="ctr">
-                      <a:solidFill>
-                        <a:srgbClr val="D1D5DB"/>
-                      </a:solidFill>
-                      <a:prstDash val="solid"/>
-                      <a:round/>
-                      <a:headEnd type="none" w="med" len="med"/>
-                      <a:tailEnd type="none" w="med" len="med"/>
-                    </a:lnB>
-                    <a:solidFill>
-                      <a:srgbClr val="FFFFFF"/>
-                    </a:solidFill>
-                  </a:tcPr>
-                </a:tc>
-                <a:tc>
-                  <a:txBody>
-                    <a:bodyPr/>
-                    <a:lstStyle/>
-                    <a:p>
-                      <a:pPr indent="0" marL="0">
-                        <a:buNone/>
-                      </a:pPr>
-                      <a:r>
-                        <a:rPr lang="en-US" sz="950" dirty="0">
-                          <a:solidFill>
-                            <a:srgbClr val="1A1F36"/>
-                          </a:solidFill>
-                          <a:latin typeface="Calibri" pitchFamily="34" charset="0"/>
-                          <a:ea typeface="Calibri" pitchFamily="34" charset="-122"/>
-                          <a:cs typeface="Calibri" pitchFamily="34" charset="-120"/>
-                        </a:rPr>
-                        <a:t>M&amp;A: K18 (US hair care), 91.88%</a:t>
-                      </a:r>
-                      <a:endParaRPr lang="en-US" sz="950" dirty="0">
-                        <a:latin typeface="Calibri" charset="0"/>
-                        <a:ea typeface="Calibri" charset="0"/>
-                        <a:cs typeface="Calibri" charset="0"/>
-                      </a:endParaRPr>
-                    </a:p>
-                  </a:txBody>
-                  <a:tcPr marL="63500" marR="63500" marT="38100" marB="38100" anchor="ctr">
-                    <a:lnL w="6350" cap="flat" cmpd="sng" algn="ctr">
-                      <a:solidFill>
-                        <a:srgbClr val="D1D5DB"/>
-                      </a:solidFill>
-                      <a:prstDash val="solid"/>
-                      <a:round/>
-                      <a:headEnd type="none" w="med" len="med"/>
-                      <a:tailEnd type="none" w="med" len="med"/>
-                    </a:lnL>
-                    <a:lnR w="6350" cap="flat" cmpd="sng" algn="ctr">
-                      <a:solidFill>
-                        <a:srgbClr val="D1D5DB"/>
-                      </a:solidFill>
-                      <a:prstDash val="solid"/>
-                      <a:round/>
-                      <a:headEnd type="none" w="med" len="med"/>
-                      <a:tailEnd type="none" w="med" len="med"/>
-                    </a:lnR>
-                    <a:lnT w="6350" cap="flat" cmpd="sng" algn="ctr">
-                      <a:solidFill>
-                        <a:srgbClr val="D1D5DB"/>
-                      </a:solidFill>
-                      <a:prstDash val="solid"/>
-                      <a:round/>
-                      <a:headEnd type="none" w="med" len="med"/>
-                      <a:tailEnd type="none" w="med" len="med"/>
-                    </a:lnT>
-                    <a:lnB w="6350" cap="flat" cmpd="sng" algn="ctr">
-                      <a:solidFill>
-                        <a:srgbClr val="D1D5DB"/>
-                      </a:solidFill>
-                      <a:prstDash val="solid"/>
-                      <a:round/>
-                      <a:headEnd type="none" w="med" len="med"/>
-                      <a:tailEnd type="none" w="med" len="med"/>
-                    </a:lnB>
-                    <a:solidFill>
-                      <a:srgbClr val="FFFFFF"/>
-                    </a:solidFill>
-                  </a:tcPr>
-                </a:tc>
-                <a:tc>
-                  <a:txBody>
-                    <a:bodyPr/>
-                    <a:lstStyle/>
-                    <a:p>
-                      <a:pPr indent="0" marL="0">
-                        <a:buNone/>
-                      </a:pPr>
-                      <a:r>
-                        <a:rPr lang="en-US" sz="950" dirty="0">
-                          <a:solidFill>
-                            <a:srgbClr val="1A1F36"/>
-                          </a:solidFill>
-                          <a:latin typeface="Calibri" pitchFamily="34" charset="0"/>
-                          <a:ea typeface="Calibri" pitchFamily="34" charset="-122"/>
-                          <a:cs typeface="Calibri" pitchFamily="34" charset="-120"/>
-                        </a:rPr>
-                        <a:t>Grew double-digit in 2024</a:t>
-                      </a:r>
-                      <a:endParaRPr lang="en-US" sz="950" dirty="0">
-                        <a:latin typeface="Calibri" charset="0"/>
-                        <a:ea typeface="Calibri" charset="0"/>
-                        <a:cs typeface="Calibri" charset="0"/>
-                      </a:endParaRPr>
-                    </a:p>
-                  </a:txBody>
-                  <a:tcPr marL="63500" marR="63500" marT="38100" marB="38100" anchor="ctr">
-                    <a:lnL w="6350" cap="flat" cmpd="sng" algn="ctr">
-                      <a:solidFill>
-                        <a:srgbClr val="D1D5DB"/>
-                      </a:solidFill>
-                      <a:prstDash val="solid"/>
-                      <a:round/>
-                      <a:headEnd type="none" w="med" len="med"/>
-                      <a:tailEnd type="none" w="med" len="med"/>
-                    </a:lnL>
-                    <a:lnR w="6350" cap="flat" cmpd="sng" algn="ctr">
-                      <a:solidFill>
-                        <a:srgbClr val="D1D5DB"/>
-                      </a:solidFill>
-                      <a:prstDash val="solid"/>
-                      <a:round/>
-                      <a:headEnd type="none" w="med" len="med"/>
-                      <a:tailEnd type="none" w="med" len="med"/>
-                    </a:lnR>
-                    <a:lnT w="6350" cap="flat" cmpd="sng" algn="ctr">
-                      <a:solidFill>
-                        <a:srgbClr val="D1D5DB"/>
-                      </a:solidFill>
-                      <a:prstDash val="solid"/>
-                      <a:round/>
-                      <a:headEnd type="none" w="med" len="med"/>
-                      <a:tailEnd type="none" w="med" len="med"/>
-                    </a:lnT>
-                    <a:lnB w="6350" cap="flat" cmpd="sng" algn="ctr">
-                      <a:solidFill>
-                        <a:srgbClr val="D1D5DB"/>
-                      </a:solidFill>
-                      <a:prstDash val="solid"/>
-                      <a:round/>
-                      <a:headEnd type="none" w="med" len="med"/>
-                      <a:tailEnd type="none" w="med" len="med"/>
-                    </a:lnB>
-                    <a:solidFill>
-                      <a:srgbClr val="FFFFFF"/>
-                    </a:solidFill>
-                  </a:tcPr>
-                </a:tc>
-              </a:tr>
-              <a:tr h="0">
-                <a:tc>
-                  <a:txBody>
-                    <a:bodyPr/>
-                    <a:lstStyle/>
-                    <a:p>
-                      <a:pPr indent="0" marL="0">
-                        <a:buNone/>
-                      </a:pPr>
-                      <a:r>
-                        <a:rPr lang="en-US" sz="950" b="1" dirty="0">
-                          <a:solidFill>
-                            <a:srgbClr val="7C3AED"/>
-                          </a:solidFill>
-                          <a:latin typeface="Calibri" pitchFamily="34" charset="0"/>
-                          <a:ea typeface="Calibri" pitchFamily="34" charset="-122"/>
-                          <a:cs typeface="Calibri" pitchFamily="34" charset="-120"/>
-                        </a:rPr>
-                        <a:t>Apr 2025</a:t>
-                      </a:r>
-                      <a:endParaRPr lang="en-US" sz="950" dirty="0">
-                        <a:latin typeface="Calibri" charset="0"/>
-                        <a:ea typeface="Calibri" charset="0"/>
-                        <a:cs typeface="Calibri" charset="0"/>
-                      </a:endParaRPr>
-                    </a:p>
-                  </a:txBody>
-                  <a:tcPr marL="63500" marR="63500" marT="38100" marB="38100" anchor="ctr">
-                    <a:lnL w="6350" cap="flat" cmpd="sng" algn="ctr">
-                      <a:solidFill>
-                        <a:srgbClr val="D1D5DB"/>
-                      </a:solidFill>
-                      <a:prstDash val="solid"/>
-                      <a:round/>
-                      <a:headEnd type="none" w="med" len="med"/>
-                      <a:tailEnd type="none" w="med" len="med"/>
-                    </a:lnL>
-                    <a:lnR w="6350" cap="flat" cmpd="sng" algn="ctr">
-                      <a:solidFill>
-                        <a:srgbClr val="D1D5DB"/>
-                      </a:solidFill>
-                      <a:prstDash val="solid"/>
-                      <a:round/>
-                      <a:headEnd type="none" w="med" len="med"/>
-                      <a:tailEnd type="none" w="med" len="med"/>
-                    </a:lnR>
-                    <a:lnT w="6350" cap="flat" cmpd="sng" algn="ctr">
-                      <a:solidFill>
-                        <a:srgbClr val="D1D5DB"/>
-                      </a:solidFill>
-                      <a:prstDash val="solid"/>
-                      <a:round/>
-                      <a:headEnd type="none" w="med" len="med"/>
-                      <a:tailEnd type="none" w="med" len="med"/>
-                    </a:lnT>
-                    <a:lnB w="6350" cap="flat" cmpd="sng" algn="ctr">
-                      <a:solidFill>
-                        <a:srgbClr val="D1D5DB"/>
-                      </a:solidFill>
-                      <a:prstDash val="solid"/>
-                      <a:round/>
-                      <a:headEnd type="none" w="med" len="med"/>
-                      <a:tailEnd type="none" w="med" len="med"/>
-                    </a:lnB>
-                    <a:solidFill>
-                      <a:srgbClr val="FFFFFF"/>
-                    </a:solidFill>
-                  </a:tcPr>
-                </a:tc>
-                <a:tc>
-                  <a:txBody>
-                    <a:bodyPr/>
-                    <a:lstStyle/>
-                    <a:p>
-                      <a:pPr indent="0" marL="0">
-                        <a:buNone/>
-                      </a:pPr>
-                      <a:r>
-                        <a:rPr lang="en-US" sz="950" dirty="0">
-                          <a:solidFill>
-                            <a:srgbClr val="1A1F36"/>
-                          </a:solidFill>
-                          <a:latin typeface="Calibri" pitchFamily="34" charset="0"/>
-                          <a:ea typeface="Calibri" pitchFamily="34" charset="-122"/>
-                          <a:cs typeface="Calibri" pitchFamily="34" charset="-120"/>
-                        </a:rPr>
-                        <a:t>Greenfield: Mexico plant raised from $400m (Feb 2023) to $800m</a:t>
-                      </a:r>
-                      <a:endParaRPr lang="en-US" sz="950" dirty="0">
-                        <a:latin typeface="Calibri" charset="0"/>
-                        <a:ea typeface="Calibri" charset="0"/>
-                        <a:cs typeface="Calibri" charset="0"/>
-                      </a:endParaRPr>
-                    </a:p>
-                  </a:txBody>
-                  <a:tcPr marL="63500" marR="63500" marT="38100" marB="38100" anchor="ctr">
-                    <a:lnL w="6350" cap="flat" cmpd="sng" algn="ctr">
-                      <a:solidFill>
-                        <a:srgbClr val="D1D5DB"/>
-                      </a:solidFill>
-                      <a:prstDash val="solid"/>
-                      <a:round/>
-                      <a:headEnd type="none" w="med" len="med"/>
-                      <a:tailEnd type="none" w="med" len="med"/>
-                    </a:lnL>
-                    <a:lnR w="6350" cap="flat" cmpd="sng" algn="ctr">
-                      <a:solidFill>
-                        <a:srgbClr val="D1D5DB"/>
-                      </a:solidFill>
-                      <a:prstDash val="solid"/>
-                      <a:round/>
-                      <a:headEnd type="none" w="med" len="med"/>
-                      <a:tailEnd type="none" w="med" len="med"/>
-                    </a:lnR>
-                    <a:lnT w="6350" cap="flat" cmpd="sng" algn="ctr">
-                      <a:solidFill>
-                        <a:srgbClr val="D1D5DB"/>
-                      </a:solidFill>
-                      <a:prstDash val="solid"/>
-                      <a:round/>
-                      <a:headEnd type="none" w="med" len="med"/>
-                      <a:tailEnd type="none" w="med" len="med"/>
-                    </a:lnT>
-                    <a:lnB w="6350" cap="flat" cmpd="sng" algn="ctr">
-                      <a:solidFill>
-                        <a:srgbClr val="D1D5DB"/>
-                      </a:solidFill>
-                      <a:prstDash val="solid"/>
-                      <a:round/>
-                      <a:headEnd type="none" w="med" len="med"/>
-                      <a:tailEnd type="none" w="med" len="med"/>
-                    </a:lnB>
-                    <a:solidFill>
-                      <a:srgbClr val="FFFFFF"/>
-                    </a:solidFill>
-                  </a:tcPr>
-                </a:tc>
-                <a:tc>
-                  <a:txBody>
-                    <a:bodyPr/>
-                    <a:lstStyle/>
-                    <a:p>
-                      <a:pPr indent="0" marL="0">
-                        <a:buNone/>
-                      </a:pPr>
-                      <a:r>
-                        <a:rPr lang="en-US" sz="950" dirty="0">
-                          <a:solidFill>
-                            <a:srgbClr val="1A1F36"/>
-                          </a:solidFill>
-                          <a:latin typeface="Calibri" pitchFamily="34" charset="0"/>
-                          <a:ea typeface="Calibri" pitchFamily="34" charset="-122"/>
-                          <a:cs typeface="Calibri" pitchFamily="34" charset="-120"/>
-                        </a:rPr>
-                        <a:t>850 direct jobs; mainly exports to the US and Canada · market- and efficiency-seeking</a:t>
-                      </a:r>
-                      <a:endParaRPr lang="en-US" sz="950" dirty="0">
-                        <a:latin typeface="Calibri" charset="0"/>
-                        <a:ea typeface="Calibri" charset="0"/>
-                        <a:cs typeface="Calibri" charset="0"/>
-                      </a:endParaRPr>
-                    </a:p>
-                  </a:txBody>
-                  <a:tcPr marL="63500" marR="63500" marT="38100" marB="38100" anchor="ctr">
-                    <a:lnL w="6350" cap="flat" cmpd="sng" algn="ctr">
-                      <a:solidFill>
-                        <a:srgbClr val="D1D5DB"/>
-                      </a:solidFill>
-                      <a:prstDash val="solid"/>
-                      <a:round/>
-                      <a:headEnd type="none" w="med" len="med"/>
-                      <a:tailEnd type="none" w="med" len="med"/>
-                    </a:lnL>
-                    <a:lnR w="6350" cap="flat" cmpd="sng" algn="ctr">
-                      <a:solidFill>
-                        <a:srgbClr val="D1D5DB"/>
-                      </a:solidFill>
-                      <a:prstDash val="solid"/>
-                      <a:round/>
-                      <a:headEnd type="none" w="med" len="med"/>
-                      <a:tailEnd type="none" w="med" len="med"/>
-                    </a:lnR>
-                    <a:lnT w="6350" cap="flat" cmpd="sng" algn="ctr">
-                      <a:solidFill>
-                        <a:srgbClr val="D1D5DB"/>
-                      </a:solidFill>
-                      <a:prstDash val="solid"/>
-                      <a:round/>
-                      <a:headEnd type="none" w="med" len="med"/>
-                      <a:tailEnd type="none" w="med" len="med"/>
-                    </a:lnT>
-                    <a:lnB w="6350" cap="flat" cmpd="sng" algn="ctr">
-                      <a:solidFill>
-                        <a:srgbClr val="D1D5DB"/>
-                      </a:solidFill>
-                      <a:prstDash val="solid"/>
-                      <a:round/>
-                      <a:headEnd type="none" w="med" len="med"/>
-                      <a:tailEnd type="none" w="med" len="med"/>
-                    </a:lnB>
-                    <a:solidFill>
-                      <a:srgbClr val="FFFFFF"/>
-                    </a:solidFill>
-                  </a:tcPr>
-                </a:tc>
-              </a:tr>
-              <a:tr h="0">
-                <a:tc>
-                  <a:txBody>
-                    <a:bodyPr/>
-                    <a:lstStyle/>
-                    <a:p>
-                      <a:pPr indent="0" marL="0">
-                        <a:buNone/>
-                      </a:pPr>
-                      <a:r>
-                        <a:rPr lang="en-US" sz="950" b="1" dirty="0">
-                          <a:solidFill>
-                            <a:srgbClr val="7C3AED"/>
-                          </a:solidFill>
-                          <a:latin typeface="Calibri" pitchFamily="34" charset="0"/>
-                          <a:ea typeface="Calibri" pitchFamily="34" charset="-122"/>
-                          <a:cs typeface="Calibri" pitchFamily="34" charset="-120"/>
-                        </a:rPr>
-                        <a:t>Sep 2025</a:t>
-                      </a:r>
-                      <a:endParaRPr lang="en-US" sz="950" dirty="0">
-                        <a:latin typeface="Calibri" charset="0"/>
-                        <a:ea typeface="Calibri" charset="0"/>
-                        <a:cs typeface="Calibri" charset="0"/>
-                      </a:endParaRPr>
-                    </a:p>
-                  </a:txBody>
-                  <a:tcPr marL="63500" marR="63500" marT="38100" marB="38100" anchor="ctr">
-                    <a:lnL w="6350" cap="flat" cmpd="sng" algn="ctr">
-                      <a:solidFill>
-                        <a:srgbClr val="D1D5DB"/>
-                      </a:solidFill>
-                      <a:prstDash val="solid"/>
-                      <a:round/>
-                      <a:headEnd type="none" w="med" len="med"/>
-                      <a:tailEnd type="none" w="med" len="med"/>
-                    </a:lnL>
-                    <a:lnR w="6350" cap="flat" cmpd="sng" algn="ctr">
-                      <a:solidFill>
-                        <a:srgbClr val="D1D5DB"/>
-                      </a:solidFill>
-                      <a:prstDash val="solid"/>
-                      <a:round/>
-                      <a:headEnd type="none" w="med" len="med"/>
-                      <a:tailEnd type="none" w="med" len="med"/>
-                    </a:lnR>
-                    <a:lnT w="6350" cap="flat" cmpd="sng" algn="ctr">
-                      <a:solidFill>
-                        <a:srgbClr val="D1D5DB"/>
-                      </a:solidFill>
-                      <a:prstDash val="solid"/>
-                      <a:round/>
-                      <a:headEnd type="none" w="med" len="med"/>
-                      <a:tailEnd type="none" w="med" len="med"/>
-                    </a:lnT>
-                    <a:lnB w="6350" cap="flat" cmpd="sng" algn="ctr">
-                      <a:solidFill>
-                        <a:srgbClr val="D1D5DB"/>
-                      </a:solidFill>
-                      <a:prstDash val="solid"/>
-                      <a:round/>
-                      <a:headEnd type="none" w="med" len="med"/>
-                      <a:tailEnd type="none" w="med" len="med"/>
-                    </a:lnB>
-                    <a:solidFill>
-                      <a:srgbClr val="FFFFFF"/>
-                    </a:solidFill>
-                  </a:tcPr>
-                </a:tc>
-                <a:tc>
-                  <a:txBody>
-                    <a:bodyPr/>
-                    <a:lstStyle/>
-                    <a:p>
-                      <a:pPr indent="0" marL="0">
-                        <a:buNone/>
-                      </a:pPr>
-                      <a:r>
-                        <a:rPr lang="en-US" sz="950" dirty="0">
-                          <a:solidFill>
-                            <a:srgbClr val="1A1F36"/>
-                          </a:solidFill>
-                          <a:latin typeface="Calibri" pitchFamily="34" charset="0"/>
-                          <a:ea typeface="Calibri" pitchFamily="34" charset="-122"/>
-                          <a:cs typeface="Calibri" pitchFamily="34" charset="-120"/>
-                        </a:rPr>
-                        <a:t>M&amp;A: Dr. Squatch (US men's care), 98.7%, €1.24bn</a:t>
-                      </a:r>
-                      <a:endParaRPr lang="en-US" sz="950" dirty="0">
-                        <a:latin typeface="Calibri" charset="0"/>
-                        <a:ea typeface="Calibri" charset="0"/>
-                        <a:cs typeface="Calibri" charset="0"/>
-                      </a:endParaRPr>
-                    </a:p>
-                  </a:txBody>
-                  <a:tcPr marL="63500" marR="63500" marT="38100" marB="38100" anchor="ctr">
-                    <a:lnL w="6350" cap="flat" cmpd="sng" algn="ctr">
-                      <a:solidFill>
-                        <a:srgbClr val="D1D5DB"/>
-                      </a:solidFill>
-                      <a:prstDash val="solid"/>
-                      <a:round/>
-                      <a:headEnd type="none" w="med" len="med"/>
-                      <a:tailEnd type="none" w="med" len="med"/>
-                    </a:lnL>
-                    <a:lnR w="6350" cap="flat" cmpd="sng" algn="ctr">
-                      <a:solidFill>
-                        <a:srgbClr val="D1D5DB"/>
-                      </a:solidFill>
-                      <a:prstDash val="solid"/>
-                      <a:round/>
-                      <a:headEnd type="none" w="med" len="med"/>
-                      <a:tailEnd type="none" w="med" len="med"/>
-                    </a:lnR>
-                    <a:lnT w="6350" cap="flat" cmpd="sng" algn="ctr">
-                      <a:solidFill>
-                        <a:srgbClr val="D1D5DB"/>
-                      </a:solidFill>
-                      <a:prstDash val="solid"/>
-                      <a:round/>
-                      <a:headEnd type="none" w="med" len="med"/>
-                      <a:tailEnd type="none" w="med" len="med"/>
-                    </a:lnT>
-                    <a:lnB w="6350" cap="flat" cmpd="sng" algn="ctr">
-                      <a:solidFill>
-                        <a:srgbClr val="D1D5DB"/>
-                      </a:solidFill>
-                      <a:prstDash val="solid"/>
-                      <a:round/>
-                      <a:headEnd type="none" w="med" len="med"/>
-                      <a:tailEnd type="none" w="med" len="med"/>
-                    </a:lnB>
-                    <a:solidFill>
-                      <a:srgbClr val="FFFFFF"/>
-                    </a:solidFill>
-                  </a:tcPr>
-                </a:tc>
-                <a:tc>
-                  <a:txBody>
-                    <a:bodyPr/>
-                    <a:lstStyle/>
-                    <a:p>
-                      <a:pPr indent="0" marL="0">
-                        <a:buNone/>
-                      </a:pPr>
-                      <a:r>
-                        <a:rPr lang="en-US" sz="950" dirty="0">
-                          <a:solidFill>
-                            <a:srgbClr val="1A1F36"/>
-                          </a:solidFill>
-                          <a:latin typeface="Calibri" pitchFamily="34" charset="0"/>
-                          <a:ea typeface="Calibri" pitchFamily="34" charset="-122"/>
-                          <a:cs typeface="Calibri" pitchFamily="34" charset="-120"/>
-                        </a:rPr>
-                        <a:t>Moves Unilever into "premium and high-growth spaces" · strategic asset-seeking</a:t>
-                      </a:r>
-                      <a:endParaRPr lang="en-US" sz="950" dirty="0">
-                        <a:latin typeface="Calibri" charset="0"/>
-                        <a:ea typeface="Calibri" charset="0"/>
-                        <a:cs typeface="Calibri" charset="0"/>
-                      </a:endParaRPr>
-                    </a:p>
-                  </a:txBody>
-                  <a:tcPr marL="63500" marR="63500" marT="38100" marB="38100" anchor="ctr">
-                    <a:lnL w="6350" cap="flat" cmpd="sng" algn="ctr">
-                      <a:solidFill>
-                        <a:srgbClr val="D1D5DB"/>
-                      </a:solidFill>
-                      <a:prstDash val="solid"/>
-                      <a:round/>
-                      <a:headEnd type="none" w="med" len="med"/>
-                      <a:tailEnd type="none" w="med" len="med"/>
-                    </a:lnL>
-                    <a:lnR w="6350" cap="flat" cmpd="sng" algn="ctr">
-                      <a:solidFill>
-                        <a:srgbClr val="D1D5DB"/>
-                      </a:solidFill>
-                      <a:prstDash val="solid"/>
-                      <a:round/>
-                      <a:headEnd type="none" w="med" len="med"/>
-                      <a:tailEnd type="none" w="med" len="med"/>
-                    </a:lnR>
-                    <a:lnT w="6350" cap="flat" cmpd="sng" algn="ctr">
-                      <a:solidFill>
-                        <a:srgbClr val="D1D5DB"/>
-                      </a:solidFill>
-                      <a:prstDash val="solid"/>
-                      <a:round/>
-                      <a:headEnd type="none" w="med" len="med"/>
-                      <a:tailEnd type="none" w="med" len="med"/>
-                    </a:lnT>
-                    <a:lnB w="6350" cap="flat" cmpd="sng" algn="ctr">
-                      <a:solidFill>
-                        <a:srgbClr val="D1D5DB"/>
-                      </a:solidFill>
-                      <a:prstDash val="solid"/>
-                      <a:round/>
-                      <a:headEnd type="none" w="med" len="med"/>
-                      <a:tailEnd type="none" w="med" len="med"/>
-                    </a:lnB>
-                    <a:solidFill>
-                      <a:srgbClr val="FFFFFF"/>
-                    </a:solidFill>
-                  </a:tcPr>
-                </a:tc>
-              </a:tr>
-            </a:tbl>
+        <a:graphic xmlns:a="http://schemas.openxmlformats.org/drawingml/2006/main">
+          <a:graphicData uri="http://schemas.openxmlformats.org/drawingml/2006/chart">
+            <c:chart xmlns:c="http://schemas.openxmlformats.org/drawingml/2006/chart" r:id="rId1"/>
           </a:graphicData>
         </a:graphic>
       </p:graphicFrame>
       <p:sp>
         <p:nvSpPr>
-          <p:cNvPr id="7" name="Shape 4"/>
+          <p:cNvPr id="7" name="Text 4"/>
           <p:cNvSpPr/>
           <p:nvPr/>
         </p:nvSpPr>
         <p:spPr>
           <a:xfrm>
-            <a:off x="411480" y="4224528"/>
-            <a:ext cx="8321040" cy="457200"/>
+            <a:off x="411480" y="4407408"/>
+            <a:ext cx="4480560" cy="274320"/>
+          </a:xfrm>
+          <a:prstGeom prst="rect">
+            <a:avLst/>
+          </a:prstGeom>
+          <a:noFill/>
+          <a:ln/>
+        </p:spPr>
+        <p:txBody>
+          <a:bodyPr wrap="square" lIns="0" tIns="0" rIns="0" bIns="0" rtlCol="0" anchor="ctr"/>
+          <a:lstStyle/>
+          <a:p>
+            <a:pPr indent="0" marL="0">
+              <a:buNone/>
+            </a:pPr>
+            <a:r>
+              <a:rPr lang="en-US" sz="850" i="1" dirty="0">
+                <a:solidFill>
+                  <a:srgbClr val="6B7280"/>
+                </a:solidFill>
+                <a:latin typeface="Calibri" pitchFamily="34" charset="0"/>
+                <a:ea typeface="Calibri" pitchFamily="34" charset="-122"/>
+                <a:cs typeface="Calibri" pitchFamily="34" charset="-120"/>
+              </a:rPr>
+              <a:t>*2025 excludes Ice Cream (demerged Dec 2025); 2024 on the same basis: €10.4bn. About 1/5 of group turnover.</a:t>
+            </a:r>
+            <a:endParaRPr lang="en-US" sz="850" dirty="0"/>
+          </a:p>
+        </p:txBody>
+      </p:sp>
+      <p:sp>
+        <p:nvSpPr>
+          <p:cNvPr id="8" name="Shape 5"/>
+          <p:cNvSpPr/>
+          <p:nvPr/>
+        </p:nvSpPr>
+        <p:spPr>
+          <a:xfrm>
+            <a:off x="5120640" y="1188720"/>
+            <a:ext cx="3611880" cy="987552"/>
           </a:xfrm>
           <a:prstGeom prst="roundRect">
             <a:avLst>
-              <a:gd name="adj" fmla="val 12000"/>
+              <a:gd name="adj" fmla="val 7407"/>
             </a:avLst>
           </a:prstGeom>
           <a:solidFill>
             <a:srgbClr val="F3F4F8"/>
           </a:solidFill>
-          <a:ln w="12700">
-            <a:solidFill>
-              <a:srgbClr val="7C3AED"/>
-            </a:solidFill>
-            <a:prstDash val="solid"/>
-          </a:ln>
-        </p:spPr>
-      </p:sp>
-      <p:sp>
-        <p:nvSpPr>
-          <p:cNvPr id="8" name="Text 5"/>
+          <a:ln/>
+        </p:spPr>
+      </p:sp>
+      <p:sp>
+        <p:nvSpPr>
+          <p:cNvPr id="9" name="Text 6"/>
           <p:cNvSpPr/>
           <p:nvPr/>
         </p:nvSpPr>
         <p:spPr>
           <a:xfrm>
-            <a:off x="548640" y="4224528"/>
-            <a:ext cx="8046720" cy="457200"/>
+            <a:off x="5257800" y="1188720"/>
+            <a:ext cx="3383280" cy="987552"/>
           </a:xfrm>
           <a:prstGeom prst="rect">
             <a:avLst/>
@@ -5213,7 +4066,7 @@
               <a:buNone/>
             </a:pPr>
             <a:r>
-              <a:rPr lang="en-US" sz="1150" b="1" dirty="0">
+              <a:rPr lang="en-US" sz="1350" b="1" dirty="0">
                 <a:solidFill>
                   <a:srgbClr val="7C3AED"/>
                 </a:solidFill>
@@ -5221,8 +4074,11 @@
                 <a:ea typeface="Calibri" pitchFamily="34" charset="-122"/>
                 <a:cs typeface="Calibri" pitchFamily="34" charset="-120"/>
               </a:rPr>
-              <a:t>So what?  </a:t>
-            </a:r>
+              <a:t>O · Ownership</a:t>
+            </a:r>
+            <a:endParaRPr lang="en-US" sz="1350" dirty="0"/>
+          </a:p>
+          <a:p>
             <a:pPr indent="0" marL="0">
               <a:buNone/>
             </a:pPr>
@@ -5235,15 +4091,171 @@
                 <a:ea typeface="Calibri" pitchFamily="34" charset="-122"/>
                 <a:cs typeface="Calibri" pitchFamily="34" charset="-120"/>
               </a:rPr>
-              <a:t>Brands are the ownership (O) advantage; Unilever buys brands and online skills it does not have.</a:t>
-            </a:r>
-            <a:endParaRPr lang="en-US" sz="1150" dirty="0"/>
+              <a:t>Global brands, money and worldwide distribution</a:t>
+            </a:r>
+            <a:endParaRPr lang="en-US" sz="1350" dirty="0"/>
           </a:p>
         </p:txBody>
       </p:sp>
       <p:sp>
         <p:nvSpPr>
-          <p:cNvPr id="9" name="Text 6"/>
+          <p:cNvPr id="10" name="Shape 7"/>
+          <p:cNvSpPr/>
+          <p:nvPr/>
+        </p:nvSpPr>
+        <p:spPr>
+          <a:xfrm>
+            <a:off x="5120640" y="2304288"/>
+            <a:ext cx="3611880" cy="987552"/>
+          </a:xfrm>
+          <a:prstGeom prst="roundRect">
+            <a:avLst>
+              <a:gd name="adj" fmla="val 7407"/>
+            </a:avLst>
+          </a:prstGeom>
+          <a:solidFill>
+            <a:srgbClr val="F3F4F8"/>
+          </a:solidFill>
+          <a:ln/>
+        </p:spPr>
+      </p:sp>
+      <p:sp>
+        <p:nvSpPr>
+          <p:cNvPr id="11" name="Text 8"/>
+          <p:cNvSpPr/>
+          <p:nvPr/>
+        </p:nvSpPr>
+        <p:spPr>
+          <a:xfrm>
+            <a:off x="5257800" y="2304288"/>
+            <a:ext cx="3383280" cy="987552"/>
+          </a:xfrm>
+          <a:prstGeom prst="rect">
+            <a:avLst/>
+          </a:prstGeom>
+          <a:noFill/>
+          <a:ln/>
+        </p:spPr>
+        <p:txBody>
+          <a:bodyPr wrap="square" lIns="0" tIns="0" rIns="0" bIns="0" rtlCol="0" anchor="ctr"/>
+          <a:lstStyle/>
+          <a:p>
+            <a:pPr indent="0" marL="0">
+              <a:buNone/>
+            </a:pPr>
+            <a:r>
+              <a:rPr lang="en-US" sz="1350" b="1" dirty="0">
+                <a:solidFill>
+                  <a:srgbClr val="7C3AED"/>
+                </a:solidFill>
+                <a:latin typeface="Calibri" pitchFamily="34" charset="0"/>
+                <a:ea typeface="Calibri" pitchFamily="34" charset="-122"/>
+                <a:cs typeface="Calibri" pitchFamily="34" charset="-120"/>
+              </a:rPr>
+              <a:t>L · Location</a:t>
+            </a:r>
+            <a:endParaRPr lang="en-US" sz="1350" dirty="0"/>
+          </a:p>
+          <a:p>
+            <a:pPr indent="0" marL="0">
+              <a:buNone/>
+            </a:pPr>
+            <a:r>
+              <a:rPr lang="en-US" sz="1150" dirty="0">
+                <a:solidFill>
+                  <a:srgbClr val="1A1F36"/>
+                </a:solidFill>
+                <a:latin typeface="Calibri" pitchFamily="34" charset="0"/>
+                <a:ea typeface="Calibri" pitchFamily="34" charset="-122"/>
+                <a:cs typeface="Calibri" pitchFamily="34" charset="-120"/>
+              </a:rPr>
+              <a:t>Biggest market; many premium and online shoppers</a:t>
+            </a:r>
+            <a:endParaRPr lang="en-US" sz="1350" dirty="0"/>
+          </a:p>
+        </p:txBody>
+      </p:sp>
+      <p:sp>
+        <p:nvSpPr>
+          <p:cNvPr id="12" name="Shape 9"/>
+          <p:cNvSpPr/>
+          <p:nvPr/>
+        </p:nvSpPr>
+        <p:spPr>
+          <a:xfrm>
+            <a:off x="5120640" y="3419856"/>
+            <a:ext cx="3611880" cy="987552"/>
+          </a:xfrm>
+          <a:prstGeom prst="roundRect">
+            <a:avLst>
+              <a:gd name="adj" fmla="val 7407"/>
+            </a:avLst>
+          </a:prstGeom>
+          <a:solidFill>
+            <a:srgbClr val="F3F4F8"/>
+          </a:solidFill>
+          <a:ln/>
+        </p:spPr>
+      </p:sp>
+      <p:sp>
+        <p:nvSpPr>
+          <p:cNvPr id="13" name="Text 10"/>
+          <p:cNvSpPr/>
+          <p:nvPr/>
+        </p:nvSpPr>
+        <p:spPr>
+          <a:xfrm>
+            <a:off x="5257800" y="3419856"/>
+            <a:ext cx="3383280" cy="987552"/>
+          </a:xfrm>
+          <a:prstGeom prst="rect">
+            <a:avLst/>
+          </a:prstGeom>
+          <a:noFill/>
+          <a:ln/>
+        </p:spPr>
+        <p:txBody>
+          <a:bodyPr wrap="square" lIns="0" tIns="0" rIns="0" bIns="0" rtlCol="0" anchor="ctr"/>
+          <a:lstStyle/>
+          <a:p>
+            <a:pPr indent="0" marL="0">
+              <a:buNone/>
+            </a:pPr>
+            <a:r>
+              <a:rPr lang="en-US" sz="1350" b="1" dirty="0">
+                <a:solidFill>
+                  <a:srgbClr val="7C3AED"/>
+                </a:solidFill>
+                <a:latin typeface="Calibri" pitchFamily="34" charset="0"/>
+                <a:ea typeface="Calibri" pitchFamily="34" charset="-122"/>
+                <a:cs typeface="Calibri" pitchFamily="34" charset="-120"/>
+              </a:rPr>
+              <a:t>I · Internalisation</a:t>
+            </a:r>
+            <a:endParaRPr lang="en-US" sz="1350" dirty="0"/>
+          </a:p>
+          <a:p>
+            <a:pPr indent="0" marL="0">
+              <a:buNone/>
+            </a:pPr>
+            <a:r>
+              <a:rPr lang="en-US" sz="1150" dirty="0">
+                <a:solidFill>
+                  <a:srgbClr val="1A1F36"/>
+                </a:solidFill>
+                <a:latin typeface="Calibri" pitchFamily="34" charset="0"/>
+                <a:ea typeface="Calibri" pitchFamily="34" charset="-122"/>
+                <a:cs typeface="Calibri" pitchFamily="34" charset="-120"/>
+              </a:rPr>
+              <a:t>Owns the brands to control them and take them abroad (Nutrafol → Canada, 2023)</a:t>
+            </a:r>
+            <a:endParaRPr lang="en-US" sz="1350" dirty="0"/>
+          </a:p>
+        </p:txBody>
+      </p:sp>
+      <p:sp>
+        <p:nvSpPr>
+          <p:cNvPr id="14" name="Text 11"/>
           <p:cNvSpPr/>
           <p:nvPr/>
         </p:nvSpPr>
@@ -5274,7 +4286,7 @@
                 <a:ea typeface="Calibri" pitchFamily="34" charset="-122"/>
                 <a:cs typeface="Calibri" pitchFamily="34" charset="-120"/>
               </a:rPr>
-              <a:t>Sources: China Daily (2020); Xinhua (2022); MND Staff (2025); Unilever PLC (2022; 2023b; 2024; 2025a; 2025b; 2026a; 2026b).</a:t>
+              <a:t>Sources: Unilever PLC (2022; 2023a; 2024; 2025a; 2026a); UNCTAD (2025).</a:t>
             </a:r>
             <a:endParaRPr lang="en-US" sz="800" dirty="0"/>
           </a:p>
@@ -5397,7 +4409,7 @@
                 <a:ea typeface="Calibri" pitchFamily="34" charset="-122"/>
                 <a:cs typeface="Calibri" pitchFamily="34" charset="-120"/>
               </a:rPr>
-              <a:t>Unilever FDI ②: sell and focus</a:t>
+              <a:t>Unilever in the US: what each deal brought</a:t>
             </a:r>
             <a:endParaRPr lang="en-US" sz="2500" dirty="0"/>
           </a:p>
@@ -5436,7 +4448,7 @@
                 <a:ea typeface="Calibri" pitchFamily="34" charset="-122"/>
                 <a:cs typeface="Calibri" pitchFamily="34" charset="-120"/>
               </a:rPr>
-              <a:t>Divesting slower businesses changed the size and shape of Unilever</a:t>
+              <a:t>Mainly M&amp;A = strategic asset-seeking: brands, customers, online skills</a:t>
             </a:r>
             <a:endParaRPr lang="en-US" sz="1300" dirty="0"/>
           </a:p>
@@ -5479,7 +4491,7 @@
                         <a:buNone/>
                       </a:pPr>
                       <a:r>
-                        <a:rPr lang="en-US" sz="1200" b="1" dirty="0">
+                        <a:rPr lang="en-US" sz="1000" b="1" dirty="0">
                           <a:solidFill>
                             <a:srgbClr val="FFFFFF"/>
                           </a:solidFill>
@@ -5489,7 +4501,7 @@
                         </a:rPr>
                         <a:t>Date</a:t>
                       </a:r>
-                      <a:endParaRPr lang="en-US" sz="1200" dirty="0">
+                      <a:endParaRPr lang="en-US" sz="1000" dirty="0">
                         <a:latin typeface="Calibri" charset="0"/>
                         <a:ea typeface="Calibri" charset="0"/>
                         <a:cs typeface="Calibri" charset="0"/>
@@ -5547,7 +4559,7 @@
                         <a:buNone/>
                       </a:pPr>
                       <a:r>
-                        <a:rPr lang="en-US" sz="1200" b="1" dirty="0">
+                        <a:rPr lang="en-US" sz="1000" b="1" dirty="0">
                           <a:solidFill>
                             <a:srgbClr val="FFFFFF"/>
                           </a:solidFill>
@@ -5557,7 +4569,7 @@
                         </a:rPr>
                         <a:t>What happened</a:t>
                       </a:r>
-                      <a:endParaRPr lang="en-US" sz="1200" dirty="0">
+                      <a:endParaRPr lang="en-US" sz="1000" dirty="0">
                         <a:latin typeface="Calibri" charset="0"/>
                         <a:ea typeface="Calibri" charset="0"/>
                         <a:cs typeface="Calibri" charset="0"/>
@@ -5615,7 +4627,7 @@
                         <a:buNone/>
                       </a:pPr>
                       <a:r>
-                        <a:rPr lang="en-US" sz="1200" b="1" dirty="0">
+                        <a:rPr lang="en-US" sz="1000" b="1" dirty="0">
                           <a:solidFill>
                             <a:srgbClr val="FFFFFF"/>
                           </a:solidFill>
@@ -5623,9 +4635,9 @@
                           <a:ea typeface="Calibri" pitchFamily="34" charset="-122"/>
                           <a:cs typeface="Calibri" pitchFamily="34" charset="-120"/>
                         </a:rPr>
-                        <a:t>Impact on Unilever</a:t>
+                        <a:t>Benefit for Unilever</a:t>
                       </a:r>
-                      <a:endParaRPr lang="en-US" sz="1200" dirty="0">
+                      <a:endParaRPr lang="en-US" sz="1000" dirty="0">
                         <a:latin typeface="Calibri" charset="0"/>
                         <a:ea typeface="Calibri" charset="0"/>
                         <a:cs typeface="Calibri" charset="0"/>
@@ -5685,7 +4697,7 @@
                         <a:buNone/>
                       </a:pPr>
                       <a:r>
-                        <a:rPr lang="en-US" sz="1200" b="1" dirty="0">
+                        <a:rPr lang="en-US" sz="1000" b="1" dirty="0">
                           <a:solidFill>
                             <a:srgbClr val="7C3AED"/>
                           </a:solidFill>
@@ -5693,9 +4705,9 @@
                           <a:ea typeface="Calibri" pitchFamily="34" charset="-122"/>
                           <a:cs typeface="Calibri" pitchFamily="34" charset="-120"/>
                         </a:rPr>
-                        <a:t>Jul 2022</a:t>
+                        <a:t>Aug 2021</a:t>
                       </a:r>
-                      <a:endParaRPr lang="en-US" sz="1200" dirty="0">
+                      <a:endParaRPr lang="en-US" sz="1000" dirty="0">
                         <a:latin typeface="Calibri" charset="0"/>
                         <a:ea typeface="Calibri" charset="0"/>
                         <a:cs typeface="Calibri" charset="0"/>
@@ -5753,7 +4765,7 @@
                         <a:buNone/>
                       </a:pPr>
                       <a:r>
-                        <a:rPr lang="en-US" sz="1200" dirty="0">
+                        <a:rPr lang="en-US" sz="1000" dirty="0">
                           <a:solidFill>
                             <a:srgbClr val="1A1F36"/>
                           </a:solidFill>
@@ -5761,9 +4773,9 @@
                           <a:ea typeface="Calibri" pitchFamily="34" charset="-122"/>
                           <a:cs typeface="Calibri" pitchFamily="34" charset="-120"/>
                         </a:rPr>
-                        <a:t>Tea business (ekaterra) sold to CVC for €4.59bn (announced Nov 2021)</a:t>
+                        <a:t>Paula's Choice (skincare, sells online), 100%, €1.83bn</a:t>
                       </a:r>
-                      <a:endParaRPr lang="en-US" sz="1200" dirty="0">
+                      <a:endParaRPr lang="en-US" sz="1000" dirty="0">
                         <a:latin typeface="Calibri" charset="0"/>
                         <a:ea typeface="Calibri" charset="0"/>
                         <a:cs typeface="Calibri" charset="0"/>
@@ -5821,7 +4833,7 @@
                         <a:buNone/>
                       </a:pPr>
                       <a:r>
-                        <a:rPr lang="en-US" sz="1200" dirty="0">
+                        <a:rPr lang="en-US" sz="1000" dirty="0">
                           <a:solidFill>
                             <a:srgbClr val="1A1F36"/>
                           </a:solidFill>
@@ -5829,9 +4841,9 @@
                           <a:ea typeface="Calibri" pitchFamily="34" charset="-122"/>
                           <a:cs typeface="Calibri" pitchFamily="34" charset="-120"/>
                         </a:rPr>
-                        <a:t>Gain €2.3bn; net debt fell; turnover 1.7% lower in 2023</a:t>
+                        <a:t>Direct-to-consumer e-commerce skills; Prestige Beauty grew double-digit in 2022</a:t>
                       </a:r>
-                      <a:endParaRPr lang="en-US" sz="1200" dirty="0">
+                      <a:endParaRPr lang="en-US" sz="1000" dirty="0">
                         <a:latin typeface="Calibri" charset="0"/>
                         <a:ea typeface="Calibri" charset="0"/>
                         <a:cs typeface="Calibri" charset="0"/>
@@ -5891,7 +4903,7 @@
                         <a:buNone/>
                       </a:pPr>
                       <a:r>
-                        <a:rPr lang="en-US" sz="1200" b="1" dirty="0">
+                        <a:rPr lang="en-US" sz="1000" b="1" dirty="0">
                           <a:solidFill>
                             <a:srgbClr val="7C3AED"/>
                           </a:solidFill>
@@ -5899,9 +4911,9 @@
                           <a:ea typeface="Calibri" pitchFamily="34" charset="-122"/>
                           <a:cs typeface="Calibri" pitchFamily="34" charset="-120"/>
                         </a:rPr>
-                        <a:t>Oct 2024</a:t>
+                        <a:t>Jul 2022</a:t>
                       </a:r>
-                      <a:endParaRPr lang="en-US" sz="1200" dirty="0">
+                      <a:endParaRPr lang="en-US" sz="1000" dirty="0">
                         <a:latin typeface="Calibri" charset="0"/>
                         <a:ea typeface="Calibri" charset="0"/>
                         <a:cs typeface="Calibri" charset="0"/>
@@ -5959,7 +4971,7 @@
                         <a:buNone/>
                       </a:pPr>
                       <a:r>
-                        <a:rPr lang="en-US" sz="1200" dirty="0">
+                        <a:rPr lang="en-US" sz="1000" dirty="0">
                           <a:solidFill>
                             <a:srgbClr val="1A1F36"/>
                           </a:solidFill>
@@ -5967,9 +4979,9 @@
                           <a:ea typeface="Calibri" pitchFamily="34" charset="-122"/>
                           <a:cs typeface="Calibri" pitchFamily="34" charset="-120"/>
                         </a:rPr>
-                        <a:t>Russian business (4 factories) sold to Arnest Group; price not disclosed</a:t>
+                        <a:t>Nutrafol (hair wellness): stake raised to 80% for €811m</a:t>
                       </a:r>
-                      <a:endParaRPr lang="en-US" sz="1200" dirty="0">
+                      <a:endParaRPr lang="en-US" sz="1000" dirty="0">
                         <a:latin typeface="Calibri" charset="0"/>
                         <a:ea typeface="Calibri" charset="0"/>
                         <a:cs typeface="Calibri" charset="0"/>
@@ -6027,7 +5039,7 @@
                         <a:buNone/>
                       </a:pPr>
                       <a:r>
-                        <a:rPr lang="en-US" sz="1200" dirty="0">
+                        <a:rPr lang="en-US" sz="1000" dirty="0">
                           <a:solidFill>
                             <a:srgbClr val="1A1F36"/>
                           </a:solidFill>
@@ -6035,9 +5047,9 @@
                           <a:ea typeface="Calibri" pitchFamily="34" charset="-122"/>
                           <a:cs typeface="Calibri" pitchFamily="34" charset="-120"/>
                         </a:rPr>
-                        <a:t>Net loss €406m on four disposals that year (incl. Russia)</a:t>
+                        <a:t>First launch outside the US (Canada, 2023); led double-digit Wellbeing growth in 2025</a:t>
                       </a:r>
-                      <a:endParaRPr lang="en-US" sz="1200" dirty="0">
+                      <a:endParaRPr lang="en-US" sz="1000" dirty="0">
                         <a:latin typeface="Calibri" charset="0"/>
                         <a:ea typeface="Calibri" charset="0"/>
                         <a:cs typeface="Calibri" charset="0"/>
@@ -6097,7 +5109,7 @@
                         <a:buNone/>
                       </a:pPr>
                       <a:r>
-                        <a:rPr lang="en-US" sz="1200" b="1" dirty="0">
+                        <a:rPr lang="en-US" sz="1000" b="1" dirty="0">
                           <a:solidFill>
                             <a:srgbClr val="7C3AED"/>
                           </a:solidFill>
@@ -6105,9 +5117,9 @@
                           <a:ea typeface="Calibri" pitchFamily="34" charset="-122"/>
                           <a:cs typeface="Calibri" pitchFamily="34" charset="-120"/>
                         </a:rPr>
-                        <a:t>Dec 2025</a:t>
+                        <a:t>Feb 2024</a:t>
                       </a:r>
-                      <a:endParaRPr lang="en-US" sz="1200" dirty="0">
+                      <a:endParaRPr lang="en-US" sz="1000" dirty="0">
                         <a:latin typeface="Calibri" charset="0"/>
                         <a:ea typeface="Calibri" charset="0"/>
                         <a:cs typeface="Calibri" charset="0"/>
@@ -6165,7 +5177,7 @@
                         <a:buNone/>
                       </a:pPr>
                       <a:r>
-                        <a:rPr lang="en-US" sz="1200" dirty="0">
+                        <a:rPr lang="en-US" sz="1000" dirty="0">
                           <a:solidFill>
                             <a:srgbClr val="1A1F36"/>
                           </a:solidFill>
@@ -6173,9 +5185,9 @@
                           <a:ea typeface="Calibri" pitchFamily="34" charset="-122"/>
                           <a:cs typeface="Calibri" pitchFamily="34" charset="-120"/>
                         </a:rPr>
-                        <a:t>Magnum Ice Cream Company demerged (announced Mar 2024); Unilever keeps 19.85%</a:t>
+                        <a:t>K18 (premium hair care), 91.88%</a:t>
                       </a:r>
-                      <a:endParaRPr lang="en-US" sz="1200" dirty="0">
+                      <a:endParaRPr lang="en-US" sz="1000" dirty="0">
                         <a:latin typeface="Calibri" charset="0"/>
                         <a:ea typeface="Calibri" charset="0"/>
                         <a:cs typeface="Calibri" charset="0"/>
@@ -6233,7 +5245,7 @@
                         <a:buNone/>
                       </a:pPr>
                       <a:r>
-                        <a:rPr lang="en-US" sz="1200" dirty="0">
+                        <a:rPr lang="en-US" sz="1000" dirty="0">
                           <a:solidFill>
                             <a:srgbClr val="1A1F36"/>
                           </a:solidFill>
@@ -6241,9 +5253,627 @@
                           <a:ea typeface="Calibri" pitchFamily="34" charset="-122"/>
                           <a:cs typeface="Calibri" pitchFamily="34" charset="-120"/>
                         </a:rPr>
-                        <a:t>2024 turnover restated €60.8bn → €52.5bn; demerger gain €3.4bn; stake worth €1.7bn</a:t>
+                        <a:t>Grew double-digit in 2024</a:t>
                       </a:r>
-                      <a:endParaRPr lang="en-US" sz="1200" dirty="0">
+                      <a:endParaRPr lang="en-US" sz="1000" dirty="0">
+                        <a:latin typeface="Calibri" charset="0"/>
+                        <a:ea typeface="Calibri" charset="0"/>
+                        <a:cs typeface="Calibri" charset="0"/>
+                      </a:endParaRPr>
+                    </a:p>
+                  </a:txBody>
+                  <a:tcPr marL="63500" marR="63500" marT="38100" marB="38100" anchor="ctr">
+                    <a:lnL w="6350" cap="flat" cmpd="sng" algn="ctr">
+                      <a:solidFill>
+                        <a:srgbClr val="D1D5DB"/>
+                      </a:solidFill>
+                      <a:prstDash val="solid"/>
+                      <a:round/>
+                      <a:headEnd type="none" w="med" len="med"/>
+                      <a:tailEnd type="none" w="med" len="med"/>
+                    </a:lnL>
+                    <a:lnR w="6350" cap="flat" cmpd="sng" algn="ctr">
+                      <a:solidFill>
+                        <a:srgbClr val="D1D5DB"/>
+                      </a:solidFill>
+                      <a:prstDash val="solid"/>
+                      <a:round/>
+                      <a:headEnd type="none" w="med" len="med"/>
+                      <a:tailEnd type="none" w="med" len="med"/>
+                    </a:lnR>
+                    <a:lnT w="6350" cap="flat" cmpd="sng" algn="ctr">
+                      <a:solidFill>
+                        <a:srgbClr val="D1D5DB"/>
+                      </a:solidFill>
+                      <a:prstDash val="solid"/>
+                      <a:round/>
+                      <a:headEnd type="none" w="med" len="med"/>
+                      <a:tailEnd type="none" w="med" len="med"/>
+                    </a:lnT>
+                    <a:lnB w="6350" cap="flat" cmpd="sng" algn="ctr">
+                      <a:solidFill>
+                        <a:srgbClr val="D1D5DB"/>
+                      </a:solidFill>
+                      <a:prstDash val="solid"/>
+                      <a:round/>
+                      <a:headEnd type="none" w="med" len="med"/>
+                      <a:tailEnd type="none" w="med" len="med"/>
+                    </a:lnB>
+                    <a:solidFill>
+                      <a:srgbClr val="FFFFFF"/>
+                    </a:solidFill>
+                  </a:tcPr>
+                </a:tc>
+              </a:tr>
+              <a:tr h="0">
+                <a:tc>
+                  <a:txBody>
+                    <a:bodyPr/>
+                    <a:lstStyle/>
+                    <a:p>
+                      <a:pPr indent="0" marL="0">
+                        <a:buNone/>
+                      </a:pPr>
+                      <a:r>
+                        <a:rPr lang="en-US" sz="1000" b="1" dirty="0">
+                          <a:solidFill>
+                            <a:srgbClr val="7C3AED"/>
+                          </a:solidFill>
+                          <a:latin typeface="Calibri" pitchFamily="34" charset="0"/>
+                          <a:ea typeface="Calibri" pitchFamily="34" charset="-122"/>
+                          <a:cs typeface="Calibri" pitchFamily="34" charset="-120"/>
+                        </a:rPr>
+                        <a:t>Sep 2025</a:t>
+                      </a:r>
+                      <a:endParaRPr lang="en-US" sz="1000" dirty="0">
+                        <a:latin typeface="Calibri" charset="0"/>
+                        <a:ea typeface="Calibri" charset="0"/>
+                        <a:cs typeface="Calibri" charset="0"/>
+                      </a:endParaRPr>
+                    </a:p>
+                  </a:txBody>
+                  <a:tcPr marL="63500" marR="63500" marT="38100" marB="38100" anchor="ctr">
+                    <a:lnL w="6350" cap="flat" cmpd="sng" algn="ctr">
+                      <a:solidFill>
+                        <a:srgbClr val="D1D5DB"/>
+                      </a:solidFill>
+                      <a:prstDash val="solid"/>
+                      <a:round/>
+                      <a:headEnd type="none" w="med" len="med"/>
+                      <a:tailEnd type="none" w="med" len="med"/>
+                    </a:lnL>
+                    <a:lnR w="6350" cap="flat" cmpd="sng" algn="ctr">
+                      <a:solidFill>
+                        <a:srgbClr val="D1D5DB"/>
+                      </a:solidFill>
+                      <a:prstDash val="solid"/>
+                      <a:round/>
+                      <a:headEnd type="none" w="med" len="med"/>
+                      <a:tailEnd type="none" w="med" len="med"/>
+                    </a:lnR>
+                    <a:lnT w="6350" cap="flat" cmpd="sng" algn="ctr">
+                      <a:solidFill>
+                        <a:srgbClr val="D1D5DB"/>
+                      </a:solidFill>
+                      <a:prstDash val="solid"/>
+                      <a:round/>
+                      <a:headEnd type="none" w="med" len="med"/>
+                      <a:tailEnd type="none" w="med" len="med"/>
+                    </a:lnT>
+                    <a:lnB w="6350" cap="flat" cmpd="sng" algn="ctr">
+                      <a:solidFill>
+                        <a:srgbClr val="D1D5DB"/>
+                      </a:solidFill>
+                      <a:prstDash val="solid"/>
+                      <a:round/>
+                      <a:headEnd type="none" w="med" len="med"/>
+                      <a:tailEnd type="none" w="med" len="med"/>
+                    </a:lnB>
+                    <a:solidFill>
+                      <a:srgbClr val="FFFFFF"/>
+                    </a:solidFill>
+                  </a:tcPr>
+                </a:tc>
+                <a:tc>
+                  <a:txBody>
+                    <a:bodyPr/>
+                    <a:lstStyle/>
+                    <a:p>
+                      <a:pPr indent="0" marL="0">
+                        <a:buNone/>
+                      </a:pPr>
+                      <a:r>
+                        <a:rPr lang="en-US" sz="1000" dirty="0">
+                          <a:solidFill>
+                            <a:srgbClr val="1A1F36"/>
+                          </a:solidFill>
+                          <a:latin typeface="Calibri" pitchFamily="34" charset="0"/>
+                          <a:ea typeface="Calibri" pitchFamily="34" charset="-122"/>
+                          <a:cs typeface="Calibri" pitchFamily="34" charset="-120"/>
+                        </a:rPr>
+                        <a:t>Dr. Squatch (men's care), 98.7%, €1.24bn</a:t>
+                      </a:r>
+                      <a:endParaRPr lang="en-US" sz="1000" dirty="0">
+                        <a:latin typeface="Calibri" charset="0"/>
+                        <a:ea typeface="Calibri" charset="0"/>
+                        <a:cs typeface="Calibri" charset="0"/>
+                      </a:endParaRPr>
+                    </a:p>
+                  </a:txBody>
+                  <a:tcPr marL="63500" marR="63500" marT="38100" marB="38100" anchor="ctr">
+                    <a:lnL w="6350" cap="flat" cmpd="sng" algn="ctr">
+                      <a:solidFill>
+                        <a:srgbClr val="D1D5DB"/>
+                      </a:solidFill>
+                      <a:prstDash val="solid"/>
+                      <a:round/>
+                      <a:headEnd type="none" w="med" len="med"/>
+                      <a:tailEnd type="none" w="med" len="med"/>
+                    </a:lnL>
+                    <a:lnR w="6350" cap="flat" cmpd="sng" algn="ctr">
+                      <a:solidFill>
+                        <a:srgbClr val="D1D5DB"/>
+                      </a:solidFill>
+                      <a:prstDash val="solid"/>
+                      <a:round/>
+                      <a:headEnd type="none" w="med" len="med"/>
+                      <a:tailEnd type="none" w="med" len="med"/>
+                    </a:lnR>
+                    <a:lnT w="6350" cap="flat" cmpd="sng" algn="ctr">
+                      <a:solidFill>
+                        <a:srgbClr val="D1D5DB"/>
+                      </a:solidFill>
+                      <a:prstDash val="solid"/>
+                      <a:round/>
+                      <a:headEnd type="none" w="med" len="med"/>
+                      <a:tailEnd type="none" w="med" len="med"/>
+                    </a:lnT>
+                    <a:lnB w="6350" cap="flat" cmpd="sng" algn="ctr">
+                      <a:solidFill>
+                        <a:srgbClr val="D1D5DB"/>
+                      </a:solidFill>
+                      <a:prstDash val="solid"/>
+                      <a:round/>
+                      <a:headEnd type="none" w="med" len="med"/>
+                      <a:tailEnd type="none" w="med" len="med"/>
+                    </a:lnB>
+                    <a:solidFill>
+                      <a:srgbClr val="FFFFFF"/>
+                    </a:solidFill>
+                  </a:tcPr>
+                </a:tc>
+                <a:tc>
+                  <a:txBody>
+                    <a:bodyPr/>
+                    <a:lstStyle/>
+                    <a:p>
+                      <a:pPr indent="0" marL="0">
+                        <a:buNone/>
+                      </a:pPr>
+                      <a:r>
+                        <a:rPr lang="en-US" sz="1000" dirty="0">
+                          <a:solidFill>
+                            <a:srgbClr val="1A1F36"/>
+                          </a:solidFill>
+                          <a:latin typeface="Calibri" pitchFamily="34" charset="0"/>
+                          <a:ea typeface="Calibri" pitchFamily="34" charset="-122"/>
+                          <a:cs typeface="Calibri" pitchFamily="34" charset="-120"/>
+                        </a:rPr>
+                        <a:t>Moves Unilever into "premium and high-growth spaces"</a:t>
+                      </a:r>
+                      <a:endParaRPr lang="en-US" sz="1000" dirty="0">
+                        <a:latin typeface="Calibri" charset="0"/>
+                        <a:ea typeface="Calibri" charset="0"/>
+                        <a:cs typeface="Calibri" charset="0"/>
+                      </a:endParaRPr>
+                    </a:p>
+                  </a:txBody>
+                  <a:tcPr marL="63500" marR="63500" marT="38100" marB="38100" anchor="ctr">
+                    <a:lnL w="6350" cap="flat" cmpd="sng" algn="ctr">
+                      <a:solidFill>
+                        <a:srgbClr val="D1D5DB"/>
+                      </a:solidFill>
+                      <a:prstDash val="solid"/>
+                      <a:round/>
+                      <a:headEnd type="none" w="med" len="med"/>
+                      <a:tailEnd type="none" w="med" len="med"/>
+                    </a:lnL>
+                    <a:lnR w="6350" cap="flat" cmpd="sng" algn="ctr">
+                      <a:solidFill>
+                        <a:srgbClr val="D1D5DB"/>
+                      </a:solidFill>
+                      <a:prstDash val="solid"/>
+                      <a:round/>
+                      <a:headEnd type="none" w="med" len="med"/>
+                      <a:tailEnd type="none" w="med" len="med"/>
+                    </a:lnR>
+                    <a:lnT w="6350" cap="flat" cmpd="sng" algn="ctr">
+                      <a:solidFill>
+                        <a:srgbClr val="D1D5DB"/>
+                      </a:solidFill>
+                      <a:prstDash val="solid"/>
+                      <a:round/>
+                      <a:headEnd type="none" w="med" len="med"/>
+                      <a:tailEnd type="none" w="med" len="med"/>
+                    </a:lnT>
+                    <a:lnB w="6350" cap="flat" cmpd="sng" algn="ctr">
+                      <a:solidFill>
+                        <a:srgbClr val="D1D5DB"/>
+                      </a:solidFill>
+                      <a:prstDash val="solid"/>
+                      <a:round/>
+                      <a:headEnd type="none" w="med" len="med"/>
+                      <a:tailEnd type="none" w="med" len="med"/>
+                    </a:lnB>
+                    <a:solidFill>
+                      <a:srgbClr val="FFFFFF"/>
+                    </a:solidFill>
+                  </a:tcPr>
+                </a:tc>
+              </a:tr>
+              <a:tr h="0">
+                <a:tc>
+                  <a:txBody>
+                    <a:bodyPr/>
+                    <a:lstStyle/>
+                    <a:p>
+                      <a:pPr indent="0" marL="0">
+                        <a:buNone/>
+                      </a:pPr>
+                      <a:r>
+                        <a:rPr lang="en-US" sz="1000" b="1" dirty="0">
+                          <a:solidFill>
+                            <a:srgbClr val="7C3AED"/>
+                          </a:solidFill>
+                          <a:latin typeface="Calibri" pitchFamily="34" charset="0"/>
+                          <a:ea typeface="Calibri" pitchFamily="34" charset="-122"/>
+                          <a:cs typeface="Calibri" pitchFamily="34" charset="-120"/>
+                        </a:rPr>
+                        <a:t>Dec 2024</a:t>
+                      </a:r>
+                      <a:endParaRPr lang="en-US" sz="1000" dirty="0">
+                        <a:latin typeface="Calibri" charset="0"/>
+                        <a:ea typeface="Calibri" charset="0"/>
+                        <a:cs typeface="Calibri" charset="0"/>
+                      </a:endParaRPr>
+                    </a:p>
+                  </a:txBody>
+                  <a:tcPr marL="63500" marR="63500" marT="38100" marB="38100" anchor="ctr">
+                    <a:lnL w="6350" cap="flat" cmpd="sng" algn="ctr">
+                      <a:solidFill>
+                        <a:srgbClr val="D1D5DB"/>
+                      </a:solidFill>
+                      <a:prstDash val="solid"/>
+                      <a:round/>
+                      <a:headEnd type="none" w="med" len="med"/>
+                      <a:tailEnd type="none" w="med" len="med"/>
+                    </a:lnL>
+                    <a:lnR w="6350" cap="flat" cmpd="sng" algn="ctr">
+                      <a:solidFill>
+                        <a:srgbClr val="D1D5DB"/>
+                      </a:solidFill>
+                      <a:prstDash val="solid"/>
+                      <a:round/>
+                      <a:headEnd type="none" w="med" len="med"/>
+                      <a:tailEnd type="none" w="med" len="med"/>
+                    </a:lnR>
+                    <a:lnT w="6350" cap="flat" cmpd="sng" algn="ctr">
+                      <a:solidFill>
+                        <a:srgbClr val="D1D5DB"/>
+                      </a:solidFill>
+                      <a:prstDash val="solid"/>
+                      <a:round/>
+                      <a:headEnd type="none" w="med" len="med"/>
+                      <a:tailEnd type="none" w="med" len="med"/>
+                    </a:lnT>
+                    <a:lnB w="6350" cap="flat" cmpd="sng" algn="ctr">
+                      <a:solidFill>
+                        <a:srgbClr val="D1D5DB"/>
+                      </a:solidFill>
+                      <a:prstDash val="solid"/>
+                      <a:round/>
+                      <a:headEnd type="none" w="med" len="med"/>
+                      <a:tailEnd type="none" w="med" len="med"/>
+                    </a:lnB>
+                    <a:solidFill>
+                      <a:srgbClr val="FFFFFF"/>
+                    </a:solidFill>
+                  </a:tcPr>
+                </a:tc>
+                <a:tc>
+                  <a:txBody>
+                    <a:bodyPr/>
+                    <a:lstStyle/>
+                    <a:p>
+                      <a:pPr indent="0" marL="0">
+                        <a:buNone/>
+                      </a:pPr>
+                      <a:r>
+                        <a:rPr lang="en-US" sz="1000" dirty="0">
+                          <a:solidFill>
+                            <a:srgbClr val="1A1F36"/>
+                          </a:solidFill>
+                          <a:latin typeface="Calibri" pitchFamily="34" charset="0"/>
+                          <a:ea typeface="Calibri" pitchFamily="34" charset="-122"/>
+                          <a:cs typeface="Calibri" pitchFamily="34" charset="-120"/>
+                        </a:rPr>
+                        <a:t>Year-end: Prestige &amp; Wellbeing ~30% of Beauty &amp; Wellbeing turnover</a:t>
+                      </a:r>
+                      <a:endParaRPr lang="en-US" sz="1000" dirty="0">
+                        <a:latin typeface="Calibri" charset="0"/>
+                        <a:ea typeface="Calibri" charset="0"/>
+                        <a:cs typeface="Calibri" charset="0"/>
+                      </a:endParaRPr>
+                    </a:p>
+                  </a:txBody>
+                  <a:tcPr marL="63500" marR="63500" marT="38100" marB="38100" anchor="ctr">
+                    <a:lnL w="6350" cap="flat" cmpd="sng" algn="ctr">
+                      <a:solidFill>
+                        <a:srgbClr val="D1D5DB"/>
+                      </a:solidFill>
+                      <a:prstDash val="solid"/>
+                      <a:round/>
+                      <a:headEnd type="none" w="med" len="med"/>
+                      <a:tailEnd type="none" w="med" len="med"/>
+                    </a:lnL>
+                    <a:lnR w="6350" cap="flat" cmpd="sng" algn="ctr">
+                      <a:solidFill>
+                        <a:srgbClr val="D1D5DB"/>
+                      </a:solidFill>
+                      <a:prstDash val="solid"/>
+                      <a:round/>
+                      <a:headEnd type="none" w="med" len="med"/>
+                      <a:tailEnd type="none" w="med" len="med"/>
+                    </a:lnR>
+                    <a:lnT w="6350" cap="flat" cmpd="sng" algn="ctr">
+                      <a:solidFill>
+                        <a:srgbClr val="D1D5DB"/>
+                      </a:solidFill>
+                      <a:prstDash val="solid"/>
+                      <a:round/>
+                      <a:headEnd type="none" w="med" len="med"/>
+                      <a:tailEnd type="none" w="med" len="med"/>
+                    </a:lnT>
+                    <a:lnB w="6350" cap="flat" cmpd="sng" algn="ctr">
+                      <a:solidFill>
+                        <a:srgbClr val="D1D5DB"/>
+                      </a:solidFill>
+                      <a:prstDash val="solid"/>
+                      <a:round/>
+                      <a:headEnd type="none" w="med" len="med"/>
+                      <a:tailEnd type="none" w="med" len="med"/>
+                    </a:lnB>
+                    <a:solidFill>
+                      <a:srgbClr val="FFFFFF"/>
+                    </a:solidFill>
+                  </a:tcPr>
+                </a:tc>
+                <a:tc>
+                  <a:txBody>
+                    <a:bodyPr/>
+                    <a:lstStyle/>
+                    <a:p>
+                      <a:pPr indent="0" marL="0">
+                        <a:buNone/>
+                      </a:pPr>
+                      <a:r>
+                        <a:rPr lang="en-US" sz="1000" dirty="0">
+                          <a:solidFill>
+                            <a:srgbClr val="1A1F36"/>
+                          </a:solidFill>
+                          <a:latin typeface="Calibri" pitchFamily="34" charset="0"/>
+                          <a:ea typeface="Calibri" pitchFamily="34" charset="-122"/>
+                          <a:cs typeface="Calibri" pitchFamily="34" charset="-120"/>
+                        </a:rPr>
+                        <a:t>In the US, 70% of Beauty &amp; Wellbeing sales now from these premium brands</a:t>
+                      </a:r>
+                      <a:endParaRPr lang="en-US" sz="1000" dirty="0">
+                        <a:latin typeface="Calibri" charset="0"/>
+                        <a:ea typeface="Calibri" charset="0"/>
+                        <a:cs typeface="Calibri" charset="0"/>
+                      </a:endParaRPr>
+                    </a:p>
+                  </a:txBody>
+                  <a:tcPr marL="63500" marR="63500" marT="38100" marB="38100" anchor="ctr">
+                    <a:lnL w="6350" cap="flat" cmpd="sng" algn="ctr">
+                      <a:solidFill>
+                        <a:srgbClr val="D1D5DB"/>
+                      </a:solidFill>
+                      <a:prstDash val="solid"/>
+                      <a:round/>
+                      <a:headEnd type="none" w="med" len="med"/>
+                      <a:tailEnd type="none" w="med" len="med"/>
+                    </a:lnL>
+                    <a:lnR w="6350" cap="flat" cmpd="sng" algn="ctr">
+                      <a:solidFill>
+                        <a:srgbClr val="D1D5DB"/>
+                      </a:solidFill>
+                      <a:prstDash val="solid"/>
+                      <a:round/>
+                      <a:headEnd type="none" w="med" len="med"/>
+                      <a:tailEnd type="none" w="med" len="med"/>
+                    </a:lnR>
+                    <a:lnT w="6350" cap="flat" cmpd="sng" algn="ctr">
+                      <a:solidFill>
+                        <a:srgbClr val="D1D5DB"/>
+                      </a:solidFill>
+                      <a:prstDash val="solid"/>
+                      <a:round/>
+                      <a:headEnd type="none" w="med" len="med"/>
+                      <a:tailEnd type="none" w="med" len="med"/>
+                    </a:lnT>
+                    <a:lnB w="6350" cap="flat" cmpd="sng" algn="ctr">
+                      <a:solidFill>
+                        <a:srgbClr val="D1D5DB"/>
+                      </a:solidFill>
+                      <a:prstDash val="solid"/>
+                      <a:round/>
+                      <a:headEnd type="none" w="med" len="med"/>
+                      <a:tailEnd type="none" w="med" len="med"/>
+                    </a:lnB>
+                    <a:solidFill>
+                      <a:srgbClr val="FFFFFF"/>
+                    </a:solidFill>
+                  </a:tcPr>
+                </a:tc>
+              </a:tr>
+              <a:tr h="0">
+                <a:tc>
+                  <a:txBody>
+                    <a:bodyPr/>
+                    <a:lstStyle/>
+                    <a:p>
+                      <a:pPr indent="0" marL="0">
+                        <a:buNone/>
+                      </a:pPr>
+                      <a:r>
+                        <a:rPr lang="en-US" sz="1000" b="1" dirty="0">
+                          <a:solidFill>
+                            <a:srgbClr val="7C3AED"/>
+                          </a:solidFill>
+                          <a:latin typeface="Calibri" pitchFamily="34" charset="0"/>
+                          <a:ea typeface="Calibri" pitchFamily="34" charset="-122"/>
+                          <a:cs typeface="Calibri" pitchFamily="34" charset="-120"/>
+                        </a:rPr>
+                        <a:t>Dec 2025</a:t>
+                      </a:r>
+                      <a:endParaRPr lang="en-US" sz="1000" dirty="0">
+                        <a:latin typeface="Calibri" charset="0"/>
+                        <a:ea typeface="Calibri" charset="0"/>
+                        <a:cs typeface="Calibri" charset="0"/>
+                      </a:endParaRPr>
+                    </a:p>
+                  </a:txBody>
+                  <a:tcPr marL="63500" marR="63500" marT="38100" marB="38100" anchor="ctr">
+                    <a:lnL w="6350" cap="flat" cmpd="sng" algn="ctr">
+                      <a:solidFill>
+                        <a:srgbClr val="D1D5DB"/>
+                      </a:solidFill>
+                      <a:prstDash val="solid"/>
+                      <a:round/>
+                      <a:headEnd type="none" w="med" len="med"/>
+                      <a:tailEnd type="none" w="med" len="med"/>
+                    </a:lnL>
+                    <a:lnR w="6350" cap="flat" cmpd="sng" algn="ctr">
+                      <a:solidFill>
+                        <a:srgbClr val="D1D5DB"/>
+                      </a:solidFill>
+                      <a:prstDash val="solid"/>
+                      <a:round/>
+                      <a:headEnd type="none" w="med" len="med"/>
+                      <a:tailEnd type="none" w="med" len="med"/>
+                    </a:lnR>
+                    <a:lnT w="6350" cap="flat" cmpd="sng" algn="ctr">
+                      <a:solidFill>
+                        <a:srgbClr val="D1D5DB"/>
+                      </a:solidFill>
+                      <a:prstDash val="solid"/>
+                      <a:round/>
+                      <a:headEnd type="none" w="med" len="med"/>
+                      <a:tailEnd type="none" w="med" len="med"/>
+                    </a:lnT>
+                    <a:lnB w="6350" cap="flat" cmpd="sng" algn="ctr">
+                      <a:solidFill>
+                        <a:srgbClr val="D1D5DB"/>
+                      </a:solidFill>
+                      <a:prstDash val="solid"/>
+                      <a:round/>
+                      <a:headEnd type="none" w="med" len="med"/>
+                      <a:tailEnd type="none" w="med" len="med"/>
+                    </a:lnB>
+                    <a:solidFill>
+                      <a:srgbClr val="FFFFFF"/>
+                    </a:solidFill>
+                  </a:tcPr>
+                </a:tc>
+                <a:tc>
+                  <a:txBody>
+                    <a:bodyPr/>
+                    <a:lstStyle/>
+                    <a:p>
+                      <a:pPr indent="0" marL="0">
+                        <a:buNone/>
+                      </a:pPr>
+                      <a:r>
+                        <a:rPr lang="en-US" sz="1000" dirty="0">
+                          <a:solidFill>
+                            <a:srgbClr val="1A1F36"/>
+                          </a:solidFill>
+                          <a:latin typeface="Calibri" pitchFamily="34" charset="0"/>
+                          <a:ea typeface="Calibri" pitchFamily="34" charset="-122"/>
+                          <a:cs typeface="Calibri" pitchFamily="34" charset="-120"/>
+                        </a:rPr>
+                        <a:t>Year-end: North America underlying sales growth 5.3%</a:t>
+                      </a:r>
+                      <a:endParaRPr lang="en-US" sz="1000" dirty="0">
+                        <a:latin typeface="Calibri" charset="0"/>
+                        <a:ea typeface="Calibri" charset="0"/>
+                        <a:cs typeface="Calibri" charset="0"/>
+                      </a:endParaRPr>
+                    </a:p>
+                  </a:txBody>
+                  <a:tcPr marL="63500" marR="63500" marT="38100" marB="38100" anchor="ctr">
+                    <a:lnL w="6350" cap="flat" cmpd="sng" algn="ctr">
+                      <a:solidFill>
+                        <a:srgbClr val="D1D5DB"/>
+                      </a:solidFill>
+                      <a:prstDash val="solid"/>
+                      <a:round/>
+                      <a:headEnd type="none" w="med" len="med"/>
+                      <a:tailEnd type="none" w="med" len="med"/>
+                    </a:lnL>
+                    <a:lnR w="6350" cap="flat" cmpd="sng" algn="ctr">
+                      <a:solidFill>
+                        <a:srgbClr val="D1D5DB"/>
+                      </a:solidFill>
+                      <a:prstDash val="solid"/>
+                      <a:round/>
+                      <a:headEnd type="none" w="med" len="med"/>
+                      <a:tailEnd type="none" w="med" len="med"/>
+                    </a:lnR>
+                    <a:lnT w="6350" cap="flat" cmpd="sng" algn="ctr">
+                      <a:solidFill>
+                        <a:srgbClr val="D1D5DB"/>
+                      </a:solidFill>
+                      <a:prstDash val="solid"/>
+                      <a:round/>
+                      <a:headEnd type="none" w="med" len="med"/>
+                      <a:tailEnd type="none" w="med" len="med"/>
+                    </a:lnT>
+                    <a:lnB w="6350" cap="flat" cmpd="sng" algn="ctr">
+                      <a:solidFill>
+                        <a:srgbClr val="D1D5DB"/>
+                      </a:solidFill>
+                      <a:prstDash val="solid"/>
+                      <a:round/>
+                      <a:headEnd type="none" w="med" len="med"/>
+                      <a:tailEnd type="none" w="med" len="med"/>
+                    </a:lnB>
+                    <a:solidFill>
+                      <a:srgbClr val="FFFFFF"/>
+                    </a:solidFill>
+                  </a:tcPr>
+                </a:tc>
+                <a:tc>
+                  <a:txBody>
+                    <a:bodyPr/>
+                    <a:lstStyle/>
+                    <a:p>
+                      <a:pPr indent="0" marL="0">
+                        <a:buNone/>
+                      </a:pPr>
+                      <a:r>
+                        <a:rPr lang="en-US" sz="1000" dirty="0">
+                          <a:solidFill>
+                            <a:srgbClr val="1A1F36"/>
+                          </a:solidFill>
+                          <a:latin typeface="Calibri" pitchFamily="34" charset="0"/>
+                          <a:ea typeface="Calibri" pitchFamily="34" charset="-122"/>
+                          <a:cs typeface="Calibri" pitchFamily="34" charset="-120"/>
+                        </a:rPr>
+                        <a:t>US non-current assets €12.9bn (2020) → €19.7bn (2024); market share largely recovered</a:t>
+                      </a:r>
+                      <a:endParaRPr lang="en-US" sz="1000" dirty="0">
                         <a:latin typeface="Calibri" charset="0"/>
                         <a:ea typeface="Calibri" charset="0"/>
                         <a:cs typeface="Calibri" charset="0"/>
@@ -6371,7 +6001,7 @@
                 <a:ea typeface="Calibri" pitchFamily="34" charset="-122"/>
                 <a:cs typeface="Calibri" pitchFamily="34" charset="-120"/>
               </a:rPr>
-              <a:t>Unilever became smaller, but more focused on beauty, personal care and fast-growing markets.</a:t>
+              <a:t>Buying US premium brands gave Unilever growth, online skills and a stronger base in its biggest market. Risk: US premium beauty slowed in 2024.</a:t>
             </a:r>
             <a:endParaRPr lang="en-US" sz="1150" dirty="0"/>
           </a:p>
@@ -6410,7 +6040,7 @@
                 <a:ea typeface="Calibri" pitchFamily="34" charset="-122"/>
                 <a:cs typeface="Calibri" pitchFamily="34" charset="-120"/>
               </a:rPr>
-              <a:t>Sources: Unilever PLC (2022; 2023b; 2025b; 2026a; 2026b).</a:t>
+              <a:t>Sources: Unilever PLC (2022; 2023b; 2024; 2025a; 2026a; 2026b).</a:t>
             </a:r>
             <a:endParaRPr lang="en-US" sz="800" dirty="0"/>
           </a:p>
@@ -6713,7 +6343,7 @@
                 <a:ea typeface="Calibri" pitchFamily="34" charset="-122"/>
                 <a:cs typeface="Calibri" pitchFamily="34" charset="-120"/>
               </a:rPr>
-              <a:t>One UK parent since November 2020; regional hubs in Mexico, Indonesia and Nigeria use trade blocs, which are mostly shallow.</a:t>
+              <a:t>Mexico + USMCA: a low-cost, tariff-free base to supply the US, Unilever's biggest market.</a:t>
             </a:r>
             <a:endParaRPr lang="en-US" sz="1200" dirty="0"/>
           </a:p>
@@ -6913,7 +6543,7 @@
                 <a:ea typeface="Calibri" pitchFamily="34" charset="-122"/>
                 <a:cs typeface="Calibri" pitchFamily="34" charset="-120"/>
               </a:rPr>
-              <a:t>Brands are the ownership advantage: it builds in big markets, buys beauty brands and sells slower businesses.</a:t>
+              <a:t>US FDI (mainly M&amp;A) bought premium brands and online skills, and grew Unilever in its biggest market.</a:t>
             </a:r>
             <a:endParaRPr lang="en-US" sz="1200" dirty="0"/>
           </a:p>
@@ -7168,7 +6798,7 @@
                 <a:ea typeface="Calibri" pitchFamily="34" charset="-122"/>
                 <a:cs typeface="Calibri" pitchFamily="34" charset="-120"/>
               </a:rPr>
-              <a:t>ADB (2021) 'RCEP Agreement to Enter into Force on 1 January 2022', SEADS. Available at: https://seads.adb.org/news/rcep-agreement-enter-force-1-january-2022 (Accessed: 31 October 2026).</a:t>
+              <a:t>Bloomberg Línea (2025) 'Unilever anuncia a Sheinbaum inversión por MXN$30.000 millones en México', 2 May. Available at: https://www.bloomberglinea.com/latinoamerica/mexico/unilever-anuncia-a-sheinbaum-inversion-por-mxn30000-millones-en-mexico/ (Accessed: 31 October 2026).</a:t>
             </a:r>
             <a:endParaRPr lang="en-US" sz="750" dirty="0"/>
           </a:p>
@@ -7188,7 +6818,7 @@
                 <a:ea typeface="Calibri" pitchFamily="34" charset="-122"/>
                 <a:cs typeface="Calibri" pitchFamily="34" charset="-120"/>
               </a:rPr>
-              <a:t>AfCFTA Secretariat (n.d.) About the AfCFTA. Available at: https://au-afcfta.org/about/ (Accessed: 31 October 2026).</a:t>
+              <a:t>Dunning, J.H. (1988) 'The eclectic paradigm of international production: a restatement and some possible extensions', Journal of International Business Studies, 19(1), pp. 1–31.</a:t>
             </a:r>
             <a:endParaRPr lang="en-US" sz="750" dirty="0"/>
           </a:p>
@@ -7208,7 +6838,7 @@
                 <a:ea typeface="Calibri" pitchFamily="34" charset="-122"/>
                 <a:cs typeface="Calibri" pitchFamily="34" charset="-120"/>
               </a:rPr>
-              <a:t>China Daily (2020) 'Unilever to upgrade Jiangsu plant', China Daily Hong Kong, 26 June. Available at: https://www.chinadailyhk.com/hk/article/134983 (Accessed: 31 October 2026).</a:t>
+              <a:t>Entrackr (2025) 'HUL acquires 90.5% stake in Minimalist at Rs 2,955 Cr valuation'. Available at: https://entrackr.com/news/hul-acquires-905-stake-in-minimalist-at-rs-2955-cr-valuation-8644087 (Accessed: 31 October 2026).</a:t>
             </a:r>
             <a:endParaRPr lang="en-US" sz="750" dirty="0"/>
           </a:p>
@@ -7228,7 +6858,7 @@
                 <a:ea typeface="Calibri" pitchFamily="34" charset="-122"/>
                 <a:cs typeface="Calibri" pitchFamily="34" charset="-120"/>
               </a:rPr>
-              <a:t>Dunning, J.H. (1988) 'The eclectic paradigm of international production: a restatement and some possible extensions', Journal of International Business Studies, 19(1), pp. 1–31.</a:t>
+              <a:t>Fortune (2025) 'Trump delays Canada, Mexico tariffs for goods under USMCA', 6 March. Available at: https://fortune.com/2025/03/06/trump-delays-canada-mexico-tariffs-for-goods-under-usmca (Accessed: 31 October 2026).</a:t>
             </a:r>
             <a:endParaRPr lang="en-US" sz="750" dirty="0"/>
           </a:p>
@@ -7248,7 +6878,7 @@
                 <a:ea typeface="Calibri" pitchFamily="34" charset="-122"/>
                 <a:cs typeface="Calibri" pitchFamily="34" charset="-120"/>
               </a:rPr>
-              <a:t>Entrackr (2025) 'HUL acquires 90.5% stake in Minimalist at Rs 2,955 Cr valuation'. Available at: https://entrackr.com/news/hul-acquires-905-stake-in-minimalist-at-rs-2955-cr-valuation-8644087 (Accessed: 31 October 2026).</a:t>
+              <a:t>Levitt, T. (1983) 'The globalization of markets', Harvard Business Review, 61(3), pp. 92–102.</a:t>
             </a:r>
             <a:endParaRPr lang="en-US" sz="750" dirty="0"/>
           </a:p>
@@ -7268,7 +6898,7 @@
                 <a:ea typeface="Calibri" pitchFamily="34" charset="-122"/>
                 <a:cs typeface="Calibri" pitchFamily="34" charset="-120"/>
               </a:rPr>
-              <a:t>Levitt, T. (1983) 'The globalization of markets', Harvard Business Review, 61(3), pp. 92–102.</a:t>
+              <a:t>MND Staff (2025) 'Household and beauty products giant Unilever to invest US $800M in Nuevo León', Mexico News Daily, 9 April. Available at: https://mexiconewsdaily.com/business/unilever-invest-in-nuevo-leon (Accessed: 31 October 2026).</a:t>
             </a:r>
             <a:endParaRPr lang="en-US" sz="750" dirty="0"/>
           </a:p>
@@ -7288,7 +6918,7 @@
                 <a:ea typeface="Calibri" pitchFamily="34" charset="-122"/>
                 <a:cs typeface="Calibri" pitchFamily="34" charset="-120"/>
               </a:rPr>
-              <a:t>MND Staff (2025) 'Household and beauty products giant Unilever to invest US $800M in Nuevo León', Mexico News Daily, 9 April. Available at: https://mexiconewsdaily.com/business/unilever-invest-in-nuevo-leon (Accessed: 31 October 2026).</a:t>
+              <a:t>UNCTAD (2025) World Investment Report 2025. Geneva: United Nations. Available at: https://unctad.org/system/files/official-document/wir2025_en.pdf (Accessed: 31 October 2026).</a:t>
             </a:r>
             <a:endParaRPr lang="en-US" sz="750" dirty="0"/>
           </a:p>
@@ -7308,7 +6938,7 @@
                 <a:ea typeface="Calibri" pitchFamily="34" charset="-122"/>
                 <a:cs typeface="Calibri" pitchFamily="34" charset="-120"/>
               </a:rPr>
-              <a:t>UNCTAD (2021) World Investment Report 2021. Geneva: United Nations. Available at: https://unctad.org/system/files/official-document/wir2021_en.pdf (Accessed: 31 October 2026).</a:t>
+              <a:t>Unilever PLC (2021) Annual Report on Form 20-F 2020. Available at: https://www.sec.gov/Archives/edgar/data/217410/000119312521075770/d14846d20f.htm (Accessed: 31 October 2026).</a:t>
             </a:r>
             <a:endParaRPr lang="en-US" sz="750" dirty="0"/>
           </a:p>
@@ -7328,7 +6958,7 @@
                 <a:ea typeface="Calibri" pitchFamily="34" charset="-122"/>
                 <a:cs typeface="Calibri" pitchFamily="34" charset="-120"/>
               </a:rPr>
-              <a:t>UNCTAD (2026) World Investment Report 2026, Chapter 1. Geneva: United Nations. Available at: https://unctad.org/system/files/official-document/wir2026_ch01_en.pdf (Accessed: 31 October 2026).</a:t>
+              <a:t>Unilever PLC (2022) Annual Report on Form 20-F 2021. Available at: https://www.sec.gov/Archives/edgar/data/217410/000021741022000009/ul-20211231.htm (Accessed: 31 October 2026).</a:t>
             </a:r>
             <a:endParaRPr lang="en-US" sz="750" dirty="0"/>
           </a:p>
@@ -7348,10 +6978,32 @@
                 <a:ea typeface="Calibri" pitchFamily="34" charset="-122"/>
                 <a:cs typeface="Calibri" pitchFamily="34" charset="-120"/>
               </a:rPr>
-              <a:t>Unilever PLC (2021) Annual Report on Form 20-F 2020. Available at: https://www.sec.gov/Archives/edgar/data/217410/000119312521075770/d14846d20f.htm (Accessed: 31 October 2026).</a:t>
+              <a:t>Unilever PLC (2023a) Annual Report on Form 20-F 2022. Available at: https://www.sec.gov/Archives/edgar/data/217410/000021741023000016/ul-20221231.htm (Accessed: 31 October 2026).</a:t>
             </a:r>
             <a:endParaRPr lang="en-US" sz="750" dirty="0"/>
           </a:p>
+        </p:txBody>
+      </p:sp>
+      <p:sp>
+        <p:nvSpPr>
+          <p:cNvPr id="4" name="Text 2"/>
+          <p:cNvSpPr/>
+          <p:nvPr/>
+        </p:nvSpPr>
+        <p:spPr>
+          <a:xfrm>
+            <a:off x="4663440" y="914400"/>
+            <a:ext cx="4069080" cy="4069080"/>
+          </a:xfrm>
+          <a:prstGeom prst="rect">
+            <a:avLst/>
+          </a:prstGeom>
+          <a:noFill/>
+          <a:ln/>
+        </p:spPr>
+        <p:txBody>
+          <a:bodyPr wrap="square" lIns="0" tIns="0" rIns="0" bIns="0" rtlCol="0" anchor="t"/>
+          <a:lstStyle/>
           <a:p>
             <a:pPr indent="0" marL="0">
               <a:spcAft>
@@ -7368,32 +7020,10 @@
                 <a:ea typeface="Calibri" pitchFamily="34" charset="-122"/>
                 <a:cs typeface="Calibri" pitchFamily="34" charset="-120"/>
               </a:rPr>
-              <a:t>Unilever PLC (2022) Annual Report on Form 20-F 2021. Available at: https://www.sec.gov/Archives/edgar/data/217410/000021741022000009/ul-20211231.htm (Accessed: 31 October 2026).</a:t>
+              <a:t>Unilever PLC (2023b) Full Year 2022 Results. Available at: https://data.fca.org.uk/artefacts/NSM/RNS/4669599.html (Accessed: 31 October 2026).</a:t>
             </a:r>
             <a:endParaRPr lang="en-US" sz="750" dirty="0"/>
           </a:p>
-        </p:txBody>
-      </p:sp>
-      <p:sp>
-        <p:nvSpPr>
-          <p:cNvPr id="4" name="Text 2"/>
-          <p:cNvSpPr/>
-          <p:nvPr/>
-        </p:nvSpPr>
-        <p:spPr>
-          <a:xfrm>
-            <a:off x="4663440" y="914400"/>
-            <a:ext cx="4069080" cy="4069080"/>
-          </a:xfrm>
-          <a:prstGeom prst="rect">
-            <a:avLst/>
-          </a:prstGeom>
-          <a:noFill/>
-          <a:ln/>
-        </p:spPr>
-        <p:txBody>
-          <a:bodyPr wrap="square" lIns="0" tIns="0" rIns="0" bIns="0" rtlCol="0" anchor="t"/>
-          <a:lstStyle/>
           <a:p>
             <a:pPr indent="0" marL="0">
               <a:spcAft>
@@ -7410,7 +7040,7 @@
                 <a:ea typeface="Calibri" pitchFamily="34" charset="-122"/>
                 <a:cs typeface="Calibri" pitchFamily="34" charset="-120"/>
               </a:rPr>
-              <a:t>Unilever PLC (2023a) Annual Report on Form 20-F 2022. Available at: https://www.sec.gov/Archives/edgar/data/217410/000021741023000016/ul-20221231.htm (Accessed: 31 October 2026).</a:t>
+              <a:t>Unilever PLC (2024) Annual Report on Form 20-F 2023. Available at: https://www.sec.gov/Archives/edgar/data/217410/000021741024000017/ul-20231231.htm (Accessed: 31 October 2026).</a:t>
             </a:r>
             <a:endParaRPr lang="en-US" sz="750" dirty="0"/>
           </a:p>
@@ -7430,7 +7060,7 @@
                 <a:ea typeface="Calibri" pitchFamily="34" charset="-122"/>
                 <a:cs typeface="Calibri" pitchFamily="34" charset="-120"/>
               </a:rPr>
-              <a:t>Unilever PLC (2023b) Full Year 2022 Results. Available at: https://data.fca.org.uk/artefacts/NSM/RNS/4669599.html (Accessed: 31 October 2026).</a:t>
+              <a:t>Unilever PLC (2025a) Annual Report on Form 20-F 2024. Available at: https://www.sec.gov/Archives/edgar/data/217410/000021741025000015/ul-20241231.htm (Accessed: 31 October 2026).</a:t>
             </a:r>
             <a:endParaRPr lang="en-US" sz="750" dirty="0"/>
           </a:p>
@@ -7450,7 +7080,7 @@
                 <a:ea typeface="Calibri" pitchFamily="34" charset="-122"/>
                 <a:cs typeface="Calibri" pitchFamily="34" charset="-120"/>
               </a:rPr>
-              <a:t>Unilever PLC (2024) Annual Report on Form 20-F 2023. Available at: https://www.sec.gov/Archives/edgar/data/217410/000021741024000017/ul-20231231.htm (Accessed: 31 October 2026).</a:t>
+              <a:t>Unilever PLC (2025b) Full Year 2024 Results. Available at: https://data.fca.org.uk/artefacts/NSM/RNS/5536689.html (Accessed: 31 October 2026).</a:t>
             </a:r>
             <a:endParaRPr lang="en-US" sz="750" dirty="0"/>
           </a:p>
@@ -7470,7 +7100,7 @@
                 <a:ea typeface="Calibri" pitchFamily="34" charset="-122"/>
                 <a:cs typeface="Calibri" pitchFamily="34" charset="-120"/>
               </a:rPr>
-              <a:t>Unilever PLC (2025a) Annual Report on Form 20-F 2024. Available at: https://www.sec.gov/Archives/edgar/data/217410/000021741025000015/ul-20241231.htm (Accessed: 31 October 2026).</a:t>
+              <a:t>Unilever PLC (2026a) Annual Report on Form 20-F 2025. Available at: https://www.sec.gov/Archives/edgar/data/217410/000021741026000007/ul-20251231.htm (Accessed: 31 October 2026).</a:t>
             </a:r>
             <a:endParaRPr lang="en-US" sz="750" dirty="0"/>
           </a:p>
@@ -7490,7 +7120,7 @@
                 <a:ea typeface="Calibri" pitchFamily="34" charset="-122"/>
                 <a:cs typeface="Calibri" pitchFamily="34" charset="-120"/>
               </a:rPr>
-              <a:t>Unilever PLC (2025b) Full Year 2024 Results. Available at: https://data.fca.org.uk/artefacts/NSM/RNS/5536689.html (Accessed: 31 October 2026).</a:t>
+              <a:t>Unilever PLC (2026b) Full Year 2025 Results. Available at: https://data.fca.org.uk/artefacts/NSM/RNS/b82e96e8-7680-4ddf-8c41-f0bb2a051dd5.html (Accessed: 31 October 2026).</a:t>
             </a:r>
             <a:endParaRPr lang="en-US" sz="750" dirty="0"/>
           </a:p>
@@ -7510,7 +7140,7 @@
                 <a:ea typeface="Calibri" pitchFamily="34" charset="-122"/>
                 <a:cs typeface="Calibri" pitchFamily="34" charset="-120"/>
               </a:rPr>
-              <a:t>Unilever PLC (2026a) Annual Report on Form 20-F 2025. Available at: https://www.sec.gov/Archives/edgar/data/217410/000021741026000007/ul-20251231.htm (Accessed: 31 October 2026).</a:t>
+              <a:t>University of Greenwich (2026a–d) BUSI 1763 Dynamics of Global Business, Lectures 1–4 [Lecture slides]. Available at: Moodle.</a:t>
             </a:r>
             <a:endParaRPr lang="en-US" sz="750" dirty="0"/>
           </a:p>
@@ -7530,7 +7160,7 @@
                 <a:ea typeface="Calibri" pitchFamily="34" charset="-122"/>
                 <a:cs typeface="Calibri" pitchFamily="34" charset="-120"/>
               </a:rPr>
-              <a:t>Unilever PLC (2026b) Full Year 2025 Results. Available at: https://data.fca.org.uk/artefacts/NSM/RNS/b82e96e8-7680-4ddf-8c41-f0bb2a051dd5.html (Accessed: 31 October 2026).</a:t>
+              <a:t>US Census Bureau (2024) Top Trading Partners – December 2023. Available at: https://www.census.gov/foreign-trade/statistics/highlights/top/top2312yr.html (Accessed: 31 October 2026).</a:t>
             </a:r>
             <a:endParaRPr lang="en-US" sz="750" dirty="0"/>
           </a:p>
@@ -7550,47 +7180,7 @@
                 <a:ea typeface="Calibri" pitchFamily="34" charset="-122"/>
                 <a:cs typeface="Calibri" pitchFamily="34" charset="-120"/>
               </a:rPr>
-              <a:t>University of Greenwich (2026a–d) BUSI 1763 Dynamics of Global Business, Lectures 1–4 [Lecture slides]. Available at: Moodle.</a:t>
-            </a:r>
-            <a:endParaRPr lang="en-US" sz="750" dirty="0"/>
-          </a:p>
-          <a:p>
-            <a:pPr indent="0" marL="0">
-              <a:spcAft>
-                <a:spcPts val="300"/>
-              </a:spcAft>
-              <a:buNone/>
-            </a:pPr>
-            <a:r>
-              <a:rPr lang="en-US" sz="750" dirty="0">
-                <a:solidFill>
-                  <a:srgbClr val="1A1F36"/>
-                </a:solidFill>
-                <a:latin typeface="Calibri" pitchFamily="34" charset="0"/>
-                <a:ea typeface="Calibri" pitchFamily="34" charset="-122"/>
-                <a:cs typeface="Calibri" pitchFamily="34" charset="-120"/>
-              </a:rPr>
               <a:t>USTR (n.d.) United States-Mexico-Canada Agreement. Available at: https://ustr.gov/trade-agreements/free-trade-agreements/united-states-mexico-canada-agreement (Accessed: 31 October 2026).</a:t>
-            </a:r>
-            <a:endParaRPr lang="en-US" sz="750" dirty="0"/>
-          </a:p>
-          <a:p>
-            <a:pPr indent="0" marL="0">
-              <a:spcAft>
-                <a:spcPts val="300"/>
-              </a:spcAft>
-              <a:buNone/>
-            </a:pPr>
-            <a:r>
-              <a:rPr lang="en-US" sz="750" dirty="0">
-                <a:solidFill>
-                  <a:srgbClr val="1A1F36"/>
-                </a:solidFill>
-                <a:latin typeface="Calibri" pitchFamily="34" charset="0"/>
-                <a:ea typeface="Calibri" pitchFamily="34" charset="-122"/>
-                <a:cs typeface="Calibri" pitchFamily="34" charset="-120"/>
-              </a:rPr>
-              <a:t>Xinhua (2022) 'Unilever unveils ice cream "lighthouse factory" in east China', 2 April. Available at: http://eng.yidaiyilu.gov.cn/p/232767.html (Accessed: 31 October 2026).</a:t>
             </a:r>
             <a:endParaRPr lang="en-US" sz="750" dirty="0"/>
           </a:p>
@@ -10912,7 +10502,7 @@
                 <a:ea typeface="Calibri" pitchFamily="34" charset="-122"/>
                 <a:cs typeface="Calibri" pitchFamily="34" charset="-120"/>
               </a:rPr>
-              <a:t>Regional integration: five levels</a:t>
+              <a:t>Regional integration: Mexico and USMCA</a:t>
             </a:r>
             <a:endParaRPr lang="en-US" sz="2500" dirty="0"/>
           </a:p>
@@ -10951,7 +10541,7 @@
                 <a:ea typeface="Calibri" pitchFamily="34" charset="-122"/>
                 <a:cs typeface="Calibri" pitchFamily="34" charset="-120"/>
               </a:rPr>
-              <a:t>Lecture 2: from free trade area to political union</a:t>
+              <a:t>Lecture 2 · Focus country: Mexico</a:t>
             </a:r>
             <a:endParaRPr lang="en-US" sz="1300" dirty="0"/>
           </a:p>
@@ -11012,7 +10602,7 @@
                 <a:ea typeface="Calibri" pitchFamily="34" charset="-122"/>
                 <a:cs typeface="Calibri" pitchFamily="34" charset="-120"/>
               </a:rPr>
-              <a:t>Countries in a region remove barriers between them, step by step. Each level goes deeper.</a:t>
+              <a:t>Countries in a region remove barriers between them, step by step. USMCA is level 1: a free trade area.</a:t>
             </a:r>
             <a:endParaRPr lang="en-US" sz="1400" dirty="0"/>
           </a:p>
@@ -11116,7 +10706,7 @@
                 <a:ea typeface="Calibri" pitchFamily="34" charset="-122"/>
                 <a:cs typeface="Calibri" pitchFamily="34" charset="-120"/>
               </a:rPr>
-              <a:t>Free trade area: no tariffs inside</a:t>
+              <a:t>Free trade area ← USMCA</a:t>
             </a:r>
             <a:endParaRPr lang="en-US" sz="1150" dirty="0"/>
           </a:p>
@@ -11137,7 +10727,7 @@
                 <a:ea typeface="Calibri" pitchFamily="34" charset="-122"/>
                 <a:cs typeface="Calibri" pitchFamily="34" charset="-120"/>
               </a:rPr>
-              <a:t>Customs union: + common outside tariff</a:t>
+              <a:t>Customs union</a:t>
             </a:r>
             <a:endParaRPr lang="en-US" sz="1150" dirty="0"/>
           </a:p>
@@ -11158,7 +10748,7 @@
                 <a:ea typeface="Calibri" pitchFamily="34" charset="-122"/>
                 <a:cs typeface="Calibri" pitchFamily="34" charset="-120"/>
               </a:rPr>
-              <a:t>Common market: + free movement of people and capital</a:t>
+              <a:t>Common market</a:t>
             </a:r>
             <a:endParaRPr lang="en-US" sz="1150" dirty="0"/>
           </a:p>
@@ -11179,7 +10769,7 @@
                 <a:ea typeface="Calibri" pitchFamily="34" charset="-122"/>
                 <a:cs typeface="Calibri" pitchFamily="34" charset="-120"/>
               </a:rPr>
-              <a:t>Economic union: + common policy</a:t>
+              <a:t>Economic union</a:t>
             </a:r>
             <a:endParaRPr lang="en-US" sz="1150" dirty="0"/>
           </a:p>
@@ -11329,6 +10919,89 @@
             </a:r>
             <a:endParaRPr lang="en-US" sz="1150" dirty="0"/>
           </a:p>
+        </p:txBody>
+      </p:sp>
+      <p:sp>
+        <p:nvSpPr>
+          <p:cNvPr id="14" name="Shape 12"/>
+          <p:cNvSpPr/>
+          <p:nvPr/>
+        </p:nvSpPr>
+        <p:spPr>
+          <a:xfrm>
+            <a:off x="6080760" y="2103120"/>
+            <a:ext cx="2651760" cy="2514600"/>
+          </a:xfrm>
+          <a:prstGeom prst="roundRect">
+            <a:avLst>
+              <a:gd name="adj" fmla="val 2909"/>
+            </a:avLst>
+          </a:prstGeom>
+          <a:solidFill>
+            <a:srgbClr val="F3F4F8"/>
+          </a:solidFill>
+          <a:ln/>
+        </p:spPr>
+      </p:sp>
+      <p:sp>
+        <p:nvSpPr>
+          <p:cNvPr id="15" name="Text 13"/>
+          <p:cNvSpPr/>
+          <p:nvPr/>
+        </p:nvSpPr>
+        <p:spPr>
+          <a:xfrm>
+            <a:off x="6217920" y="2194560"/>
+            <a:ext cx="2377440" cy="365760"/>
+          </a:xfrm>
+          <a:prstGeom prst="rect">
+            <a:avLst/>
+          </a:prstGeom>
+          <a:noFill/>
+          <a:ln/>
+        </p:spPr>
+        <p:txBody>
+          <a:bodyPr wrap="square" lIns="0" tIns="0" rIns="0" bIns="0" rtlCol="0" anchor="ctr"/>
+          <a:lstStyle/>
+          <a:p>
+            <a:pPr indent="0" marL="0">
+              <a:buNone/>
+            </a:pPr>
+            <a:r>
+              <a:rPr lang="en-US" sz="1350" b="1" dirty="0">
+                <a:solidFill>
+                  <a:srgbClr val="0F8A6B"/>
+                </a:solidFill>
+                <a:latin typeface="Calibri" pitchFamily="34" charset="0"/>
+                <a:ea typeface="Calibri" pitchFamily="34" charset="-122"/>
+                <a:cs typeface="Calibri" pitchFamily="34" charset="-120"/>
+              </a:rPr>
+              <a:t>USMCA in brief</a:t>
+            </a:r>
+            <a:endParaRPr lang="en-US" sz="1350" dirty="0"/>
+          </a:p>
+        </p:txBody>
+      </p:sp>
+      <p:sp>
+        <p:nvSpPr>
+          <p:cNvPr id="16" name="Text 14"/>
+          <p:cNvSpPr/>
+          <p:nvPr/>
+        </p:nvSpPr>
+        <p:spPr>
+          <a:xfrm>
+            <a:off x="6217920" y="2606040"/>
+            <a:ext cx="2377440" cy="1920240"/>
+          </a:xfrm>
+          <a:prstGeom prst="rect">
+            <a:avLst/>
+          </a:prstGeom>
+          <a:noFill/>
+          <a:ln/>
+        </p:spPr>
+        <p:txBody>
+          <a:bodyPr wrap="square" lIns="0" tIns="0" rIns="0" bIns="0" rtlCol="0" anchor="t"/>
+          <a:lstStyle/>
           <a:p>
             <a:pPr marL="342900" indent="-342900">
               <a:spcAft>
@@ -11346,93 +11019,10 @@
                 <a:ea typeface="Calibri" pitchFamily="34" charset="-122"/>
                 <a:cs typeface="Calibri" pitchFamily="34" charset="-120"/>
               </a:rPr>
-              <a:t>Spreads risk</a:t>
+              <a:t>US, Mexico and Canada; replaced NAFTA in Jul 2020</a:t>
             </a:r>
             <a:endParaRPr lang="en-US" sz="1150" dirty="0"/>
           </a:p>
-        </p:txBody>
-      </p:sp>
-      <p:sp>
-        <p:nvSpPr>
-          <p:cNvPr id="14" name="Shape 12"/>
-          <p:cNvSpPr/>
-          <p:nvPr/>
-        </p:nvSpPr>
-        <p:spPr>
-          <a:xfrm>
-            <a:off x="6080760" y="2103120"/>
-            <a:ext cx="2651760" cy="2514600"/>
-          </a:xfrm>
-          <a:prstGeom prst="roundRect">
-            <a:avLst>
-              <a:gd name="adj" fmla="val 2909"/>
-            </a:avLst>
-          </a:prstGeom>
-          <a:solidFill>
-            <a:srgbClr val="F3F4F8"/>
-          </a:solidFill>
-          <a:ln/>
-        </p:spPr>
-      </p:sp>
-      <p:sp>
-        <p:nvSpPr>
-          <p:cNvPr id="15" name="Text 13"/>
-          <p:cNvSpPr/>
-          <p:nvPr/>
-        </p:nvSpPr>
-        <p:spPr>
-          <a:xfrm>
-            <a:off x="6217920" y="2194560"/>
-            <a:ext cx="2377440" cy="365760"/>
-          </a:xfrm>
-          <a:prstGeom prst="rect">
-            <a:avLst/>
-          </a:prstGeom>
-          <a:noFill/>
-          <a:ln/>
-        </p:spPr>
-        <p:txBody>
-          <a:bodyPr wrap="square" lIns="0" tIns="0" rIns="0" bIns="0" rtlCol="0" anchor="ctr"/>
-          <a:lstStyle/>
-          <a:p>
-            <a:pPr indent="0" marL="0">
-              <a:buNone/>
-            </a:pPr>
-            <a:r>
-              <a:rPr lang="en-US" sz="1350" b="1" dirty="0">
-                <a:solidFill>
-                  <a:srgbClr val="0F8A6B"/>
-                </a:solidFill>
-                <a:latin typeface="Calibri" pitchFamily="34" charset="0"/>
-                <a:ea typeface="Calibri" pitchFamily="34" charset="-122"/>
-                <a:cs typeface="Calibri" pitchFamily="34" charset="-120"/>
-              </a:rPr>
-              <a:t>Limits</a:t>
-            </a:r>
-            <a:endParaRPr lang="en-US" sz="1350" dirty="0"/>
-          </a:p>
-        </p:txBody>
-      </p:sp>
-      <p:sp>
-        <p:nvSpPr>
-          <p:cNvPr id="16" name="Text 14"/>
-          <p:cNvSpPr/>
-          <p:nvPr/>
-        </p:nvSpPr>
-        <p:spPr>
-          <a:xfrm>
-            <a:off x="6217920" y="2606040"/>
-            <a:ext cx="2377440" cy="1920240"/>
-          </a:xfrm>
-          <a:prstGeom prst="rect">
-            <a:avLst/>
-          </a:prstGeom>
-          <a:noFill/>
-          <a:ln/>
-        </p:spPr>
-        <p:txBody>
-          <a:bodyPr wrap="square" lIns="0" tIns="0" rIns="0" bIns="0" rtlCol="0" anchor="t"/>
-          <a:lstStyle/>
           <a:p>
             <a:pPr marL="342900" indent="-342900">
               <a:spcAft>
@@ -11450,7 +11040,7 @@
                 <a:ea typeface="Calibri" pitchFamily="34" charset="-122"/>
                 <a:cs typeface="Calibri" pitchFamily="34" charset="-120"/>
               </a:rPr>
-              <a:t>Most agreements stay at level 1</a:t>
+              <a:t>Zero tariffs if rules of origin are met</a:t>
             </a:r>
             <a:endParaRPr lang="en-US" sz="1150" dirty="0"/>
           </a:p>
@@ -11471,28 +11061,7 @@
                 <a:ea typeface="Calibri" pitchFamily="34" charset="-122"/>
                 <a:cs typeface="Calibri" pitchFamily="34" charset="-120"/>
               </a:rPr>
-              <a:t>Only the EU has gone far</a:t>
-            </a:r>
-            <a:endParaRPr lang="en-US" sz="1150" dirty="0"/>
-          </a:p>
-          <a:p>
-            <a:pPr marL="342900" indent="-342900">
-              <a:spcAft>
-                <a:spcPts val="400"/>
-              </a:spcAft>
-              <a:buSzPct val="100000"/>
-              <a:buChar char="•"/>
-            </a:pPr>
-            <a:r>
-              <a:rPr lang="en-US" sz="1150" dirty="0">
-                <a:solidFill>
-                  <a:srgbClr val="1A1F36"/>
-                </a:solidFill>
-                <a:latin typeface="Calibri" pitchFamily="34" charset="0"/>
-                <a:ea typeface="Calibri" pitchFamily="34" charset="-122"/>
-                <a:cs typeface="Calibri" pitchFamily="34" charset="-120"/>
-              </a:rPr>
-              <a:t>Countries lose some sovereignty</a:t>
+              <a:t>Mexico = US's No. 1 trading partner (2023, $799bn goods trade)</a:t>
             </a:r>
             <a:endParaRPr lang="en-US" sz="1150" dirty="0"/>
           </a:p>
@@ -11531,7 +11100,7 @@
                 <a:ea typeface="Calibri" pitchFamily="34" charset="-122"/>
                 <a:cs typeface="Calibri" pitchFamily="34" charset="-120"/>
               </a:rPr>
-              <a:t>Sources: University of Greenwich (2026b).</a:t>
+              <a:t>Sources: University of Greenwich (2026b); USTR (n.d.); US Census Bureau (2024).</a:t>
             </a:r>
             <a:endParaRPr lang="en-US" sz="800" dirty="0"/>
           </a:p>
@@ -11654,7 +11223,7 @@
                 <a:ea typeface="Calibri" pitchFamily="34" charset="-122"/>
                 <a:cs typeface="Calibri" pitchFamily="34" charset="-120"/>
               </a:rPr>
-              <a:t>Unilever: regional hubs inside trade blocs</a:t>
+              <a:t>Mexico: Unilever's door to North America</a:t>
             </a:r>
             <a:endParaRPr lang="en-US" sz="2500" dirty="0"/>
           </a:p>
@@ -11693,7 +11262,7 @@
                 <a:ea typeface="Calibri" pitchFamily="34" charset="-122"/>
                 <a:cs typeface="Calibri" pitchFamily="34" charset="-120"/>
               </a:rPr>
-              <a:t>Organised in three regions: Asia Pacific Africa · Americas · Europe</a:t>
+              <a:t>Mexico is one of Unilever's 10 largest markets; 7,000+ employees</a:t>
             </a:r>
             <a:endParaRPr lang="en-US" sz="1300" dirty="0"/>
           </a:p>
@@ -11880,7 +11449,7 @@
                           <a:ea typeface="Calibri" pitchFamily="34" charset="-122"/>
                           <a:cs typeface="Calibri" pitchFamily="34" charset="-120"/>
                         </a:rPr>
-                        <a:t>Impact on Unilever</a:t>
+                        <a:t>Benefit for Unilever</a:t>
                       </a:r>
                       <a:endParaRPr lang="en-US" sz="1050" dirty="0">
                         <a:latin typeface="Calibri" charset="0"/>
@@ -12018,7 +11587,7 @@
                           <a:ea typeface="Calibri" pitchFamily="34" charset="-122"/>
                           <a:cs typeface="Calibri" pitchFamily="34" charset="-120"/>
                         </a:rPr>
-                        <a:t>USMCA (US–Mexico–Canada) enters into force</a:t>
+                        <a:t>USMCA enters into force (replaces NAFTA)</a:t>
                       </a:r>
                       <a:endParaRPr lang="en-US" sz="1050" dirty="0">
                         <a:latin typeface="Calibri" charset="0"/>
@@ -12086,7 +11655,7 @@
                           <a:ea typeface="Calibri" pitchFamily="34" charset="-122"/>
                           <a:cs typeface="Calibri" pitchFamily="34" charset="-120"/>
                         </a:rPr>
-                        <a:t>Mexico plant: $400m (Feb 2023) raised to $800m (Apr 2025); mainly exports to the US and Canada</a:t>
+                        <a:t>Qualifying goods made in Mexico enter the US and Canada with no tariffs</a:t>
                       </a:r>
                       <a:endParaRPr lang="en-US" sz="1050" dirty="0">
                         <a:latin typeface="Calibri" charset="0"/>
@@ -12156,7 +11725,7 @@
                           <a:ea typeface="Calibri" pitchFamily="34" charset="-122"/>
                           <a:cs typeface="Calibri" pitchFamily="34" charset="-120"/>
                         </a:rPr>
-                        <a:t>Nov 2020</a:t>
+                        <a:t>Feb 2023</a:t>
                       </a:r>
                       <a:endParaRPr lang="en-US" sz="1050" dirty="0">
                         <a:latin typeface="Calibri" charset="0"/>
@@ -12224,7 +11793,7 @@
                           <a:ea typeface="Calibri" pitchFamily="34" charset="-122"/>
                           <a:cs typeface="Calibri" pitchFamily="34" charset="-120"/>
                         </a:rPr>
-                        <a:t>Unification: one UK parent, Unilever PLC, based in London</a:t>
+                        <a:t>New beauty &amp; personal care plant in Nuevo León (near the US border) announced: $400m</a:t>
                       </a:r>
                       <a:endParaRPr lang="en-US" sz="1050" dirty="0">
                         <a:latin typeface="Calibri" charset="0"/>
@@ -12292,7 +11861,7 @@
                           <a:ea typeface="Calibri" pitchFamily="34" charset="-122"/>
                           <a:cs typeface="Calibri" pitchFamily="34" charset="-120"/>
                         </a:rPr>
-                        <a:t>One share class; more flexibility to buy, sell and demerge businesses (used for ice cream, Dec 2025); UNCTAD: $81bn cross-border merger</a:t>
+                        <a:t>Low-cost production next to the US market</a:t>
                       </a:r>
                       <a:endParaRPr lang="en-US" sz="1050" dirty="0">
                         <a:latin typeface="Calibri" charset="0"/>
@@ -12362,7 +11931,7 @@
                           <a:ea typeface="Calibri" pitchFamily="34" charset="-122"/>
                           <a:cs typeface="Calibri" pitchFamily="34" charset="-120"/>
                         </a:rPr>
-                        <a:t>Dec 2020</a:t>
+                        <a:t>Mar 2025</a:t>
                       </a:r>
                       <a:endParaRPr lang="en-US" sz="1050" dirty="0">
                         <a:latin typeface="Calibri" charset="0"/>
@@ -12430,7 +11999,7 @@
                           <a:ea typeface="Calibri" pitchFamily="34" charset="-122"/>
                           <a:cs typeface="Calibri" pitchFamily="34" charset="-120"/>
                         </a:rPr>
-                        <a:t>Brexit transition ends: UK leaves the EU single market</a:t>
+                        <a:t>US 25% tariff on Mexico (4 Mar); USMCA-qualifying goods exempted (6 Mar)</a:t>
                       </a:r>
                       <a:endParaRPr lang="en-US" sz="1050" dirty="0">
                         <a:latin typeface="Calibri" charset="0"/>
@@ -12498,7 +12067,7 @@
                           <a:ea typeface="Calibri" pitchFamily="34" charset="-122"/>
                           <a:cs typeface="Calibri" pitchFamily="34" charset="-120"/>
                         </a:rPr>
-                        <a:t>Head office outside the EU; Europe is 19% of turnover (2025)</a:t>
+                        <a:t>Meeting USMCA rules of origin protects Unilever from tariffs</a:t>
                       </a:r>
                       <a:endParaRPr lang="en-US" sz="1050" dirty="0">
                         <a:latin typeface="Calibri" charset="0"/>
@@ -12568,7 +12137,7 @@
                           <a:ea typeface="Calibri" pitchFamily="34" charset="-122"/>
                           <a:cs typeface="Calibri" pitchFamily="34" charset="-120"/>
                         </a:rPr>
-                        <a:t>Jan 2021</a:t>
+                        <a:t>Apr 2025</a:t>
                       </a:r>
                       <a:endParaRPr lang="en-US" sz="1050" dirty="0">
                         <a:latin typeface="Calibri" charset="0"/>
@@ -12636,7 +12205,7 @@
                           <a:ea typeface="Calibri" pitchFamily="34" charset="-122"/>
                           <a:cs typeface="Calibri" pitchFamily="34" charset="-120"/>
                         </a:rPr>
-                        <a:t>AfCFTA trading begins</a:t>
+                        <a:t>Plant investment doubled to $800m; will "mainly export to the U.S. and Canada"</a:t>
                       </a:r>
                       <a:endParaRPr lang="en-US" sz="1050" dirty="0">
                         <a:latin typeface="Calibri" charset="0"/>
@@ -12704,7 +12273,7 @@
                           <a:ea typeface="Calibri" pitchFamily="34" charset="-122"/>
                           <a:cs typeface="Calibri" pitchFamily="34" charset="-120"/>
                         </a:rPr>
-                        <a:t>Unilever Nigeria (76% owned) is inside an Africa-wide free trade area</a:t>
+                        <a:t>850 direct jobs; supplies the US, Unilever's biggest market (€10.5bn turnover, 2025)</a:t>
                       </a:r>
                       <a:endParaRPr lang="en-US" sz="1050" dirty="0">
                         <a:latin typeface="Calibri" charset="0"/>
@@ -12774,7 +12343,7 @@
                           <a:ea typeface="Calibri" pitchFamily="34" charset="-122"/>
                           <a:cs typeface="Calibri" pitchFamily="34" charset="-120"/>
                         </a:rPr>
-                        <a:t>Jan 2022</a:t>
+                        <a:t>May 2025</a:t>
                       </a:r>
                       <a:endParaRPr lang="en-US" sz="1050" dirty="0">
                         <a:latin typeface="Calibri" charset="0"/>
@@ -12842,7 +12411,7 @@
                           <a:ea typeface="Calibri" pitchFamily="34" charset="-122"/>
                           <a:cs typeface="Calibri" pitchFamily="34" charset="-120"/>
                         </a:rPr>
-                        <a:t>RCEP enters into force (15 Asia-Pacific countries)</a:t>
+                        <a:t>MXN 30bn (~$1.5bn) Mexico plan for 2025–2028 announced with President Sheinbaum</a:t>
                       </a:r>
                       <a:endParaRPr lang="en-US" sz="1050" dirty="0">
                         <a:latin typeface="Calibri" charset="0"/>
@@ -12910,7 +12479,7 @@
                           <a:ea typeface="Calibri" pitchFamily="34" charset="-122"/>
                           <a:cs typeface="Calibri" pitchFamily="34" charset="-120"/>
                         </a:rPr>
-                        <a:t>Indonesia joins in Jan 2023; Unilever owns 85% of Unilever Indonesia</a:t>
+                        <a:t>New lines, logistics and digital tools; plant serves Mexico, the US and Canada</a:t>
                       </a:r>
                       <a:endParaRPr lang="en-US" sz="1050" dirty="0">
                         <a:latin typeface="Calibri" charset="0"/>
@@ -13040,7 +12609,7 @@
                 <a:ea typeface="Calibri" pitchFamily="34" charset="-122"/>
                 <a:cs typeface="Calibri" pitchFamily="34" charset="-120"/>
               </a:rPr>
-              <a:t>Trade blocs help Unilever supply many countries from regional hubs, but most blocs are only free trade areas.</a:t>
+              <a:t>USMCA makes Mexico a low-cost, tariff-free base for the US. Limit: only ~half of US imports from Mexico qualified in 2024.</a:t>
             </a:r>
             <a:endParaRPr lang="en-US" sz="1150" dirty="0"/>
           </a:p>
@@ -13079,7 +12648,7 @@
                 <a:ea typeface="Calibri" pitchFamily="34" charset="-122"/>
                 <a:cs typeface="Calibri" pitchFamily="34" charset="-120"/>
               </a:rPr>
-              <a:t>Sources: Unilever PLC (2021; 2025a; 2026b); UNCTAD (2021); USTR (n.d.); AfCFTA Secretariat (n.d.); ADB (2021); MND Staff (2025).</a:t>
+              <a:t>Sources: USTR (n.d.); MND Staff (2025); Fortune (2025); Bloomberg Línea (2025); Unilever PLC (2026a).</a:t>
             </a:r>
             <a:endParaRPr lang="en-US" sz="800" dirty="0"/>
           </a:p>

--- a/content/busi1763/files/Unilever_Group_EN.pptx
+++ b/content/busi1763/files/Unilever_Group_EN.pptx
@@ -20,9 +20,10 @@
     <p:sldId id="268" r:id="rId14"/>
     <p:sldId id="269" r:id="rId15"/>
     <p:sldId id="270" r:id="rId16"/>
+    <p:sldId id="271" r:id="rId17"/>
   </p:sldIdLst>
   <p:notesMasterIdLst>
-    <p:notesMasterId r:id="rId17"/>
+    <p:notesMasterId r:id="rId18"/>
   </p:notesMasterIdLst>
   <p:sldSz cx="9144000" cy="5143500"/>
   <p:notesSz cx="5143500" cy="9144000"/>
@@ -1156,7 +1157,7 @@
           <a:p>
             <a:r>
               <a:rPr lang="en-US" dirty="0"/>
-              <a:t>Thank you. My theory is FDI, foreign direct investment, and my country is the United States. FDI means a company owns and controls a business in another country. It can build something new, which is greenfield, or buy a company, which is M&amp;A. Dunning's OLI model explains why companies do FDI: ownership advantages, location advantages and internalisation advantages. There are four motives: market-seeking, resource-seeking, efficiency-seeking and strategic asset-seeking.</a:t>
+              <a:t>Now, CSR, corporate social responsibility. Host countries want a clean environment and fair wages, so CSR is an MNE's licence to operate. Unilever's CSR framework is the Unilever Compass. It was introduced in March 2021, after the Sustainable Living Plan ended in December 2020. What did it achieve? In June 2020, it promised net zero emissions by 2039, and in May 2021, 99.6 percent of shareholders voted for its climate plan. By December 2025, emissions from its own operations were 77 percent lower than in 2015. But there is a critical side. In January 2022, the fund manager Terry Smith said Unilever had lost the plot by defining a purpose for Hellmann's mayonnaise. In April 2024, Unilever lowered its plastic target. It had planned to halve virgin plastic by 2025, but by December 2025 it had cut it by only 29 percent. So CSR keeps Unilever's licence to operate and investor support, but missed targets bring accusations of greenwashing. For the future, Unilever's own targets are zero emissions from its own operations by 2030, and net zero across the value chain by 2039. These are targets, not results. My conclusion: Unilever's advantages come from being an advanced-economy MNE. On CSR, it has done well on climate but gone backwards on plastics, so it must balance profit, jobs, politics and sustainability. Next, our last speaker will explain Unilever's FDI in the United States.</a:t>
             </a:r>
             <a:endParaRPr lang="en-US" dirty="0"/>
           </a:p>
@@ -1244,7 +1245,7 @@
           <a:p>
             <a:r>
               <a:rPr lang="en-US" dirty="0"/>
-              <a:t>Why the United States? The US is the world's largest FDI host. In 2024, it received 279 billion dollars. For Unilever, the US is its biggest market. Its US turnover grew from 9.4 billion euros in 2020 to 12.5 billion in 2024, about one fifth of the group. Using OLI: O, Unilever has global brands, money and distribution. L, the US is the biggest market, with many premium and online shoppers. I, Unilever buys and owns these brands, so it controls them and can take them to other countries. For example, it launched Nutrafol in Canada in 2023.</a:t>
+              <a:t>Thank you. My topic is FDI. FDI means foreign direct investment. My country is the United States. FDI means a company owns a business in another country. There are two ways. A company can build a new business. This is called greenfield. Or it can buy a company. This is called M&amp;A. Dunning's OLI model tells us why companies do FDI. O is ownership. The company has something special, like strong brands. L is location. The country has something good, like a big market. I is internalisation. The company wants to own the business, not just sell a licence. There are four reasons for FDI: to find markets, to find resources, to cut costs, and to buy strategic assets.</a:t>
             </a:r>
             <a:endParaRPr lang="en-US" dirty="0"/>
           </a:p>
@@ -1332,7 +1333,7 @@
           <a:p>
             <a:r>
               <a:rPr lang="en-US" dirty="0"/>
-              <a:t>Unilever's FDI in the US was mainly M&amp;A. This is strategic asset-seeking: it buys brands, customers and online skills. In August 2021, it bought Paula's Choice, a skincare brand that sells online, for 1.8 billion euros. In 2022, Prestige Beauty grew by double digits. In July 2022, it raised its stake in Nutrafol to 80 percent. In 2025, Nutrafol led double-digit growth in Wellbeing. In February 2024, it bought K18, which grew by double digits that year. In September 2025, it bought Dr. Squatch for 1.2 billion euros. What are the benefits for Unilever? First, faster growth: by 2024, 70 percent of its US Beauty and Wellbeing sales came from these premium brands. Second, a stronger position: its long-term assets in the US grew from 12.9 billion euros in 2020 to 19.7 billion in 2024. Third, results: in 2025, North America grew 5.3 percent, and Unilever recovered much of its lost market share in the US. But there is risk: in 2024, the US premium beauty market slowed, and Paula's Choice slowed too. My conclusion: Unilever's FDI in the US follows the OLI model. By buying American premium brands, it gained growth, online skills and a stronger position in its biggest market.</a:t>
+              <a:t>Why the United States? First, the US gets the most FDI in the world. In all of 2024, it got 279 billion dollars. Second, the US is Unilever's biggest market. Unilever's sales in the US went up from 9.4 billion euros in 2020 to 12.5 billion euros in 2024. Now, OLI. O: Unilever has famous brands, money and a big sales network. L: the US is a big market. Many people buy premium products and shop online. I: Unilever buys and owns the brands. So it controls the brands and their customers.</a:t>
             </a:r>
             <a:endParaRPr lang="en-US" dirty="0"/>
           </a:p>
@@ -1420,7 +1421,7 @@
           <a:p>
             <a:r>
               <a:rPr lang="en-US" dirty="0"/>
-              <a:t>To conclude: Unilever is global, it uses regional trade deals like USMCA, it uses its advantages as a British MNE, and it grows through FDI in its biggest market. Thank you for listening. We are happy to take your questions.</a:t>
+              <a:t>In the US, Unilever mostly buys companies. So its FDI is mainly M&amp;A. Its reason is to buy strategic assets: brands, customers and online skills. In August 2021, Unilever bought Paula's Choice for 1.8 billion euros. It is a skincare brand. It sells online. In all of 2022, Unilever's premium beauty sales grew by more than 10 percent. In February 2024, Unilever bought K18, a hair care brand. In September 2025, Unilever bought Dr. Squatch for 1.2 billion euros. It sells personal care products for men. What are the good things for Unilever? First, faster growth. By December 2024, 70 percent of its US beauty and wellbeing sales came from these premium brands. Second, good results. In all of 2025, sales in North America grew by 5.3 percent. But there is a risk. In 2024, the US premium beauty market slowed down. Paula's Choice slowed down too. My conclusion: Unilever's FDI in the US fits the OLI model. By buying American brands, Unilever got growth, online skills and a stronger place in its biggest market.</a:t>
             </a:r>
             <a:endParaRPr lang="en-US" dirty="0"/>
           </a:p>
@@ -1508,7 +1509,7 @@
           <a:p>
             <a:r>
               <a:rPr lang="en-US" dirty="0"/>
-              <a:t/>
+              <a:t>To conclude: Unilever is a global company. It uses trade deals like USMCA. It uses its British strengths. And it grows by FDI in the US. Thank you for listening. Now we are happy to answer your questions.</a:t>
             </a:r>
             <a:endParaRPr lang="en-US" dirty="0"/>
           </a:p>
@@ -1638,6 +1639,94 @@
 </p:notes>
 </file>
 
+<file path=ppt/notesSlides/notesSlide16.xml><?xml version="1.0" encoding="utf-8"?>
+<p:notes xmlns:a="http://schemas.openxmlformats.org/drawingml/2006/main" xmlns:r="http://schemas.openxmlformats.org/officeDocument/2006/relationships" xmlns:p="http://schemas.openxmlformats.org/presentationml/2006/main">
+  <p:cSld>
+    <p:spTree>
+      <p:nvGrpSpPr>
+        <p:cNvPr id="1" name=""/>
+        <p:cNvGrpSpPr/>
+        <p:nvPr/>
+      </p:nvGrpSpPr>
+      <p:grpSpPr>
+        <a:xfrm>
+          <a:off x="0" y="0"/>
+          <a:ext cx="0" cy="0"/>
+          <a:chOff x="0" y="0"/>
+          <a:chExt cx="0" cy="0"/>
+        </a:xfrm>
+      </p:grpSpPr>
+      <p:sp>
+        <p:nvSpPr>
+          <p:cNvPr id="2" name="Slide Image Placeholder 1"/>
+          <p:cNvSpPr>
+            <a:spLocks noGrp="1" noRot="1" noChangeAspect="1"/>
+          </p:cNvSpPr>
+          <p:nvPr>
+            <p:ph type="sldImg"/>
+          </p:nvPr>
+        </p:nvSpPr>
+        <p:spPr/>
+      </p:sp>
+      <p:sp>
+        <p:nvSpPr>
+          <p:cNvPr id="3" name="Notes Placeholder 2"/>
+          <p:cNvSpPr>
+            <a:spLocks noGrp="1"/>
+          </p:cNvSpPr>
+          <p:nvPr>
+            <p:ph type="body" idx="1"/>
+          </p:nvPr>
+        </p:nvSpPr>
+        <p:spPr/>
+        <p:txBody>
+          <a:bodyPr/>
+          <a:lstStyle/>
+          <a:p>
+            <a:r>
+              <a:rPr lang="en-US" dirty="0"/>
+              <a:t/>
+            </a:r>
+            <a:endParaRPr lang="en-US" dirty="0"/>
+          </a:p>
+        </p:txBody>
+      </p:sp>
+      <p:sp>
+        <p:nvSpPr>
+          <p:cNvPr id="4" name="Slide Number Placeholder 3"/>
+          <p:cNvSpPr>
+            <a:spLocks noGrp="1"/>
+          </p:cNvSpPr>
+          <p:nvPr>
+            <p:ph type="sldNum" sz="quarter" idx="10"/>
+          </p:nvPr>
+        </p:nvSpPr>
+        <p:spPr/>
+        <p:txBody>
+          <a:bodyPr/>
+          <a:lstStyle/>
+          <a:p>
+            <a:fld id="{F7021451-1387-4CA6-816F-3879F97B5CBC}" type="slidenum">
+              <a:rPr lang="en-US"/>
+              <a:t>16</a:t>
+            </a:fld>
+            <a:endParaRPr lang="en-US"/>
+          </a:p>
+        </p:txBody>
+      </p:sp>
+    </p:spTree>
+    <p:extLst>
+      <p:ext uri="{BB962C8B-B14F-4D97-AF65-F5344CB8AC3E}">
+        <p14:creationId xmlns:p14="http://schemas.microsoft.com/office/powerpoint/2010/main" val="1024086991"/>
+      </p:ext>
+    </p:extLst>
+  </p:cSld>
+  <p:clrMapOvr>
+    <a:masterClrMapping/>
+  </p:clrMapOvr>
+</p:notes>
+</file>
+
 <file path=ppt/notesSlides/notesSlide2.xml><?xml version="1.0" encoding="utf-8"?>
 <p:notes xmlns:a="http://schemas.openxmlformats.org/drawingml/2006/main" xmlns:r="http://schemas.openxmlformats.org/officeDocument/2006/relationships" xmlns:p="http://schemas.openxmlformats.org/presentationml/2006/main">
   <p:cSld>
@@ -1948,7 +2037,7 @@
           <a:p>
             <a:r>
               <a:rPr lang="en-US" dirty="0"/>
-              <a:t>First, markets. Unilever sells in about 190 countries, and 3.4 billion people use its products every day. In 2025, its turnover was 50.5 billion euros, and 59 percent came from emerging markets. Asia Pacific and Africa is now its biggest region, with 44 percent. Europe, its home region, is only 19 percent. Second, production. Unilever had more than 280 factories in 2023, so it gets economies of scale. This is the cost driver. Its 30 Power Brands, such as Dove, make 78 percent of turnover. So it sells the same brands across the world, as Levitt said. But these years also show the risks. In March 2020, COVID-19 disrupted supply chains, and the extra costs cut the margin by about 0.9 percentage points. In 2022, inflation was high all year. Unilever raised prices by 11.3 percent, and volumes fell by 2.1 percent. In March 2022, after the war in Ukraine started, Unilever stopped trade and capital flows with Russia, and in October 2024 it sold its Russian business. In its 2025 report, Unilever says rising protectionism and tariffs are a risk to its supply chain. My conclusion: Unilever is still very global, but globalisation is less smooth now, and Unilever must manage more risk. One way it does this is through regions. My teammate will explain this now.</a:t>
+              <a:t>First, markets. By December 2024, Unilever sold in about 190 countries, and 3.4 billion people used its products every day. In the year to December 2025, its turnover was 50.5 billion euros, and 59 percent came from emerging markets. Asia Pacific and Africa is now its biggest region, with 44 percent. Europe, its home region, is only 19 percent. Second, production. By December 2023, Unilever had more than 280 factories, so it gets economies of scale. This is the cost driver. In the year to December 2025, its 30 Power Brands, such as Dove, made 78 percent of turnover. So it sells the same brands across the world, as Levitt said. But these years also show the risks. From March 2020, COVID-19 disrupted supply chains, and in the year to December 2020, the extra costs cut the margin by about 0.9 percentage points. From January to December 2022, inflation was high. Unilever raised prices by 11.3 percent, and volumes fell by 2.1 percent. In March 2022, after the war in Ukraine started, Unilever stopped trade and capital flows with Russia, and in October 2024 it sold its Russian business. And in March 2025, the US put new tariffs on Mexico and Canada, so trade barriers are rising again. My conclusion: Unilever is still very global, but globalisation is less smooth now, and Unilever must manage more risk. One way it does this is through regions. My teammate will explain this now.</a:t>
             </a:r>
             <a:endParaRPr lang="en-US" dirty="0"/>
           </a:p>
@@ -2036,7 +2125,7 @@
           <a:p>
             <a:r>
               <a:rPr lang="en-US" dirty="0"/>
-              <a:t>Thank you. My theory is regional integration, and my country is Mexico. Countries can integrate at five levels: free trade area, customs union, common market, economic union and political union. Each level goes deeper. Integration can create trade, because tariffs between members fall. But it can also divert trade, from a cheaper country outside to a member country. Mexico is in USMCA, the trade agreement with the US and Canada. It replaced NAFTA in July 2020. USMCA is a free trade area, the first level. Goods that meet its rules of origin can cross the borders with no tariffs. In 2023, Mexico became the United States' largest trading partner, with almost 800 billion dollars of goods trade.</a:t>
+              <a:t>Thank you. My theory is regional integration, and my country is Mexico. Countries can integrate at five levels: free trade area, customs union, common market, economic union and political union. Each level goes deeper. Integration can create trade, because tariffs between members fall. But it can also divert trade, from a cheaper country outside to a member country. Mexico is in USMCA, the trade agreement with the US and Canada. It replaced NAFTA in July 2020. USMCA is a free trade area, the first level. Goods that meet its rules of origin can cross the borders with no tariffs. In the year to December 2023, Mexico became the United States' largest trading partner, with almost 800 billion dollars of goods trade.</a:t>
             </a:r>
             <a:endParaRPr lang="en-US" dirty="0"/>
           </a:p>
@@ -2124,7 +2213,7 @@
           <a:p>
             <a:r>
               <a:rPr lang="en-US" dirty="0"/>
-              <a:t>Now, Unilever in Mexico. Mexico is one of Unilever's ten largest markets, and it has more than 7,000 employees there. In February 2023, Unilever announced a new beauty and personal care factory in Nuevo León, near the US border, for 400 million dollars. In April 2025, it doubled the investment to 800 million dollars. The plant will mainly export to the US and Canada, and it will create 850 direct jobs. In May 2025, Unilever announced an even bigger plan: 30 billion pesos, about 1.5 billion dollars, for Mexico from 2025 to 2028. So what are the benefits for Unilever? First, market access. Products that meet USMCA rules can enter the US with no tariffs, and the US is Unilever's biggest market, with 10.5 billion euros of turnover in 2025. Second, protection from tariffs. In March 2025, the US put a 25 percent tariff on Mexico, but goods that qualify under USMCA were exempted. One month later, Unilever doubled its investment. Third, lower costs and speed. Making products next to the US is cheaper and faster than shipping them from far away. This is trade creation inside North America. But there are limits. Only about half of US imports from Mexico qualified for USMCA in 2024, and US trade policy can change quickly. Unilever has not said publicly that USMCA is the reason for its investment, so this is our own analysis. My conclusion: through USMCA, Mexico gives Unilever a low-cost base with tariff-free access to its biggest market. But the benefit depends on the rules of origin and on US politics. Next, my teammate will explain Unilever as an MNE from an advanced economy.</a:t>
+              <a:t>Now, Unilever in Mexico. In May 2025, Unilever said Mexico is one of its ten largest markets, with more than 7,000 employees. In February 2023, Unilever announced a new beauty and personal care factory in Nuevo León, near the US border, for 400 million dollars. In April 2025, it doubled the investment to 800 million dollars, and said the plant is mainly for exports to the US and Canada. In May 2025, Unilever announced an even bigger plan: 30 billion pesos, about 1.5 billion dollars, for Mexico from 2025 to 2028. So what are the benefits for Unilever? First, market access. Products that meet USMCA rules can enter the US with no tariffs, and the US is Unilever's biggest market, with 10.5 billion euros of turnover in the year to December 2025. Second, protection from tariffs. In March 2025, the US put a 25 percent tariff on Mexico, but goods that qualify under USMCA were exempted. One month later, Unilever doubled its investment. Third, lower costs and speed. Making products next to the US is cheaper and faster than shipping them from far away. This is trade creation inside North America. But there are limits. From January to December 2024, only about half of US imports from Mexico qualified for USMCA, and US trade policy can change quickly. Unilever has not said publicly that USMCA is the reason for its investment, so this is our own analysis. My conclusion: through USMCA, Mexico gives Unilever a low-cost base with tariff-free access to its biggest market. But the benefit depends on the rules of origin and on US politics. Next, my teammate will explain Unilever as an MNE from an advanced economy.</a:t>
             </a:r>
             <a:endParaRPr lang="en-US" dirty="0"/>
           </a:p>
@@ -2212,7 +2301,7 @@
           <a:p>
             <a:r>
               <a:rPr lang="en-US" dirty="0"/>
-              <a:t>Thank you. My theory is MNEs from advanced economies. An MNE and its host country both have goals. The MNE wants high returns, more sales, lower costs and to share risk. The host country wants jobs, growth, technology, control of its economy and a clean environment. Sometimes these goals clash. For example, a host government may change its rules to take more value from the MNE. This is called creeping expropriation.</a:t>
+              <a:t>Thank you. My theory is MNEs from advanced economies. An MNE wants high returns, more sales and lower costs. The host country wants jobs, technology, control of its economy and a clean environment. When these goals clash, the host may change its rules to take more value. This is creeping expropriation.</a:t>
             </a:r>
             <a:endParaRPr lang="en-US" dirty="0"/>
           </a:p>
@@ -2300,7 +2389,7 @@
           <a:p>
             <a:r>
               <a:rPr lang="en-US" dirty="0"/>
-              <a:t>Unilever is a British MNE. Its advantages come from an advanced economy: strong brands, money and research. Its 30 Power Brands make 78 percent of turnover, and it spends between 800 million and nearly 1 billion euros a year on research and development. Host countries also gain. Look at India. Unilever owns 61.9 percent of Hindustan Unilever, which is listed in India. So Indian investors share the profits, and the company employs local people. In April 2025, Hindustan Unilever completed buying 90.5 percent of Minimalist, an Indian skincare brand, for about 2,670 crore rupees. This moves it into faster-growing beauty in India. But there are also conflicts. First, jobs. In March 2024, Unilever announced it would cut about 7,500 office jobs to save about 800 million euros over three years. By the end of 2024, 4,300 jobs had gone. This helps profits, but it goes against the host country's goal of employment. Second, politics. Unilever stayed in Russia from March 2022 until October 2024, when it finally sold the business. This shows how the MNE's goal of protecting its assets can clash with political goals. My conclusion: Unilever's advantages come from being an advanced-economy MNE, and it shares benefits with host countries like India. But it must balance profit with jobs and politics. Next, our last speaker will explain Unilever's FDI in the United States.</a:t>
+              <a:t>Unilever is a British MNE. Its advantages come from an advanced economy: strong brands, money and research. In the year to December 2025, its 30 Power Brands made 78 percent of turnover, and in 2024 it spent nearly 1 billion euros on research and development. Host countries also gain. In December 2024, Unilever owned 61.9 percent of Hindustan Unilever, which is listed in India, so Indian investors share the profits. But there are also conflicts. First, jobs. In March 2024, Unilever announced it would cut about 7,500 office jobs. By December 2024, 4,300 jobs had gone. This helps profits, but it goes against the host country's goal of employment. Second, politics. Unilever stayed in Russia from March 2022 until October 2024, when it finally sold the business. This shows that the MNE's goal of protecting its assets can clash with politics.</a:t>
             </a:r>
             <a:endParaRPr lang="en-US" dirty="0"/>
           </a:p>
@@ -2979,7 +3068,7 @@
                 <a:ea typeface="Calibri" pitchFamily="34" charset="-122"/>
                 <a:cs typeface="Calibri" pitchFamily="34" charset="-120"/>
               </a:rPr>
-              <a:t>MNEs from Advanced Economies</a:t>
+              <a:t>MNEs from Advanced Economies + CSR</a:t>
             </a:r>
             <a:endParaRPr lang="en-US" sz="1000" dirty="0"/>
           </a:p>
@@ -3142,7 +3231,7 @@
             <a:avLst/>
           </a:prstGeom>
           <a:solidFill>
-            <a:srgbClr val="7C3AED"/>
+            <a:srgbClr val="D9822B"/>
           </a:solidFill>
           <a:ln/>
         </p:spPr>
@@ -3174,13 +3263,13 @@
             <a:r>
               <a:rPr lang="en-US" sz="1000" b="1" dirty="0">
                 <a:solidFill>
-                  <a:srgbClr val="7C3AED"/>
-                </a:solidFill>
-                <a:latin typeface="Calibri" pitchFamily="34" charset="0"/>
-                <a:ea typeface="Calibri" pitchFamily="34" charset="-122"/>
-                <a:cs typeface="Calibri" pitchFamily="34" charset="-120"/>
-              </a:rPr>
-              <a:t>Speaker 4 · FDI</a:t>
+                  <a:srgbClr val="D9822B"/>
+                </a:solidFill>
+                <a:latin typeface="Calibri" pitchFamily="34" charset="0"/>
+                <a:ea typeface="Calibri" pitchFamily="34" charset="-122"/>
+                <a:cs typeface="Calibri" pitchFamily="34" charset="-120"/>
+              </a:rPr>
+              <a:t>Speaker 3 · MNEs from Advanced Economies + CSR</a:t>
             </a:r>
             <a:endParaRPr lang="en-US" sz="1000" dirty="0"/>
           </a:p>
@@ -3219,7 +3308,7 @@
                 <a:ea typeface="Calibri" pitchFamily="34" charset="-122"/>
                 <a:cs typeface="Calibri" pitchFamily="34" charset="-120"/>
               </a:rPr>
-              <a:t>FDI: why and how firms invest abroad</a:t>
+              <a:t>Sustainability &amp; CSR: progress and setbacks</a:t>
             </a:r>
             <a:endParaRPr lang="en-US" sz="2500" dirty="0"/>
           </a:p>
@@ -3258,707 +3347,7 @@
                 <a:ea typeface="Calibri" pitchFamily="34" charset="-122"/>
                 <a:cs typeface="Calibri" pitchFamily="34" charset="-120"/>
               </a:rPr>
-              <a:t>Lecture 3 · Focus country: United States</a:t>
-            </a:r>
-            <a:endParaRPr lang="en-US" sz="1300" dirty="0"/>
-          </a:p>
-        </p:txBody>
-      </p:sp>
-      <p:sp>
-        <p:nvSpPr>
-          <p:cNvPr id="6" name="Shape 4"/>
-          <p:cNvSpPr/>
-          <p:nvPr/>
-        </p:nvSpPr>
-        <p:spPr>
-          <a:xfrm>
-            <a:off x="411480" y="1234440"/>
-            <a:ext cx="8321040" cy="713232"/>
-          </a:xfrm>
-          <a:prstGeom prst="roundRect">
-            <a:avLst>
-              <a:gd name="adj" fmla="val 10256"/>
-            </a:avLst>
-          </a:prstGeom>
-          <a:solidFill>
-            <a:srgbClr val="7C3AED"/>
-          </a:solidFill>
-          <a:ln/>
-        </p:spPr>
-      </p:sp>
-      <p:sp>
-        <p:nvSpPr>
-          <p:cNvPr id="7" name="Text 5"/>
-          <p:cNvSpPr/>
-          <p:nvPr/>
-        </p:nvSpPr>
-        <p:spPr>
-          <a:xfrm>
-            <a:off x="594360" y="1234440"/>
-            <a:ext cx="7955280" cy="713232"/>
-          </a:xfrm>
-          <a:prstGeom prst="rect">
-            <a:avLst/>
-          </a:prstGeom>
-          <a:noFill/>
-          <a:ln/>
-        </p:spPr>
-        <p:txBody>
-          <a:bodyPr wrap="square" lIns="0" tIns="0" rIns="0" bIns="0" rtlCol="0" anchor="ctr"/>
-          <a:lstStyle/>
-          <a:p>
-            <a:pPr indent="0" marL="0">
-              <a:buNone/>
-            </a:pPr>
-            <a:r>
-              <a:rPr lang="en-US" sz="1400" b="1" dirty="0">
-                <a:solidFill>
-                  <a:srgbClr val="FFFFFF"/>
-                </a:solidFill>
-                <a:latin typeface="Calibri" pitchFamily="34" charset="0"/>
-                <a:ea typeface="Calibri" pitchFamily="34" charset="-122"/>
-                <a:cs typeface="Calibri" pitchFamily="34" charset="-120"/>
-              </a:rPr>
-              <a:t>FDI: a company owns and controls a business in another country, by building it (greenfield) or buying it (M&amp;A).</a:t>
-            </a:r>
-            <a:endParaRPr lang="en-US" sz="1400" dirty="0"/>
-          </a:p>
-        </p:txBody>
-      </p:sp>
-      <p:sp>
-        <p:nvSpPr>
-          <p:cNvPr id="8" name="Shape 6"/>
-          <p:cNvSpPr/>
-          <p:nvPr/>
-        </p:nvSpPr>
-        <p:spPr>
-          <a:xfrm>
-            <a:off x="411480" y="2103120"/>
-            <a:ext cx="2651760" cy="2514600"/>
-          </a:xfrm>
-          <a:prstGeom prst="roundRect">
-            <a:avLst>
-              <a:gd name="adj" fmla="val 2909"/>
-            </a:avLst>
-          </a:prstGeom>
-          <a:solidFill>
-            <a:srgbClr val="F3F4F8"/>
-          </a:solidFill>
-          <a:ln/>
-        </p:spPr>
-      </p:sp>
-      <p:sp>
-        <p:nvSpPr>
-          <p:cNvPr id="9" name="Text 7"/>
-          <p:cNvSpPr/>
-          <p:nvPr/>
-        </p:nvSpPr>
-        <p:spPr>
-          <a:xfrm>
-            <a:off x="548640" y="2194560"/>
-            <a:ext cx="2377440" cy="365760"/>
-          </a:xfrm>
-          <a:prstGeom prst="rect">
-            <a:avLst/>
-          </a:prstGeom>
-          <a:noFill/>
-          <a:ln/>
-        </p:spPr>
-        <p:txBody>
-          <a:bodyPr wrap="square" lIns="0" tIns="0" rIns="0" bIns="0" rtlCol="0" anchor="ctr"/>
-          <a:lstStyle/>
-          <a:p>
-            <a:pPr indent="0" marL="0">
-              <a:buNone/>
-            </a:pPr>
-            <a:r>
-              <a:rPr lang="en-US" sz="1350" b="1" dirty="0">
-                <a:solidFill>
-                  <a:srgbClr val="7C3AED"/>
-                </a:solidFill>
-                <a:latin typeface="Calibri" pitchFamily="34" charset="0"/>
-                <a:ea typeface="Calibri" pitchFamily="34" charset="-122"/>
-                <a:cs typeface="Calibri" pitchFamily="34" charset="-120"/>
-              </a:rPr>
-              <a:t>OLI model (Dunning)</a:t>
-            </a:r>
-            <a:endParaRPr lang="en-US" sz="1350" dirty="0"/>
-          </a:p>
-        </p:txBody>
-      </p:sp>
-      <p:sp>
-        <p:nvSpPr>
-          <p:cNvPr id="10" name="Text 8"/>
-          <p:cNvSpPr/>
-          <p:nvPr/>
-        </p:nvSpPr>
-        <p:spPr>
-          <a:xfrm>
-            <a:off x="548640" y="2606040"/>
-            <a:ext cx="2377440" cy="1920240"/>
-          </a:xfrm>
-          <a:prstGeom prst="rect">
-            <a:avLst/>
-          </a:prstGeom>
-          <a:noFill/>
-          <a:ln/>
-        </p:spPr>
-        <p:txBody>
-          <a:bodyPr wrap="square" lIns="0" tIns="0" rIns="0" bIns="0" rtlCol="0" anchor="t"/>
-          <a:lstStyle/>
-          <a:p>
-            <a:pPr marL="342900" indent="-342900">
-              <a:spcAft>
-                <a:spcPts val="400"/>
-              </a:spcAft>
-              <a:buSzPct val="100000"/>
-              <a:buChar char="•"/>
-            </a:pPr>
-            <a:r>
-              <a:rPr lang="en-US" sz="1150" dirty="0">
-                <a:solidFill>
-                  <a:srgbClr val="1A1F36"/>
-                </a:solidFill>
-                <a:latin typeface="Calibri" pitchFamily="34" charset="0"/>
-                <a:ea typeface="Calibri" pitchFamily="34" charset="-122"/>
-                <a:cs typeface="Calibri" pitchFamily="34" charset="-120"/>
-              </a:rPr>
-              <a:t>O – Ownership: brands, technology, money</a:t>
-            </a:r>
-            <a:endParaRPr lang="en-US" sz="1150" dirty="0"/>
-          </a:p>
-          <a:p>
-            <a:pPr marL="342900" indent="-342900">
-              <a:spcAft>
-                <a:spcPts val="400"/>
-              </a:spcAft>
-              <a:buSzPct val="100000"/>
-              <a:buChar char="•"/>
-            </a:pPr>
-            <a:r>
-              <a:rPr lang="en-US" sz="1150" dirty="0">
-                <a:solidFill>
-                  <a:srgbClr val="1A1F36"/>
-                </a:solidFill>
-                <a:latin typeface="Calibri" pitchFamily="34" charset="0"/>
-                <a:ea typeface="Calibri" pitchFamily="34" charset="-122"/>
-                <a:cs typeface="Calibri" pitchFamily="34" charset="-120"/>
-              </a:rPr>
-              <a:t>L – Location: big market, low costs</a:t>
-            </a:r>
-            <a:endParaRPr lang="en-US" sz="1150" dirty="0"/>
-          </a:p>
-          <a:p>
-            <a:pPr marL="342900" indent="-342900">
-              <a:spcAft>
-                <a:spcPts val="400"/>
-              </a:spcAft>
-              <a:buSzPct val="100000"/>
-              <a:buChar char="•"/>
-            </a:pPr>
-            <a:r>
-              <a:rPr lang="en-US" sz="1150" dirty="0">
-                <a:solidFill>
-                  <a:srgbClr val="1A1F36"/>
-                </a:solidFill>
-                <a:latin typeface="Calibri" pitchFamily="34" charset="0"/>
-                <a:ea typeface="Calibri" pitchFamily="34" charset="-122"/>
-                <a:cs typeface="Calibri" pitchFamily="34" charset="-120"/>
-              </a:rPr>
-              <a:t>I – Internalisation: own it, do not license it</a:t>
-            </a:r>
-            <a:endParaRPr lang="en-US" sz="1150" dirty="0"/>
-          </a:p>
-        </p:txBody>
-      </p:sp>
-      <p:sp>
-        <p:nvSpPr>
-          <p:cNvPr id="11" name="Shape 9"/>
-          <p:cNvSpPr/>
-          <p:nvPr/>
-        </p:nvSpPr>
-        <p:spPr>
-          <a:xfrm>
-            <a:off x="3246120" y="2103120"/>
-            <a:ext cx="2651760" cy="2514600"/>
-          </a:xfrm>
-          <a:prstGeom prst="roundRect">
-            <a:avLst>
-              <a:gd name="adj" fmla="val 2909"/>
-            </a:avLst>
-          </a:prstGeom>
-          <a:solidFill>
-            <a:srgbClr val="F3F4F8"/>
-          </a:solidFill>
-          <a:ln/>
-        </p:spPr>
-      </p:sp>
-      <p:sp>
-        <p:nvSpPr>
-          <p:cNvPr id="12" name="Text 10"/>
-          <p:cNvSpPr/>
-          <p:nvPr/>
-        </p:nvSpPr>
-        <p:spPr>
-          <a:xfrm>
-            <a:off x="3383280" y="2194560"/>
-            <a:ext cx="2377440" cy="365760"/>
-          </a:xfrm>
-          <a:prstGeom prst="rect">
-            <a:avLst/>
-          </a:prstGeom>
-          <a:noFill/>
-          <a:ln/>
-        </p:spPr>
-        <p:txBody>
-          <a:bodyPr wrap="square" lIns="0" tIns="0" rIns="0" bIns="0" rtlCol="0" anchor="ctr"/>
-          <a:lstStyle/>
-          <a:p>
-            <a:pPr indent="0" marL="0">
-              <a:buNone/>
-            </a:pPr>
-            <a:r>
-              <a:rPr lang="en-US" sz="1350" b="1" dirty="0">
-                <a:solidFill>
-                  <a:srgbClr val="7C3AED"/>
-                </a:solidFill>
-                <a:latin typeface="Calibri" pitchFamily="34" charset="0"/>
-                <a:ea typeface="Calibri" pitchFamily="34" charset="-122"/>
-                <a:cs typeface="Calibri" pitchFamily="34" charset="-120"/>
-              </a:rPr>
-              <a:t>Four motives</a:t>
-            </a:r>
-            <a:endParaRPr lang="en-US" sz="1350" dirty="0"/>
-          </a:p>
-        </p:txBody>
-      </p:sp>
-      <p:sp>
-        <p:nvSpPr>
-          <p:cNvPr id="13" name="Text 11"/>
-          <p:cNvSpPr/>
-          <p:nvPr/>
-        </p:nvSpPr>
-        <p:spPr>
-          <a:xfrm>
-            <a:off x="3383280" y="2606040"/>
-            <a:ext cx="2377440" cy="1920240"/>
-          </a:xfrm>
-          <a:prstGeom prst="rect">
-            <a:avLst/>
-          </a:prstGeom>
-          <a:noFill/>
-          <a:ln/>
-        </p:spPr>
-        <p:txBody>
-          <a:bodyPr wrap="square" lIns="0" tIns="0" rIns="0" bIns="0" rtlCol="0" anchor="t"/>
-          <a:lstStyle/>
-          <a:p>
-            <a:pPr marL="342900" indent="-342900">
-              <a:spcAft>
-                <a:spcPts val="400"/>
-              </a:spcAft>
-              <a:buSzPct val="100000"/>
-              <a:buChar char="•"/>
-            </a:pPr>
-            <a:r>
-              <a:rPr lang="en-US" sz="1150" dirty="0">
-                <a:solidFill>
-                  <a:srgbClr val="1A1F36"/>
-                </a:solidFill>
-                <a:latin typeface="Calibri" pitchFamily="34" charset="0"/>
-                <a:ea typeface="Calibri" pitchFamily="34" charset="-122"/>
-                <a:cs typeface="Calibri" pitchFamily="34" charset="-120"/>
-              </a:rPr>
-              <a:t>Market-seeking</a:t>
-            </a:r>
-            <a:endParaRPr lang="en-US" sz="1150" dirty="0"/>
-          </a:p>
-          <a:p>
-            <a:pPr marL="342900" indent="-342900">
-              <a:spcAft>
-                <a:spcPts val="400"/>
-              </a:spcAft>
-              <a:buSzPct val="100000"/>
-              <a:buChar char="•"/>
-            </a:pPr>
-            <a:r>
-              <a:rPr lang="en-US" sz="1150" dirty="0">
-                <a:solidFill>
-                  <a:srgbClr val="1A1F36"/>
-                </a:solidFill>
-                <a:latin typeface="Calibri" pitchFamily="34" charset="0"/>
-                <a:ea typeface="Calibri" pitchFamily="34" charset="-122"/>
-                <a:cs typeface="Calibri" pitchFamily="34" charset="-120"/>
-              </a:rPr>
-              <a:t>Resource-seeking</a:t>
-            </a:r>
-            <a:endParaRPr lang="en-US" sz="1150" dirty="0"/>
-          </a:p>
-          <a:p>
-            <a:pPr marL="342900" indent="-342900">
-              <a:spcAft>
-                <a:spcPts val="400"/>
-              </a:spcAft>
-              <a:buSzPct val="100000"/>
-              <a:buChar char="•"/>
-            </a:pPr>
-            <a:r>
-              <a:rPr lang="en-US" sz="1150" dirty="0">
-                <a:solidFill>
-                  <a:srgbClr val="1A1F36"/>
-                </a:solidFill>
-                <a:latin typeface="Calibri" pitchFamily="34" charset="0"/>
-                <a:ea typeface="Calibri" pitchFamily="34" charset="-122"/>
-                <a:cs typeface="Calibri" pitchFamily="34" charset="-120"/>
-              </a:rPr>
-              <a:t>Efficiency-seeking</a:t>
-            </a:r>
-            <a:endParaRPr lang="en-US" sz="1150" dirty="0"/>
-          </a:p>
-          <a:p>
-            <a:pPr marL="342900" indent="-342900">
-              <a:spcAft>
-                <a:spcPts val="400"/>
-              </a:spcAft>
-              <a:buSzPct val="100000"/>
-              <a:buChar char="•"/>
-            </a:pPr>
-            <a:r>
-              <a:rPr lang="en-US" sz="1150" dirty="0">
-                <a:solidFill>
-                  <a:srgbClr val="1A1F36"/>
-                </a:solidFill>
-                <a:latin typeface="Calibri" pitchFamily="34" charset="0"/>
-                <a:ea typeface="Calibri" pitchFamily="34" charset="-122"/>
-                <a:cs typeface="Calibri" pitchFamily="34" charset="-120"/>
-              </a:rPr>
-              <a:t>Strategic asset-seeking</a:t>
-            </a:r>
-            <a:endParaRPr lang="en-US" sz="1150" dirty="0"/>
-          </a:p>
-        </p:txBody>
-      </p:sp>
-      <p:sp>
-        <p:nvSpPr>
-          <p:cNvPr id="14" name="Shape 12"/>
-          <p:cNvSpPr/>
-          <p:nvPr/>
-        </p:nvSpPr>
-        <p:spPr>
-          <a:xfrm>
-            <a:off x="6080760" y="2103120"/>
-            <a:ext cx="2651760" cy="2514600"/>
-          </a:xfrm>
-          <a:prstGeom prst="roundRect">
-            <a:avLst>
-              <a:gd name="adj" fmla="val 2909"/>
-            </a:avLst>
-          </a:prstGeom>
-          <a:solidFill>
-            <a:srgbClr val="F3F4F8"/>
-          </a:solidFill>
-          <a:ln/>
-        </p:spPr>
-      </p:sp>
-      <p:sp>
-        <p:nvSpPr>
-          <p:cNvPr id="15" name="Text 13"/>
-          <p:cNvSpPr/>
-          <p:nvPr/>
-        </p:nvSpPr>
-        <p:spPr>
-          <a:xfrm>
-            <a:off x="6217920" y="2194560"/>
-            <a:ext cx="2377440" cy="365760"/>
-          </a:xfrm>
-          <a:prstGeom prst="rect">
-            <a:avLst/>
-          </a:prstGeom>
-          <a:noFill/>
-          <a:ln/>
-        </p:spPr>
-        <p:txBody>
-          <a:bodyPr wrap="square" lIns="0" tIns="0" rIns="0" bIns="0" rtlCol="0" anchor="ctr"/>
-          <a:lstStyle/>
-          <a:p>
-            <a:pPr indent="0" marL="0">
-              <a:buNone/>
-            </a:pPr>
-            <a:r>
-              <a:rPr lang="en-US" sz="1350" b="1" dirty="0">
-                <a:solidFill>
-                  <a:srgbClr val="7C3AED"/>
-                </a:solidFill>
-                <a:latin typeface="Calibri" pitchFamily="34" charset="0"/>
-                <a:ea typeface="Calibri" pitchFamily="34" charset="-122"/>
-                <a:cs typeface="Calibri" pitchFamily="34" charset="-120"/>
-              </a:rPr>
-              <a:t>Two modes</a:t>
-            </a:r>
-            <a:endParaRPr lang="en-US" sz="1350" dirty="0"/>
-          </a:p>
-        </p:txBody>
-      </p:sp>
-      <p:sp>
-        <p:nvSpPr>
-          <p:cNvPr id="16" name="Text 14"/>
-          <p:cNvSpPr/>
-          <p:nvPr/>
-        </p:nvSpPr>
-        <p:spPr>
-          <a:xfrm>
-            <a:off x="6217920" y="2606040"/>
-            <a:ext cx="2377440" cy="1920240"/>
-          </a:xfrm>
-          <a:prstGeom prst="rect">
-            <a:avLst/>
-          </a:prstGeom>
-          <a:noFill/>
-          <a:ln/>
-        </p:spPr>
-        <p:txBody>
-          <a:bodyPr wrap="square" lIns="0" tIns="0" rIns="0" bIns="0" rtlCol="0" anchor="t"/>
-          <a:lstStyle/>
-          <a:p>
-            <a:pPr marL="342900" indent="-342900">
-              <a:spcAft>
-                <a:spcPts val="400"/>
-              </a:spcAft>
-              <a:buSzPct val="100000"/>
-              <a:buChar char="•"/>
-            </a:pPr>
-            <a:r>
-              <a:rPr lang="en-US" sz="1150" dirty="0">
-                <a:solidFill>
-                  <a:srgbClr val="1A1F36"/>
-                </a:solidFill>
-                <a:latin typeface="Calibri" pitchFamily="34" charset="0"/>
-                <a:ea typeface="Calibri" pitchFamily="34" charset="-122"/>
-                <a:cs typeface="Calibri" pitchFamily="34" charset="-120"/>
-              </a:rPr>
-              <a:t>Greenfield: build new; slower, full control</a:t>
-            </a:r>
-            <a:endParaRPr lang="en-US" sz="1150" dirty="0"/>
-          </a:p>
-          <a:p>
-            <a:pPr marL="342900" indent="-342900">
-              <a:spcAft>
-                <a:spcPts val="400"/>
-              </a:spcAft>
-              <a:buSzPct val="100000"/>
-              <a:buChar char="•"/>
-            </a:pPr>
-            <a:r>
-              <a:rPr lang="en-US" sz="1150" dirty="0">
-                <a:solidFill>
-                  <a:srgbClr val="1A1F36"/>
-                </a:solidFill>
-                <a:latin typeface="Calibri" pitchFamily="34" charset="0"/>
-                <a:ea typeface="Calibri" pitchFamily="34" charset="-122"/>
-                <a:cs typeface="Calibri" pitchFamily="34" charset="-120"/>
-              </a:rPr>
-              <a:t>M&amp;A: buy; faster, but expensive and hard to integrate</a:t>
-            </a:r>
-            <a:endParaRPr lang="en-US" sz="1150" dirty="0"/>
-          </a:p>
-        </p:txBody>
-      </p:sp>
-      <p:sp>
-        <p:nvSpPr>
-          <p:cNvPr id="17" name="Text 15"/>
-          <p:cNvSpPr/>
-          <p:nvPr/>
-        </p:nvSpPr>
-        <p:spPr>
-          <a:xfrm>
-            <a:off x="411480" y="4736592"/>
-            <a:ext cx="8321040" cy="274320"/>
-          </a:xfrm>
-          <a:prstGeom prst="rect">
-            <a:avLst/>
-          </a:prstGeom>
-          <a:noFill/>
-          <a:ln/>
-        </p:spPr>
-        <p:txBody>
-          <a:bodyPr wrap="square" lIns="0" tIns="0" rIns="0" bIns="0" rtlCol="0" anchor="b"/>
-          <a:lstStyle/>
-          <a:p>
-            <a:pPr indent="0" marL="0">
-              <a:buNone/>
-            </a:pPr>
-            <a:r>
-              <a:rPr lang="en-US" sz="800" dirty="0">
-                <a:solidFill>
-                  <a:srgbClr val="6B7280"/>
-                </a:solidFill>
-                <a:latin typeface="Calibri" pitchFamily="34" charset="0"/>
-                <a:ea typeface="Calibri" pitchFamily="34" charset="-122"/>
-                <a:cs typeface="Calibri" pitchFamily="34" charset="-120"/>
-              </a:rPr>
-              <a:t>Sources: Dunning (1988); University of Greenwich (2026d).</a:t>
-            </a:r>
-            <a:endParaRPr lang="en-US" sz="800" dirty="0"/>
-          </a:p>
-        </p:txBody>
-      </p:sp>
-    </p:spTree>
-  </p:cSld>
-  <p:clrMapOvr>
-    <a:masterClrMapping/>
-  </p:clrMapOvr>
-</p:sld>
-</file>
-
-<file path=ppt/slides/slide11.xml><?xml version="1.0" encoding="utf-8"?>
-<p:sld xmlns:a="http://schemas.openxmlformats.org/drawingml/2006/main" xmlns:r="http://schemas.openxmlformats.org/officeDocument/2006/relationships" xmlns:p="http://schemas.openxmlformats.org/presentationml/2006/main">
-  <p:cSld name="Slide 11">
-    <p:spTree>
-      <p:nvGrpSpPr>
-        <p:cNvPr id="1" name=""/>
-        <p:cNvGrpSpPr/>
-        <p:nvPr/>
-      </p:nvGrpSpPr>
-      <p:grpSpPr>
-        <a:xfrm>
-          <a:off x="0" y="0"/>
-          <a:ext cx="0" cy="0"/>
-          <a:chOff x="0" y="0"/>
-          <a:chExt cx="0" cy="0"/>
-        </a:xfrm>
-      </p:grpSpPr>
-      <p:sp>
-        <p:nvSpPr>
-          <p:cNvPr id="2" name="Shape 0"/>
-          <p:cNvSpPr/>
-          <p:nvPr/>
-        </p:nvSpPr>
-        <p:spPr>
-          <a:xfrm>
-            <a:off x="0" y="0"/>
-            <a:ext cx="109728" cy="5143500"/>
-          </a:xfrm>
-          <a:prstGeom prst="rect">
-            <a:avLst/>
-          </a:prstGeom>
-          <a:solidFill>
-            <a:srgbClr val="7C3AED"/>
-          </a:solidFill>
-          <a:ln/>
-        </p:spPr>
-      </p:sp>
-      <p:sp>
-        <p:nvSpPr>
-          <p:cNvPr id="3" name="Text 1"/>
-          <p:cNvSpPr/>
-          <p:nvPr/>
-        </p:nvSpPr>
-        <p:spPr>
-          <a:xfrm>
-            <a:off x="4480560" y="109728"/>
-            <a:ext cx="4389120" cy="219456"/>
-          </a:xfrm>
-          <a:prstGeom prst="rect">
-            <a:avLst/>
-          </a:prstGeom>
-          <a:noFill/>
-          <a:ln/>
-        </p:spPr>
-        <p:txBody>
-          <a:bodyPr wrap="square" lIns="0" tIns="0" rIns="0" bIns="0" rtlCol="0" anchor="ctr"/>
-          <a:lstStyle/>
-          <a:p>
-            <a:pPr algn="r" indent="0" marL="0">
-              <a:buNone/>
-            </a:pPr>
-            <a:r>
-              <a:rPr lang="en-US" sz="1000" b="1" dirty="0">
-                <a:solidFill>
-                  <a:srgbClr val="7C3AED"/>
-                </a:solidFill>
-                <a:latin typeface="Calibri" pitchFamily="34" charset="0"/>
-                <a:ea typeface="Calibri" pitchFamily="34" charset="-122"/>
-                <a:cs typeface="Calibri" pitchFamily="34" charset="-120"/>
-              </a:rPr>
-              <a:t>Speaker 4 · FDI</a:t>
-            </a:r>
-            <a:endParaRPr lang="en-US" sz="1000" dirty="0"/>
-          </a:p>
-        </p:txBody>
-      </p:sp>
-      <p:sp>
-        <p:nvSpPr>
-          <p:cNvPr id="4" name="Text 2"/>
-          <p:cNvSpPr/>
-          <p:nvPr/>
-        </p:nvSpPr>
-        <p:spPr>
-          <a:xfrm>
-            <a:off x="411480" y="292608"/>
-            <a:ext cx="8321040" cy="548640"/>
-          </a:xfrm>
-          <a:prstGeom prst="rect">
-            <a:avLst/>
-          </a:prstGeom>
-          <a:noFill/>
-          <a:ln/>
-        </p:spPr>
-        <p:txBody>
-          <a:bodyPr wrap="square" lIns="0" tIns="0" rIns="0" bIns="0" rtlCol="0" anchor="ctr"/>
-          <a:lstStyle/>
-          <a:p>
-            <a:pPr indent="0" marL="0">
-              <a:buNone/>
-            </a:pPr>
-            <a:r>
-              <a:rPr lang="en-US" sz="2500" b="1" dirty="0">
-                <a:solidFill>
-                  <a:srgbClr val="1A1F36"/>
-                </a:solidFill>
-                <a:latin typeface="Calibri" pitchFamily="34" charset="0"/>
-                <a:ea typeface="Calibri" pitchFamily="34" charset="-122"/>
-                <a:cs typeface="Calibri" pitchFamily="34" charset="-120"/>
-              </a:rPr>
-              <a:t>Why the United States? Unilever and OLI</a:t>
-            </a:r>
-            <a:endParaRPr lang="en-US" sz="2500" dirty="0"/>
-          </a:p>
-        </p:txBody>
-      </p:sp>
-      <p:sp>
-        <p:nvSpPr>
-          <p:cNvPr id="5" name="Text 3"/>
-          <p:cNvSpPr/>
-          <p:nvPr/>
-        </p:nvSpPr>
-        <p:spPr>
-          <a:xfrm>
-            <a:off x="411480" y="822960"/>
-            <a:ext cx="8321040" cy="292608"/>
-          </a:xfrm>
-          <a:prstGeom prst="rect">
-            <a:avLst/>
-          </a:prstGeom>
-          <a:noFill/>
-          <a:ln/>
-        </p:spPr>
-        <p:txBody>
-          <a:bodyPr wrap="square" lIns="0" tIns="0" rIns="0" bIns="0" rtlCol="0" anchor="ctr"/>
-          <a:lstStyle/>
-          <a:p>
-            <a:pPr indent="0" marL="0">
-              <a:buNone/>
-            </a:pPr>
-            <a:r>
-              <a:rPr lang="en-US" sz="1300" i="1" dirty="0">
-                <a:solidFill>
-                  <a:srgbClr val="6B7280"/>
-                </a:solidFill>
-                <a:latin typeface="Calibri" pitchFamily="34" charset="0"/>
-                <a:ea typeface="Calibri" pitchFamily="34" charset="-122"/>
-                <a:cs typeface="Calibri" pitchFamily="34" charset="-120"/>
-              </a:rPr>
-              <a:t>The US: world's largest FDI host ($279bn in 2024) and Unilever's biggest market</a:t>
+              <a:t>CSR framework: the Unilever Compass (from Mar 2021)</a:t>
             </a:r>
             <a:endParaRPr lang="en-US" sz="1300" dirty="0"/>
           </a:p>
@@ -3966,497 +3355,7 @@
       </p:sp>
       <p:graphicFrame>
         <p:nvGraphicFramePr>
-          <p:cNvPr id="6" name="Chart 0" descr=""/>
-          <p:cNvGraphicFramePr/>
-          <p:nvPr/>
-        </p:nvGraphicFramePr>
-        <p:xfrm>
-          <a:off x="411480" y="1188720"/>
-          <a:ext cx="4480560" cy="3246120"/>
-        </p:xfrm>
-        <a:graphic xmlns:a="http://schemas.openxmlformats.org/drawingml/2006/main">
-          <a:graphicData uri="http://schemas.openxmlformats.org/drawingml/2006/chart">
-            <c:chart xmlns:c="http://schemas.openxmlformats.org/drawingml/2006/chart" r:id="rId1"/>
-          </a:graphicData>
-        </a:graphic>
-      </p:graphicFrame>
-      <p:sp>
-        <p:nvSpPr>
-          <p:cNvPr id="7" name="Text 4"/>
-          <p:cNvSpPr/>
-          <p:nvPr/>
-        </p:nvSpPr>
-        <p:spPr>
-          <a:xfrm>
-            <a:off x="411480" y="4407408"/>
-            <a:ext cx="4480560" cy="274320"/>
-          </a:xfrm>
-          <a:prstGeom prst="rect">
-            <a:avLst/>
-          </a:prstGeom>
-          <a:noFill/>
-          <a:ln/>
-        </p:spPr>
-        <p:txBody>
-          <a:bodyPr wrap="square" lIns="0" tIns="0" rIns="0" bIns="0" rtlCol="0" anchor="ctr"/>
-          <a:lstStyle/>
-          <a:p>
-            <a:pPr indent="0" marL="0">
-              <a:buNone/>
-            </a:pPr>
-            <a:r>
-              <a:rPr lang="en-US" sz="850" i="1" dirty="0">
-                <a:solidFill>
-                  <a:srgbClr val="6B7280"/>
-                </a:solidFill>
-                <a:latin typeface="Calibri" pitchFamily="34" charset="0"/>
-                <a:ea typeface="Calibri" pitchFamily="34" charset="-122"/>
-                <a:cs typeface="Calibri" pitchFamily="34" charset="-120"/>
-              </a:rPr>
-              <a:t>*2025 excludes Ice Cream (demerged Dec 2025); 2024 on the same basis: €10.4bn. About 1/5 of group turnover.</a:t>
-            </a:r>
-            <a:endParaRPr lang="en-US" sz="850" dirty="0"/>
-          </a:p>
-        </p:txBody>
-      </p:sp>
-      <p:sp>
-        <p:nvSpPr>
-          <p:cNvPr id="8" name="Shape 5"/>
-          <p:cNvSpPr/>
-          <p:nvPr/>
-        </p:nvSpPr>
-        <p:spPr>
-          <a:xfrm>
-            <a:off x="5120640" y="1188720"/>
-            <a:ext cx="3611880" cy="987552"/>
-          </a:xfrm>
-          <a:prstGeom prst="roundRect">
-            <a:avLst>
-              <a:gd name="adj" fmla="val 7407"/>
-            </a:avLst>
-          </a:prstGeom>
-          <a:solidFill>
-            <a:srgbClr val="F3F4F8"/>
-          </a:solidFill>
-          <a:ln/>
-        </p:spPr>
-      </p:sp>
-      <p:sp>
-        <p:nvSpPr>
-          <p:cNvPr id="9" name="Text 6"/>
-          <p:cNvSpPr/>
-          <p:nvPr/>
-        </p:nvSpPr>
-        <p:spPr>
-          <a:xfrm>
-            <a:off x="5257800" y="1188720"/>
-            <a:ext cx="3383280" cy="987552"/>
-          </a:xfrm>
-          <a:prstGeom prst="rect">
-            <a:avLst/>
-          </a:prstGeom>
-          <a:noFill/>
-          <a:ln/>
-        </p:spPr>
-        <p:txBody>
-          <a:bodyPr wrap="square" lIns="0" tIns="0" rIns="0" bIns="0" rtlCol="0" anchor="ctr"/>
-          <a:lstStyle/>
-          <a:p>
-            <a:pPr indent="0" marL="0">
-              <a:buNone/>
-            </a:pPr>
-            <a:r>
-              <a:rPr lang="en-US" sz="1350" b="1" dirty="0">
-                <a:solidFill>
-                  <a:srgbClr val="7C3AED"/>
-                </a:solidFill>
-                <a:latin typeface="Calibri" pitchFamily="34" charset="0"/>
-                <a:ea typeface="Calibri" pitchFamily="34" charset="-122"/>
-                <a:cs typeface="Calibri" pitchFamily="34" charset="-120"/>
-              </a:rPr>
-              <a:t>O · Ownership</a:t>
-            </a:r>
-            <a:endParaRPr lang="en-US" sz="1350" dirty="0"/>
-          </a:p>
-          <a:p>
-            <a:pPr indent="0" marL="0">
-              <a:buNone/>
-            </a:pPr>
-            <a:r>
-              <a:rPr lang="en-US" sz="1150" dirty="0">
-                <a:solidFill>
-                  <a:srgbClr val="1A1F36"/>
-                </a:solidFill>
-                <a:latin typeface="Calibri" pitchFamily="34" charset="0"/>
-                <a:ea typeface="Calibri" pitchFamily="34" charset="-122"/>
-                <a:cs typeface="Calibri" pitchFamily="34" charset="-120"/>
-              </a:rPr>
-              <a:t>Global brands, money and worldwide distribution</a:t>
-            </a:r>
-            <a:endParaRPr lang="en-US" sz="1350" dirty="0"/>
-          </a:p>
-        </p:txBody>
-      </p:sp>
-      <p:sp>
-        <p:nvSpPr>
-          <p:cNvPr id="10" name="Shape 7"/>
-          <p:cNvSpPr/>
-          <p:nvPr/>
-        </p:nvSpPr>
-        <p:spPr>
-          <a:xfrm>
-            <a:off x="5120640" y="2304288"/>
-            <a:ext cx="3611880" cy="987552"/>
-          </a:xfrm>
-          <a:prstGeom prst="roundRect">
-            <a:avLst>
-              <a:gd name="adj" fmla="val 7407"/>
-            </a:avLst>
-          </a:prstGeom>
-          <a:solidFill>
-            <a:srgbClr val="F3F4F8"/>
-          </a:solidFill>
-          <a:ln/>
-        </p:spPr>
-      </p:sp>
-      <p:sp>
-        <p:nvSpPr>
-          <p:cNvPr id="11" name="Text 8"/>
-          <p:cNvSpPr/>
-          <p:nvPr/>
-        </p:nvSpPr>
-        <p:spPr>
-          <a:xfrm>
-            <a:off x="5257800" y="2304288"/>
-            <a:ext cx="3383280" cy="987552"/>
-          </a:xfrm>
-          <a:prstGeom prst="rect">
-            <a:avLst/>
-          </a:prstGeom>
-          <a:noFill/>
-          <a:ln/>
-        </p:spPr>
-        <p:txBody>
-          <a:bodyPr wrap="square" lIns="0" tIns="0" rIns="0" bIns="0" rtlCol="0" anchor="ctr"/>
-          <a:lstStyle/>
-          <a:p>
-            <a:pPr indent="0" marL="0">
-              <a:buNone/>
-            </a:pPr>
-            <a:r>
-              <a:rPr lang="en-US" sz="1350" b="1" dirty="0">
-                <a:solidFill>
-                  <a:srgbClr val="7C3AED"/>
-                </a:solidFill>
-                <a:latin typeface="Calibri" pitchFamily="34" charset="0"/>
-                <a:ea typeface="Calibri" pitchFamily="34" charset="-122"/>
-                <a:cs typeface="Calibri" pitchFamily="34" charset="-120"/>
-              </a:rPr>
-              <a:t>L · Location</a:t>
-            </a:r>
-            <a:endParaRPr lang="en-US" sz="1350" dirty="0"/>
-          </a:p>
-          <a:p>
-            <a:pPr indent="0" marL="0">
-              <a:buNone/>
-            </a:pPr>
-            <a:r>
-              <a:rPr lang="en-US" sz="1150" dirty="0">
-                <a:solidFill>
-                  <a:srgbClr val="1A1F36"/>
-                </a:solidFill>
-                <a:latin typeface="Calibri" pitchFamily="34" charset="0"/>
-                <a:ea typeface="Calibri" pitchFamily="34" charset="-122"/>
-                <a:cs typeface="Calibri" pitchFamily="34" charset="-120"/>
-              </a:rPr>
-              <a:t>Biggest market; many premium and online shoppers</a:t>
-            </a:r>
-            <a:endParaRPr lang="en-US" sz="1350" dirty="0"/>
-          </a:p>
-        </p:txBody>
-      </p:sp>
-      <p:sp>
-        <p:nvSpPr>
-          <p:cNvPr id="12" name="Shape 9"/>
-          <p:cNvSpPr/>
-          <p:nvPr/>
-        </p:nvSpPr>
-        <p:spPr>
-          <a:xfrm>
-            <a:off x="5120640" y="3419856"/>
-            <a:ext cx="3611880" cy="987552"/>
-          </a:xfrm>
-          <a:prstGeom prst="roundRect">
-            <a:avLst>
-              <a:gd name="adj" fmla="val 7407"/>
-            </a:avLst>
-          </a:prstGeom>
-          <a:solidFill>
-            <a:srgbClr val="F3F4F8"/>
-          </a:solidFill>
-          <a:ln/>
-        </p:spPr>
-      </p:sp>
-      <p:sp>
-        <p:nvSpPr>
-          <p:cNvPr id="13" name="Text 10"/>
-          <p:cNvSpPr/>
-          <p:nvPr/>
-        </p:nvSpPr>
-        <p:spPr>
-          <a:xfrm>
-            <a:off x="5257800" y="3419856"/>
-            <a:ext cx="3383280" cy="987552"/>
-          </a:xfrm>
-          <a:prstGeom prst="rect">
-            <a:avLst/>
-          </a:prstGeom>
-          <a:noFill/>
-          <a:ln/>
-        </p:spPr>
-        <p:txBody>
-          <a:bodyPr wrap="square" lIns="0" tIns="0" rIns="0" bIns="0" rtlCol="0" anchor="ctr"/>
-          <a:lstStyle/>
-          <a:p>
-            <a:pPr indent="0" marL="0">
-              <a:buNone/>
-            </a:pPr>
-            <a:r>
-              <a:rPr lang="en-US" sz="1350" b="1" dirty="0">
-                <a:solidFill>
-                  <a:srgbClr val="7C3AED"/>
-                </a:solidFill>
-                <a:latin typeface="Calibri" pitchFamily="34" charset="0"/>
-                <a:ea typeface="Calibri" pitchFamily="34" charset="-122"/>
-                <a:cs typeface="Calibri" pitchFamily="34" charset="-120"/>
-              </a:rPr>
-              <a:t>I · Internalisation</a:t>
-            </a:r>
-            <a:endParaRPr lang="en-US" sz="1350" dirty="0"/>
-          </a:p>
-          <a:p>
-            <a:pPr indent="0" marL="0">
-              <a:buNone/>
-            </a:pPr>
-            <a:r>
-              <a:rPr lang="en-US" sz="1150" dirty="0">
-                <a:solidFill>
-                  <a:srgbClr val="1A1F36"/>
-                </a:solidFill>
-                <a:latin typeface="Calibri" pitchFamily="34" charset="0"/>
-                <a:ea typeface="Calibri" pitchFamily="34" charset="-122"/>
-                <a:cs typeface="Calibri" pitchFamily="34" charset="-120"/>
-              </a:rPr>
-              <a:t>Owns the brands to control them and take them abroad (Nutrafol → Canada, 2023)</a:t>
-            </a:r>
-            <a:endParaRPr lang="en-US" sz="1350" dirty="0"/>
-          </a:p>
-        </p:txBody>
-      </p:sp>
-      <p:sp>
-        <p:nvSpPr>
-          <p:cNvPr id="14" name="Text 11"/>
-          <p:cNvSpPr/>
-          <p:nvPr/>
-        </p:nvSpPr>
-        <p:spPr>
-          <a:xfrm>
-            <a:off x="411480" y="4736592"/>
-            <a:ext cx="8321040" cy="274320"/>
-          </a:xfrm>
-          <a:prstGeom prst="rect">
-            <a:avLst/>
-          </a:prstGeom>
-          <a:noFill/>
-          <a:ln/>
-        </p:spPr>
-        <p:txBody>
-          <a:bodyPr wrap="square" lIns="0" tIns="0" rIns="0" bIns="0" rtlCol="0" anchor="b"/>
-          <a:lstStyle/>
-          <a:p>
-            <a:pPr indent="0" marL="0">
-              <a:buNone/>
-            </a:pPr>
-            <a:r>
-              <a:rPr lang="en-US" sz="800" dirty="0">
-                <a:solidFill>
-                  <a:srgbClr val="6B7280"/>
-                </a:solidFill>
-                <a:latin typeface="Calibri" pitchFamily="34" charset="0"/>
-                <a:ea typeface="Calibri" pitchFamily="34" charset="-122"/>
-                <a:cs typeface="Calibri" pitchFamily="34" charset="-120"/>
-              </a:rPr>
-              <a:t>Sources: Unilever PLC (2022; 2023a; 2024; 2025a; 2026a); UNCTAD (2025).</a:t>
-            </a:r>
-            <a:endParaRPr lang="en-US" sz="800" dirty="0"/>
-          </a:p>
-        </p:txBody>
-      </p:sp>
-    </p:spTree>
-  </p:cSld>
-  <p:clrMapOvr>
-    <a:masterClrMapping/>
-  </p:clrMapOvr>
-</p:sld>
-</file>
-
-<file path=ppt/slides/slide12.xml><?xml version="1.0" encoding="utf-8"?>
-<p:sld xmlns:a="http://schemas.openxmlformats.org/drawingml/2006/main" xmlns:r="http://schemas.openxmlformats.org/officeDocument/2006/relationships" xmlns:p="http://schemas.openxmlformats.org/presentationml/2006/main">
-  <p:cSld name="Slide 12">
-    <p:spTree>
-      <p:nvGrpSpPr>
-        <p:cNvPr id="1" name=""/>
-        <p:cNvGrpSpPr/>
-        <p:nvPr/>
-      </p:nvGrpSpPr>
-      <p:grpSpPr>
-        <a:xfrm>
-          <a:off x="0" y="0"/>
-          <a:ext cx="0" cy="0"/>
-          <a:chOff x="0" y="0"/>
-          <a:chExt cx="0" cy="0"/>
-        </a:xfrm>
-      </p:grpSpPr>
-      <p:sp>
-        <p:nvSpPr>
-          <p:cNvPr id="2" name="Shape 0"/>
-          <p:cNvSpPr/>
-          <p:nvPr/>
-        </p:nvSpPr>
-        <p:spPr>
-          <a:xfrm>
-            <a:off x="0" y="0"/>
-            <a:ext cx="109728" cy="5143500"/>
-          </a:xfrm>
-          <a:prstGeom prst="rect">
-            <a:avLst/>
-          </a:prstGeom>
-          <a:solidFill>
-            <a:srgbClr val="7C3AED"/>
-          </a:solidFill>
-          <a:ln/>
-        </p:spPr>
-      </p:sp>
-      <p:sp>
-        <p:nvSpPr>
-          <p:cNvPr id="3" name="Text 1"/>
-          <p:cNvSpPr/>
-          <p:nvPr/>
-        </p:nvSpPr>
-        <p:spPr>
-          <a:xfrm>
-            <a:off x="4480560" y="109728"/>
-            <a:ext cx="4389120" cy="219456"/>
-          </a:xfrm>
-          <a:prstGeom prst="rect">
-            <a:avLst/>
-          </a:prstGeom>
-          <a:noFill/>
-          <a:ln/>
-        </p:spPr>
-        <p:txBody>
-          <a:bodyPr wrap="square" lIns="0" tIns="0" rIns="0" bIns="0" rtlCol="0" anchor="ctr"/>
-          <a:lstStyle/>
-          <a:p>
-            <a:pPr algn="r" indent="0" marL="0">
-              <a:buNone/>
-            </a:pPr>
-            <a:r>
-              <a:rPr lang="en-US" sz="1000" b="1" dirty="0">
-                <a:solidFill>
-                  <a:srgbClr val="7C3AED"/>
-                </a:solidFill>
-                <a:latin typeface="Calibri" pitchFamily="34" charset="0"/>
-                <a:ea typeface="Calibri" pitchFamily="34" charset="-122"/>
-                <a:cs typeface="Calibri" pitchFamily="34" charset="-120"/>
-              </a:rPr>
-              <a:t>Speaker 4 · FDI</a:t>
-            </a:r>
-            <a:endParaRPr lang="en-US" sz="1000" dirty="0"/>
-          </a:p>
-        </p:txBody>
-      </p:sp>
-      <p:sp>
-        <p:nvSpPr>
-          <p:cNvPr id="4" name="Text 2"/>
-          <p:cNvSpPr/>
-          <p:nvPr/>
-        </p:nvSpPr>
-        <p:spPr>
-          <a:xfrm>
-            <a:off x="411480" y="292608"/>
-            <a:ext cx="8321040" cy="548640"/>
-          </a:xfrm>
-          <a:prstGeom prst="rect">
-            <a:avLst/>
-          </a:prstGeom>
-          <a:noFill/>
-          <a:ln/>
-        </p:spPr>
-        <p:txBody>
-          <a:bodyPr wrap="square" lIns="0" tIns="0" rIns="0" bIns="0" rtlCol="0" anchor="ctr"/>
-          <a:lstStyle/>
-          <a:p>
-            <a:pPr indent="0" marL="0">
-              <a:buNone/>
-            </a:pPr>
-            <a:r>
-              <a:rPr lang="en-US" sz="2500" b="1" dirty="0">
-                <a:solidFill>
-                  <a:srgbClr val="1A1F36"/>
-                </a:solidFill>
-                <a:latin typeface="Calibri" pitchFamily="34" charset="0"/>
-                <a:ea typeface="Calibri" pitchFamily="34" charset="-122"/>
-                <a:cs typeface="Calibri" pitchFamily="34" charset="-120"/>
-              </a:rPr>
-              <a:t>Unilever in the US: what each deal brought</a:t>
-            </a:r>
-            <a:endParaRPr lang="en-US" sz="2500" dirty="0"/>
-          </a:p>
-        </p:txBody>
-      </p:sp>
-      <p:sp>
-        <p:nvSpPr>
-          <p:cNvPr id="5" name="Text 3"/>
-          <p:cNvSpPr/>
-          <p:nvPr/>
-        </p:nvSpPr>
-        <p:spPr>
-          <a:xfrm>
-            <a:off x="411480" y="822960"/>
-            <a:ext cx="8321040" cy="292608"/>
-          </a:xfrm>
-          <a:prstGeom prst="rect">
-            <a:avLst/>
-          </a:prstGeom>
-          <a:noFill/>
-          <a:ln/>
-        </p:spPr>
-        <p:txBody>
-          <a:bodyPr wrap="square" lIns="0" tIns="0" rIns="0" bIns="0" rtlCol="0" anchor="ctr"/>
-          <a:lstStyle/>
-          <a:p>
-            <a:pPr indent="0" marL="0">
-              <a:buNone/>
-            </a:pPr>
-            <a:r>
-              <a:rPr lang="en-US" sz="1300" i="1" dirty="0">
-                <a:solidFill>
-                  <a:srgbClr val="6B7280"/>
-                </a:solidFill>
-                <a:latin typeface="Calibri" pitchFamily="34" charset="0"/>
-                <a:ea typeface="Calibri" pitchFamily="34" charset="-122"/>
-                <a:cs typeface="Calibri" pitchFamily="34" charset="-120"/>
-              </a:rPr>
-              <a:t>Mainly M&amp;A = strategic asset-seeking: brands, customers, online skills</a:t>
-            </a:r>
-            <a:endParaRPr lang="en-US" sz="1300" dirty="0"/>
-          </a:p>
-        </p:txBody>
-      </p:sp>
-      <p:graphicFrame>
-        <p:nvGraphicFramePr>
-          <p:cNvPr id="13" name="Table 0"/>
+          <p:cNvPr id="11" name="Table 0"/>
           <p:cNvGraphicFramePr>
             <a:graphicFrameLocks noGrp="1"/>
           </p:cNvGraphicFramePr>
@@ -4546,6 +3445,2950 @@
                       <a:tailEnd type="none" w="med" len="med"/>
                     </a:lnB>
                     <a:solidFill>
+                      <a:srgbClr val="D9822B"/>
+                    </a:solidFill>
+                  </a:tcPr>
+                </a:tc>
+                <a:tc>
+                  <a:txBody>
+                    <a:bodyPr/>
+                    <a:lstStyle/>
+                    <a:p>
+                      <a:pPr indent="0" marL="0">
+                        <a:buNone/>
+                      </a:pPr>
+                      <a:r>
+                        <a:rPr lang="en-US" sz="1000" b="1" dirty="0">
+                          <a:solidFill>
+                            <a:srgbClr val="FFFFFF"/>
+                          </a:solidFill>
+                          <a:latin typeface="Calibri" pitchFamily="34" charset="0"/>
+                          <a:ea typeface="Calibri" pitchFamily="34" charset="-122"/>
+                          <a:cs typeface="Calibri" pitchFamily="34" charset="-120"/>
+                        </a:rPr>
+                        <a:t>What happened</a:t>
+                      </a:r>
+                      <a:endParaRPr lang="en-US" sz="1000" dirty="0">
+                        <a:latin typeface="Calibri" charset="0"/>
+                        <a:ea typeface="Calibri" charset="0"/>
+                        <a:cs typeface="Calibri" charset="0"/>
+                      </a:endParaRPr>
+                    </a:p>
+                  </a:txBody>
+                  <a:tcPr marL="63500" marR="63500" marT="38100" marB="38100" anchor="ctr">
+                    <a:lnL w="6350" cap="flat" cmpd="sng" algn="ctr">
+                      <a:solidFill>
+                        <a:srgbClr val="D1D5DB"/>
+                      </a:solidFill>
+                      <a:prstDash val="solid"/>
+                      <a:round/>
+                      <a:headEnd type="none" w="med" len="med"/>
+                      <a:tailEnd type="none" w="med" len="med"/>
+                    </a:lnL>
+                    <a:lnR w="6350" cap="flat" cmpd="sng" algn="ctr">
+                      <a:solidFill>
+                        <a:srgbClr val="D1D5DB"/>
+                      </a:solidFill>
+                      <a:prstDash val="solid"/>
+                      <a:round/>
+                      <a:headEnd type="none" w="med" len="med"/>
+                      <a:tailEnd type="none" w="med" len="med"/>
+                    </a:lnR>
+                    <a:lnT w="6350" cap="flat" cmpd="sng" algn="ctr">
+                      <a:solidFill>
+                        <a:srgbClr val="D1D5DB"/>
+                      </a:solidFill>
+                      <a:prstDash val="solid"/>
+                      <a:round/>
+                      <a:headEnd type="none" w="med" len="med"/>
+                      <a:tailEnd type="none" w="med" len="med"/>
+                    </a:lnT>
+                    <a:lnB w="6350" cap="flat" cmpd="sng" algn="ctr">
+                      <a:solidFill>
+                        <a:srgbClr val="D1D5DB"/>
+                      </a:solidFill>
+                      <a:prstDash val="solid"/>
+                      <a:round/>
+                      <a:headEnd type="none" w="med" len="med"/>
+                      <a:tailEnd type="none" w="med" len="med"/>
+                    </a:lnB>
+                    <a:solidFill>
+                      <a:srgbClr val="D9822B"/>
+                    </a:solidFill>
+                  </a:tcPr>
+                </a:tc>
+                <a:tc>
+                  <a:txBody>
+                    <a:bodyPr/>
+                    <a:lstStyle/>
+                    <a:p>
+                      <a:pPr indent="0" marL="0">
+                        <a:buNone/>
+                      </a:pPr>
+                      <a:r>
+                        <a:rPr lang="en-US" sz="1000" b="1" dirty="0">
+                          <a:solidFill>
+                            <a:srgbClr val="FFFFFF"/>
+                          </a:solidFill>
+                          <a:latin typeface="Calibri" pitchFamily="34" charset="0"/>
+                          <a:ea typeface="Calibri" pitchFamily="34" charset="-122"/>
+                          <a:cs typeface="Calibri" pitchFamily="34" charset="-120"/>
+                        </a:rPr>
+                        <a:t>What it means for Unilever</a:t>
+                      </a:r>
+                      <a:endParaRPr lang="en-US" sz="1000" dirty="0">
+                        <a:latin typeface="Calibri" charset="0"/>
+                        <a:ea typeface="Calibri" charset="0"/>
+                        <a:cs typeface="Calibri" charset="0"/>
+                      </a:endParaRPr>
+                    </a:p>
+                  </a:txBody>
+                  <a:tcPr marL="63500" marR="63500" marT="38100" marB="38100" anchor="ctr">
+                    <a:lnL w="6350" cap="flat" cmpd="sng" algn="ctr">
+                      <a:solidFill>
+                        <a:srgbClr val="D1D5DB"/>
+                      </a:solidFill>
+                      <a:prstDash val="solid"/>
+                      <a:round/>
+                      <a:headEnd type="none" w="med" len="med"/>
+                      <a:tailEnd type="none" w="med" len="med"/>
+                    </a:lnL>
+                    <a:lnR w="6350" cap="flat" cmpd="sng" algn="ctr">
+                      <a:solidFill>
+                        <a:srgbClr val="D1D5DB"/>
+                      </a:solidFill>
+                      <a:prstDash val="solid"/>
+                      <a:round/>
+                      <a:headEnd type="none" w="med" len="med"/>
+                      <a:tailEnd type="none" w="med" len="med"/>
+                    </a:lnR>
+                    <a:lnT w="6350" cap="flat" cmpd="sng" algn="ctr">
+                      <a:solidFill>
+                        <a:srgbClr val="D1D5DB"/>
+                      </a:solidFill>
+                      <a:prstDash val="solid"/>
+                      <a:round/>
+                      <a:headEnd type="none" w="med" len="med"/>
+                      <a:tailEnd type="none" w="med" len="med"/>
+                    </a:lnT>
+                    <a:lnB w="6350" cap="flat" cmpd="sng" algn="ctr">
+                      <a:solidFill>
+                        <a:srgbClr val="D1D5DB"/>
+                      </a:solidFill>
+                      <a:prstDash val="solid"/>
+                      <a:round/>
+                      <a:headEnd type="none" w="med" len="med"/>
+                      <a:tailEnd type="none" w="med" len="med"/>
+                    </a:lnB>
+                    <a:solidFill>
+                      <a:srgbClr val="D9822B"/>
+                    </a:solidFill>
+                  </a:tcPr>
+                </a:tc>
+              </a:tr>
+              <a:tr h="0">
+                <a:tc>
+                  <a:txBody>
+                    <a:bodyPr/>
+                    <a:lstStyle/>
+                    <a:p>
+                      <a:pPr indent="0" marL="0">
+                        <a:buNone/>
+                      </a:pPr>
+                      <a:r>
+                        <a:rPr lang="en-US" sz="1000" b="1" dirty="0">
+                          <a:solidFill>
+                            <a:srgbClr val="D9822B"/>
+                          </a:solidFill>
+                          <a:latin typeface="Calibri" pitchFamily="34" charset="0"/>
+                          <a:ea typeface="Calibri" pitchFamily="34" charset="-122"/>
+                          <a:cs typeface="Calibri" pitchFamily="34" charset="-120"/>
+                        </a:rPr>
+                        <a:t>Jun 2020</a:t>
+                      </a:r>
+                      <a:endParaRPr lang="en-US" sz="1000" dirty="0">
+                        <a:latin typeface="Calibri" charset="0"/>
+                        <a:ea typeface="Calibri" charset="0"/>
+                        <a:cs typeface="Calibri" charset="0"/>
+                      </a:endParaRPr>
+                    </a:p>
+                  </a:txBody>
+                  <a:tcPr marL="63500" marR="63500" marT="38100" marB="38100" anchor="ctr">
+                    <a:lnL w="6350" cap="flat" cmpd="sng" algn="ctr">
+                      <a:solidFill>
+                        <a:srgbClr val="D1D5DB"/>
+                      </a:solidFill>
+                      <a:prstDash val="solid"/>
+                      <a:round/>
+                      <a:headEnd type="none" w="med" len="med"/>
+                      <a:tailEnd type="none" w="med" len="med"/>
+                    </a:lnL>
+                    <a:lnR w="6350" cap="flat" cmpd="sng" algn="ctr">
+                      <a:solidFill>
+                        <a:srgbClr val="D1D5DB"/>
+                      </a:solidFill>
+                      <a:prstDash val="solid"/>
+                      <a:round/>
+                      <a:headEnd type="none" w="med" len="med"/>
+                      <a:tailEnd type="none" w="med" len="med"/>
+                    </a:lnR>
+                    <a:lnT w="6350" cap="flat" cmpd="sng" algn="ctr">
+                      <a:solidFill>
+                        <a:srgbClr val="D1D5DB"/>
+                      </a:solidFill>
+                      <a:prstDash val="solid"/>
+                      <a:round/>
+                      <a:headEnd type="none" w="med" len="med"/>
+                      <a:tailEnd type="none" w="med" len="med"/>
+                    </a:lnT>
+                    <a:lnB w="6350" cap="flat" cmpd="sng" algn="ctr">
+                      <a:solidFill>
+                        <a:srgbClr val="D1D5DB"/>
+                      </a:solidFill>
+                      <a:prstDash val="solid"/>
+                      <a:round/>
+                      <a:headEnd type="none" w="med" len="med"/>
+                      <a:tailEnd type="none" w="med" len="med"/>
+                    </a:lnB>
+                    <a:solidFill>
+                      <a:srgbClr val="FFFFFF"/>
+                    </a:solidFill>
+                  </a:tcPr>
+                </a:tc>
+                <a:tc>
+                  <a:txBody>
+                    <a:bodyPr/>
+                    <a:lstStyle/>
+                    <a:p>
+                      <a:pPr indent="0" marL="0">
+                        <a:buNone/>
+                      </a:pPr>
+                      <a:r>
+                        <a:rPr lang="en-US" sz="1000" dirty="0">
+                          <a:solidFill>
+                            <a:srgbClr val="1A1F36"/>
+                          </a:solidFill>
+                          <a:latin typeface="Calibri" pitchFamily="34" charset="0"/>
+                          <a:ea typeface="Calibri" pitchFamily="34" charset="-122"/>
+                          <a:cs typeface="Calibri" pitchFamily="34" charset="-120"/>
+                        </a:rPr>
+                        <a:t>Commits to net zero emissions by 2039; €1bn Climate &amp; Nature Fund</a:t>
+                      </a:r>
+                      <a:endParaRPr lang="en-US" sz="1000" dirty="0">
+                        <a:latin typeface="Calibri" charset="0"/>
+                        <a:ea typeface="Calibri" charset="0"/>
+                        <a:cs typeface="Calibri" charset="0"/>
+                      </a:endParaRPr>
+                    </a:p>
+                  </a:txBody>
+                  <a:tcPr marL="63500" marR="63500" marT="38100" marB="38100" anchor="ctr">
+                    <a:lnL w="6350" cap="flat" cmpd="sng" algn="ctr">
+                      <a:solidFill>
+                        <a:srgbClr val="D1D5DB"/>
+                      </a:solidFill>
+                      <a:prstDash val="solid"/>
+                      <a:round/>
+                      <a:headEnd type="none" w="med" len="med"/>
+                      <a:tailEnd type="none" w="med" len="med"/>
+                    </a:lnL>
+                    <a:lnR w="6350" cap="flat" cmpd="sng" algn="ctr">
+                      <a:solidFill>
+                        <a:srgbClr val="D1D5DB"/>
+                      </a:solidFill>
+                      <a:prstDash val="solid"/>
+                      <a:round/>
+                      <a:headEnd type="none" w="med" len="med"/>
+                      <a:tailEnd type="none" w="med" len="med"/>
+                    </a:lnR>
+                    <a:lnT w="6350" cap="flat" cmpd="sng" algn="ctr">
+                      <a:solidFill>
+                        <a:srgbClr val="D1D5DB"/>
+                      </a:solidFill>
+                      <a:prstDash val="solid"/>
+                      <a:round/>
+                      <a:headEnd type="none" w="med" len="med"/>
+                      <a:tailEnd type="none" w="med" len="med"/>
+                    </a:lnT>
+                    <a:lnB w="6350" cap="flat" cmpd="sng" algn="ctr">
+                      <a:solidFill>
+                        <a:srgbClr val="D1D5DB"/>
+                      </a:solidFill>
+                      <a:prstDash val="solid"/>
+                      <a:round/>
+                      <a:headEnd type="none" w="med" len="med"/>
+                      <a:tailEnd type="none" w="med" len="med"/>
+                    </a:lnB>
+                    <a:solidFill>
+                      <a:srgbClr val="FFFFFF"/>
+                    </a:solidFill>
+                  </a:tcPr>
+                </a:tc>
+                <a:tc>
+                  <a:txBody>
+                    <a:bodyPr/>
+                    <a:lstStyle/>
+                    <a:p>
+                      <a:pPr indent="0" marL="0">
+                        <a:buNone/>
+                      </a:pPr>
+                      <a:r>
+                        <a:rPr lang="en-US" sz="1000" dirty="0">
+                          <a:solidFill>
+                            <a:srgbClr val="1A1F36"/>
+                          </a:solidFill>
+                          <a:latin typeface="Calibri" pitchFamily="34" charset="0"/>
+                          <a:ea typeface="Calibri" pitchFamily="34" charset="-122"/>
+                          <a:cs typeface="Calibri" pitchFamily="34" charset="-120"/>
+                        </a:rPr>
+                        <a:t>Long-term climate goal for the whole value chain</a:t>
+                      </a:r>
+                      <a:endParaRPr lang="en-US" sz="1000" dirty="0">
+                        <a:latin typeface="Calibri" charset="0"/>
+                        <a:ea typeface="Calibri" charset="0"/>
+                        <a:cs typeface="Calibri" charset="0"/>
+                      </a:endParaRPr>
+                    </a:p>
+                  </a:txBody>
+                  <a:tcPr marL="63500" marR="63500" marT="38100" marB="38100" anchor="ctr">
+                    <a:lnL w="6350" cap="flat" cmpd="sng" algn="ctr">
+                      <a:solidFill>
+                        <a:srgbClr val="D1D5DB"/>
+                      </a:solidFill>
+                      <a:prstDash val="solid"/>
+                      <a:round/>
+                      <a:headEnd type="none" w="med" len="med"/>
+                      <a:tailEnd type="none" w="med" len="med"/>
+                    </a:lnL>
+                    <a:lnR w="6350" cap="flat" cmpd="sng" algn="ctr">
+                      <a:solidFill>
+                        <a:srgbClr val="D1D5DB"/>
+                      </a:solidFill>
+                      <a:prstDash val="solid"/>
+                      <a:round/>
+                      <a:headEnd type="none" w="med" len="med"/>
+                      <a:tailEnd type="none" w="med" len="med"/>
+                    </a:lnR>
+                    <a:lnT w="6350" cap="flat" cmpd="sng" algn="ctr">
+                      <a:solidFill>
+                        <a:srgbClr val="D1D5DB"/>
+                      </a:solidFill>
+                      <a:prstDash val="solid"/>
+                      <a:round/>
+                      <a:headEnd type="none" w="med" len="med"/>
+                      <a:tailEnd type="none" w="med" len="med"/>
+                    </a:lnT>
+                    <a:lnB w="6350" cap="flat" cmpd="sng" algn="ctr">
+                      <a:solidFill>
+                        <a:srgbClr val="D1D5DB"/>
+                      </a:solidFill>
+                      <a:prstDash val="solid"/>
+                      <a:round/>
+                      <a:headEnd type="none" w="med" len="med"/>
+                      <a:tailEnd type="none" w="med" len="med"/>
+                    </a:lnB>
+                    <a:solidFill>
+                      <a:srgbClr val="FFFFFF"/>
+                    </a:solidFill>
+                  </a:tcPr>
+                </a:tc>
+              </a:tr>
+              <a:tr h="0">
+                <a:tc>
+                  <a:txBody>
+                    <a:bodyPr/>
+                    <a:lstStyle/>
+                    <a:p>
+                      <a:pPr indent="0" marL="0">
+                        <a:buNone/>
+                      </a:pPr>
+                      <a:r>
+                        <a:rPr lang="en-US" sz="1000" b="1" dirty="0">
+                          <a:solidFill>
+                            <a:srgbClr val="D9822B"/>
+                          </a:solidFill>
+                          <a:latin typeface="Calibri" pitchFamily="34" charset="0"/>
+                          <a:ea typeface="Calibri" pitchFamily="34" charset="-122"/>
+                          <a:cs typeface="Calibri" pitchFamily="34" charset="-120"/>
+                        </a:rPr>
+                        <a:t>May 2021</a:t>
+                      </a:r>
+                      <a:endParaRPr lang="en-US" sz="1000" dirty="0">
+                        <a:latin typeface="Calibri" charset="0"/>
+                        <a:ea typeface="Calibri" charset="0"/>
+                        <a:cs typeface="Calibri" charset="0"/>
+                      </a:endParaRPr>
+                    </a:p>
+                  </a:txBody>
+                  <a:tcPr marL="63500" marR="63500" marT="38100" marB="38100" anchor="ctr">
+                    <a:lnL w="6350" cap="flat" cmpd="sng" algn="ctr">
+                      <a:solidFill>
+                        <a:srgbClr val="D1D5DB"/>
+                      </a:solidFill>
+                      <a:prstDash val="solid"/>
+                      <a:round/>
+                      <a:headEnd type="none" w="med" len="med"/>
+                      <a:tailEnd type="none" w="med" len="med"/>
+                    </a:lnL>
+                    <a:lnR w="6350" cap="flat" cmpd="sng" algn="ctr">
+                      <a:solidFill>
+                        <a:srgbClr val="D1D5DB"/>
+                      </a:solidFill>
+                      <a:prstDash val="solid"/>
+                      <a:round/>
+                      <a:headEnd type="none" w="med" len="med"/>
+                      <a:tailEnd type="none" w="med" len="med"/>
+                    </a:lnR>
+                    <a:lnT w="6350" cap="flat" cmpd="sng" algn="ctr">
+                      <a:solidFill>
+                        <a:srgbClr val="D1D5DB"/>
+                      </a:solidFill>
+                      <a:prstDash val="solid"/>
+                      <a:round/>
+                      <a:headEnd type="none" w="med" len="med"/>
+                      <a:tailEnd type="none" w="med" len="med"/>
+                    </a:lnT>
+                    <a:lnB w="6350" cap="flat" cmpd="sng" algn="ctr">
+                      <a:solidFill>
+                        <a:srgbClr val="D1D5DB"/>
+                      </a:solidFill>
+                      <a:prstDash val="solid"/>
+                      <a:round/>
+                      <a:headEnd type="none" w="med" len="med"/>
+                      <a:tailEnd type="none" w="med" len="med"/>
+                    </a:lnB>
+                    <a:solidFill>
+                      <a:srgbClr val="FFFFFF"/>
+                    </a:solidFill>
+                  </a:tcPr>
+                </a:tc>
+                <a:tc>
+                  <a:txBody>
+                    <a:bodyPr/>
+                    <a:lstStyle/>
+                    <a:p>
+                      <a:pPr indent="0" marL="0">
+                        <a:buNone/>
+                      </a:pPr>
+                      <a:r>
+                        <a:rPr lang="en-US" sz="1000" dirty="0">
+                          <a:solidFill>
+                            <a:srgbClr val="1A1F36"/>
+                          </a:solidFill>
+                          <a:latin typeface="Calibri" pitchFamily="34" charset="0"/>
+                          <a:ea typeface="Calibri" pitchFamily="34" charset="-122"/>
+                          <a:cs typeface="Calibri" pitchFamily="34" charset="-120"/>
+                        </a:rPr>
+                        <a:t>Shareholders approve its Climate Transition Action Plan (99.59%)</a:t>
+                      </a:r>
+                      <a:endParaRPr lang="en-US" sz="1000" dirty="0">
+                        <a:latin typeface="Calibri" charset="0"/>
+                        <a:ea typeface="Calibri" charset="0"/>
+                        <a:cs typeface="Calibri" charset="0"/>
+                      </a:endParaRPr>
+                    </a:p>
+                  </a:txBody>
+                  <a:tcPr marL="63500" marR="63500" marT="38100" marB="38100" anchor="ctr">
+                    <a:lnL w="6350" cap="flat" cmpd="sng" algn="ctr">
+                      <a:solidFill>
+                        <a:srgbClr val="D1D5DB"/>
+                      </a:solidFill>
+                      <a:prstDash val="solid"/>
+                      <a:round/>
+                      <a:headEnd type="none" w="med" len="med"/>
+                      <a:tailEnd type="none" w="med" len="med"/>
+                    </a:lnL>
+                    <a:lnR w="6350" cap="flat" cmpd="sng" algn="ctr">
+                      <a:solidFill>
+                        <a:srgbClr val="D1D5DB"/>
+                      </a:solidFill>
+                      <a:prstDash val="solid"/>
+                      <a:round/>
+                      <a:headEnd type="none" w="med" len="med"/>
+                      <a:tailEnd type="none" w="med" len="med"/>
+                    </a:lnR>
+                    <a:lnT w="6350" cap="flat" cmpd="sng" algn="ctr">
+                      <a:solidFill>
+                        <a:srgbClr val="D1D5DB"/>
+                      </a:solidFill>
+                      <a:prstDash val="solid"/>
+                      <a:round/>
+                      <a:headEnd type="none" w="med" len="med"/>
+                      <a:tailEnd type="none" w="med" len="med"/>
+                    </a:lnT>
+                    <a:lnB w="6350" cap="flat" cmpd="sng" algn="ctr">
+                      <a:solidFill>
+                        <a:srgbClr val="D1D5DB"/>
+                      </a:solidFill>
+                      <a:prstDash val="solid"/>
+                      <a:round/>
+                      <a:headEnd type="none" w="med" len="med"/>
+                      <a:tailEnd type="none" w="med" len="med"/>
+                    </a:lnB>
+                    <a:solidFill>
+                      <a:srgbClr val="FFFFFF"/>
+                    </a:solidFill>
+                  </a:tcPr>
+                </a:tc>
+                <a:tc>
+                  <a:txBody>
+                    <a:bodyPr/>
+                    <a:lstStyle/>
+                    <a:p>
+                      <a:pPr indent="0" marL="0">
+                        <a:buNone/>
+                      </a:pPr>
+                      <a:r>
+                        <a:rPr lang="en-US" sz="1000" dirty="0">
+                          <a:solidFill>
+                            <a:srgbClr val="1A1F36"/>
+                          </a:solidFill>
+                          <a:latin typeface="Calibri" pitchFamily="34" charset="0"/>
+                          <a:ea typeface="Calibri" pitchFamily="34" charset="-122"/>
+                          <a:cs typeface="Calibri" pitchFamily="34" charset="-120"/>
+                        </a:rPr>
+                        <a:t>Strong investor support</a:t>
+                      </a:r>
+                      <a:endParaRPr lang="en-US" sz="1000" dirty="0">
+                        <a:latin typeface="Calibri" charset="0"/>
+                        <a:ea typeface="Calibri" charset="0"/>
+                        <a:cs typeface="Calibri" charset="0"/>
+                      </a:endParaRPr>
+                    </a:p>
+                  </a:txBody>
+                  <a:tcPr marL="63500" marR="63500" marT="38100" marB="38100" anchor="ctr">
+                    <a:lnL w="6350" cap="flat" cmpd="sng" algn="ctr">
+                      <a:solidFill>
+                        <a:srgbClr val="D1D5DB"/>
+                      </a:solidFill>
+                      <a:prstDash val="solid"/>
+                      <a:round/>
+                      <a:headEnd type="none" w="med" len="med"/>
+                      <a:tailEnd type="none" w="med" len="med"/>
+                    </a:lnL>
+                    <a:lnR w="6350" cap="flat" cmpd="sng" algn="ctr">
+                      <a:solidFill>
+                        <a:srgbClr val="D1D5DB"/>
+                      </a:solidFill>
+                      <a:prstDash val="solid"/>
+                      <a:round/>
+                      <a:headEnd type="none" w="med" len="med"/>
+                      <a:tailEnd type="none" w="med" len="med"/>
+                    </a:lnR>
+                    <a:lnT w="6350" cap="flat" cmpd="sng" algn="ctr">
+                      <a:solidFill>
+                        <a:srgbClr val="D1D5DB"/>
+                      </a:solidFill>
+                      <a:prstDash val="solid"/>
+                      <a:round/>
+                      <a:headEnd type="none" w="med" len="med"/>
+                      <a:tailEnd type="none" w="med" len="med"/>
+                    </a:lnT>
+                    <a:lnB w="6350" cap="flat" cmpd="sng" algn="ctr">
+                      <a:solidFill>
+                        <a:srgbClr val="D1D5DB"/>
+                      </a:solidFill>
+                      <a:prstDash val="solid"/>
+                      <a:round/>
+                      <a:headEnd type="none" w="med" len="med"/>
+                      <a:tailEnd type="none" w="med" len="med"/>
+                    </a:lnB>
+                    <a:solidFill>
+                      <a:srgbClr val="FFFFFF"/>
+                    </a:solidFill>
+                  </a:tcPr>
+                </a:tc>
+              </a:tr>
+              <a:tr h="0">
+                <a:tc>
+                  <a:txBody>
+                    <a:bodyPr/>
+                    <a:lstStyle/>
+                    <a:p>
+                      <a:pPr indent="0" marL="0">
+                        <a:buNone/>
+                      </a:pPr>
+                      <a:r>
+                        <a:rPr lang="en-US" sz="1000" b="1" dirty="0">
+                          <a:solidFill>
+                            <a:srgbClr val="D9822B"/>
+                          </a:solidFill>
+                          <a:latin typeface="Calibri" pitchFamily="34" charset="0"/>
+                          <a:ea typeface="Calibri" pitchFamily="34" charset="-122"/>
+                          <a:cs typeface="Calibri" pitchFamily="34" charset="-120"/>
+                        </a:rPr>
+                        <a:t>Jan 2022</a:t>
+                      </a:r>
+                      <a:endParaRPr lang="en-US" sz="1000" dirty="0">
+                        <a:latin typeface="Calibri" charset="0"/>
+                        <a:ea typeface="Calibri" charset="0"/>
+                        <a:cs typeface="Calibri" charset="0"/>
+                      </a:endParaRPr>
+                    </a:p>
+                  </a:txBody>
+                  <a:tcPr marL="63500" marR="63500" marT="38100" marB="38100" anchor="ctr">
+                    <a:lnL w="6350" cap="flat" cmpd="sng" algn="ctr">
+                      <a:solidFill>
+                        <a:srgbClr val="D1D5DB"/>
+                      </a:solidFill>
+                      <a:prstDash val="solid"/>
+                      <a:round/>
+                      <a:headEnd type="none" w="med" len="med"/>
+                      <a:tailEnd type="none" w="med" len="med"/>
+                    </a:lnL>
+                    <a:lnR w="6350" cap="flat" cmpd="sng" algn="ctr">
+                      <a:solidFill>
+                        <a:srgbClr val="D1D5DB"/>
+                      </a:solidFill>
+                      <a:prstDash val="solid"/>
+                      <a:round/>
+                      <a:headEnd type="none" w="med" len="med"/>
+                      <a:tailEnd type="none" w="med" len="med"/>
+                    </a:lnR>
+                    <a:lnT w="6350" cap="flat" cmpd="sng" algn="ctr">
+                      <a:solidFill>
+                        <a:srgbClr val="D1D5DB"/>
+                      </a:solidFill>
+                      <a:prstDash val="solid"/>
+                      <a:round/>
+                      <a:headEnd type="none" w="med" len="med"/>
+                      <a:tailEnd type="none" w="med" len="med"/>
+                    </a:lnT>
+                    <a:lnB w="6350" cap="flat" cmpd="sng" algn="ctr">
+                      <a:solidFill>
+                        <a:srgbClr val="D1D5DB"/>
+                      </a:solidFill>
+                      <a:prstDash val="solid"/>
+                      <a:round/>
+                      <a:headEnd type="none" w="med" len="med"/>
+                      <a:tailEnd type="none" w="med" len="med"/>
+                    </a:lnB>
+                    <a:solidFill>
+                      <a:srgbClr val="FFFFFF"/>
+                    </a:solidFill>
+                  </a:tcPr>
+                </a:tc>
+                <a:tc>
+                  <a:txBody>
+                    <a:bodyPr/>
+                    <a:lstStyle/>
+                    <a:p>
+                      <a:pPr indent="0" marL="0">
+                        <a:buNone/>
+                      </a:pPr>
+                      <a:r>
+                        <a:rPr lang="en-US" sz="1000" dirty="0">
+                          <a:solidFill>
+                            <a:srgbClr val="1A1F36"/>
+                          </a:solidFill>
+                          <a:latin typeface="Calibri" pitchFamily="34" charset="0"/>
+                          <a:ea typeface="Calibri" pitchFamily="34" charset="-122"/>
+                          <a:cs typeface="Calibri" pitchFamily="34" charset="-120"/>
+                        </a:rPr>
+                        <a:t>Fund manager Terry Smith: Unilever has "lost the plot" over purpose</a:t>
+                      </a:r>
+                      <a:endParaRPr lang="en-US" sz="1000" dirty="0">
+                        <a:latin typeface="Calibri" charset="0"/>
+                        <a:ea typeface="Calibri" charset="0"/>
+                        <a:cs typeface="Calibri" charset="0"/>
+                      </a:endParaRPr>
+                    </a:p>
+                  </a:txBody>
+                  <a:tcPr marL="63500" marR="63500" marT="38100" marB="38100" anchor="ctr">
+                    <a:lnL w="6350" cap="flat" cmpd="sng" algn="ctr">
+                      <a:solidFill>
+                        <a:srgbClr val="D1D5DB"/>
+                      </a:solidFill>
+                      <a:prstDash val="solid"/>
+                      <a:round/>
+                      <a:headEnd type="none" w="med" len="med"/>
+                      <a:tailEnd type="none" w="med" len="med"/>
+                    </a:lnL>
+                    <a:lnR w="6350" cap="flat" cmpd="sng" algn="ctr">
+                      <a:solidFill>
+                        <a:srgbClr val="D1D5DB"/>
+                      </a:solidFill>
+                      <a:prstDash val="solid"/>
+                      <a:round/>
+                      <a:headEnd type="none" w="med" len="med"/>
+                      <a:tailEnd type="none" w="med" len="med"/>
+                    </a:lnR>
+                    <a:lnT w="6350" cap="flat" cmpd="sng" algn="ctr">
+                      <a:solidFill>
+                        <a:srgbClr val="D1D5DB"/>
+                      </a:solidFill>
+                      <a:prstDash val="solid"/>
+                      <a:round/>
+                      <a:headEnd type="none" w="med" len="med"/>
+                      <a:tailEnd type="none" w="med" len="med"/>
+                    </a:lnT>
+                    <a:lnB w="6350" cap="flat" cmpd="sng" algn="ctr">
+                      <a:solidFill>
+                        <a:srgbClr val="D1D5DB"/>
+                      </a:solidFill>
+                      <a:prstDash val="solid"/>
+                      <a:round/>
+                      <a:headEnd type="none" w="med" len="med"/>
+                      <a:tailEnd type="none" w="med" len="med"/>
+                    </a:lnB>
+                    <a:solidFill>
+                      <a:srgbClr val="FFFFFF"/>
+                    </a:solidFill>
+                  </a:tcPr>
+                </a:tc>
+                <a:tc>
+                  <a:txBody>
+                    <a:bodyPr/>
+                    <a:lstStyle/>
+                    <a:p>
+                      <a:pPr indent="0" marL="0">
+                        <a:buNone/>
+                      </a:pPr>
+                      <a:r>
+                        <a:rPr lang="en-US" sz="1000" dirty="0">
+                          <a:solidFill>
+                            <a:srgbClr val="1A1F36"/>
+                          </a:solidFill>
+                          <a:latin typeface="Calibri" pitchFamily="34" charset="0"/>
+                          <a:ea typeface="Calibri" pitchFamily="34" charset="-122"/>
+                          <a:cs typeface="Calibri" pitchFamily="34" charset="-120"/>
+                        </a:rPr>
+                        <a:t>Criticism: purpose vs profit</a:t>
+                      </a:r>
+                      <a:endParaRPr lang="en-US" sz="1000" dirty="0">
+                        <a:latin typeface="Calibri" charset="0"/>
+                        <a:ea typeface="Calibri" charset="0"/>
+                        <a:cs typeface="Calibri" charset="0"/>
+                      </a:endParaRPr>
+                    </a:p>
+                  </a:txBody>
+                  <a:tcPr marL="63500" marR="63500" marT="38100" marB="38100" anchor="ctr">
+                    <a:lnL w="6350" cap="flat" cmpd="sng" algn="ctr">
+                      <a:solidFill>
+                        <a:srgbClr val="D1D5DB"/>
+                      </a:solidFill>
+                      <a:prstDash val="solid"/>
+                      <a:round/>
+                      <a:headEnd type="none" w="med" len="med"/>
+                      <a:tailEnd type="none" w="med" len="med"/>
+                    </a:lnL>
+                    <a:lnR w="6350" cap="flat" cmpd="sng" algn="ctr">
+                      <a:solidFill>
+                        <a:srgbClr val="D1D5DB"/>
+                      </a:solidFill>
+                      <a:prstDash val="solid"/>
+                      <a:round/>
+                      <a:headEnd type="none" w="med" len="med"/>
+                      <a:tailEnd type="none" w="med" len="med"/>
+                    </a:lnR>
+                    <a:lnT w="6350" cap="flat" cmpd="sng" algn="ctr">
+                      <a:solidFill>
+                        <a:srgbClr val="D1D5DB"/>
+                      </a:solidFill>
+                      <a:prstDash val="solid"/>
+                      <a:round/>
+                      <a:headEnd type="none" w="med" len="med"/>
+                      <a:tailEnd type="none" w="med" len="med"/>
+                    </a:lnT>
+                    <a:lnB w="6350" cap="flat" cmpd="sng" algn="ctr">
+                      <a:solidFill>
+                        <a:srgbClr val="D1D5DB"/>
+                      </a:solidFill>
+                      <a:prstDash val="solid"/>
+                      <a:round/>
+                      <a:headEnd type="none" w="med" len="med"/>
+                      <a:tailEnd type="none" w="med" len="med"/>
+                    </a:lnB>
+                    <a:solidFill>
+                      <a:srgbClr val="FFFFFF"/>
+                    </a:solidFill>
+                  </a:tcPr>
+                </a:tc>
+              </a:tr>
+              <a:tr h="0">
+                <a:tc>
+                  <a:txBody>
+                    <a:bodyPr/>
+                    <a:lstStyle/>
+                    <a:p>
+                      <a:pPr indent="0" marL="0">
+                        <a:buNone/>
+                      </a:pPr>
+                      <a:r>
+                        <a:rPr lang="en-US" sz="1000" b="1" dirty="0">
+                          <a:solidFill>
+                            <a:srgbClr val="D9822B"/>
+                          </a:solidFill>
+                          <a:latin typeface="Calibri" pitchFamily="34" charset="0"/>
+                          <a:ea typeface="Calibri" pitchFamily="34" charset="-122"/>
+                          <a:cs typeface="Calibri" pitchFamily="34" charset="-120"/>
+                        </a:rPr>
+                        <a:t>Dec 2023</a:t>
+                      </a:r>
+                      <a:endParaRPr lang="en-US" sz="1000" dirty="0">
+                        <a:latin typeface="Calibri" charset="0"/>
+                        <a:ea typeface="Calibri" charset="0"/>
+                        <a:cs typeface="Calibri" charset="0"/>
+                      </a:endParaRPr>
+                    </a:p>
+                  </a:txBody>
+                  <a:tcPr marL="63500" marR="63500" marT="38100" marB="38100" anchor="ctr">
+                    <a:lnL w="6350" cap="flat" cmpd="sng" algn="ctr">
+                      <a:solidFill>
+                        <a:srgbClr val="D1D5DB"/>
+                      </a:solidFill>
+                      <a:prstDash val="solid"/>
+                      <a:round/>
+                      <a:headEnd type="none" w="med" len="med"/>
+                      <a:tailEnd type="none" w="med" len="med"/>
+                    </a:lnL>
+                    <a:lnR w="6350" cap="flat" cmpd="sng" algn="ctr">
+                      <a:solidFill>
+                        <a:srgbClr val="D1D5DB"/>
+                      </a:solidFill>
+                      <a:prstDash val="solid"/>
+                      <a:round/>
+                      <a:headEnd type="none" w="med" len="med"/>
+                      <a:tailEnd type="none" w="med" len="med"/>
+                    </a:lnR>
+                    <a:lnT w="6350" cap="flat" cmpd="sng" algn="ctr">
+                      <a:solidFill>
+                        <a:srgbClr val="D1D5DB"/>
+                      </a:solidFill>
+                      <a:prstDash val="solid"/>
+                      <a:round/>
+                      <a:headEnd type="none" w="med" len="med"/>
+                      <a:tailEnd type="none" w="med" len="med"/>
+                    </a:lnT>
+                    <a:lnB w="6350" cap="flat" cmpd="sng" algn="ctr">
+                      <a:solidFill>
+                        <a:srgbClr val="D1D5DB"/>
+                      </a:solidFill>
+                      <a:prstDash val="solid"/>
+                      <a:round/>
+                      <a:headEnd type="none" w="med" len="med"/>
+                      <a:tailEnd type="none" w="med" len="med"/>
+                    </a:lnB>
+                    <a:solidFill>
+                      <a:srgbClr val="FFFFFF"/>
+                    </a:solidFill>
+                  </a:tcPr>
+                </a:tc>
+                <a:tc>
+                  <a:txBody>
+                    <a:bodyPr/>
+                    <a:lstStyle/>
+                    <a:p>
+                      <a:pPr indent="0" marL="0">
+                        <a:buNone/>
+                      </a:pPr>
+                      <a:r>
+                        <a:rPr lang="en-US" sz="1000" dirty="0">
+                          <a:solidFill>
+                            <a:srgbClr val="1A1F36"/>
+                          </a:solidFill>
+                          <a:latin typeface="Calibri" pitchFamily="34" charset="0"/>
+                          <a:ea typeface="Calibri" pitchFamily="34" charset="-122"/>
+                          <a:cs typeface="Calibri" pitchFamily="34" charset="-120"/>
+                        </a:rPr>
+                        <a:t>UK CMA investigates its green claims; case closed Nov 2024 after Unilever changed some claims</a:t>
+                      </a:r>
+                      <a:endParaRPr lang="en-US" sz="1000" dirty="0">
+                        <a:latin typeface="Calibri" charset="0"/>
+                        <a:ea typeface="Calibri" charset="0"/>
+                        <a:cs typeface="Calibri" charset="0"/>
+                      </a:endParaRPr>
+                    </a:p>
+                  </a:txBody>
+                  <a:tcPr marL="63500" marR="63500" marT="38100" marB="38100" anchor="ctr">
+                    <a:lnL w="6350" cap="flat" cmpd="sng" algn="ctr">
+                      <a:solidFill>
+                        <a:srgbClr val="D1D5DB"/>
+                      </a:solidFill>
+                      <a:prstDash val="solid"/>
+                      <a:round/>
+                      <a:headEnd type="none" w="med" len="med"/>
+                      <a:tailEnd type="none" w="med" len="med"/>
+                    </a:lnL>
+                    <a:lnR w="6350" cap="flat" cmpd="sng" algn="ctr">
+                      <a:solidFill>
+                        <a:srgbClr val="D1D5DB"/>
+                      </a:solidFill>
+                      <a:prstDash val="solid"/>
+                      <a:round/>
+                      <a:headEnd type="none" w="med" len="med"/>
+                      <a:tailEnd type="none" w="med" len="med"/>
+                    </a:lnR>
+                    <a:lnT w="6350" cap="flat" cmpd="sng" algn="ctr">
+                      <a:solidFill>
+                        <a:srgbClr val="D1D5DB"/>
+                      </a:solidFill>
+                      <a:prstDash val="solid"/>
+                      <a:round/>
+                      <a:headEnd type="none" w="med" len="med"/>
+                      <a:tailEnd type="none" w="med" len="med"/>
+                    </a:lnT>
+                    <a:lnB w="6350" cap="flat" cmpd="sng" algn="ctr">
+                      <a:solidFill>
+                        <a:srgbClr val="D1D5DB"/>
+                      </a:solidFill>
+                      <a:prstDash val="solid"/>
+                      <a:round/>
+                      <a:headEnd type="none" w="med" len="med"/>
+                      <a:tailEnd type="none" w="med" len="med"/>
+                    </a:lnB>
+                    <a:solidFill>
+                      <a:srgbClr val="FFFFFF"/>
+                    </a:solidFill>
+                  </a:tcPr>
+                </a:tc>
+                <a:tc>
+                  <a:txBody>
+                    <a:bodyPr/>
+                    <a:lstStyle/>
+                    <a:p>
+                      <a:pPr indent="0" marL="0">
+                        <a:buNone/>
+                      </a:pPr>
+                      <a:r>
+                        <a:rPr lang="en-US" sz="1000" dirty="0">
+                          <a:solidFill>
+                            <a:srgbClr val="1A1F36"/>
+                          </a:solidFill>
+                          <a:latin typeface="Calibri" pitchFamily="34" charset="0"/>
+                          <a:ea typeface="Calibri" pitchFamily="34" charset="-122"/>
+                          <a:cs typeface="Calibri" pitchFamily="34" charset="-120"/>
+                        </a:rPr>
+                        <a:t>Greenwashing risk to its brands</a:t>
+                      </a:r>
+                      <a:endParaRPr lang="en-US" sz="1000" dirty="0">
+                        <a:latin typeface="Calibri" charset="0"/>
+                        <a:ea typeface="Calibri" charset="0"/>
+                        <a:cs typeface="Calibri" charset="0"/>
+                      </a:endParaRPr>
+                    </a:p>
+                  </a:txBody>
+                  <a:tcPr marL="63500" marR="63500" marT="38100" marB="38100" anchor="ctr">
+                    <a:lnL w="6350" cap="flat" cmpd="sng" algn="ctr">
+                      <a:solidFill>
+                        <a:srgbClr val="D1D5DB"/>
+                      </a:solidFill>
+                      <a:prstDash val="solid"/>
+                      <a:round/>
+                      <a:headEnd type="none" w="med" len="med"/>
+                      <a:tailEnd type="none" w="med" len="med"/>
+                    </a:lnL>
+                    <a:lnR w="6350" cap="flat" cmpd="sng" algn="ctr">
+                      <a:solidFill>
+                        <a:srgbClr val="D1D5DB"/>
+                      </a:solidFill>
+                      <a:prstDash val="solid"/>
+                      <a:round/>
+                      <a:headEnd type="none" w="med" len="med"/>
+                      <a:tailEnd type="none" w="med" len="med"/>
+                    </a:lnR>
+                    <a:lnT w="6350" cap="flat" cmpd="sng" algn="ctr">
+                      <a:solidFill>
+                        <a:srgbClr val="D1D5DB"/>
+                      </a:solidFill>
+                      <a:prstDash val="solid"/>
+                      <a:round/>
+                      <a:headEnd type="none" w="med" len="med"/>
+                      <a:tailEnd type="none" w="med" len="med"/>
+                    </a:lnT>
+                    <a:lnB w="6350" cap="flat" cmpd="sng" algn="ctr">
+                      <a:solidFill>
+                        <a:srgbClr val="D1D5DB"/>
+                      </a:solidFill>
+                      <a:prstDash val="solid"/>
+                      <a:round/>
+                      <a:headEnd type="none" w="med" len="med"/>
+                      <a:tailEnd type="none" w="med" len="med"/>
+                    </a:lnB>
+                    <a:solidFill>
+                      <a:srgbClr val="FFFFFF"/>
+                    </a:solidFill>
+                  </a:tcPr>
+                </a:tc>
+              </a:tr>
+              <a:tr h="0">
+                <a:tc>
+                  <a:txBody>
+                    <a:bodyPr/>
+                    <a:lstStyle/>
+                    <a:p>
+                      <a:pPr indent="0" marL="0">
+                        <a:buNone/>
+                      </a:pPr>
+                      <a:r>
+                        <a:rPr lang="en-US" sz="1000" b="1" dirty="0">
+                          <a:solidFill>
+                            <a:srgbClr val="D9822B"/>
+                          </a:solidFill>
+                          <a:latin typeface="Calibri" pitchFamily="34" charset="0"/>
+                          <a:ea typeface="Calibri" pitchFamily="34" charset="-122"/>
+                          <a:cs typeface="Calibri" pitchFamily="34" charset="-120"/>
+                        </a:rPr>
+                        <a:t>Apr 2024</a:t>
+                      </a:r>
+                      <a:endParaRPr lang="en-US" sz="1000" dirty="0">
+                        <a:latin typeface="Calibri" charset="0"/>
+                        <a:ea typeface="Calibri" charset="0"/>
+                        <a:cs typeface="Calibri" charset="0"/>
+                      </a:endParaRPr>
+                    </a:p>
+                  </a:txBody>
+                  <a:tcPr marL="63500" marR="63500" marT="38100" marB="38100" anchor="ctr">
+                    <a:lnL w="6350" cap="flat" cmpd="sng" algn="ctr">
+                      <a:solidFill>
+                        <a:srgbClr val="D1D5DB"/>
+                      </a:solidFill>
+                      <a:prstDash val="solid"/>
+                      <a:round/>
+                      <a:headEnd type="none" w="med" len="med"/>
+                      <a:tailEnd type="none" w="med" len="med"/>
+                    </a:lnL>
+                    <a:lnR w="6350" cap="flat" cmpd="sng" algn="ctr">
+                      <a:solidFill>
+                        <a:srgbClr val="D1D5DB"/>
+                      </a:solidFill>
+                      <a:prstDash val="solid"/>
+                      <a:round/>
+                      <a:headEnd type="none" w="med" len="med"/>
+                      <a:tailEnd type="none" w="med" len="med"/>
+                    </a:lnR>
+                    <a:lnT w="6350" cap="flat" cmpd="sng" algn="ctr">
+                      <a:solidFill>
+                        <a:srgbClr val="D1D5DB"/>
+                      </a:solidFill>
+                      <a:prstDash val="solid"/>
+                      <a:round/>
+                      <a:headEnd type="none" w="med" len="med"/>
+                      <a:tailEnd type="none" w="med" len="med"/>
+                    </a:lnT>
+                    <a:lnB w="6350" cap="flat" cmpd="sng" algn="ctr">
+                      <a:solidFill>
+                        <a:srgbClr val="D1D5DB"/>
+                      </a:solidFill>
+                      <a:prstDash val="solid"/>
+                      <a:round/>
+                      <a:headEnd type="none" w="med" len="med"/>
+                      <a:tailEnd type="none" w="med" len="med"/>
+                    </a:lnB>
+                    <a:solidFill>
+                      <a:srgbClr val="FFFFFF"/>
+                    </a:solidFill>
+                  </a:tcPr>
+                </a:tc>
+                <a:tc>
+                  <a:txBody>
+                    <a:bodyPr/>
+                    <a:lstStyle/>
+                    <a:p>
+                      <a:pPr indent="0" marL="0">
+                        <a:buNone/>
+                      </a:pPr>
+                      <a:r>
+                        <a:rPr lang="en-US" sz="1000" dirty="0">
+                          <a:solidFill>
+                            <a:srgbClr val="1A1F36"/>
+                          </a:solidFill>
+                          <a:latin typeface="Calibri" pitchFamily="34" charset="0"/>
+                          <a:ea typeface="Calibri" pitchFamily="34" charset="-122"/>
+                          <a:cs typeface="Calibri" pitchFamily="34" charset="-120"/>
+                        </a:rPr>
+                        <a:t>Plastic target lowered: virgin plastic −30% by 2026, −40% by 2028 (was −50% by 2025)</a:t>
+                      </a:r>
+                      <a:endParaRPr lang="en-US" sz="1000" dirty="0">
+                        <a:latin typeface="Calibri" charset="0"/>
+                        <a:ea typeface="Calibri" charset="0"/>
+                        <a:cs typeface="Calibri" charset="0"/>
+                      </a:endParaRPr>
+                    </a:p>
+                  </a:txBody>
+                  <a:tcPr marL="63500" marR="63500" marT="38100" marB="38100" anchor="ctr">
+                    <a:lnL w="6350" cap="flat" cmpd="sng" algn="ctr">
+                      <a:solidFill>
+                        <a:srgbClr val="D1D5DB"/>
+                      </a:solidFill>
+                      <a:prstDash val="solid"/>
+                      <a:round/>
+                      <a:headEnd type="none" w="med" len="med"/>
+                      <a:tailEnd type="none" w="med" len="med"/>
+                    </a:lnL>
+                    <a:lnR w="6350" cap="flat" cmpd="sng" algn="ctr">
+                      <a:solidFill>
+                        <a:srgbClr val="D1D5DB"/>
+                      </a:solidFill>
+                      <a:prstDash val="solid"/>
+                      <a:round/>
+                      <a:headEnd type="none" w="med" len="med"/>
+                      <a:tailEnd type="none" w="med" len="med"/>
+                    </a:lnR>
+                    <a:lnT w="6350" cap="flat" cmpd="sng" algn="ctr">
+                      <a:solidFill>
+                        <a:srgbClr val="D1D5DB"/>
+                      </a:solidFill>
+                      <a:prstDash val="solid"/>
+                      <a:round/>
+                      <a:headEnd type="none" w="med" len="med"/>
+                      <a:tailEnd type="none" w="med" len="med"/>
+                    </a:lnT>
+                    <a:lnB w="6350" cap="flat" cmpd="sng" algn="ctr">
+                      <a:solidFill>
+                        <a:srgbClr val="D1D5DB"/>
+                      </a:solidFill>
+                      <a:prstDash val="solid"/>
+                      <a:round/>
+                      <a:headEnd type="none" w="med" len="med"/>
+                      <a:tailEnd type="none" w="med" len="med"/>
+                    </a:lnB>
+                    <a:solidFill>
+                      <a:srgbClr val="FFFFFF"/>
+                    </a:solidFill>
+                  </a:tcPr>
+                </a:tc>
+                <a:tc>
+                  <a:txBody>
+                    <a:bodyPr/>
+                    <a:lstStyle/>
+                    <a:p>
+                      <a:pPr indent="0" marL="0">
+                        <a:buNone/>
+                      </a:pPr>
+                      <a:r>
+                        <a:rPr lang="en-US" sz="1000" dirty="0">
+                          <a:solidFill>
+                            <a:srgbClr val="1A1F36"/>
+                          </a:solidFill>
+                          <a:latin typeface="Calibri" pitchFamily="34" charset="0"/>
+                          <a:ea typeface="Calibri" pitchFamily="34" charset="-122"/>
+                          <a:cs typeface="Calibri" pitchFamily="34" charset="-120"/>
+                        </a:rPr>
+                        <a:t>Setback: only −29% by Dec 2025</a:t>
+                      </a:r>
+                      <a:endParaRPr lang="en-US" sz="1000" dirty="0">
+                        <a:latin typeface="Calibri" charset="0"/>
+                        <a:ea typeface="Calibri" charset="0"/>
+                        <a:cs typeface="Calibri" charset="0"/>
+                      </a:endParaRPr>
+                    </a:p>
+                  </a:txBody>
+                  <a:tcPr marL="63500" marR="63500" marT="38100" marB="38100" anchor="ctr">
+                    <a:lnL w="6350" cap="flat" cmpd="sng" algn="ctr">
+                      <a:solidFill>
+                        <a:srgbClr val="D1D5DB"/>
+                      </a:solidFill>
+                      <a:prstDash val="solid"/>
+                      <a:round/>
+                      <a:headEnd type="none" w="med" len="med"/>
+                      <a:tailEnd type="none" w="med" len="med"/>
+                    </a:lnL>
+                    <a:lnR w="6350" cap="flat" cmpd="sng" algn="ctr">
+                      <a:solidFill>
+                        <a:srgbClr val="D1D5DB"/>
+                      </a:solidFill>
+                      <a:prstDash val="solid"/>
+                      <a:round/>
+                      <a:headEnd type="none" w="med" len="med"/>
+                      <a:tailEnd type="none" w="med" len="med"/>
+                    </a:lnR>
+                    <a:lnT w="6350" cap="flat" cmpd="sng" algn="ctr">
+                      <a:solidFill>
+                        <a:srgbClr val="D1D5DB"/>
+                      </a:solidFill>
+                      <a:prstDash val="solid"/>
+                      <a:round/>
+                      <a:headEnd type="none" w="med" len="med"/>
+                      <a:tailEnd type="none" w="med" len="med"/>
+                    </a:lnT>
+                    <a:lnB w="6350" cap="flat" cmpd="sng" algn="ctr">
+                      <a:solidFill>
+                        <a:srgbClr val="D1D5DB"/>
+                      </a:solidFill>
+                      <a:prstDash val="solid"/>
+                      <a:round/>
+                      <a:headEnd type="none" w="med" len="med"/>
+                      <a:tailEnd type="none" w="med" len="med"/>
+                    </a:lnB>
+                    <a:solidFill>
+                      <a:srgbClr val="FFFFFF"/>
+                    </a:solidFill>
+                  </a:tcPr>
+                </a:tc>
+              </a:tr>
+              <a:tr h="0">
+                <a:tc>
+                  <a:txBody>
+                    <a:bodyPr/>
+                    <a:lstStyle/>
+                    <a:p>
+                      <a:pPr indent="0" marL="0">
+                        <a:buNone/>
+                      </a:pPr>
+                      <a:r>
+                        <a:rPr lang="en-US" sz="1000" b="1" dirty="0">
+                          <a:solidFill>
+                            <a:srgbClr val="D9822B"/>
+                          </a:solidFill>
+                          <a:latin typeface="Calibri" pitchFamily="34" charset="0"/>
+                          <a:ea typeface="Calibri" pitchFamily="34" charset="-122"/>
+                          <a:cs typeface="Calibri" pitchFamily="34" charset="-120"/>
+                        </a:rPr>
+                        <a:t>Dec 2025</a:t>
+                      </a:r>
+                      <a:endParaRPr lang="en-US" sz="1000" dirty="0">
+                        <a:latin typeface="Calibri" charset="0"/>
+                        <a:ea typeface="Calibri" charset="0"/>
+                        <a:cs typeface="Calibri" charset="0"/>
+                      </a:endParaRPr>
+                    </a:p>
+                  </a:txBody>
+                  <a:tcPr marL="63500" marR="63500" marT="38100" marB="38100" anchor="ctr">
+                    <a:lnL w="6350" cap="flat" cmpd="sng" algn="ctr">
+                      <a:solidFill>
+                        <a:srgbClr val="D1D5DB"/>
+                      </a:solidFill>
+                      <a:prstDash val="solid"/>
+                      <a:round/>
+                      <a:headEnd type="none" w="med" len="med"/>
+                      <a:tailEnd type="none" w="med" len="med"/>
+                    </a:lnL>
+                    <a:lnR w="6350" cap="flat" cmpd="sng" algn="ctr">
+                      <a:solidFill>
+                        <a:srgbClr val="D1D5DB"/>
+                      </a:solidFill>
+                      <a:prstDash val="solid"/>
+                      <a:round/>
+                      <a:headEnd type="none" w="med" len="med"/>
+                      <a:tailEnd type="none" w="med" len="med"/>
+                    </a:lnR>
+                    <a:lnT w="6350" cap="flat" cmpd="sng" algn="ctr">
+                      <a:solidFill>
+                        <a:srgbClr val="D1D5DB"/>
+                      </a:solidFill>
+                      <a:prstDash val="solid"/>
+                      <a:round/>
+                      <a:headEnd type="none" w="med" len="med"/>
+                      <a:tailEnd type="none" w="med" len="med"/>
+                    </a:lnT>
+                    <a:lnB w="6350" cap="flat" cmpd="sng" algn="ctr">
+                      <a:solidFill>
+                        <a:srgbClr val="D1D5DB"/>
+                      </a:solidFill>
+                      <a:prstDash val="solid"/>
+                      <a:round/>
+                      <a:headEnd type="none" w="med" len="med"/>
+                      <a:tailEnd type="none" w="med" len="med"/>
+                    </a:lnB>
+                    <a:solidFill>
+                      <a:srgbClr val="FFFFFF"/>
+                    </a:solidFill>
+                  </a:tcPr>
+                </a:tc>
+                <a:tc>
+                  <a:txBody>
+                    <a:bodyPr/>
+                    <a:lstStyle/>
+                    <a:p>
+                      <a:pPr indent="0" marL="0">
+                        <a:buNone/>
+                      </a:pPr>
+                      <a:r>
+                        <a:rPr lang="en-US" sz="1000" dirty="0">
+                          <a:solidFill>
+                            <a:srgbClr val="1A1F36"/>
+                          </a:solidFill>
+                          <a:latin typeface="Calibri" pitchFamily="34" charset="0"/>
+                          <a:ea typeface="Calibri" pitchFamily="34" charset="-122"/>
+                          <a:cs typeface="Calibri" pitchFamily="34" charset="-120"/>
+                        </a:rPr>
+                        <a:t>Own-operation emissions −77% vs 2015</a:t>
+                      </a:r>
+                      <a:endParaRPr lang="en-US" sz="1000" dirty="0">
+                        <a:latin typeface="Calibri" charset="0"/>
+                        <a:ea typeface="Calibri" charset="0"/>
+                        <a:cs typeface="Calibri" charset="0"/>
+                      </a:endParaRPr>
+                    </a:p>
+                  </a:txBody>
+                  <a:tcPr marL="63500" marR="63500" marT="38100" marB="38100" anchor="ctr">
+                    <a:lnL w="6350" cap="flat" cmpd="sng" algn="ctr">
+                      <a:solidFill>
+                        <a:srgbClr val="D1D5DB"/>
+                      </a:solidFill>
+                      <a:prstDash val="solid"/>
+                      <a:round/>
+                      <a:headEnd type="none" w="med" len="med"/>
+                      <a:tailEnd type="none" w="med" len="med"/>
+                    </a:lnL>
+                    <a:lnR w="6350" cap="flat" cmpd="sng" algn="ctr">
+                      <a:solidFill>
+                        <a:srgbClr val="D1D5DB"/>
+                      </a:solidFill>
+                      <a:prstDash val="solid"/>
+                      <a:round/>
+                      <a:headEnd type="none" w="med" len="med"/>
+                      <a:tailEnd type="none" w="med" len="med"/>
+                    </a:lnR>
+                    <a:lnT w="6350" cap="flat" cmpd="sng" algn="ctr">
+                      <a:solidFill>
+                        <a:srgbClr val="D1D5DB"/>
+                      </a:solidFill>
+                      <a:prstDash val="solid"/>
+                      <a:round/>
+                      <a:headEnd type="none" w="med" len="med"/>
+                      <a:tailEnd type="none" w="med" len="med"/>
+                    </a:lnT>
+                    <a:lnB w="6350" cap="flat" cmpd="sng" algn="ctr">
+                      <a:solidFill>
+                        <a:srgbClr val="D1D5DB"/>
+                      </a:solidFill>
+                      <a:prstDash val="solid"/>
+                      <a:round/>
+                      <a:headEnd type="none" w="med" len="med"/>
+                      <a:tailEnd type="none" w="med" len="med"/>
+                    </a:lnB>
+                    <a:solidFill>
+                      <a:srgbClr val="FFFFFF"/>
+                    </a:solidFill>
+                  </a:tcPr>
+                </a:tc>
+                <a:tc>
+                  <a:txBody>
+                    <a:bodyPr/>
+                    <a:lstStyle/>
+                    <a:p>
+                      <a:pPr indent="0" marL="0">
+                        <a:buNone/>
+                      </a:pPr>
+                      <a:r>
+                        <a:rPr lang="en-US" sz="1000" dirty="0">
+                          <a:solidFill>
+                            <a:srgbClr val="1A1F36"/>
+                          </a:solidFill>
+                          <a:latin typeface="Calibri" pitchFamily="34" charset="0"/>
+                          <a:ea typeface="Calibri" pitchFamily="34" charset="-122"/>
+                          <a:cs typeface="Calibri" pitchFamily="34" charset="-120"/>
+                        </a:rPr>
+                        <a:t>Progress on climate</a:t>
+                      </a:r>
+                      <a:endParaRPr lang="en-US" sz="1000" dirty="0">
+                        <a:latin typeface="Calibri" charset="0"/>
+                        <a:ea typeface="Calibri" charset="0"/>
+                        <a:cs typeface="Calibri" charset="0"/>
+                      </a:endParaRPr>
+                    </a:p>
+                  </a:txBody>
+                  <a:tcPr marL="63500" marR="63500" marT="38100" marB="38100" anchor="ctr">
+                    <a:lnL w="6350" cap="flat" cmpd="sng" algn="ctr">
+                      <a:solidFill>
+                        <a:srgbClr val="D1D5DB"/>
+                      </a:solidFill>
+                      <a:prstDash val="solid"/>
+                      <a:round/>
+                      <a:headEnd type="none" w="med" len="med"/>
+                      <a:tailEnd type="none" w="med" len="med"/>
+                    </a:lnL>
+                    <a:lnR w="6350" cap="flat" cmpd="sng" algn="ctr">
+                      <a:solidFill>
+                        <a:srgbClr val="D1D5DB"/>
+                      </a:solidFill>
+                      <a:prstDash val="solid"/>
+                      <a:round/>
+                      <a:headEnd type="none" w="med" len="med"/>
+                      <a:tailEnd type="none" w="med" len="med"/>
+                    </a:lnR>
+                    <a:lnT w="6350" cap="flat" cmpd="sng" algn="ctr">
+                      <a:solidFill>
+                        <a:srgbClr val="D1D5DB"/>
+                      </a:solidFill>
+                      <a:prstDash val="solid"/>
+                      <a:round/>
+                      <a:headEnd type="none" w="med" len="med"/>
+                      <a:tailEnd type="none" w="med" len="med"/>
+                    </a:lnT>
+                    <a:lnB w="6350" cap="flat" cmpd="sng" algn="ctr">
+                      <a:solidFill>
+                        <a:srgbClr val="D1D5DB"/>
+                      </a:solidFill>
+                      <a:prstDash val="solid"/>
+                      <a:round/>
+                      <a:headEnd type="none" w="med" len="med"/>
+                      <a:tailEnd type="none" w="med" len="med"/>
+                    </a:lnB>
+                    <a:solidFill>
+                      <a:srgbClr val="FFFFFF"/>
+                    </a:solidFill>
+                  </a:tcPr>
+                </a:tc>
+              </a:tr>
+            </a:tbl>
+          </a:graphicData>
+        </a:graphic>
+      </p:graphicFrame>
+      <p:sp>
+        <p:nvSpPr>
+          <p:cNvPr id="7" name="Shape 4"/>
+          <p:cNvSpPr/>
+          <p:nvPr/>
+        </p:nvSpPr>
+        <p:spPr>
+          <a:xfrm>
+            <a:off x="411480" y="4224528"/>
+            <a:ext cx="8321040" cy="457200"/>
+          </a:xfrm>
+          <a:prstGeom prst="roundRect">
+            <a:avLst>
+              <a:gd name="adj" fmla="val 12000"/>
+            </a:avLst>
+          </a:prstGeom>
+          <a:solidFill>
+            <a:srgbClr val="F3F4F8"/>
+          </a:solidFill>
+          <a:ln w="12700">
+            <a:solidFill>
+              <a:srgbClr val="D9822B"/>
+            </a:solidFill>
+            <a:prstDash val="solid"/>
+          </a:ln>
+        </p:spPr>
+      </p:sp>
+      <p:sp>
+        <p:nvSpPr>
+          <p:cNvPr id="8" name="Text 5"/>
+          <p:cNvSpPr/>
+          <p:nvPr/>
+        </p:nvSpPr>
+        <p:spPr>
+          <a:xfrm>
+            <a:off x="548640" y="4224528"/>
+            <a:ext cx="8046720" cy="457200"/>
+          </a:xfrm>
+          <a:prstGeom prst="rect">
+            <a:avLst/>
+          </a:prstGeom>
+          <a:noFill/>
+          <a:ln/>
+        </p:spPr>
+        <p:txBody>
+          <a:bodyPr wrap="square" lIns="0" tIns="0" rIns="0" bIns="0" rtlCol="0" anchor="ctr"/>
+          <a:lstStyle/>
+          <a:p>
+            <a:pPr indent="0" marL="0">
+              <a:buNone/>
+            </a:pPr>
+            <a:r>
+              <a:rPr lang="en-US" sz="1150" b="1" dirty="0">
+                <a:solidFill>
+                  <a:srgbClr val="D9822B"/>
+                </a:solidFill>
+                <a:latin typeface="Calibri" pitchFamily="34" charset="0"/>
+                <a:ea typeface="Calibri" pitchFamily="34" charset="-122"/>
+                <a:cs typeface="Calibri" pitchFamily="34" charset="-120"/>
+              </a:rPr>
+              <a:t>So what?  </a:t>
+            </a:r>
+            <a:pPr indent="0" marL="0">
+              <a:buNone/>
+            </a:pPr>
+            <a:r>
+              <a:rPr lang="en-US" sz="1150" dirty="0">
+                <a:solidFill>
+                  <a:srgbClr val="1A1F36"/>
+                </a:solidFill>
+                <a:latin typeface="Calibri" pitchFamily="34" charset="0"/>
+                <a:ea typeface="Calibri" pitchFamily="34" charset="-122"/>
+                <a:cs typeface="Calibri" pitchFamily="34" charset="-120"/>
+              </a:rPr>
+              <a:t>CSR keeps Unilever's licence to operate, but missed targets bring greenwashing claims. Future (company targets, not results): zero own emissions by 2030; net zero by 2039.</a:t>
+            </a:r>
+            <a:endParaRPr lang="en-US" sz="1150" dirty="0"/>
+          </a:p>
+        </p:txBody>
+      </p:sp>
+      <p:sp>
+        <p:nvSpPr>
+          <p:cNvPr id="9" name="Text 6"/>
+          <p:cNvSpPr/>
+          <p:nvPr/>
+        </p:nvSpPr>
+        <p:spPr>
+          <a:xfrm>
+            <a:off x="411480" y="4736592"/>
+            <a:ext cx="8321040" cy="274320"/>
+          </a:xfrm>
+          <a:prstGeom prst="rect">
+            <a:avLst/>
+          </a:prstGeom>
+          <a:noFill/>
+          <a:ln/>
+        </p:spPr>
+        <p:txBody>
+          <a:bodyPr wrap="square" lIns="0" tIns="0" rIns="0" bIns="0" rtlCol="0" anchor="b"/>
+          <a:lstStyle/>
+          <a:p>
+            <a:pPr indent="0" marL="0">
+              <a:buNone/>
+            </a:pPr>
+            <a:r>
+              <a:rPr lang="en-US" sz="800" dirty="0">
+                <a:solidFill>
+                  <a:srgbClr val="6B7280"/>
+                </a:solidFill>
+                <a:latin typeface="Calibri" pitchFamily="34" charset="0"/>
+                <a:ea typeface="Calibri" pitchFamily="34" charset="-122"/>
+                <a:cs typeface="Calibri" pitchFamily="34" charset="-120"/>
+              </a:rPr>
+              <a:t>Sources: Unilever PLC (2021a; 2021b; 2025a; 2026a); FoodNavigator (2022); Grocery Gazette (2024).</a:t>
+            </a:r>
+            <a:endParaRPr lang="en-US" sz="800" dirty="0"/>
+          </a:p>
+        </p:txBody>
+      </p:sp>
+    </p:spTree>
+  </p:cSld>
+  <p:clrMapOvr>
+    <a:masterClrMapping/>
+  </p:clrMapOvr>
+</p:sld>
+</file>
+
+<file path=ppt/slides/slide11.xml><?xml version="1.0" encoding="utf-8"?>
+<p:sld xmlns:a="http://schemas.openxmlformats.org/drawingml/2006/main" xmlns:r="http://schemas.openxmlformats.org/officeDocument/2006/relationships" xmlns:p="http://schemas.openxmlformats.org/presentationml/2006/main">
+  <p:cSld name="Slide 11">
+    <p:spTree>
+      <p:nvGrpSpPr>
+        <p:cNvPr id="1" name=""/>
+        <p:cNvGrpSpPr/>
+        <p:nvPr/>
+      </p:nvGrpSpPr>
+      <p:grpSpPr>
+        <a:xfrm>
+          <a:off x="0" y="0"/>
+          <a:ext cx="0" cy="0"/>
+          <a:chOff x="0" y="0"/>
+          <a:chExt cx="0" cy="0"/>
+        </a:xfrm>
+      </p:grpSpPr>
+      <p:sp>
+        <p:nvSpPr>
+          <p:cNvPr id="2" name="Shape 0"/>
+          <p:cNvSpPr/>
+          <p:nvPr/>
+        </p:nvSpPr>
+        <p:spPr>
+          <a:xfrm>
+            <a:off x="0" y="0"/>
+            <a:ext cx="109728" cy="5143500"/>
+          </a:xfrm>
+          <a:prstGeom prst="rect">
+            <a:avLst/>
+          </a:prstGeom>
+          <a:solidFill>
+            <a:srgbClr val="7C3AED"/>
+          </a:solidFill>
+          <a:ln/>
+        </p:spPr>
+      </p:sp>
+      <p:sp>
+        <p:nvSpPr>
+          <p:cNvPr id="3" name="Text 1"/>
+          <p:cNvSpPr/>
+          <p:nvPr/>
+        </p:nvSpPr>
+        <p:spPr>
+          <a:xfrm>
+            <a:off x="4480560" y="109728"/>
+            <a:ext cx="4389120" cy="219456"/>
+          </a:xfrm>
+          <a:prstGeom prst="rect">
+            <a:avLst/>
+          </a:prstGeom>
+          <a:noFill/>
+          <a:ln/>
+        </p:spPr>
+        <p:txBody>
+          <a:bodyPr wrap="square" lIns="0" tIns="0" rIns="0" bIns="0" rtlCol="0" anchor="ctr"/>
+          <a:lstStyle/>
+          <a:p>
+            <a:pPr algn="r" indent="0" marL="0">
+              <a:buNone/>
+            </a:pPr>
+            <a:r>
+              <a:rPr lang="en-US" sz="1000" b="1" dirty="0">
+                <a:solidFill>
+                  <a:srgbClr val="7C3AED"/>
+                </a:solidFill>
+                <a:latin typeface="Calibri" pitchFamily="34" charset="0"/>
+                <a:ea typeface="Calibri" pitchFamily="34" charset="-122"/>
+                <a:cs typeface="Calibri" pitchFamily="34" charset="-120"/>
+              </a:rPr>
+              <a:t>Speaker 4 · FDI</a:t>
+            </a:r>
+            <a:endParaRPr lang="en-US" sz="1000" dirty="0"/>
+          </a:p>
+        </p:txBody>
+      </p:sp>
+      <p:sp>
+        <p:nvSpPr>
+          <p:cNvPr id="4" name="Text 2"/>
+          <p:cNvSpPr/>
+          <p:nvPr/>
+        </p:nvSpPr>
+        <p:spPr>
+          <a:xfrm>
+            <a:off x="411480" y="292608"/>
+            <a:ext cx="8321040" cy="548640"/>
+          </a:xfrm>
+          <a:prstGeom prst="rect">
+            <a:avLst/>
+          </a:prstGeom>
+          <a:noFill/>
+          <a:ln/>
+        </p:spPr>
+        <p:txBody>
+          <a:bodyPr wrap="square" lIns="0" tIns="0" rIns="0" bIns="0" rtlCol="0" anchor="ctr"/>
+          <a:lstStyle/>
+          <a:p>
+            <a:pPr indent="0" marL="0">
+              <a:buNone/>
+            </a:pPr>
+            <a:r>
+              <a:rPr lang="en-US" sz="2500" b="1" dirty="0">
+                <a:solidFill>
+                  <a:srgbClr val="1A1F36"/>
+                </a:solidFill>
+                <a:latin typeface="Calibri" pitchFamily="34" charset="0"/>
+                <a:ea typeface="Calibri" pitchFamily="34" charset="-122"/>
+                <a:cs typeface="Calibri" pitchFamily="34" charset="-120"/>
+              </a:rPr>
+              <a:t>FDI: why and how firms invest abroad</a:t>
+            </a:r>
+            <a:endParaRPr lang="en-US" sz="2500" dirty="0"/>
+          </a:p>
+        </p:txBody>
+      </p:sp>
+      <p:sp>
+        <p:nvSpPr>
+          <p:cNvPr id="5" name="Text 3"/>
+          <p:cNvSpPr/>
+          <p:nvPr/>
+        </p:nvSpPr>
+        <p:spPr>
+          <a:xfrm>
+            <a:off x="411480" y="822960"/>
+            <a:ext cx="8321040" cy="292608"/>
+          </a:xfrm>
+          <a:prstGeom prst="rect">
+            <a:avLst/>
+          </a:prstGeom>
+          <a:noFill/>
+          <a:ln/>
+        </p:spPr>
+        <p:txBody>
+          <a:bodyPr wrap="square" lIns="0" tIns="0" rIns="0" bIns="0" rtlCol="0" anchor="ctr"/>
+          <a:lstStyle/>
+          <a:p>
+            <a:pPr indent="0" marL="0">
+              <a:buNone/>
+            </a:pPr>
+            <a:r>
+              <a:rPr lang="en-US" sz="1300" i="1" dirty="0">
+                <a:solidFill>
+                  <a:srgbClr val="6B7280"/>
+                </a:solidFill>
+                <a:latin typeface="Calibri" pitchFamily="34" charset="0"/>
+                <a:ea typeface="Calibri" pitchFamily="34" charset="-122"/>
+                <a:cs typeface="Calibri" pitchFamily="34" charset="-120"/>
+              </a:rPr>
+              <a:t>Lecture 3 · Focus country: United States</a:t>
+            </a:r>
+            <a:endParaRPr lang="en-US" sz="1300" dirty="0"/>
+          </a:p>
+        </p:txBody>
+      </p:sp>
+      <p:sp>
+        <p:nvSpPr>
+          <p:cNvPr id="6" name="Shape 4"/>
+          <p:cNvSpPr/>
+          <p:nvPr/>
+        </p:nvSpPr>
+        <p:spPr>
+          <a:xfrm>
+            <a:off x="411480" y="1234440"/>
+            <a:ext cx="8321040" cy="713232"/>
+          </a:xfrm>
+          <a:prstGeom prst="roundRect">
+            <a:avLst>
+              <a:gd name="adj" fmla="val 10256"/>
+            </a:avLst>
+          </a:prstGeom>
+          <a:solidFill>
+            <a:srgbClr val="7C3AED"/>
+          </a:solidFill>
+          <a:ln/>
+        </p:spPr>
+      </p:sp>
+      <p:sp>
+        <p:nvSpPr>
+          <p:cNvPr id="7" name="Text 5"/>
+          <p:cNvSpPr/>
+          <p:nvPr/>
+        </p:nvSpPr>
+        <p:spPr>
+          <a:xfrm>
+            <a:off x="594360" y="1234440"/>
+            <a:ext cx="7955280" cy="713232"/>
+          </a:xfrm>
+          <a:prstGeom prst="rect">
+            <a:avLst/>
+          </a:prstGeom>
+          <a:noFill/>
+          <a:ln/>
+        </p:spPr>
+        <p:txBody>
+          <a:bodyPr wrap="square" lIns="0" tIns="0" rIns="0" bIns="0" rtlCol="0" anchor="ctr"/>
+          <a:lstStyle/>
+          <a:p>
+            <a:pPr indent="0" marL="0">
+              <a:buNone/>
+            </a:pPr>
+            <a:r>
+              <a:rPr lang="en-US" sz="1400" b="1" dirty="0">
+                <a:solidFill>
+                  <a:srgbClr val="FFFFFF"/>
+                </a:solidFill>
+                <a:latin typeface="Calibri" pitchFamily="34" charset="0"/>
+                <a:ea typeface="Calibri" pitchFamily="34" charset="-122"/>
+                <a:cs typeface="Calibri" pitchFamily="34" charset="-120"/>
+              </a:rPr>
+              <a:t>FDI: a company owns and controls a business in another country, by building it (greenfield) or buying it (M&amp;A).</a:t>
+            </a:r>
+            <a:endParaRPr lang="en-US" sz="1400" dirty="0"/>
+          </a:p>
+        </p:txBody>
+      </p:sp>
+      <p:sp>
+        <p:nvSpPr>
+          <p:cNvPr id="8" name="Shape 6"/>
+          <p:cNvSpPr/>
+          <p:nvPr/>
+        </p:nvSpPr>
+        <p:spPr>
+          <a:xfrm>
+            <a:off x="411480" y="2103120"/>
+            <a:ext cx="2651760" cy="2514600"/>
+          </a:xfrm>
+          <a:prstGeom prst="roundRect">
+            <a:avLst>
+              <a:gd name="adj" fmla="val 2909"/>
+            </a:avLst>
+          </a:prstGeom>
+          <a:solidFill>
+            <a:srgbClr val="F3F4F8"/>
+          </a:solidFill>
+          <a:ln/>
+        </p:spPr>
+      </p:sp>
+      <p:sp>
+        <p:nvSpPr>
+          <p:cNvPr id="9" name="Text 7"/>
+          <p:cNvSpPr/>
+          <p:nvPr/>
+        </p:nvSpPr>
+        <p:spPr>
+          <a:xfrm>
+            <a:off x="548640" y="2194560"/>
+            <a:ext cx="2377440" cy="365760"/>
+          </a:xfrm>
+          <a:prstGeom prst="rect">
+            <a:avLst/>
+          </a:prstGeom>
+          <a:noFill/>
+          <a:ln/>
+        </p:spPr>
+        <p:txBody>
+          <a:bodyPr wrap="square" lIns="0" tIns="0" rIns="0" bIns="0" rtlCol="0" anchor="ctr"/>
+          <a:lstStyle/>
+          <a:p>
+            <a:pPr indent="0" marL="0">
+              <a:buNone/>
+            </a:pPr>
+            <a:r>
+              <a:rPr lang="en-US" sz="1350" b="1" dirty="0">
+                <a:solidFill>
+                  <a:srgbClr val="7C3AED"/>
+                </a:solidFill>
+                <a:latin typeface="Calibri" pitchFamily="34" charset="0"/>
+                <a:ea typeface="Calibri" pitchFamily="34" charset="-122"/>
+                <a:cs typeface="Calibri" pitchFamily="34" charset="-120"/>
+              </a:rPr>
+              <a:t>OLI model (Dunning)</a:t>
+            </a:r>
+            <a:endParaRPr lang="en-US" sz="1350" dirty="0"/>
+          </a:p>
+        </p:txBody>
+      </p:sp>
+      <p:sp>
+        <p:nvSpPr>
+          <p:cNvPr id="10" name="Text 8"/>
+          <p:cNvSpPr/>
+          <p:nvPr/>
+        </p:nvSpPr>
+        <p:spPr>
+          <a:xfrm>
+            <a:off x="548640" y="2606040"/>
+            <a:ext cx="2377440" cy="1920240"/>
+          </a:xfrm>
+          <a:prstGeom prst="rect">
+            <a:avLst/>
+          </a:prstGeom>
+          <a:noFill/>
+          <a:ln/>
+        </p:spPr>
+        <p:txBody>
+          <a:bodyPr wrap="square" lIns="0" tIns="0" rIns="0" bIns="0" rtlCol="0" anchor="t"/>
+          <a:lstStyle/>
+          <a:p>
+            <a:pPr marL="342900" indent="-342900">
+              <a:spcAft>
+                <a:spcPts val="400"/>
+              </a:spcAft>
+              <a:buSzPct val="100000"/>
+              <a:buChar char="•"/>
+            </a:pPr>
+            <a:r>
+              <a:rPr lang="en-US" sz="1150" dirty="0">
+                <a:solidFill>
+                  <a:srgbClr val="1A1F36"/>
+                </a:solidFill>
+                <a:latin typeface="Calibri" pitchFamily="34" charset="0"/>
+                <a:ea typeface="Calibri" pitchFamily="34" charset="-122"/>
+                <a:cs typeface="Calibri" pitchFamily="34" charset="-120"/>
+              </a:rPr>
+              <a:t>O – Ownership: brands, technology, money</a:t>
+            </a:r>
+            <a:endParaRPr lang="en-US" sz="1150" dirty="0"/>
+          </a:p>
+          <a:p>
+            <a:pPr marL="342900" indent="-342900">
+              <a:spcAft>
+                <a:spcPts val="400"/>
+              </a:spcAft>
+              <a:buSzPct val="100000"/>
+              <a:buChar char="•"/>
+            </a:pPr>
+            <a:r>
+              <a:rPr lang="en-US" sz="1150" dirty="0">
+                <a:solidFill>
+                  <a:srgbClr val="1A1F36"/>
+                </a:solidFill>
+                <a:latin typeface="Calibri" pitchFamily="34" charset="0"/>
+                <a:ea typeface="Calibri" pitchFamily="34" charset="-122"/>
+                <a:cs typeface="Calibri" pitchFamily="34" charset="-120"/>
+              </a:rPr>
+              <a:t>L – Location: big market, low costs</a:t>
+            </a:r>
+            <a:endParaRPr lang="en-US" sz="1150" dirty="0"/>
+          </a:p>
+          <a:p>
+            <a:pPr marL="342900" indent="-342900">
+              <a:spcAft>
+                <a:spcPts val="400"/>
+              </a:spcAft>
+              <a:buSzPct val="100000"/>
+              <a:buChar char="•"/>
+            </a:pPr>
+            <a:r>
+              <a:rPr lang="en-US" sz="1150" dirty="0">
+                <a:solidFill>
+                  <a:srgbClr val="1A1F36"/>
+                </a:solidFill>
+                <a:latin typeface="Calibri" pitchFamily="34" charset="0"/>
+                <a:ea typeface="Calibri" pitchFamily="34" charset="-122"/>
+                <a:cs typeface="Calibri" pitchFamily="34" charset="-120"/>
+              </a:rPr>
+              <a:t>I – Internalisation: own it, do not license it</a:t>
+            </a:r>
+            <a:endParaRPr lang="en-US" sz="1150" dirty="0"/>
+          </a:p>
+        </p:txBody>
+      </p:sp>
+      <p:sp>
+        <p:nvSpPr>
+          <p:cNvPr id="11" name="Shape 9"/>
+          <p:cNvSpPr/>
+          <p:nvPr/>
+        </p:nvSpPr>
+        <p:spPr>
+          <a:xfrm>
+            <a:off x="3246120" y="2103120"/>
+            <a:ext cx="2651760" cy="2514600"/>
+          </a:xfrm>
+          <a:prstGeom prst="roundRect">
+            <a:avLst>
+              <a:gd name="adj" fmla="val 2909"/>
+            </a:avLst>
+          </a:prstGeom>
+          <a:solidFill>
+            <a:srgbClr val="F3F4F8"/>
+          </a:solidFill>
+          <a:ln/>
+        </p:spPr>
+      </p:sp>
+      <p:sp>
+        <p:nvSpPr>
+          <p:cNvPr id="12" name="Text 10"/>
+          <p:cNvSpPr/>
+          <p:nvPr/>
+        </p:nvSpPr>
+        <p:spPr>
+          <a:xfrm>
+            <a:off x="3383280" y="2194560"/>
+            <a:ext cx="2377440" cy="365760"/>
+          </a:xfrm>
+          <a:prstGeom prst="rect">
+            <a:avLst/>
+          </a:prstGeom>
+          <a:noFill/>
+          <a:ln/>
+        </p:spPr>
+        <p:txBody>
+          <a:bodyPr wrap="square" lIns="0" tIns="0" rIns="0" bIns="0" rtlCol="0" anchor="ctr"/>
+          <a:lstStyle/>
+          <a:p>
+            <a:pPr indent="0" marL="0">
+              <a:buNone/>
+            </a:pPr>
+            <a:r>
+              <a:rPr lang="en-US" sz="1350" b="1" dirty="0">
+                <a:solidFill>
+                  <a:srgbClr val="7C3AED"/>
+                </a:solidFill>
+                <a:latin typeface="Calibri" pitchFamily="34" charset="0"/>
+                <a:ea typeface="Calibri" pitchFamily="34" charset="-122"/>
+                <a:cs typeface="Calibri" pitchFamily="34" charset="-120"/>
+              </a:rPr>
+              <a:t>Four motives</a:t>
+            </a:r>
+            <a:endParaRPr lang="en-US" sz="1350" dirty="0"/>
+          </a:p>
+        </p:txBody>
+      </p:sp>
+      <p:sp>
+        <p:nvSpPr>
+          <p:cNvPr id="13" name="Text 11"/>
+          <p:cNvSpPr/>
+          <p:nvPr/>
+        </p:nvSpPr>
+        <p:spPr>
+          <a:xfrm>
+            <a:off x="3383280" y="2606040"/>
+            <a:ext cx="2377440" cy="1920240"/>
+          </a:xfrm>
+          <a:prstGeom prst="rect">
+            <a:avLst/>
+          </a:prstGeom>
+          <a:noFill/>
+          <a:ln/>
+        </p:spPr>
+        <p:txBody>
+          <a:bodyPr wrap="square" lIns="0" tIns="0" rIns="0" bIns="0" rtlCol="0" anchor="t"/>
+          <a:lstStyle/>
+          <a:p>
+            <a:pPr marL="342900" indent="-342900">
+              <a:spcAft>
+                <a:spcPts val="400"/>
+              </a:spcAft>
+              <a:buSzPct val="100000"/>
+              <a:buChar char="•"/>
+            </a:pPr>
+            <a:r>
+              <a:rPr lang="en-US" sz="1150" dirty="0">
+                <a:solidFill>
+                  <a:srgbClr val="1A1F36"/>
+                </a:solidFill>
+                <a:latin typeface="Calibri" pitchFamily="34" charset="0"/>
+                <a:ea typeface="Calibri" pitchFamily="34" charset="-122"/>
+                <a:cs typeface="Calibri" pitchFamily="34" charset="-120"/>
+              </a:rPr>
+              <a:t>Market-seeking</a:t>
+            </a:r>
+            <a:endParaRPr lang="en-US" sz="1150" dirty="0"/>
+          </a:p>
+          <a:p>
+            <a:pPr marL="342900" indent="-342900">
+              <a:spcAft>
+                <a:spcPts val="400"/>
+              </a:spcAft>
+              <a:buSzPct val="100000"/>
+              <a:buChar char="•"/>
+            </a:pPr>
+            <a:r>
+              <a:rPr lang="en-US" sz="1150" dirty="0">
+                <a:solidFill>
+                  <a:srgbClr val="1A1F36"/>
+                </a:solidFill>
+                <a:latin typeface="Calibri" pitchFamily="34" charset="0"/>
+                <a:ea typeface="Calibri" pitchFamily="34" charset="-122"/>
+                <a:cs typeface="Calibri" pitchFamily="34" charset="-120"/>
+              </a:rPr>
+              <a:t>Resource-seeking</a:t>
+            </a:r>
+            <a:endParaRPr lang="en-US" sz="1150" dirty="0"/>
+          </a:p>
+          <a:p>
+            <a:pPr marL="342900" indent="-342900">
+              <a:spcAft>
+                <a:spcPts val="400"/>
+              </a:spcAft>
+              <a:buSzPct val="100000"/>
+              <a:buChar char="•"/>
+            </a:pPr>
+            <a:r>
+              <a:rPr lang="en-US" sz="1150" dirty="0">
+                <a:solidFill>
+                  <a:srgbClr val="1A1F36"/>
+                </a:solidFill>
+                <a:latin typeface="Calibri" pitchFamily="34" charset="0"/>
+                <a:ea typeface="Calibri" pitchFamily="34" charset="-122"/>
+                <a:cs typeface="Calibri" pitchFamily="34" charset="-120"/>
+              </a:rPr>
+              <a:t>Efficiency-seeking</a:t>
+            </a:r>
+            <a:endParaRPr lang="en-US" sz="1150" dirty="0"/>
+          </a:p>
+          <a:p>
+            <a:pPr marL="342900" indent="-342900">
+              <a:spcAft>
+                <a:spcPts val="400"/>
+              </a:spcAft>
+              <a:buSzPct val="100000"/>
+              <a:buChar char="•"/>
+            </a:pPr>
+            <a:r>
+              <a:rPr lang="en-US" sz="1150" dirty="0">
+                <a:solidFill>
+                  <a:srgbClr val="1A1F36"/>
+                </a:solidFill>
+                <a:latin typeface="Calibri" pitchFamily="34" charset="0"/>
+                <a:ea typeface="Calibri" pitchFamily="34" charset="-122"/>
+                <a:cs typeface="Calibri" pitchFamily="34" charset="-120"/>
+              </a:rPr>
+              <a:t>Strategic asset-seeking</a:t>
+            </a:r>
+            <a:endParaRPr lang="en-US" sz="1150" dirty="0"/>
+          </a:p>
+        </p:txBody>
+      </p:sp>
+      <p:sp>
+        <p:nvSpPr>
+          <p:cNvPr id="14" name="Shape 12"/>
+          <p:cNvSpPr/>
+          <p:nvPr/>
+        </p:nvSpPr>
+        <p:spPr>
+          <a:xfrm>
+            <a:off x="6080760" y="2103120"/>
+            <a:ext cx="2651760" cy="2514600"/>
+          </a:xfrm>
+          <a:prstGeom prst="roundRect">
+            <a:avLst>
+              <a:gd name="adj" fmla="val 2909"/>
+            </a:avLst>
+          </a:prstGeom>
+          <a:solidFill>
+            <a:srgbClr val="F3F4F8"/>
+          </a:solidFill>
+          <a:ln/>
+        </p:spPr>
+      </p:sp>
+      <p:sp>
+        <p:nvSpPr>
+          <p:cNvPr id="15" name="Text 13"/>
+          <p:cNvSpPr/>
+          <p:nvPr/>
+        </p:nvSpPr>
+        <p:spPr>
+          <a:xfrm>
+            <a:off x="6217920" y="2194560"/>
+            <a:ext cx="2377440" cy="365760"/>
+          </a:xfrm>
+          <a:prstGeom prst="rect">
+            <a:avLst/>
+          </a:prstGeom>
+          <a:noFill/>
+          <a:ln/>
+        </p:spPr>
+        <p:txBody>
+          <a:bodyPr wrap="square" lIns="0" tIns="0" rIns="0" bIns="0" rtlCol="0" anchor="ctr"/>
+          <a:lstStyle/>
+          <a:p>
+            <a:pPr indent="0" marL="0">
+              <a:buNone/>
+            </a:pPr>
+            <a:r>
+              <a:rPr lang="en-US" sz="1350" b="1" dirty="0">
+                <a:solidFill>
+                  <a:srgbClr val="7C3AED"/>
+                </a:solidFill>
+                <a:latin typeface="Calibri" pitchFamily="34" charset="0"/>
+                <a:ea typeface="Calibri" pitchFamily="34" charset="-122"/>
+                <a:cs typeface="Calibri" pitchFamily="34" charset="-120"/>
+              </a:rPr>
+              <a:t>Two modes</a:t>
+            </a:r>
+            <a:endParaRPr lang="en-US" sz="1350" dirty="0"/>
+          </a:p>
+        </p:txBody>
+      </p:sp>
+      <p:sp>
+        <p:nvSpPr>
+          <p:cNvPr id="16" name="Text 14"/>
+          <p:cNvSpPr/>
+          <p:nvPr/>
+        </p:nvSpPr>
+        <p:spPr>
+          <a:xfrm>
+            <a:off x="6217920" y="2606040"/>
+            <a:ext cx="2377440" cy="1920240"/>
+          </a:xfrm>
+          <a:prstGeom prst="rect">
+            <a:avLst/>
+          </a:prstGeom>
+          <a:noFill/>
+          <a:ln/>
+        </p:spPr>
+        <p:txBody>
+          <a:bodyPr wrap="square" lIns="0" tIns="0" rIns="0" bIns="0" rtlCol="0" anchor="t"/>
+          <a:lstStyle/>
+          <a:p>
+            <a:pPr marL="342900" indent="-342900">
+              <a:spcAft>
+                <a:spcPts val="400"/>
+              </a:spcAft>
+              <a:buSzPct val="100000"/>
+              <a:buChar char="•"/>
+            </a:pPr>
+            <a:r>
+              <a:rPr lang="en-US" sz="1150" dirty="0">
+                <a:solidFill>
+                  <a:srgbClr val="1A1F36"/>
+                </a:solidFill>
+                <a:latin typeface="Calibri" pitchFamily="34" charset="0"/>
+                <a:ea typeface="Calibri" pitchFamily="34" charset="-122"/>
+                <a:cs typeface="Calibri" pitchFamily="34" charset="-120"/>
+              </a:rPr>
+              <a:t>Greenfield: build new; slower, full control</a:t>
+            </a:r>
+            <a:endParaRPr lang="en-US" sz="1150" dirty="0"/>
+          </a:p>
+          <a:p>
+            <a:pPr marL="342900" indent="-342900">
+              <a:spcAft>
+                <a:spcPts val="400"/>
+              </a:spcAft>
+              <a:buSzPct val="100000"/>
+              <a:buChar char="•"/>
+            </a:pPr>
+            <a:r>
+              <a:rPr lang="en-US" sz="1150" dirty="0">
+                <a:solidFill>
+                  <a:srgbClr val="1A1F36"/>
+                </a:solidFill>
+                <a:latin typeface="Calibri" pitchFamily="34" charset="0"/>
+                <a:ea typeface="Calibri" pitchFamily="34" charset="-122"/>
+                <a:cs typeface="Calibri" pitchFamily="34" charset="-120"/>
+              </a:rPr>
+              <a:t>M&amp;A: buy; faster, but expensive and hard to integrate</a:t>
+            </a:r>
+            <a:endParaRPr lang="en-US" sz="1150" dirty="0"/>
+          </a:p>
+        </p:txBody>
+      </p:sp>
+      <p:sp>
+        <p:nvSpPr>
+          <p:cNvPr id="17" name="Text 15"/>
+          <p:cNvSpPr/>
+          <p:nvPr/>
+        </p:nvSpPr>
+        <p:spPr>
+          <a:xfrm>
+            <a:off x="411480" y="4736592"/>
+            <a:ext cx="8321040" cy="274320"/>
+          </a:xfrm>
+          <a:prstGeom prst="rect">
+            <a:avLst/>
+          </a:prstGeom>
+          <a:noFill/>
+          <a:ln/>
+        </p:spPr>
+        <p:txBody>
+          <a:bodyPr wrap="square" lIns="0" tIns="0" rIns="0" bIns="0" rtlCol="0" anchor="b"/>
+          <a:lstStyle/>
+          <a:p>
+            <a:pPr indent="0" marL="0">
+              <a:buNone/>
+            </a:pPr>
+            <a:r>
+              <a:rPr lang="en-US" sz="800" dirty="0">
+                <a:solidFill>
+                  <a:srgbClr val="6B7280"/>
+                </a:solidFill>
+                <a:latin typeface="Calibri" pitchFamily="34" charset="0"/>
+                <a:ea typeface="Calibri" pitchFamily="34" charset="-122"/>
+                <a:cs typeface="Calibri" pitchFamily="34" charset="-120"/>
+              </a:rPr>
+              <a:t>Sources: Dunning (1988); University of Greenwich (2026d).</a:t>
+            </a:r>
+            <a:endParaRPr lang="en-US" sz="800" dirty="0"/>
+          </a:p>
+        </p:txBody>
+      </p:sp>
+    </p:spTree>
+  </p:cSld>
+  <p:clrMapOvr>
+    <a:masterClrMapping/>
+  </p:clrMapOvr>
+</p:sld>
+</file>
+
+<file path=ppt/slides/slide12.xml><?xml version="1.0" encoding="utf-8"?>
+<p:sld xmlns:a="http://schemas.openxmlformats.org/drawingml/2006/main" xmlns:r="http://schemas.openxmlformats.org/officeDocument/2006/relationships" xmlns:p="http://schemas.openxmlformats.org/presentationml/2006/main">
+  <p:cSld name="Slide 12">
+    <p:spTree>
+      <p:nvGrpSpPr>
+        <p:cNvPr id="1" name=""/>
+        <p:cNvGrpSpPr/>
+        <p:nvPr/>
+      </p:nvGrpSpPr>
+      <p:grpSpPr>
+        <a:xfrm>
+          <a:off x="0" y="0"/>
+          <a:ext cx="0" cy="0"/>
+          <a:chOff x="0" y="0"/>
+          <a:chExt cx="0" cy="0"/>
+        </a:xfrm>
+      </p:grpSpPr>
+      <p:sp>
+        <p:nvSpPr>
+          <p:cNvPr id="2" name="Shape 0"/>
+          <p:cNvSpPr/>
+          <p:nvPr/>
+        </p:nvSpPr>
+        <p:spPr>
+          <a:xfrm>
+            <a:off x="0" y="0"/>
+            <a:ext cx="109728" cy="5143500"/>
+          </a:xfrm>
+          <a:prstGeom prst="rect">
+            <a:avLst/>
+          </a:prstGeom>
+          <a:solidFill>
+            <a:srgbClr val="7C3AED"/>
+          </a:solidFill>
+          <a:ln/>
+        </p:spPr>
+      </p:sp>
+      <p:sp>
+        <p:nvSpPr>
+          <p:cNvPr id="3" name="Text 1"/>
+          <p:cNvSpPr/>
+          <p:nvPr/>
+        </p:nvSpPr>
+        <p:spPr>
+          <a:xfrm>
+            <a:off x="4480560" y="109728"/>
+            <a:ext cx="4389120" cy="219456"/>
+          </a:xfrm>
+          <a:prstGeom prst="rect">
+            <a:avLst/>
+          </a:prstGeom>
+          <a:noFill/>
+          <a:ln/>
+        </p:spPr>
+        <p:txBody>
+          <a:bodyPr wrap="square" lIns="0" tIns="0" rIns="0" bIns="0" rtlCol="0" anchor="ctr"/>
+          <a:lstStyle/>
+          <a:p>
+            <a:pPr algn="r" indent="0" marL="0">
+              <a:buNone/>
+            </a:pPr>
+            <a:r>
+              <a:rPr lang="en-US" sz="1000" b="1" dirty="0">
+                <a:solidFill>
+                  <a:srgbClr val="7C3AED"/>
+                </a:solidFill>
+                <a:latin typeface="Calibri" pitchFamily="34" charset="0"/>
+                <a:ea typeface="Calibri" pitchFamily="34" charset="-122"/>
+                <a:cs typeface="Calibri" pitchFamily="34" charset="-120"/>
+              </a:rPr>
+              <a:t>Speaker 4 · FDI</a:t>
+            </a:r>
+            <a:endParaRPr lang="en-US" sz="1000" dirty="0"/>
+          </a:p>
+        </p:txBody>
+      </p:sp>
+      <p:sp>
+        <p:nvSpPr>
+          <p:cNvPr id="4" name="Text 2"/>
+          <p:cNvSpPr/>
+          <p:nvPr/>
+        </p:nvSpPr>
+        <p:spPr>
+          <a:xfrm>
+            <a:off x="411480" y="292608"/>
+            <a:ext cx="8321040" cy="548640"/>
+          </a:xfrm>
+          <a:prstGeom prst="rect">
+            <a:avLst/>
+          </a:prstGeom>
+          <a:noFill/>
+          <a:ln/>
+        </p:spPr>
+        <p:txBody>
+          <a:bodyPr wrap="square" lIns="0" tIns="0" rIns="0" bIns="0" rtlCol="0" anchor="ctr"/>
+          <a:lstStyle/>
+          <a:p>
+            <a:pPr indent="0" marL="0">
+              <a:buNone/>
+            </a:pPr>
+            <a:r>
+              <a:rPr lang="en-US" sz="2500" b="1" dirty="0">
+                <a:solidFill>
+                  <a:srgbClr val="1A1F36"/>
+                </a:solidFill>
+                <a:latin typeface="Calibri" pitchFamily="34" charset="0"/>
+                <a:ea typeface="Calibri" pitchFamily="34" charset="-122"/>
+                <a:cs typeface="Calibri" pitchFamily="34" charset="-120"/>
+              </a:rPr>
+              <a:t>Why the United States? Unilever and OLI</a:t>
+            </a:r>
+            <a:endParaRPr lang="en-US" sz="2500" dirty="0"/>
+          </a:p>
+        </p:txBody>
+      </p:sp>
+      <p:sp>
+        <p:nvSpPr>
+          <p:cNvPr id="5" name="Text 3"/>
+          <p:cNvSpPr/>
+          <p:nvPr/>
+        </p:nvSpPr>
+        <p:spPr>
+          <a:xfrm>
+            <a:off x="411480" y="822960"/>
+            <a:ext cx="8321040" cy="292608"/>
+          </a:xfrm>
+          <a:prstGeom prst="rect">
+            <a:avLst/>
+          </a:prstGeom>
+          <a:noFill/>
+          <a:ln/>
+        </p:spPr>
+        <p:txBody>
+          <a:bodyPr wrap="square" lIns="0" tIns="0" rIns="0" bIns="0" rtlCol="0" anchor="ctr"/>
+          <a:lstStyle/>
+          <a:p>
+            <a:pPr indent="0" marL="0">
+              <a:buNone/>
+            </a:pPr>
+            <a:r>
+              <a:rPr lang="en-US" sz="1300" i="1" dirty="0">
+                <a:solidFill>
+                  <a:srgbClr val="6B7280"/>
+                </a:solidFill>
+                <a:latin typeface="Calibri" pitchFamily="34" charset="0"/>
+                <a:ea typeface="Calibri" pitchFamily="34" charset="-122"/>
+                <a:cs typeface="Calibri" pitchFamily="34" charset="-120"/>
+              </a:rPr>
+              <a:t>The US: world's largest FDI host ($279bn in Jan–Dec 2024) and Unilever's biggest market</a:t>
+            </a:r>
+            <a:endParaRPr lang="en-US" sz="1300" dirty="0"/>
+          </a:p>
+        </p:txBody>
+      </p:sp>
+      <p:graphicFrame>
+        <p:nvGraphicFramePr>
+          <p:cNvPr id="6" name="Chart 0" descr=""/>
+          <p:cNvGraphicFramePr/>
+          <p:nvPr/>
+        </p:nvGraphicFramePr>
+        <p:xfrm>
+          <a:off x="411480" y="1188720"/>
+          <a:ext cx="4480560" cy="3246120"/>
+        </p:xfrm>
+        <a:graphic xmlns:a="http://schemas.openxmlformats.org/drawingml/2006/main">
+          <a:graphicData uri="http://schemas.openxmlformats.org/drawingml/2006/chart">
+            <c:chart xmlns:c="http://schemas.openxmlformats.org/drawingml/2006/chart" r:id="rId1"/>
+          </a:graphicData>
+        </a:graphic>
+      </p:graphicFrame>
+      <p:sp>
+        <p:nvSpPr>
+          <p:cNvPr id="7" name="Text 4"/>
+          <p:cNvSpPr/>
+          <p:nvPr/>
+        </p:nvSpPr>
+        <p:spPr>
+          <a:xfrm>
+            <a:off x="411480" y="4407408"/>
+            <a:ext cx="4480560" cy="274320"/>
+          </a:xfrm>
+          <a:prstGeom prst="rect">
+            <a:avLst/>
+          </a:prstGeom>
+          <a:noFill/>
+          <a:ln/>
+        </p:spPr>
+        <p:txBody>
+          <a:bodyPr wrap="square" lIns="0" tIns="0" rIns="0" bIns="0" rtlCol="0" anchor="ctr"/>
+          <a:lstStyle/>
+          <a:p>
+            <a:pPr indent="0" marL="0">
+              <a:buNone/>
+            </a:pPr>
+            <a:r>
+              <a:rPr lang="en-US" sz="850" i="1" dirty="0">
+                <a:solidFill>
+                  <a:srgbClr val="6B7280"/>
+                </a:solidFill>
+                <a:latin typeface="Calibri" pitchFamily="34" charset="0"/>
+                <a:ea typeface="Calibri" pitchFamily="34" charset="-122"/>
+                <a:cs typeface="Calibri" pitchFamily="34" charset="-120"/>
+              </a:rPr>
+              <a:t>*2025 excludes Ice Cream (demerged Dec 2025); 2024 on the same basis: €10.4bn. Each bar = Jan–Dec.</a:t>
+            </a:r>
+            <a:endParaRPr lang="en-US" sz="850" dirty="0"/>
+          </a:p>
+        </p:txBody>
+      </p:sp>
+      <p:sp>
+        <p:nvSpPr>
+          <p:cNvPr id="8" name="Shape 5"/>
+          <p:cNvSpPr/>
+          <p:nvPr/>
+        </p:nvSpPr>
+        <p:spPr>
+          <a:xfrm>
+            <a:off x="5120640" y="1188720"/>
+            <a:ext cx="3611880" cy="987552"/>
+          </a:xfrm>
+          <a:prstGeom prst="roundRect">
+            <a:avLst>
+              <a:gd name="adj" fmla="val 7407"/>
+            </a:avLst>
+          </a:prstGeom>
+          <a:solidFill>
+            <a:srgbClr val="F3F4F8"/>
+          </a:solidFill>
+          <a:ln/>
+        </p:spPr>
+      </p:sp>
+      <p:sp>
+        <p:nvSpPr>
+          <p:cNvPr id="9" name="Text 6"/>
+          <p:cNvSpPr/>
+          <p:nvPr/>
+        </p:nvSpPr>
+        <p:spPr>
+          <a:xfrm>
+            <a:off x="5257800" y="1188720"/>
+            <a:ext cx="3383280" cy="987552"/>
+          </a:xfrm>
+          <a:prstGeom prst="rect">
+            <a:avLst/>
+          </a:prstGeom>
+          <a:noFill/>
+          <a:ln/>
+        </p:spPr>
+        <p:txBody>
+          <a:bodyPr wrap="square" lIns="0" tIns="0" rIns="0" bIns="0" rtlCol="0" anchor="ctr"/>
+          <a:lstStyle/>
+          <a:p>
+            <a:pPr indent="0" marL="0">
+              <a:buNone/>
+            </a:pPr>
+            <a:r>
+              <a:rPr lang="en-US" sz="1350" b="1" dirty="0">
+                <a:solidFill>
+                  <a:srgbClr val="7C3AED"/>
+                </a:solidFill>
+                <a:latin typeface="Calibri" pitchFamily="34" charset="0"/>
+                <a:ea typeface="Calibri" pitchFamily="34" charset="-122"/>
+                <a:cs typeface="Calibri" pitchFamily="34" charset="-120"/>
+              </a:rPr>
+              <a:t>O · Ownership</a:t>
+            </a:r>
+            <a:endParaRPr lang="en-US" sz="1350" dirty="0"/>
+          </a:p>
+          <a:p>
+            <a:pPr indent="0" marL="0">
+              <a:buNone/>
+            </a:pPr>
+            <a:r>
+              <a:rPr lang="en-US" sz="1150" dirty="0">
+                <a:solidFill>
+                  <a:srgbClr val="1A1F36"/>
+                </a:solidFill>
+                <a:latin typeface="Calibri" pitchFamily="34" charset="0"/>
+                <a:ea typeface="Calibri" pitchFamily="34" charset="-122"/>
+                <a:cs typeface="Calibri" pitchFamily="34" charset="-120"/>
+              </a:rPr>
+              <a:t>Global brands, money and worldwide distribution</a:t>
+            </a:r>
+            <a:endParaRPr lang="en-US" sz="1350" dirty="0"/>
+          </a:p>
+        </p:txBody>
+      </p:sp>
+      <p:sp>
+        <p:nvSpPr>
+          <p:cNvPr id="10" name="Shape 7"/>
+          <p:cNvSpPr/>
+          <p:nvPr/>
+        </p:nvSpPr>
+        <p:spPr>
+          <a:xfrm>
+            <a:off x="5120640" y="2304288"/>
+            <a:ext cx="3611880" cy="987552"/>
+          </a:xfrm>
+          <a:prstGeom prst="roundRect">
+            <a:avLst>
+              <a:gd name="adj" fmla="val 7407"/>
+            </a:avLst>
+          </a:prstGeom>
+          <a:solidFill>
+            <a:srgbClr val="F3F4F8"/>
+          </a:solidFill>
+          <a:ln/>
+        </p:spPr>
+      </p:sp>
+      <p:sp>
+        <p:nvSpPr>
+          <p:cNvPr id="11" name="Text 8"/>
+          <p:cNvSpPr/>
+          <p:nvPr/>
+        </p:nvSpPr>
+        <p:spPr>
+          <a:xfrm>
+            <a:off x="5257800" y="2304288"/>
+            <a:ext cx="3383280" cy="987552"/>
+          </a:xfrm>
+          <a:prstGeom prst="rect">
+            <a:avLst/>
+          </a:prstGeom>
+          <a:noFill/>
+          <a:ln/>
+        </p:spPr>
+        <p:txBody>
+          <a:bodyPr wrap="square" lIns="0" tIns="0" rIns="0" bIns="0" rtlCol="0" anchor="ctr"/>
+          <a:lstStyle/>
+          <a:p>
+            <a:pPr indent="0" marL="0">
+              <a:buNone/>
+            </a:pPr>
+            <a:r>
+              <a:rPr lang="en-US" sz="1350" b="1" dirty="0">
+                <a:solidFill>
+                  <a:srgbClr val="7C3AED"/>
+                </a:solidFill>
+                <a:latin typeface="Calibri" pitchFamily="34" charset="0"/>
+                <a:ea typeface="Calibri" pitchFamily="34" charset="-122"/>
+                <a:cs typeface="Calibri" pitchFamily="34" charset="-120"/>
+              </a:rPr>
+              <a:t>L · Location</a:t>
+            </a:r>
+            <a:endParaRPr lang="en-US" sz="1350" dirty="0"/>
+          </a:p>
+          <a:p>
+            <a:pPr indent="0" marL="0">
+              <a:buNone/>
+            </a:pPr>
+            <a:r>
+              <a:rPr lang="en-US" sz="1150" dirty="0">
+                <a:solidFill>
+                  <a:srgbClr val="1A1F36"/>
+                </a:solidFill>
+                <a:latin typeface="Calibri" pitchFamily="34" charset="0"/>
+                <a:ea typeface="Calibri" pitchFamily="34" charset="-122"/>
+                <a:cs typeface="Calibri" pitchFamily="34" charset="-120"/>
+              </a:rPr>
+              <a:t>Biggest market; many premium and online shoppers</a:t>
+            </a:r>
+            <a:endParaRPr lang="en-US" sz="1350" dirty="0"/>
+          </a:p>
+        </p:txBody>
+      </p:sp>
+      <p:sp>
+        <p:nvSpPr>
+          <p:cNvPr id="12" name="Shape 9"/>
+          <p:cNvSpPr/>
+          <p:nvPr/>
+        </p:nvSpPr>
+        <p:spPr>
+          <a:xfrm>
+            <a:off x="5120640" y="3419856"/>
+            <a:ext cx="3611880" cy="987552"/>
+          </a:xfrm>
+          <a:prstGeom prst="roundRect">
+            <a:avLst>
+              <a:gd name="adj" fmla="val 7407"/>
+            </a:avLst>
+          </a:prstGeom>
+          <a:solidFill>
+            <a:srgbClr val="F3F4F8"/>
+          </a:solidFill>
+          <a:ln/>
+        </p:spPr>
+      </p:sp>
+      <p:sp>
+        <p:nvSpPr>
+          <p:cNvPr id="13" name="Text 10"/>
+          <p:cNvSpPr/>
+          <p:nvPr/>
+        </p:nvSpPr>
+        <p:spPr>
+          <a:xfrm>
+            <a:off x="5257800" y="3419856"/>
+            <a:ext cx="3383280" cy="987552"/>
+          </a:xfrm>
+          <a:prstGeom prst="rect">
+            <a:avLst/>
+          </a:prstGeom>
+          <a:noFill/>
+          <a:ln/>
+        </p:spPr>
+        <p:txBody>
+          <a:bodyPr wrap="square" lIns="0" tIns="0" rIns="0" bIns="0" rtlCol="0" anchor="ctr"/>
+          <a:lstStyle/>
+          <a:p>
+            <a:pPr indent="0" marL="0">
+              <a:buNone/>
+            </a:pPr>
+            <a:r>
+              <a:rPr lang="en-US" sz="1350" b="1" dirty="0">
+                <a:solidFill>
+                  <a:srgbClr val="7C3AED"/>
+                </a:solidFill>
+                <a:latin typeface="Calibri" pitchFamily="34" charset="0"/>
+                <a:ea typeface="Calibri" pitchFamily="34" charset="-122"/>
+                <a:cs typeface="Calibri" pitchFamily="34" charset="-120"/>
+              </a:rPr>
+              <a:t>I · Internalisation</a:t>
+            </a:r>
+            <a:endParaRPr lang="en-US" sz="1350" dirty="0"/>
+          </a:p>
+          <a:p>
+            <a:pPr indent="0" marL="0">
+              <a:buNone/>
+            </a:pPr>
+            <a:r>
+              <a:rPr lang="en-US" sz="1150" dirty="0">
+                <a:solidFill>
+                  <a:srgbClr val="1A1F36"/>
+                </a:solidFill>
+                <a:latin typeface="Calibri" pitchFamily="34" charset="0"/>
+                <a:ea typeface="Calibri" pitchFamily="34" charset="-122"/>
+                <a:cs typeface="Calibri" pitchFamily="34" charset="-120"/>
+              </a:rPr>
+              <a:t>Buys and owns the brands, so it controls them and their customers</a:t>
+            </a:r>
+            <a:endParaRPr lang="en-US" sz="1350" dirty="0"/>
+          </a:p>
+        </p:txBody>
+      </p:sp>
+      <p:sp>
+        <p:nvSpPr>
+          <p:cNvPr id="14" name="Text 11"/>
+          <p:cNvSpPr/>
+          <p:nvPr/>
+        </p:nvSpPr>
+        <p:spPr>
+          <a:xfrm>
+            <a:off x="411480" y="4736592"/>
+            <a:ext cx="8321040" cy="274320"/>
+          </a:xfrm>
+          <a:prstGeom prst="rect">
+            <a:avLst/>
+          </a:prstGeom>
+          <a:noFill/>
+          <a:ln/>
+        </p:spPr>
+        <p:txBody>
+          <a:bodyPr wrap="square" lIns="0" tIns="0" rIns="0" bIns="0" rtlCol="0" anchor="b"/>
+          <a:lstStyle/>
+          <a:p>
+            <a:pPr indent="0" marL="0">
+              <a:buNone/>
+            </a:pPr>
+            <a:r>
+              <a:rPr lang="en-US" sz="800" dirty="0">
+                <a:solidFill>
+                  <a:srgbClr val="6B7280"/>
+                </a:solidFill>
+                <a:latin typeface="Calibri" pitchFamily="34" charset="0"/>
+                <a:ea typeface="Calibri" pitchFamily="34" charset="-122"/>
+                <a:cs typeface="Calibri" pitchFamily="34" charset="-120"/>
+              </a:rPr>
+              <a:t>Sources: Unilever PLC (2022; 2023a; 2024; 2025a; 2026a); UNCTAD (2025).</a:t>
+            </a:r>
+            <a:endParaRPr lang="en-US" sz="800" dirty="0"/>
+          </a:p>
+        </p:txBody>
+      </p:sp>
+    </p:spTree>
+  </p:cSld>
+  <p:clrMapOvr>
+    <a:masterClrMapping/>
+  </p:clrMapOvr>
+</p:sld>
+</file>
+
+<file path=ppt/slides/slide13.xml><?xml version="1.0" encoding="utf-8"?>
+<p:sld xmlns:a="http://schemas.openxmlformats.org/drawingml/2006/main" xmlns:r="http://schemas.openxmlformats.org/officeDocument/2006/relationships" xmlns:p="http://schemas.openxmlformats.org/presentationml/2006/main">
+  <p:cSld name="Slide 13">
+    <p:spTree>
+      <p:nvGrpSpPr>
+        <p:cNvPr id="1" name=""/>
+        <p:cNvGrpSpPr/>
+        <p:nvPr/>
+      </p:nvGrpSpPr>
+      <p:grpSpPr>
+        <a:xfrm>
+          <a:off x="0" y="0"/>
+          <a:ext cx="0" cy="0"/>
+          <a:chOff x="0" y="0"/>
+          <a:chExt cx="0" cy="0"/>
+        </a:xfrm>
+      </p:grpSpPr>
+      <p:sp>
+        <p:nvSpPr>
+          <p:cNvPr id="2" name="Shape 0"/>
+          <p:cNvSpPr/>
+          <p:nvPr/>
+        </p:nvSpPr>
+        <p:spPr>
+          <a:xfrm>
+            <a:off x="0" y="0"/>
+            <a:ext cx="109728" cy="5143500"/>
+          </a:xfrm>
+          <a:prstGeom prst="rect">
+            <a:avLst/>
+          </a:prstGeom>
+          <a:solidFill>
+            <a:srgbClr val="7C3AED"/>
+          </a:solidFill>
+          <a:ln/>
+        </p:spPr>
+      </p:sp>
+      <p:sp>
+        <p:nvSpPr>
+          <p:cNvPr id="3" name="Text 1"/>
+          <p:cNvSpPr/>
+          <p:nvPr/>
+        </p:nvSpPr>
+        <p:spPr>
+          <a:xfrm>
+            <a:off x="4480560" y="109728"/>
+            <a:ext cx="4389120" cy="219456"/>
+          </a:xfrm>
+          <a:prstGeom prst="rect">
+            <a:avLst/>
+          </a:prstGeom>
+          <a:noFill/>
+          <a:ln/>
+        </p:spPr>
+        <p:txBody>
+          <a:bodyPr wrap="square" lIns="0" tIns="0" rIns="0" bIns="0" rtlCol="0" anchor="ctr"/>
+          <a:lstStyle/>
+          <a:p>
+            <a:pPr algn="r" indent="0" marL="0">
+              <a:buNone/>
+            </a:pPr>
+            <a:r>
+              <a:rPr lang="en-US" sz="1000" b="1" dirty="0">
+                <a:solidFill>
+                  <a:srgbClr val="7C3AED"/>
+                </a:solidFill>
+                <a:latin typeface="Calibri" pitchFamily="34" charset="0"/>
+                <a:ea typeface="Calibri" pitchFamily="34" charset="-122"/>
+                <a:cs typeface="Calibri" pitchFamily="34" charset="-120"/>
+              </a:rPr>
+              <a:t>Speaker 4 · FDI</a:t>
+            </a:r>
+            <a:endParaRPr lang="en-US" sz="1000" dirty="0"/>
+          </a:p>
+        </p:txBody>
+      </p:sp>
+      <p:sp>
+        <p:nvSpPr>
+          <p:cNvPr id="4" name="Text 2"/>
+          <p:cNvSpPr/>
+          <p:nvPr/>
+        </p:nvSpPr>
+        <p:spPr>
+          <a:xfrm>
+            <a:off x="411480" y="292608"/>
+            <a:ext cx="8321040" cy="548640"/>
+          </a:xfrm>
+          <a:prstGeom prst="rect">
+            <a:avLst/>
+          </a:prstGeom>
+          <a:noFill/>
+          <a:ln/>
+        </p:spPr>
+        <p:txBody>
+          <a:bodyPr wrap="square" lIns="0" tIns="0" rIns="0" bIns="0" rtlCol="0" anchor="ctr"/>
+          <a:lstStyle/>
+          <a:p>
+            <a:pPr indent="0" marL="0">
+              <a:buNone/>
+            </a:pPr>
+            <a:r>
+              <a:rPr lang="en-US" sz="2500" b="1" dirty="0">
+                <a:solidFill>
+                  <a:srgbClr val="1A1F36"/>
+                </a:solidFill>
+                <a:latin typeface="Calibri" pitchFamily="34" charset="0"/>
+                <a:ea typeface="Calibri" pitchFamily="34" charset="-122"/>
+                <a:cs typeface="Calibri" pitchFamily="34" charset="-120"/>
+              </a:rPr>
+              <a:t>Unilever in the US: what each deal brought</a:t>
+            </a:r>
+            <a:endParaRPr lang="en-US" sz="2500" dirty="0"/>
+          </a:p>
+        </p:txBody>
+      </p:sp>
+      <p:sp>
+        <p:nvSpPr>
+          <p:cNvPr id="5" name="Text 3"/>
+          <p:cNvSpPr/>
+          <p:nvPr/>
+        </p:nvSpPr>
+        <p:spPr>
+          <a:xfrm>
+            <a:off x="411480" y="822960"/>
+            <a:ext cx="8321040" cy="292608"/>
+          </a:xfrm>
+          <a:prstGeom prst="rect">
+            <a:avLst/>
+          </a:prstGeom>
+          <a:noFill/>
+          <a:ln/>
+        </p:spPr>
+        <p:txBody>
+          <a:bodyPr wrap="square" lIns="0" tIns="0" rIns="0" bIns="0" rtlCol="0" anchor="ctr"/>
+          <a:lstStyle/>
+          <a:p>
+            <a:pPr indent="0" marL="0">
+              <a:buNone/>
+            </a:pPr>
+            <a:r>
+              <a:rPr lang="en-US" sz="1300" i="1" dirty="0">
+                <a:solidFill>
+                  <a:srgbClr val="6B7280"/>
+                </a:solidFill>
+                <a:latin typeface="Calibri" pitchFamily="34" charset="0"/>
+                <a:ea typeface="Calibri" pitchFamily="34" charset="-122"/>
+                <a:cs typeface="Calibri" pitchFamily="34" charset="-120"/>
+              </a:rPr>
+              <a:t>Mainly M&amp;A = strategic asset-seeking: brands, customers, online skills</a:t>
+            </a:r>
+            <a:endParaRPr lang="en-US" sz="1300" dirty="0"/>
+          </a:p>
+        </p:txBody>
+      </p:sp>
+      <p:graphicFrame>
+        <p:nvGraphicFramePr>
+          <p:cNvPr id="14" name="Table 0"/>
+          <p:cNvGraphicFramePr>
+            <a:graphicFrameLocks noGrp="1"/>
+          </p:cNvGraphicFramePr>
+          <p:nvPr>
+            <p:extLst>
+              <p:ext uri="{D42A27DB-BD31-4B8C-83A1-F6EECF244321}">
+                <p14:modId xmlns:p14="http://schemas.microsoft.com/office/powerpoint/2010/main" val="1579011935"/>
+              </p:ext>
+            </p:extLst>
+          </p:nvPr>
+        </p:nvGraphicFramePr>
+        <p:xfrm>
+          <a:off x="411480" y="1188720"/>
+          <a:ext cx="8321040" cy="914400"/>
+        </p:xfrm>
+        <a:graphic>
+          <a:graphicData uri="http://schemas.openxmlformats.org/drawingml/2006/table">
+            <a:tbl>
+              <a:tblPr/>
+              <a:tblGrid>
+                <a:gridCol w="914400"/>
+                <a:gridCol w="3429000"/>
+                <a:gridCol w="3977640"/>
+              </a:tblGrid>
+              <a:tr h="0">
+                <a:tc>
+                  <a:txBody>
+                    <a:bodyPr/>
+                    <a:lstStyle/>
+                    <a:p>
+                      <a:pPr indent="0" marL="0">
+                        <a:buNone/>
+                      </a:pPr>
+                      <a:r>
+                        <a:rPr lang="en-US" sz="1000" b="1" dirty="0">
+                          <a:solidFill>
+                            <a:srgbClr val="FFFFFF"/>
+                          </a:solidFill>
+                          <a:latin typeface="Calibri" pitchFamily="34" charset="0"/>
+                          <a:ea typeface="Calibri" pitchFamily="34" charset="-122"/>
+                          <a:cs typeface="Calibri" pitchFamily="34" charset="-120"/>
+                        </a:rPr>
+                        <a:t>Date</a:t>
+                      </a:r>
+                      <a:endParaRPr lang="en-US" sz="1000" dirty="0">
+                        <a:latin typeface="Calibri" charset="0"/>
+                        <a:ea typeface="Calibri" charset="0"/>
+                        <a:cs typeface="Calibri" charset="0"/>
+                      </a:endParaRPr>
+                    </a:p>
+                  </a:txBody>
+                  <a:tcPr marL="63500" marR="63500" marT="38100" marB="38100" anchor="ctr">
+                    <a:lnL w="6350" cap="flat" cmpd="sng" algn="ctr">
+                      <a:solidFill>
+                        <a:srgbClr val="D1D5DB"/>
+                      </a:solidFill>
+                      <a:prstDash val="solid"/>
+                      <a:round/>
+                      <a:headEnd type="none" w="med" len="med"/>
+                      <a:tailEnd type="none" w="med" len="med"/>
+                    </a:lnL>
+                    <a:lnR w="6350" cap="flat" cmpd="sng" algn="ctr">
+                      <a:solidFill>
+                        <a:srgbClr val="D1D5DB"/>
+                      </a:solidFill>
+                      <a:prstDash val="solid"/>
+                      <a:round/>
+                      <a:headEnd type="none" w="med" len="med"/>
+                      <a:tailEnd type="none" w="med" len="med"/>
+                    </a:lnR>
+                    <a:lnT w="6350" cap="flat" cmpd="sng" algn="ctr">
+                      <a:solidFill>
+                        <a:srgbClr val="D1D5DB"/>
+                      </a:solidFill>
+                      <a:prstDash val="solid"/>
+                      <a:round/>
+                      <a:headEnd type="none" w="med" len="med"/>
+                      <a:tailEnd type="none" w="med" len="med"/>
+                    </a:lnT>
+                    <a:lnB w="6350" cap="flat" cmpd="sng" algn="ctr">
+                      <a:solidFill>
+                        <a:srgbClr val="D1D5DB"/>
+                      </a:solidFill>
+                      <a:prstDash val="solid"/>
+                      <a:round/>
+                      <a:headEnd type="none" w="med" len="med"/>
+                      <a:tailEnd type="none" w="med" len="med"/>
+                    </a:lnB>
+                    <a:solidFill>
                       <a:srgbClr val="7C3AED"/>
                     </a:solidFill>
                   </a:tcPr>
@@ -4841,7 +6684,7 @@
                           <a:ea typeface="Calibri" pitchFamily="34" charset="-122"/>
                           <a:cs typeface="Calibri" pitchFamily="34" charset="-120"/>
                         </a:rPr>
-                        <a:t>Direct-to-consumer e-commerce skills; Prestige Beauty grew double-digit in 2022</a:t>
+                        <a:t>Online sales skills; premium (Prestige) beauty grew by more than 10% in Jan–Dec 2022</a:t>
                       </a:r>
                       <a:endParaRPr lang="en-US" sz="1000" dirty="0">
                         <a:latin typeface="Calibri" charset="0"/>
@@ -5047,7 +6890,7 @@
                           <a:ea typeface="Calibri" pitchFamily="34" charset="-122"/>
                           <a:cs typeface="Calibri" pitchFamily="34" charset="-120"/>
                         </a:rPr>
-                        <a:t>First launch outside the US (Canada, 2023); led double-digit Wellbeing growth in 2025</a:t>
+                        <a:t>Helped Wellbeing grow by more than 10% in Jan–Dec 2025</a:t>
                       </a:r>
                       <a:endParaRPr lang="en-US" sz="1000" dirty="0">
                         <a:latin typeface="Calibri" charset="0"/>
@@ -5253,7 +7096,7 @@
                           <a:ea typeface="Calibri" pitchFamily="34" charset="-122"/>
                           <a:cs typeface="Calibri" pitchFamily="34" charset="-120"/>
                         </a:rPr>
-                        <a:t>Grew double-digit in 2024</a:t>
+                        <a:t>Grew by more than 10% in Jan–Dec 2024</a:t>
                       </a:r>
                       <a:endParaRPr lang="en-US" sz="1000" dirty="0">
                         <a:latin typeface="Calibri" charset="0"/>
@@ -5391,7 +7234,7 @@
                           <a:ea typeface="Calibri" pitchFamily="34" charset="-122"/>
                           <a:cs typeface="Calibri" pitchFamily="34" charset="-120"/>
                         </a:rPr>
-                        <a:t>Dr. Squatch (men's care), 98.7%, €1.24bn</a:t>
+                        <a:t>Dr. Squatch (men's personal care), 98.7%, €1.24bn</a:t>
                       </a:r>
                       <a:endParaRPr lang="en-US" sz="1000" dirty="0">
                         <a:latin typeface="Calibri" charset="0"/>
@@ -5597,7 +7440,7 @@
                           <a:ea typeface="Calibri" pitchFamily="34" charset="-122"/>
                           <a:cs typeface="Calibri" pitchFamily="34" charset="-120"/>
                         </a:rPr>
-                        <a:t>Year-end: Prestige &amp; Wellbeing ~30% of Beauty &amp; Wellbeing turnover</a:t>
+                        <a:t>70% of US Beauty &amp; Wellbeing sales now from Prestige and Wellbeing brands</a:t>
                       </a:r>
                       <a:endParaRPr lang="en-US" sz="1000" dirty="0">
                         <a:latin typeface="Calibri" charset="0"/>
@@ -5665,7 +7508,7 @@
                           <a:ea typeface="Calibri" pitchFamily="34" charset="-122"/>
                           <a:cs typeface="Calibri" pitchFamily="34" charset="-120"/>
                         </a:rPr>
-                        <a:t>In the US, 70% of Beauty &amp; Wellbeing sales now from these premium brands</a:t>
+                        <a:t>Faster growth from premium brands</a:t>
                       </a:r>
                       <a:endParaRPr lang="en-US" sz="1000" dirty="0">
                         <a:latin typeface="Calibri" charset="0"/>
@@ -5803,7 +7646,7 @@
                           <a:ea typeface="Calibri" pitchFamily="34" charset="-122"/>
                           <a:cs typeface="Calibri" pitchFamily="34" charset="-120"/>
                         </a:rPr>
-                        <a:t>Year-end: North America underlying sales growth 5.3%</a:t>
+                        <a:t>North America underlying sales growth 5.3% (Jan–Dec 2025)</a:t>
                       </a:r>
                       <a:endParaRPr lang="en-US" sz="1000" dirty="0">
                         <a:latin typeface="Calibri" charset="0"/>
@@ -5871,7 +7714,7 @@
                           <a:ea typeface="Calibri" pitchFamily="34" charset="-122"/>
                           <a:cs typeface="Calibri" pitchFamily="34" charset="-120"/>
                         </a:rPr>
-                        <a:t>US non-current assets €12.9bn (2020) → €19.7bn (2024); market share largely recovered</a:t>
+                        <a:t>Good results in its biggest market</a:t>
                       </a:r>
                       <a:endParaRPr lang="en-US" sz="1000" dirty="0">
                         <a:latin typeface="Calibri" charset="0"/>
@@ -6054,9 +7897,9 @@
 </p:sld>
 </file>
 
-<file path=ppt/slides/slide13.xml><?xml version="1.0" encoding="utf-8"?>
+<file path=ppt/slides/slide14.xml><?xml version="1.0" encoding="utf-8"?>
 <p:sld xmlns:a="http://schemas.openxmlformats.org/drawingml/2006/main" xmlns:r="http://schemas.openxmlformats.org/officeDocument/2006/relationships" xmlns:p="http://schemas.openxmlformats.org/presentationml/2006/main">
-  <p:cSld name="Slide 13">
+  <p:cSld name="Slide 14">
     <p:spTree>
       <p:nvGrpSpPr>
         <p:cNvPr id="1" name=""/>
@@ -6404,7 +8247,7 @@
                 <a:ea typeface="Calibri" pitchFamily="34" charset="-122"/>
                 <a:cs typeface="Calibri" pitchFamily="34" charset="-120"/>
               </a:rPr>
-              <a:t>MNEs from Advanced Economies</a:t>
+              <a:t>MNEs from Advanced Economies + CSR</a:t>
             </a:r>
             <a:endParaRPr lang="en-US" sz="1250" dirty="0"/>
           </a:p>
@@ -6443,7 +8286,7 @@
                 <a:ea typeface="Calibri" pitchFamily="34" charset="-122"/>
                 <a:cs typeface="Calibri" pitchFamily="34" charset="-120"/>
               </a:rPr>
-              <a:t>Brands and R&amp;D are its advantages; local listings share profits, but job cuts and Russia show goal conflicts.</a:t>
+              <a:t>Brands and R&amp;D are its advantages; on CSR, progress on climate but setbacks on plastics; conflicts over jobs and Russia.</a:t>
             </a:r>
             <a:endParaRPr lang="en-US" sz="1200" dirty="0"/>
           </a:p>
@@ -6596,9 +8439,9 @@
 </p:sld>
 </file>
 
-<file path=ppt/slides/slide14.xml><?xml version="1.0" encoding="utf-8"?>
+<file path=ppt/slides/slide15.xml><?xml version="1.0" encoding="utf-8"?>
 <p:sld xmlns:a="http://schemas.openxmlformats.org/drawingml/2006/main" xmlns:r="http://schemas.openxmlformats.org/officeDocument/2006/relationships" xmlns:p="http://schemas.openxmlformats.org/presentationml/2006/main">
-  <p:cSld name="Slide 14">
+  <p:cSld name="Slide 15">
     <p:bg>
       <p:bgPr>
         <a:solidFill>
@@ -6706,9 +8549,9 @@
 </p:sld>
 </file>
 
-<file path=ppt/slides/slide15.xml><?xml version="1.0" encoding="utf-8"?>
+<file path=ppt/slides/slide16.xml><?xml version="1.0" encoding="utf-8"?>
 <p:sld xmlns:a="http://schemas.openxmlformats.org/drawingml/2006/main" xmlns:r="http://schemas.openxmlformats.org/officeDocument/2006/relationships" xmlns:p="http://schemas.openxmlformats.org/presentationml/2006/main">
-  <p:cSld name="Slide 15">
+  <p:cSld name="Slide 16">
     <p:spTree>
       <p:nvGrpSpPr>
         <p:cNvPr id="1" name=""/>
@@ -6785,12 +8628,12 @@
           <a:p>
             <a:pPr indent="0" marL="0">
               <a:spcAft>
-                <a:spcPts val="300"/>
+                <a:spcPts val="200"/>
               </a:spcAft>
               <a:buNone/>
             </a:pPr>
             <a:r>
-              <a:rPr lang="en-US" sz="750" dirty="0">
+              <a:rPr lang="en-US" sz="700" dirty="0">
                 <a:solidFill>
                   <a:srgbClr val="1A1F36"/>
                 </a:solidFill>
@@ -6800,17 +8643,17 @@
               </a:rPr>
               <a:t>Bloomberg Línea (2025) 'Unilever anuncia a Sheinbaum inversión por MXN$30.000 millones en México', 2 May. Available at: https://www.bloomberglinea.com/latinoamerica/mexico/unilever-anuncia-a-sheinbaum-inversion-por-mxn30000-millones-en-mexico/ (Accessed: 31 October 2026).</a:t>
             </a:r>
-            <a:endParaRPr lang="en-US" sz="750" dirty="0"/>
+            <a:endParaRPr lang="en-US" sz="700" dirty="0"/>
           </a:p>
           <a:p>
             <a:pPr indent="0" marL="0">
               <a:spcAft>
-                <a:spcPts val="300"/>
+                <a:spcPts val="200"/>
               </a:spcAft>
               <a:buNone/>
             </a:pPr>
             <a:r>
-              <a:rPr lang="en-US" sz="750" dirty="0">
+              <a:rPr lang="en-US" sz="700" dirty="0">
                 <a:solidFill>
                   <a:srgbClr val="1A1F36"/>
                 </a:solidFill>
@@ -6820,17 +8663,17 @@
               </a:rPr>
               <a:t>Dunning, J.H. (1988) 'The eclectic paradigm of international production: a restatement and some possible extensions', Journal of International Business Studies, 19(1), pp. 1–31.</a:t>
             </a:r>
-            <a:endParaRPr lang="en-US" sz="750" dirty="0"/>
+            <a:endParaRPr lang="en-US" sz="700" dirty="0"/>
           </a:p>
           <a:p>
             <a:pPr indent="0" marL="0">
               <a:spcAft>
-                <a:spcPts val="300"/>
+                <a:spcPts val="200"/>
               </a:spcAft>
               <a:buNone/>
             </a:pPr>
             <a:r>
-              <a:rPr lang="en-US" sz="750" dirty="0">
+              <a:rPr lang="en-US" sz="700" dirty="0">
                 <a:solidFill>
                   <a:srgbClr val="1A1F36"/>
                 </a:solidFill>
@@ -6838,19 +8681,19 @@
                 <a:ea typeface="Calibri" pitchFamily="34" charset="-122"/>
                 <a:cs typeface="Calibri" pitchFamily="34" charset="-120"/>
               </a:rPr>
-              <a:t>Entrackr (2025) 'HUL acquires 90.5% stake in Minimalist at Rs 2,955 Cr valuation'. Available at: https://entrackr.com/news/hul-acquires-905-stake-in-minimalist-at-rs-2955-cr-valuation-8644087 (Accessed: 31 October 2026).</a:t>
-            </a:r>
-            <a:endParaRPr lang="en-US" sz="750" dirty="0"/>
+              <a:t>FoodNavigator (2022) 'Dispose with purpose? Unilever has "lost the plot" by fixating on sustainability claims, says influential UK fund manager', 12 January. Available at: https://www.foodnavigator.com/Article/2022/01/12/Dispose-with-purpose-Unilever-has-lost-the-plot-by-fixating-on-sustainability-claims-influential-UK-fund-manager/ (Accessed: 31 October 2026).</a:t>
+            </a:r>
+            <a:endParaRPr lang="en-US" sz="700" dirty="0"/>
           </a:p>
           <a:p>
             <a:pPr indent="0" marL="0">
               <a:spcAft>
-                <a:spcPts val="300"/>
+                <a:spcPts val="200"/>
               </a:spcAft>
               <a:buNone/>
             </a:pPr>
             <a:r>
-              <a:rPr lang="en-US" sz="750" dirty="0">
+              <a:rPr lang="en-US" sz="700" dirty="0">
                 <a:solidFill>
                   <a:srgbClr val="1A1F36"/>
                 </a:solidFill>
@@ -6860,17 +8703,17 @@
               </a:rPr>
               <a:t>Fortune (2025) 'Trump delays Canada, Mexico tariffs for goods under USMCA', 6 March. Available at: https://fortune.com/2025/03/06/trump-delays-canada-mexico-tariffs-for-goods-under-usmca (Accessed: 31 October 2026).</a:t>
             </a:r>
-            <a:endParaRPr lang="en-US" sz="750" dirty="0"/>
+            <a:endParaRPr lang="en-US" sz="700" dirty="0"/>
           </a:p>
           <a:p>
             <a:pPr indent="0" marL="0">
               <a:spcAft>
-                <a:spcPts val="300"/>
+                <a:spcPts val="200"/>
               </a:spcAft>
               <a:buNone/>
             </a:pPr>
             <a:r>
-              <a:rPr lang="en-US" sz="750" dirty="0">
+              <a:rPr lang="en-US" sz="700" dirty="0">
                 <a:solidFill>
                   <a:srgbClr val="1A1F36"/>
                 </a:solidFill>
@@ -6878,19 +8721,19 @@
                 <a:ea typeface="Calibri" pitchFamily="34" charset="-122"/>
                 <a:cs typeface="Calibri" pitchFamily="34" charset="-120"/>
               </a:rPr>
-              <a:t>Levitt, T. (1983) 'The globalization of markets', Harvard Business Review, 61(3), pp. 92–102.</a:t>
-            </a:r>
-            <a:endParaRPr lang="en-US" sz="750" dirty="0"/>
+              <a:t>Grocery Gazette (2024) 'CMA drops Unilever green claim investigation', 7 November. Available at: https://www.grocerygazette.co.uk/2024/11/07/cma-drops-unilever-green-claim/ (Accessed: 31 October 2026).</a:t>
+            </a:r>
+            <a:endParaRPr lang="en-US" sz="700" dirty="0"/>
           </a:p>
           <a:p>
             <a:pPr indent="0" marL="0">
               <a:spcAft>
-                <a:spcPts val="300"/>
+                <a:spcPts val="200"/>
               </a:spcAft>
               <a:buNone/>
             </a:pPr>
             <a:r>
-              <a:rPr lang="en-US" sz="750" dirty="0">
+              <a:rPr lang="en-US" sz="700" dirty="0">
                 <a:solidFill>
                   <a:srgbClr val="1A1F36"/>
                 </a:solidFill>
@@ -6898,19 +8741,19 @@
                 <a:ea typeface="Calibri" pitchFamily="34" charset="-122"/>
                 <a:cs typeface="Calibri" pitchFamily="34" charset="-120"/>
               </a:rPr>
-              <a:t>MND Staff (2025) 'Household and beauty products giant Unilever to invest US $800M in Nuevo León', Mexico News Daily, 9 April. Available at: https://mexiconewsdaily.com/business/unilever-invest-in-nuevo-leon (Accessed: 31 October 2026).</a:t>
-            </a:r>
-            <a:endParaRPr lang="en-US" sz="750" dirty="0"/>
+              <a:t>Levitt, T. (1983) 'The globalization of markets', Harvard Business Review, 61(3), pp. 92–102.</a:t>
+            </a:r>
+            <a:endParaRPr lang="en-US" sz="700" dirty="0"/>
           </a:p>
           <a:p>
             <a:pPr indent="0" marL="0">
               <a:spcAft>
-                <a:spcPts val="300"/>
+                <a:spcPts val="200"/>
               </a:spcAft>
               <a:buNone/>
             </a:pPr>
             <a:r>
-              <a:rPr lang="en-US" sz="750" dirty="0">
+              <a:rPr lang="en-US" sz="700" dirty="0">
                 <a:solidFill>
                   <a:srgbClr val="1A1F36"/>
                 </a:solidFill>
@@ -6918,19 +8761,19 @@
                 <a:ea typeface="Calibri" pitchFamily="34" charset="-122"/>
                 <a:cs typeface="Calibri" pitchFamily="34" charset="-120"/>
               </a:rPr>
-              <a:t>UNCTAD (2025) World Investment Report 2025. Geneva: United Nations. Available at: https://unctad.org/system/files/official-document/wir2025_en.pdf (Accessed: 31 October 2026).</a:t>
-            </a:r>
-            <a:endParaRPr lang="en-US" sz="750" dirty="0"/>
+              <a:t>MND Staff (2025) 'Household and beauty products giant Unilever to invest US $800M in Nuevo León', Mexico News Daily, 9 April. Available at: https://mexiconewsdaily.com/business/unilever-invest-in-nuevo-leon (Accessed: 31 October 2026).</a:t>
+            </a:r>
+            <a:endParaRPr lang="en-US" sz="700" dirty="0"/>
           </a:p>
           <a:p>
             <a:pPr indent="0" marL="0">
               <a:spcAft>
-                <a:spcPts val="300"/>
+                <a:spcPts val="200"/>
               </a:spcAft>
               <a:buNone/>
             </a:pPr>
             <a:r>
-              <a:rPr lang="en-US" sz="750" dirty="0">
+              <a:rPr lang="en-US" sz="700" dirty="0">
                 <a:solidFill>
                   <a:srgbClr val="1A1F36"/>
                 </a:solidFill>
@@ -6938,19 +8781,19 @@
                 <a:ea typeface="Calibri" pitchFamily="34" charset="-122"/>
                 <a:cs typeface="Calibri" pitchFamily="34" charset="-120"/>
               </a:rPr>
-              <a:t>Unilever PLC (2021) Annual Report on Form 20-F 2020. Available at: https://www.sec.gov/Archives/edgar/data/217410/000119312521075770/d14846d20f.htm (Accessed: 31 October 2026).</a:t>
-            </a:r>
-            <a:endParaRPr lang="en-US" sz="750" dirty="0"/>
+              <a:t>UNCTAD (2025) World Investment Report 2025. Geneva: United Nations. Available at: https://unctad.org/system/files/official-document/wir2025_en.pdf (Accessed: 31 October 2026).</a:t>
+            </a:r>
+            <a:endParaRPr lang="en-US" sz="700" dirty="0"/>
           </a:p>
           <a:p>
             <a:pPr indent="0" marL="0">
               <a:spcAft>
-                <a:spcPts val="300"/>
+                <a:spcPts val="200"/>
               </a:spcAft>
               <a:buNone/>
             </a:pPr>
             <a:r>
-              <a:rPr lang="en-US" sz="750" dirty="0">
+              <a:rPr lang="en-US" sz="700" dirty="0">
                 <a:solidFill>
                   <a:srgbClr val="1A1F36"/>
                 </a:solidFill>
@@ -6958,19 +8801,19 @@
                 <a:ea typeface="Calibri" pitchFamily="34" charset="-122"/>
                 <a:cs typeface="Calibri" pitchFamily="34" charset="-120"/>
               </a:rPr>
-              <a:t>Unilever PLC (2022) Annual Report on Form 20-F 2021. Available at: https://www.sec.gov/Archives/edgar/data/217410/000021741022000009/ul-20211231.htm (Accessed: 31 October 2026).</a:t>
-            </a:r>
-            <a:endParaRPr lang="en-US" sz="750" dirty="0"/>
+              <a:t>Unilever PLC (2021a) Annual Report on Form 20-F 2020. Available at: https://www.sec.gov/Archives/edgar/data/217410/000119312521075770/d14846d20f.htm (Accessed: 31 October 2026).</a:t>
+            </a:r>
+            <a:endParaRPr lang="en-US" sz="700" dirty="0"/>
           </a:p>
           <a:p>
             <a:pPr indent="0" marL="0">
               <a:spcAft>
-                <a:spcPts val="300"/>
+                <a:spcPts val="200"/>
               </a:spcAft>
               <a:buNone/>
             </a:pPr>
             <a:r>
-              <a:rPr lang="en-US" sz="750" dirty="0">
+              <a:rPr lang="en-US" sz="700" dirty="0">
                 <a:solidFill>
                   <a:srgbClr val="1A1F36"/>
                 </a:solidFill>
@@ -6978,9 +8821,29 @@
                 <a:ea typeface="Calibri" pitchFamily="34" charset="-122"/>
                 <a:cs typeface="Calibri" pitchFamily="34" charset="-120"/>
               </a:rPr>
-              <a:t>Unilever PLC (2023a) Annual Report on Form 20-F 2022. Available at: https://www.sec.gov/Archives/edgar/data/217410/000021741023000016/ul-20221231.htm (Accessed: 31 October 2026).</a:t>
-            </a:r>
-            <a:endParaRPr lang="en-US" sz="750" dirty="0"/>
+              <a:t>Unilever PLC (2021b) Result of AGM [Form 6-K], May. Available at: https://www.sec.gov/Archives/edgar/data/217410/000165495421005145/a6813x.htm (Accessed: 31 October 2026).</a:t>
+            </a:r>
+            <a:endParaRPr lang="en-US" sz="700" dirty="0"/>
+          </a:p>
+          <a:p>
+            <a:pPr indent="0" marL="0">
+              <a:spcAft>
+                <a:spcPts val="200"/>
+              </a:spcAft>
+              <a:buNone/>
+            </a:pPr>
+            <a:r>
+              <a:rPr lang="en-US" sz="700" dirty="0">
+                <a:solidFill>
+                  <a:srgbClr val="1A1F36"/>
+                </a:solidFill>
+                <a:latin typeface="Calibri" pitchFamily="34" charset="0"/>
+                <a:ea typeface="Calibri" pitchFamily="34" charset="-122"/>
+                <a:cs typeface="Calibri" pitchFamily="34" charset="-120"/>
+              </a:rPr>
+              <a:t>Unilever PLC (2022) Annual Report on Form 20-F 2021. Available at: https://www.sec.gov/Archives/edgar/data/217410/000021741022000009/ul-20211231.htm (Accessed: 31 October 2026).</a:t>
+            </a:r>
+            <a:endParaRPr lang="en-US" sz="700" dirty="0"/>
           </a:p>
         </p:txBody>
       </p:sp>
@@ -7007,12 +8870,12 @@
           <a:p>
             <a:pPr indent="0" marL="0">
               <a:spcAft>
-                <a:spcPts val="300"/>
+                <a:spcPts val="200"/>
               </a:spcAft>
               <a:buNone/>
             </a:pPr>
             <a:r>
-              <a:rPr lang="en-US" sz="750" dirty="0">
+              <a:rPr lang="en-US" sz="700" dirty="0">
                 <a:solidFill>
                   <a:srgbClr val="1A1F36"/>
                 </a:solidFill>
@@ -7020,19 +8883,19 @@
                 <a:ea typeface="Calibri" pitchFamily="34" charset="-122"/>
                 <a:cs typeface="Calibri" pitchFamily="34" charset="-120"/>
               </a:rPr>
-              <a:t>Unilever PLC (2023b) Full Year 2022 Results. Available at: https://data.fca.org.uk/artefacts/NSM/RNS/4669599.html (Accessed: 31 October 2026).</a:t>
-            </a:r>
-            <a:endParaRPr lang="en-US" sz="750" dirty="0"/>
+              <a:t>Unilever PLC (2023a) Annual Report on Form 20-F 2022. Available at: https://www.sec.gov/Archives/edgar/data/217410/000021741023000016/ul-20221231.htm (Accessed: 31 October 2026).</a:t>
+            </a:r>
+            <a:endParaRPr lang="en-US" sz="700" dirty="0"/>
           </a:p>
           <a:p>
             <a:pPr indent="0" marL="0">
               <a:spcAft>
-                <a:spcPts val="300"/>
+                <a:spcPts val="200"/>
               </a:spcAft>
               <a:buNone/>
             </a:pPr>
             <a:r>
-              <a:rPr lang="en-US" sz="750" dirty="0">
+              <a:rPr lang="en-US" sz="700" dirty="0">
                 <a:solidFill>
                   <a:srgbClr val="1A1F36"/>
                 </a:solidFill>
@@ -7040,19 +8903,19 @@
                 <a:ea typeface="Calibri" pitchFamily="34" charset="-122"/>
                 <a:cs typeface="Calibri" pitchFamily="34" charset="-120"/>
               </a:rPr>
-              <a:t>Unilever PLC (2024) Annual Report on Form 20-F 2023. Available at: https://www.sec.gov/Archives/edgar/data/217410/000021741024000017/ul-20231231.htm (Accessed: 31 October 2026).</a:t>
-            </a:r>
-            <a:endParaRPr lang="en-US" sz="750" dirty="0"/>
+              <a:t>Unilever PLC (2023b) Full Year 2022 Results. Available at: https://data.fca.org.uk/artefacts/NSM/RNS/4669599.html (Accessed: 31 October 2026).</a:t>
+            </a:r>
+            <a:endParaRPr lang="en-US" sz="700" dirty="0"/>
           </a:p>
           <a:p>
             <a:pPr indent="0" marL="0">
               <a:spcAft>
-                <a:spcPts val="300"/>
+                <a:spcPts val="200"/>
               </a:spcAft>
               <a:buNone/>
             </a:pPr>
             <a:r>
-              <a:rPr lang="en-US" sz="750" dirty="0">
+              <a:rPr lang="en-US" sz="700" dirty="0">
                 <a:solidFill>
                   <a:srgbClr val="1A1F36"/>
                 </a:solidFill>
@@ -7060,19 +8923,19 @@
                 <a:ea typeface="Calibri" pitchFamily="34" charset="-122"/>
                 <a:cs typeface="Calibri" pitchFamily="34" charset="-120"/>
               </a:rPr>
-              <a:t>Unilever PLC (2025a) Annual Report on Form 20-F 2024. Available at: https://www.sec.gov/Archives/edgar/data/217410/000021741025000015/ul-20241231.htm (Accessed: 31 October 2026).</a:t>
-            </a:r>
-            <a:endParaRPr lang="en-US" sz="750" dirty="0"/>
+              <a:t>Unilever PLC (2024) Annual Report on Form 20-F 2023. Available at: https://www.sec.gov/Archives/edgar/data/217410/000021741024000017/ul-20231231.htm (Accessed: 31 October 2026).</a:t>
+            </a:r>
+            <a:endParaRPr lang="en-US" sz="700" dirty="0"/>
           </a:p>
           <a:p>
             <a:pPr indent="0" marL="0">
               <a:spcAft>
-                <a:spcPts val="300"/>
+                <a:spcPts val="200"/>
               </a:spcAft>
               <a:buNone/>
             </a:pPr>
             <a:r>
-              <a:rPr lang="en-US" sz="750" dirty="0">
+              <a:rPr lang="en-US" sz="700" dirty="0">
                 <a:solidFill>
                   <a:srgbClr val="1A1F36"/>
                 </a:solidFill>
@@ -7080,19 +8943,19 @@
                 <a:ea typeface="Calibri" pitchFamily="34" charset="-122"/>
                 <a:cs typeface="Calibri" pitchFamily="34" charset="-120"/>
               </a:rPr>
-              <a:t>Unilever PLC (2025b) Full Year 2024 Results. Available at: https://data.fca.org.uk/artefacts/NSM/RNS/5536689.html (Accessed: 31 October 2026).</a:t>
-            </a:r>
-            <a:endParaRPr lang="en-US" sz="750" dirty="0"/>
+              <a:t>Unilever PLC (2025a) Annual Report on Form 20-F 2024. Available at: https://www.sec.gov/Archives/edgar/data/217410/000021741025000015/ul-20241231.htm (Accessed: 31 October 2026).</a:t>
+            </a:r>
+            <a:endParaRPr lang="en-US" sz="700" dirty="0"/>
           </a:p>
           <a:p>
             <a:pPr indent="0" marL="0">
               <a:spcAft>
-                <a:spcPts val="300"/>
+                <a:spcPts val="200"/>
               </a:spcAft>
               <a:buNone/>
             </a:pPr>
             <a:r>
-              <a:rPr lang="en-US" sz="750" dirty="0">
+              <a:rPr lang="en-US" sz="700" dirty="0">
                 <a:solidFill>
                   <a:srgbClr val="1A1F36"/>
                 </a:solidFill>
@@ -7100,19 +8963,19 @@
                 <a:ea typeface="Calibri" pitchFamily="34" charset="-122"/>
                 <a:cs typeface="Calibri" pitchFamily="34" charset="-120"/>
               </a:rPr>
-              <a:t>Unilever PLC (2026a) Annual Report on Form 20-F 2025. Available at: https://www.sec.gov/Archives/edgar/data/217410/000021741026000007/ul-20251231.htm (Accessed: 31 October 2026).</a:t>
-            </a:r>
-            <a:endParaRPr lang="en-US" sz="750" dirty="0"/>
+              <a:t>Unilever PLC (2025b) Full Year 2024 Results. Available at: https://data.fca.org.uk/artefacts/NSM/RNS/5536689.html (Accessed: 31 October 2026).</a:t>
+            </a:r>
+            <a:endParaRPr lang="en-US" sz="700" dirty="0"/>
           </a:p>
           <a:p>
             <a:pPr indent="0" marL="0">
               <a:spcAft>
-                <a:spcPts val="300"/>
+                <a:spcPts val="200"/>
               </a:spcAft>
               <a:buNone/>
             </a:pPr>
             <a:r>
-              <a:rPr lang="en-US" sz="750" dirty="0">
+              <a:rPr lang="en-US" sz="700" dirty="0">
                 <a:solidFill>
                   <a:srgbClr val="1A1F36"/>
                 </a:solidFill>
@@ -7120,19 +8983,19 @@
                 <a:ea typeface="Calibri" pitchFamily="34" charset="-122"/>
                 <a:cs typeface="Calibri" pitchFamily="34" charset="-120"/>
               </a:rPr>
-              <a:t>Unilever PLC (2026b) Full Year 2025 Results. Available at: https://data.fca.org.uk/artefacts/NSM/RNS/b82e96e8-7680-4ddf-8c41-f0bb2a051dd5.html (Accessed: 31 October 2026).</a:t>
-            </a:r>
-            <a:endParaRPr lang="en-US" sz="750" dirty="0"/>
+              <a:t>Unilever PLC (2026a) Annual Report on Form 20-F 2025. Available at: https://www.sec.gov/Archives/edgar/data/217410/000021741026000007/ul-20251231.htm (Accessed: 31 October 2026).</a:t>
+            </a:r>
+            <a:endParaRPr lang="en-US" sz="700" dirty="0"/>
           </a:p>
           <a:p>
             <a:pPr indent="0" marL="0">
               <a:spcAft>
-                <a:spcPts val="300"/>
+                <a:spcPts val="200"/>
               </a:spcAft>
               <a:buNone/>
             </a:pPr>
             <a:r>
-              <a:rPr lang="en-US" sz="750" dirty="0">
+              <a:rPr lang="en-US" sz="700" dirty="0">
                 <a:solidFill>
                   <a:srgbClr val="1A1F36"/>
                 </a:solidFill>
@@ -7140,19 +9003,19 @@
                 <a:ea typeface="Calibri" pitchFamily="34" charset="-122"/>
                 <a:cs typeface="Calibri" pitchFamily="34" charset="-120"/>
               </a:rPr>
-              <a:t>University of Greenwich (2026a–d) BUSI 1763 Dynamics of Global Business, Lectures 1–4 [Lecture slides]. Available at: Moodle.</a:t>
-            </a:r>
-            <a:endParaRPr lang="en-US" sz="750" dirty="0"/>
+              <a:t>Unilever PLC (2026b) Full Year 2025 Results. Available at: https://data.fca.org.uk/artefacts/NSM/RNS/b82e96e8-7680-4ddf-8c41-f0bb2a051dd5.html (Accessed: 31 October 2026).</a:t>
+            </a:r>
+            <a:endParaRPr lang="en-US" sz="700" dirty="0"/>
           </a:p>
           <a:p>
             <a:pPr indent="0" marL="0">
               <a:spcAft>
-                <a:spcPts val="300"/>
+                <a:spcPts val="200"/>
               </a:spcAft>
               <a:buNone/>
             </a:pPr>
             <a:r>
-              <a:rPr lang="en-US" sz="750" dirty="0">
+              <a:rPr lang="en-US" sz="700" dirty="0">
                 <a:solidFill>
                   <a:srgbClr val="1A1F36"/>
                 </a:solidFill>
@@ -7160,19 +9023,19 @@
                 <a:ea typeface="Calibri" pitchFamily="34" charset="-122"/>
                 <a:cs typeface="Calibri" pitchFamily="34" charset="-120"/>
               </a:rPr>
-              <a:t>US Census Bureau (2024) Top Trading Partners – December 2023. Available at: https://www.census.gov/foreign-trade/statistics/highlights/top/top2312yr.html (Accessed: 31 October 2026).</a:t>
-            </a:r>
-            <a:endParaRPr lang="en-US" sz="750" dirty="0"/>
+              <a:t>University of Greenwich (2026a–d) BUSI 1763 Dynamics of Global Business, Lectures 1–4 [Lecture slides]. Available at: Moodle.</a:t>
+            </a:r>
+            <a:endParaRPr lang="en-US" sz="700" dirty="0"/>
           </a:p>
           <a:p>
             <a:pPr indent="0" marL="0">
               <a:spcAft>
-                <a:spcPts val="300"/>
+                <a:spcPts val="200"/>
               </a:spcAft>
               <a:buNone/>
             </a:pPr>
             <a:r>
-              <a:rPr lang="en-US" sz="750" dirty="0">
+              <a:rPr lang="en-US" sz="700" dirty="0">
                 <a:solidFill>
                   <a:srgbClr val="1A1F36"/>
                 </a:solidFill>
@@ -7180,9 +9043,29 @@
                 <a:ea typeface="Calibri" pitchFamily="34" charset="-122"/>
                 <a:cs typeface="Calibri" pitchFamily="34" charset="-120"/>
               </a:rPr>
+              <a:t>US Census Bureau (2024) Top Trading Partners – December 2023. Available at: https://www.census.gov/foreign-trade/statistics/highlights/top/top2312yr.html (Accessed: 31 October 2026).</a:t>
+            </a:r>
+            <a:endParaRPr lang="en-US" sz="700" dirty="0"/>
+          </a:p>
+          <a:p>
+            <a:pPr indent="0" marL="0">
+              <a:spcAft>
+                <a:spcPts val="200"/>
+              </a:spcAft>
+              <a:buNone/>
+            </a:pPr>
+            <a:r>
+              <a:rPr lang="en-US" sz="700" dirty="0">
+                <a:solidFill>
+                  <a:srgbClr val="1A1F36"/>
+                </a:solidFill>
+                <a:latin typeface="Calibri" pitchFamily="34" charset="0"/>
+                <a:ea typeface="Calibri" pitchFamily="34" charset="-122"/>
+                <a:cs typeface="Calibri" pitchFamily="34" charset="-120"/>
+              </a:rPr>
               <a:t>USTR (n.d.) United States-Mexico-Canada Agreement. Available at: https://ustr.gov/trade-agreements/free-trade-agreements/united-states-mexico-canada-agreement (Accessed: 31 October 2026).</a:t>
             </a:r>
-            <a:endParaRPr lang="en-US" sz="750" dirty="0"/>
+            <a:endParaRPr lang="en-US" sz="700" dirty="0"/>
           </a:p>
         </p:txBody>
       </p:sp>
@@ -7565,7 +9448,7 @@
                 <a:ea typeface="Calibri" pitchFamily="34" charset="-122"/>
                 <a:cs typeface="Calibri" pitchFamily="34" charset="-120"/>
               </a:rPr>
-              <a:t>of turnover from emerging markets (2025)</a:t>
+              <a:t>of turnover from emerging markets (Jan–Dec 2025)</a:t>
             </a:r>
             <a:endParaRPr lang="en-US" sz="1050" dirty="0"/>
           </a:p>
@@ -7665,7 +9548,7 @@
                 <a:ea typeface="Calibri" pitchFamily="34" charset="-122"/>
                 <a:cs typeface="Calibri" pitchFamily="34" charset="-120"/>
               </a:rPr>
-              <a:t>countries where its brands are sold</a:t>
+              <a:t>countries where its brands are sold (Dec 2024)</a:t>
             </a:r>
             <a:endParaRPr lang="en-US" sz="1050" dirty="0"/>
           </a:p>
@@ -7765,7 +9648,7 @@
                 <a:ea typeface="Calibri" pitchFamily="34" charset="-122"/>
                 <a:cs typeface="Calibri" pitchFamily="34" charset="-120"/>
               </a:rPr>
-              <a:t>people use its products every day</a:t>
+              <a:t>people use its products every day (Dec 2024)</a:t>
             </a:r>
             <a:endParaRPr lang="en-US" sz="1050" dirty="0"/>
           </a:p>
@@ -7904,7 +9787,7 @@
                 <a:ea typeface="Calibri" pitchFamily="34" charset="-122"/>
                 <a:cs typeface="Calibri" pitchFamily="34" charset="-120"/>
               </a:rPr>
-              <a:t>Sources: Unilever PLC (2021; 2026a; 2026b).</a:t>
+              <a:t>Sources: Unilever PLC (2021a; 2026a; 2026b).</a:t>
             </a:r>
             <a:endParaRPr lang="en-US" sz="800" dirty="0"/>
           </a:p>
@@ -9180,7 +11063,7 @@
                           <a:ea typeface="Calibri" pitchFamily="34" charset="-122"/>
                           <a:cs typeface="Calibri" pitchFamily="34" charset="-120"/>
                         </a:rPr>
-                        <a:t>Extra supply-chain costs cut underlying operating margin by ~0.9 points; emerging-market sales growth only 1.2% in 2020</a:t>
+                        <a:t>Extra supply-chain costs cut underlying operating margin by ~0.9 points in Jan–Dec 2020</a:t>
                       </a:r>
                       <a:endParaRPr lang="en-US" sz="1050" dirty="0">
                         <a:latin typeface="Calibri" charset="0"/>
@@ -9868,7 +11751,7 @@
                           <a:ea typeface="Calibri" pitchFamily="34" charset="-122"/>
                           <a:cs typeface="Calibri" pitchFamily="34" charset="-120"/>
                         </a:rPr>
-                        <a:t>Dec 2025</a:t>
+                        <a:t>Mar 2025</a:t>
                       </a:r>
                       <a:endParaRPr lang="en-US" sz="1050" dirty="0">
                         <a:latin typeface="Calibri" charset="0"/>
@@ -9936,7 +11819,213 @@
                           <a:ea typeface="Calibri" pitchFamily="34" charset="-122"/>
                           <a:cs typeface="Calibri" pitchFamily="34" charset="-120"/>
                         </a:rPr>
-                        <a:t>Year-end: Asia Pacific Africa 44%, Americas 37%, Europe 19% of turnover</a:t>
+                        <a:t>US puts 25% tariffs on Mexico and Canada (USMCA goods exempted)</a:t>
+                      </a:r>
+                      <a:endParaRPr lang="en-US" sz="1050" dirty="0">
+                        <a:latin typeface="Calibri" charset="0"/>
+                        <a:ea typeface="Calibri" charset="0"/>
+                        <a:cs typeface="Calibri" charset="0"/>
+                      </a:endParaRPr>
+                    </a:p>
+                  </a:txBody>
+                  <a:tcPr marL="63500" marR="63500" marT="38100" marB="38100" anchor="ctr">
+                    <a:lnL w="6350" cap="flat" cmpd="sng" algn="ctr">
+                      <a:solidFill>
+                        <a:srgbClr val="D1D5DB"/>
+                      </a:solidFill>
+                      <a:prstDash val="solid"/>
+                      <a:round/>
+                      <a:headEnd type="none" w="med" len="med"/>
+                      <a:tailEnd type="none" w="med" len="med"/>
+                    </a:lnL>
+                    <a:lnR w="6350" cap="flat" cmpd="sng" algn="ctr">
+                      <a:solidFill>
+                        <a:srgbClr val="D1D5DB"/>
+                      </a:solidFill>
+                      <a:prstDash val="solid"/>
+                      <a:round/>
+                      <a:headEnd type="none" w="med" len="med"/>
+                      <a:tailEnd type="none" w="med" len="med"/>
+                    </a:lnR>
+                    <a:lnT w="6350" cap="flat" cmpd="sng" algn="ctr">
+                      <a:solidFill>
+                        <a:srgbClr val="D1D5DB"/>
+                      </a:solidFill>
+                      <a:prstDash val="solid"/>
+                      <a:round/>
+                      <a:headEnd type="none" w="med" len="med"/>
+                      <a:tailEnd type="none" w="med" len="med"/>
+                    </a:lnT>
+                    <a:lnB w="6350" cap="flat" cmpd="sng" algn="ctr">
+                      <a:solidFill>
+                        <a:srgbClr val="D1D5DB"/>
+                      </a:solidFill>
+                      <a:prstDash val="solid"/>
+                      <a:round/>
+                      <a:headEnd type="none" w="med" len="med"/>
+                      <a:tailEnd type="none" w="med" len="med"/>
+                    </a:lnB>
+                    <a:solidFill>
+                      <a:srgbClr val="FFFFFF"/>
+                    </a:solidFill>
+                  </a:tcPr>
+                </a:tc>
+                <a:tc>
+                  <a:txBody>
+                    <a:bodyPr/>
+                    <a:lstStyle/>
+                    <a:p>
+                      <a:pPr indent="0" marL="0">
+                        <a:buNone/>
+                      </a:pPr>
+                      <a:r>
+                        <a:rPr lang="en-US" sz="1050" dirty="0">
+                          <a:solidFill>
+                            <a:srgbClr val="1A1F36"/>
+                          </a:solidFill>
+                          <a:latin typeface="Calibri" pitchFamily="34" charset="0"/>
+                          <a:ea typeface="Calibri" pitchFamily="34" charset="-122"/>
+                          <a:cs typeface="Calibri" pitchFamily="34" charset="-120"/>
+                        </a:rPr>
+                        <a:t>Trade barriers are rising again</a:t>
+                      </a:r>
+                      <a:endParaRPr lang="en-US" sz="1050" dirty="0">
+                        <a:latin typeface="Calibri" charset="0"/>
+                        <a:ea typeface="Calibri" charset="0"/>
+                        <a:cs typeface="Calibri" charset="0"/>
+                      </a:endParaRPr>
+                    </a:p>
+                  </a:txBody>
+                  <a:tcPr marL="63500" marR="63500" marT="38100" marB="38100" anchor="ctr">
+                    <a:lnL w="6350" cap="flat" cmpd="sng" algn="ctr">
+                      <a:solidFill>
+                        <a:srgbClr val="D1D5DB"/>
+                      </a:solidFill>
+                      <a:prstDash val="solid"/>
+                      <a:round/>
+                      <a:headEnd type="none" w="med" len="med"/>
+                      <a:tailEnd type="none" w="med" len="med"/>
+                    </a:lnL>
+                    <a:lnR w="6350" cap="flat" cmpd="sng" algn="ctr">
+                      <a:solidFill>
+                        <a:srgbClr val="D1D5DB"/>
+                      </a:solidFill>
+                      <a:prstDash val="solid"/>
+                      <a:round/>
+                      <a:headEnd type="none" w="med" len="med"/>
+                      <a:tailEnd type="none" w="med" len="med"/>
+                    </a:lnR>
+                    <a:lnT w="6350" cap="flat" cmpd="sng" algn="ctr">
+                      <a:solidFill>
+                        <a:srgbClr val="D1D5DB"/>
+                      </a:solidFill>
+                      <a:prstDash val="solid"/>
+                      <a:round/>
+                      <a:headEnd type="none" w="med" len="med"/>
+                      <a:tailEnd type="none" w="med" len="med"/>
+                    </a:lnT>
+                    <a:lnB w="6350" cap="flat" cmpd="sng" algn="ctr">
+                      <a:solidFill>
+                        <a:srgbClr val="D1D5DB"/>
+                      </a:solidFill>
+                      <a:prstDash val="solid"/>
+                      <a:round/>
+                      <a:headEnd type="none" w="med" len="med"/>
+                      <a:tailEnd type="none" w="med" len="med"/>
+                    </a:lnB>
+                    <a:solidFill>
+                      <a:srgbClr val="FFFFFF"/>
+                    </a:solidFill>
+                  </a:tcPr>
+                </a:tc>
+              </a:tr>
+              <a:tr h="0">
+                <a:tc>
+                  <a:txBody>
+                    <a:bodyPr/>
+                    <a:lstStyle/>
+                    <a:p>
+                      <a:pPr indent="0" marL="0">
+                        <a:buNone/>
+                      </a:pPr>
+                      <a:r>
+                        <a:rPr lang="en-US" sz="1050" b="1" dirty="0">
+                          <a:solidFill>
+                            <a:srgbClr val="1F36C7"/>
+                          </a:solidFill>
+                          <a:latin typeface="Calibri" pitchFamily="34" charset="0"/>
+                          <a:ea typeface="Calibri" pitchFamily="34" charset="-122"/>
+                          <a:cs typeface="Calibri" pitchFamily="34" charset="-120"/>
+                        </a:rPr>
+                        <a:t>Dec 2025</a:t>
+                      </a:r>
+                      <a:endParaRPr lang="en-US" sz="1050" dirty="0">
+                        <a:latin typeface="Calibri" charset="0"/>
+                        <a:ea typeface="Calibri" charset="0"/>
+                        <a:cs typeface="Calibri" charset="0"/>
+                      </a:endParaRPr>
+                    </a:p>
+                  </a:txBody>
+                  <a:tcPr marL="63500" marR="63500" marT="38100" marB="38100" anchor="ctr">
+                    <a:lnL w="6350" cap="flat" cmpd="sng" algn="ctr">
+                      <a:solidFill>
+                        <a:srgbClr val="D1D5DB"/>
+                      </a:solidFill>
+                      <a:prstDash val="solid"/>
+                      <a:round/>
+                      <a:headEnd type="none" w="med" len="med"/>
+                      <a:tailEnd type="none" w="med" len="med"/>
+                    </a:lnL>
+                    <a:lnR w="6350" cap="flat" cmpd="sng" algn="ctr">
+                      <a:solidFill>
+                        <a:srgbClr val="D1D5DB"/>
+                      </a:solidFill>
+                      <a:prstDash val="solid"/>
+                      <a:round/>
+                      <a:headEnd type="none" w="med" len="med"/>
+                      <a:tailEnd type="none" w="med" len="med"/>
+                    </a:lnR>
+                    <a:lnT w="6350" cap="flat" cmpd="sng" algn="ctr">
+                      <a:solidFill>
+                        <a:srgbClr val="D1D5DB"/>
+                      </a:solidFill>
+                      <a:prstDash val="solid"/>
+                      <a:round/>
+                      <a:headEnd type="none" w="med" len="med"/>
+                      <a:tailEnd type="none" w="med" len="med"/>
+                    </a:lnT>
+                    <a:lnB w="6350" cap="flat" cmpd="sng" algn="ctr">
+                      <a:solidFill>
+                        <a:srgbClr val="D1D5DB"/>
+                      </a:solidFill>
+                      <a:prstDash val="solid"/>
+                      <a:round/>
+                      <a:headEnd type="none" w="med" len="med"/>
+                      <a:tailEnd type="none" w="med" len="med"/>
+                    </a:lnB>
+                    <a:solidFill>
+                      <a:srgbClr val="FFFFFF"/>
+                    </a:solidFill>
+                  </a:tcPr>
+                </a:tc>
+                <a:tc>
+                  <a:txBody>
+                    <a:bodyPr/>
+                    <a:lstStyle/>
+                    <a:p>
+                      <a:pPr indent="0" marL="0">
+                        <a:buNone/>
+                      </a:pPr>
+                      <a:r>
+                        <a:rPr lang="en-US" sz="1050" dirty="0">
+                          <a:solidFill>
+                            <a:srgbClr val="1A1F36"/>
+                          </a:solidFill>
+                          <a:latin typeface="Calibri" pitchFamily="34" charset="0"/>
+                          <a:ea typeface="Calibri" pitchFamily="34" charset="-122"/>
+                          <a:cs typeface="Calibri" pitchFamily="34" charset="-120"/>
+                        </a:rPr>
+                        <a:t>Jan–Dec 2025: Asia Pacific Africa 44%, Americas 37%, Europe 19% of turnover</a:t>
                       </a:r>
                       <a:endParaRPr lang="en-US" sz="1050" dirty="0">
                         <a:latin typeface="Calibri" charset="0"/>
@@ -10056,212 +12145,6 @@
                   </a:tcPr>
                 </a:tc>
               </a:tr>
-              <a:tr h="0">
-                <a:tc>
-                  <a:txBody>
-                    <a:bodyPr/>
-                    <a:lstStyle/>
-                    <a:p>
-                      <a:pPr indent="0" marL="0">
-                        <a:buNone/>
-                      </a:pPr>
-                      <a:r>
-                        <a:rPr lang="en-US" sz="1050" b="1" dirty="0">
-                          <a:solidFill>
-                            <a:srgbClr val="1F36C7"/>
-                          </a:solidFill>
-                          <a:latin typeface="Calibri" pitchFamily="34" charset="0"/>
-                          <a:ea typeface="Calibri" pitchFamily="34" charset="-122"/>
-                          <a:cs typeface="Calibri" pitchFamily="34" charset="-120"/>
-                        </a:rPr>
-                        <a:t>2025 report</a:t>
-                      </a:r>
-                      <a:endParaRPr lang="en-US" sz="1050" dirty="0">
-                        <a:latin typeface="Calibri" charset="0"/>
-                        <a:ea typeface="Calibri" charset="0"/>
-                        <a:cs typeface="Calibri" charset="0"/>
-                      </a:endParaRPr>
-                    </a:p>
-                  </a:txBody>
-                  <a:tcPr marL="63500" marR="63500" marT="38100" marB="38100" anchor="ctr">
-                    <a:lnL w="6350" cap="flat" cmpd="sng" algn="ctr">
-                      <a:solidFill>
-                        <a:srgbClr val="D1D5DB"/>
-                      </a:solidFill>
-                      <a:prstDash val="solid"/>
-                      <a:round/>
-                      <a:headEnd type="none" w="med" len="med"/>
-                      <a:tailEnd type="none" w="med" len="med"/>
-                    </a:lnL>
-                    <a:lnR w="6350" cap="flat" cmpd="sng" algn="ctr">
-                      <a:solidFill>
-                        <a:srgbClr val="D1D5DB"/>
-                      </a:solidFill>
-                      <a:prstDash val="solid"/>
-                      <a:round/>
-                      <a:headEnd type="none" w="med" len="med"/>
-                      <a:tailEnd type="none" w="med" len="med"/>
-                    </a:lnR>
-                    <a:lnT w="6350" cap="flat" cmpd="sng" algn="ctr">
-                      <a:solidFill>
-                        <a:srgbClr val="D1D5DB"/>
-                      </a:solidFill>
-                      <a:prstDash val="solid"/>
-                      <a:round/>
-                      <a:headEnd type="none" w="med" len="med"/>
-                      <a:tailEnd type="none" w="med" len="med"/>
-                    </a:lnT>
-                    <a:lnB w="6350" cap="flat" cmpd="sng" algn="ctr">
-                      <a:solidFill>
-                        <a:srgbClr val="D1D5DB"/>
-                      </a:solidFill>
-                      <a:prstDash val="solid"/>
-                      <a:round/>
-                      <a:headEnd type="none" w="med" len="med"/>
-                      <a:tailEnd type="none" w="med" len="med"/>
-                    </a:lnB>
-                    <a:solidFill>
-                      <a:srgbClr val="FFFFFF"/>
-                    </a:solidFill>
-                  </a:tcPr>
-                </a:tc>
-                <a:tc>
-                  <a:txBody>
-                    <a:bodyPr/>
-                    <a:lstStyle/>
-                    <a:p>
-                      <a:pPr indent="0" marL="0">
-                        <a:buNone/>
-                      </a:pPr>
-                      <a:r>
-                        <a:rPr lang="en-US" sz="1050" dirty="0">
-                          <a:solidFill>
-                            <a:srgbClr val="1A1F36"/>
-                          </a:solidFill>
-                          <a:latin typeface="Calibri" pitchFamily="34" charset="0"/>
-                          <a:ea typeface="Calibri" pitchFamily="34" charset="-122"/>
-                          <a:cs typeface="Calibri" pitchFamily="34" charset="-120"/>
-                        </a:rPr>
-                        <a:t>Rising protectionism and tariffs named as a supply-chain risk</a:t>
-                      </a:r>
-                      <a:endParaRPr lang="en-US" sz="1050" dirty="0">
-                        <a:latin typeface="Calibri" charset="0"/>
-                        <a:ea typeface="Calibri" charset="0"/>
-                        <a:cs typeface="Calibri" charset="0"/>
-                      </a:endParaRPr>
-                    </a:p>
-                  </a:txBody>
-                  <a:tcPr marL="63500" marR="63500" marT="38100" marB="38100" anchor="ctr">
-                    <a:lnL w="6350" cap="flat" cmpd="sng" algn="ctr">
-                      <a:solidFill>
-                        <a:srgbClr val="D1D5DB"/>
-                      </a:solidFill>
-                      <a:prstDash val="solid"/>
-                      <a:round/>
-                      <a:headEnd type="none" w="med" len="med"/>
-                      <a:tailEnd type="none" w="med" len="med"/>
-                    </a:lnL>
-                    <a:lnR w="6350" cap="flat" cmpd="sng" algn="ctr">
-                      <a:solidFill>
-                        <a:srgbClr val="D1D5DB"/>
-                      </a:solidFill>
-                      <a:prstDash val="solid"/>
-                      <a:round/>
-                      <a:headEnd type="none" w="med" len="med"/>
-                      <a:tailEnd type="none" w="med" len="med"/>
-                    </a:lnR>
-                    <a:lnT w="6350" cap="flat" cmpd="sng" algn="ctr">
-                      <a:solidFill>
-                        <a:srgbClr val="D1D5DB"/>
-                      </a:solidFill>
-                      <a:prstDash val="solid"/>
-                      <a:round/>
-                      <a:headEnd type="none" w="med" len="med"/>
-                      <a:tailEnd type="none" w="med" len="med"/>
-                    </a:lnT>
-                    <a:lnB w="6350" cap="flat" cmpd="sng" algn="ctr">
-                      <a:solidFill>
-                        <a:srgbClr val="D1D5DB"/>
-                      </a:solidFill>
-                      <a:prstDash val="solid"/>
-                      <a:round/>
-                      <a:headEnd type="none" w="med" len="med"/>
-                      <a:tailEnd type="none" w="med" len="med"/>
-                    </a:lnB>
-                    <a:solidFill>
-                      <a:srgbClr val="FFFFFF"/>
-                    </a:solidFill>
-                  </a:tcPr>
-                </a:tc>
-                <a:tc>
-                  <a:txBody>
-                    <a:bodyPr/>
-                    <a:lstStyle/>
-                    <a:p>
-                      <a:pPr indent="0" marL="0">
-                        <a:buNone/>
-                      </a:pPr>
-                      <a:r>
-                        <a:rPr lang="en-US" sz="1050" dirty="0">
-                          <a:solidFill>
-                            <a:srgbClr val="1A1F36"/>
-                          </a:solidFill>
-                          <a:latin typeface="Calibri" pitchFamily="34" charset="0"/>
-                          <a:ea typeface="Calibri" pitchFamily="34" charset="-122"/>
-                          <a:cs typeface="Calibri" pitchFamily="34" charset="-120"/>
-                        </a:rPr>
-                        <a:t>Globalisation is less smooth</a:t>
-                      </a:r>
-                      <a:endParaRPr lang="en-US" sz="1050" dirty="0">
-                        <a:latin typeface="Calibri" charset="0"/>
-                        <a:ea typeface="Calibri" charset="0"/>
-                        <a:cs typeface="Calibri" charset="0"/>
-                      </a:endParaRPr>
-                    </a:p>
-                  </a:txBody>
-                  <a:tcPr marL="63500" marR="63500" marT="38100" marB="38100" anchor="ctr">
-                    <a:lnL w="6350" cap="flat" cmpd="sng" algn="ctr">
-                      <a:solidFill>
-                        <a:srgbClr val="D1D5DB"/>
-                      </a:solidFill>
-                      <a:prstDash val="solid"/>
-                      <a:round/>
-                      <a:headEnd type="none" w="med" len="med"/>
-                      <a:tailEnd type="none" w="med" len="med"/>
-                    </a:lnL>
-                    <a:lnR w="6350" cap="flat" cmpd="sng" algn="ctr">
-                      <a:solidFill>
-                        <a:srgbClr val="D1D5DB"/>
-                      </a:solidFill>
-                      <a:prstDash val="solid"/>
-                      <a:round/>
-                      <a:headEnd type="none" w="med" len="med"/>
-                      <a:tailEnd type="none" w="med" len="med"/>
-                    </a:lnR>
-                    <a:lnT w="6350" cap="flat" cmpd="sng" algn="ctr">
-                      <a:solidFill>
-                        <a:srgbClr val="D1D5DB"/>
-                      </a:solidFill>
-                      <a:prstDash val="solid"/>
-                      <a:round/>
-                      <a:headEnd type="none" w="med" len="med"/>
-                      <a:tailEnd type="none" w="med" len="med"/>
-                    </a:lnT>
-                    <a:lnB w="6350" cap="flat" cmpd="sng" algn="ctr">
-                      <a:solidFill>
-                        <a:srgbClr val="D1D5DB"/>
-                      </a:solidFill>
-                      <a:prstDash val="solid"/>
-                      <a:round/>
-                      <a:headEnd type="none" w="med" len="med"/>
-                      <a:tailEnd type="none" w="med" len="med"/>
-                    </a:lnB>
-                    <a:solidFill>
-                      <a:srgbClr val="FFFFFF"/>
-                    </a:solidFill>
-                  </a:tcPr>
-                </a:tc>
-              </a:tr>
             </a:tbl>
           </a:graphicData>
         </a:graphic>
@@ -10379,7 +12262,7 @@
                 <a:ea typeface="Calibri" pitchFamily="34" charset="-122"/>
                 <a:cs typeface="Calibri" pitchFamily="34" charset="-120"/>
               </a:rPr>
-              <a:t>Sources: Unilever PLC (2021; 2023b; 2025a; 2026a; 2026b).</a:t>
+              <a:t>Sources: Unilever PLC (2021a; 2023b; 2025a; 2026b); Fortune (2025).</a:t>
             </a:r>
             <a:endParaRPr lang="en-US" sz="800" dirty="0"/>
           </a:p>
@@ -11061,7 +12944,7 @@
                 <a:ea typeface="Calibri" pitchFamily="34" charset="-122"/>
                 <a:cs typeface="Calibri" pitchFamily="34" charset="-120"/>
               </a:rPr>
-              <a:t>Mexico = US's No. 1 trading partner (2023, $799bn goods trade)</a:t>
+              <a:t>Mexico = US's No. 1 trading partner (Jan–Dec 2023, $799bn goods trade)</a:t>
             </a:r>
             <a:endParaRPr lang="en-US" sz="1150" dirty="0"/>
           </a:p>
@@ -11262,7 +13145,7 @@
                 <a:ea typeface="Calibri" pitchFamily="34" charset="-122"/>
                 <a:cs typeface="Calibri" pitchFamily="34" charset="-120"/>
               </a:rPr>
-              <a:t>Mexico is one of Unilever's 10 largest markets; 7,000+ employees</a:t>
+              <a:t>May 2025: Unilever calls Mexico one of its 10 largest markets (7,000+ employees)</a:t>
             </a:r>
             <a:endParaRPr lang="en-US" sz="1300" dirty="0"/>
           </a:p>
@@ -12205,7 +14088,7 @@
                           <a:ea typeface="Calibri" pitchFamily="34" charset="-122"/>
                           <a:cs typeface="Calibri" pitchFamily="34" charset="-120"/>
                         </a:rPr>
-                        <a:t>Plant investment doubled to $800m; will "mainly export to the U.S. and Canada"</a:t>
+                        <a:t>Plant investment doubled to $800m; Unilever says it is mainly for exports to the US and Canada</a:t>
                       </a:r>
                       <a:endParaRPr lang="en-US" sz="1050" dirty="0">
                         <a:latin typeface="Calibri" charset="0"/>
@@ -12273,213 +14156,7 @@
                           <a:ea typeface="Calibri" pitchFamily="34" charset="-122"/>
                           <a:cs typeface="Calibri" pitchFamily="34" charset="-120"/>
                         </a:rPr>
-                        <a:t>850 direct jobs; supplies the US, Unilever's biggest market (€10.5bn turnover, 2025)</a:t>
-                      </a:r>
-                      <a:endParaRPr lang="en-US" sz="1050" dirty="0">
-                        <a:latin typeface="Calibri" charset="0"/>
-                        <a:ea typeface="Calibri" charset="0"/>
-                        <a:cs typeface="Calibri" charset="0"/>
-                      </a:endParaRPr>
-                    </a:p>
-                  </a:txBody>
-                  <a:tcPr marL="63500" marR="63500" marT="38100" marB="38100" anchor="ctr">
-                    <a:lnL w="6350" cap="flat" cmpd="sng" algn="ctr">
-                      <a:solidFill>
-                        <a:srgbClr val="D1D5DB"/>
-                      </a:solidFill>
-                      <a:prstDash val="solid"/>
-                      <a:round/>
-                      <a:headEnd type="none" w="med" len="med"/>
-                      <a:tailEnd type="none" w="med" len="med"/>
-                    </a:lnL>
-                    <a:lnR w="6350" cap="flat" cmpd="sng" algn="ctr">
-                      <a:solidFill>
-                        <a:srgbClr val="D1D5DB"/>
-                      </a:solidFill>
-                      <a:prstDash val="solid"/>
-                      <a:round/>
-                      <a:headEnd type="none" w="med" len="med"/>
-                      <a:tailEnd type="none" w="med" len="med"/>
-                    </a:lnR>
-                    <a:lnT w="6350" cap="flat" cmpd="sng" algn="ctr">
-                      <a:solidFill>
-                        <a:srgbClr val="D1D5DB"/>
-                      </a:solidFill>
-                      <a:prstDash val="solid"/>
-                      <a:round/>
-                      <a:headEnd type="none" w="med" len="med"/>
-                      <a:tailEnd type="none" w="med" len="med"/>
-                    </a:lnT>
-                    <a:lnB w="6350" cap="flat" cmpd="sng" algn="ctr">
-                      <a:solidFill>
-                        <a:srgbClr val="D1D5DB"/>
-                      </a:solidFill>
-                      <a:prstDash val="solid"/>
-                      <a:round/>
-                      <a:headEnd type="none" w="med" len="med"/>
-                      <a:tailEnd type="none" w="med" len="med"/>
-                    </a:lnB>
-                    <a:solidFill>
-                      <a:srgbClr val="FFFFFF"/>
-                    </a:solidFill>
-                  </a:tcPr>
-                </a:tc>
-              </a:tr>
-              <a:tr h="0">
-                <a:tc>
-                  <a:txBody>
-                    <a:bodyPr/>
-                    <a:lstStyle/>
-                    <a:p>
-                      <a:pPr indent="0" marL="0">
-                        <a:buNone/>
-                      </a:pPr>
-                      <a:r>
-                        <a:rPr lang="en-US" sz="1050" b="1" dirty="0">
-                          <a:solidFill>
-                            <a:srgbClr val="0F8A6B"/>
-                          </a:solidFill>
-                          <a:latin typeface="Calibri" pitchFamily="34" charset="0"/>
-                          <a:ea typeface="Calibri" pitchFamily="34" charset="-122"/>
-                          <a:cs typeface="Calibri" pitchFamily="34" charset="-120"/>
-                        </a:rPr>
-                        <a:t>May 2025</a:t>
-                      </a:r>
-                      <a:endParaRPr lang="en-US" sz="1050" dirty="0">
-                        <a:latin typeface="Calibri" charset="0"/>
-                        <a:ea typeface="Calibri" charset="0"/>
-                        <a:cs typeface="Calibri" charset="0"/>
-                      </a:endParaRPr>
-                    </a:p>
-                  </a:txBody>
-                  <a:tcPr marL="63500" marR="63500" marT="38100" marB="38100" anchor="ctr">
-                    <a:lnL w="6350" cap="flat" cmpd="sng" algn="ctr">
-                      <a:solidFill>
-                        <a:srgbClr val="D1D5DB"/>
-                      </a:solidFill>
-                      <a:prstDash val="solid"/>
-                      <a:round/>
-                      <a:headEnd type="none" w="med" len="med"/>
-                      <a:tailEnd type="none" w="med" len="med"/>
-                    </a:lnL>
-                    <a:lnR w="6350" cap="flat" cmpd="sng" algn="ctr">
-                      <a:solidFill>
-                        <a:srgbClr val="D1D5DB"/>
-                      </a:solidFill>
-                      <a:prstDash val="solid"/>
-                      <a:round/>
-                      <a:headEnd type="none" w="med" len="med"/>
-                      <a:tailEnd type="none" w="med" len="med"/>
-                    </a:lnR>
-                    <a:lnT w="6350" cap="flat" cmpd="sng" algn="ctr">
-                      <a:solidFill>
-                        <a:srgbClr val="D1D5DB"/>
-                      </a:solidFill>
-                      <a:prstDash val="solid"/>
-                      <a:round/>
-                      <a:headEnd type="none" w="med" len="med"/>
-                      <a:tailEnd type="none" w="med" len="med"/>
-                    </a:lnT>
-                    <a:lnB w="6350" cap="flat" cmpd="sng" algn="ctr">
-                      <a:solidFill>
-                        <a:srgbClr val="D1D5DB"/>
-                      </a:solidFill>
-                      <a:prstDash val="solid"/>
-                      <a:round/>
-                      <a:headEnd type="none" w="med" len="med"/>
-                      <a:tailEnd type="none" w="med" len="med"/>
-                    </a:lnB>
-                    <a:solidFill>
-                      <a:srgbClr val="FFFFFF"/>
-                    </a:solidFill>
-                  </a:tcPr>
-                </a:tc>
-                <a:tc>
-                  <a:txBody>
-                    <a:bodyPr/>
-                    <a:lstStyle/>
-                    <a:p>
-                      <a:pPr indent="0" marL="0">
-                        <a:buNone/>
-                      </a:pPr>
-                      <a:r>
-                        <a:rPr lang="en-US" sz="1050" dirty="0">
-                          <a:solidFill>
-                            <a:srgbClr val="1A1F36"/>
-                          </a:solidFill>
-                          <a:latin typeface="Calibri" pitchFamily="34" charset="0"/>
-                          <a:ea typeface="Calibri" pitchFamily="34" charset="-122"/>
-                          <a:cs typeface="Calibri" pitchFamily="34" charset="-120"/>
-                        </a:rPr>
-                        <a:t>MXN 30bn (~$1.5bn) Mexico plan for 2025–2028 announced with President Sheinbaum</a:t>
-                      </a:r>
-                      <a:endParaRPr lang="en-US" sz="1050" dirty="0">
-                        <a:latin typeface="Calibri" charset="0"/>
-                        <a:ea typeface="Calibri" charset="0"/>
-                        <a:cs typeface="Calibri" charset="0"/>
-                      </a:endParaRPr>
-                    </a:p>
-                  </a:txBody>
-                  <a:tcPr marL="63500" marR="63500" marT="38100" marB="38100" anchor="ctr">
-                    <a:lnL w="6350" cap="flat" cmpd="sng" algn="ctr">
-                      <a:solidFill>
-                        <a:srgbClr val="D1D5DB"/>
-                      </a:solidFill>
-                      <a:prstDash val="solid"/>
-                      <a:round/>
-                      <a:headEnd type="none" w="med" len="med"/>
-                      <a:tailEnd type="none" w="med" len="med"/>
-                    </a:lnL>
-                    <a:lnR w="6350" cap="flat" cmpd="sng" algn="ctr">
-                      <a:solidFill>
-                        <a:srgbClr val="D1D5DB"/>
-                      </a:solidFill>
-                      <a:prstDash val="solid"/>
-                      <a:round/>
-                      <a:headEnd type="none" w="med" len="med"/>
-                      <a:tailEnd type="none" w="med" len="med"/>
-                    </a:lnR>
-                    <a:lnT w="6350" cap="flat" cmpd="sng" algn="ctr">
-                      <a:solidFill>
-                        <a:srgbClr val="D1D5DB"/>
-                      </a:solidFill>
-                      <a:prstDash val="solid"/>
-                      <a:round/>
-                      <a:headEnd type="none" w="med" len="med"/>
-                      <a:tailEnd type="none" w="med" len="med"/>
-                    </a:lnT>
-                    <a:lnB w="6350" cap="flat" cmpd="sng" algn="ctr">
-                      <a:solidFill>
-                        <a:srgbClr val="D1D5DB"/>
-                      </a:solidFill>
-                      <a:prstDash val="solid"/>
-                      <a:round/>
-                      <a:headEnd type="none" w="med" len="med"/>
-                      <a:tailEnd type="none" w="med" len="med"/>
-                    </a:lnB>
-                    <a:solidFill>
-                      <a:srgbClr val="FFFFFF"/>
-                    </a:solidFill>
-                  </a:tcPr>
-                </a:tc>
-                <a:tc>
-                  <a:txBody>
-                    <a:bodyPr/>
-                    <a:lstStyle/>
-                    <a:p>
-                      <a:pPr indent="0" marL="0">
-                        <a:buNone/>
-                      </a:pPr>
-                      <a:r>
-                        <a:rPr lang="en-US" sz="1050" dirty="0">
-                          <a:solidFill>
-                            <a:srgbClr val="1A1F36"/>
-                          </a:solidFill>
-                          <a:latin typeface="Calibri" pitchFamily="34" charset="0"/>
-                          <a:ea typeface="Calibri" pitchFamily="34" charset="-122"/>
-                          <a:cs typeface="Calibri" pitchFamily="34" charset="-120"/>
-                        </a:rPr>
-                        <a:t>New lines, logistics and digital tools; plant serves Mexico, the US and Canada</a:t>
+                        <a:t>Supplies the US, Unilever's biggest market (€10.5bn turnover, Jan–Dec 2025); plant still being built</a:t>
                       </a:r>
                       <a:endParaRPr lang="en-US" sz="1050" dirty="0">
                         <a:latin typeface="Calibri" charset="0"/>
@@ -12609,7 +14286,7 @@
                 <a:ea typeface="Calibri" pitchFamily="34" charset="-122"/>
                 <a:cs typeface="Calibri" pitchFamily="34" charset="-120"/>
               </a:rPr>
-              <a:t>USMCA makes Mexico a low-cost, tariff-free base for the US. Limit: only ~half of US imports from Mexico qualified in 2024.</a:t>
+              <a:t>USMCA makes Mexico a low-cost, tariff-free base for the US. Limit: only ~half of US imports from Mexico qualified in Jan–Dec 2024.</a:t>
             </a:r>
             <a:endParaRPr lang="en-US" sz="1150" dirty="0"/>
           </a:p>
@@ -12732,7 +14409,7 @@
                 <a:ea typeface="Calibri" pitchFamily="34" charset="-122"/>
                 <a:cs typeface="Calibri" pitchFamily="34" charset="-120"/>
               </a:rPr>
-              <a:t>Speaker 3 · MNEs from Advanced Economies</a:t>
+              <a:t>Speaker 3 · MNEs from Advanced Economies + CSR</a:t>
             </a:r>
             <a:endParaRPr lang="en-US" sz="1000" dirty="0"/>
           </a:p>
@@ -12771,7 +14448,7 @@
                 <a:ea typeface="Calibri" pitchFamily="34" charset="-122"/>
                 <a:cs typeface="Calibri" pitchFamily="34" charset="-120"/>
               </a:rPr>
-              <a:t>MNEs from advanced economies</a:t>
+              <a:t>MNEs from advanced economies + CSR</a:t>
             </a:r>
             <a:endParaRPr lang="en-US" sz="2500" dirty="0"/>
           </a:p>
@@ -13372,7 +15049,7 @@
                 <a:ea typeface="Calibri" pitchFamily="34" charset="-122"/>
                 <a:cs typeface="Calibri" pitchFamily="34" charset="-120"/>
               </a:rPr>
-              <a:t>Outright expropriation</a:t>
+              <a:t>Profits leaving the country</a:t>
             </a:r>
             <a:endParaRPr lang="en-US" sz="1150" dirty="0"/>
           </a:p>
@@ -13393,7 +15070,7 @@
                 <a:ea typeface="Calibri" pitchFamily="34" charset="-122"/>
                 <a:cs typeface="Calibri" pitchFamily="34" charset="-120"/>
               </a:rPr>
-              <a:t>Profits leaving the country</a:t>
+              <a:t>CSR = the MNE's "licence to operate"</a:t>
             </a:r>
             <a:endParaRPr lang="en-US" sz="1150" dirty="0"/>
           </a:p>
@@ -13516,7 +15193,7 @@
                 <a:ea typeface="Calibri" pitchFamily="34" charset="-122"/>
                 <a:cs typeface="Calibri" pitchFamily="34" charset="-120"/>
               </a:rPr>
-              <a:t>Speaker 3 · MNEs from Advanced Economies</a:t>
+              <a:t>Speaker 3 · MNEs from Advanced Economies + CSR</a:t>
             </a:r>
             <a:endParaRPr lang="en-US" sz="1000" dirty="0"/>
           </a:p>
@@ -13851,7 +15528,7 @@
                           <a:ea typeface="Calibri" pitchFamily="34" charset="-122"/>
                           <a:cs typeface="Calibri" pitchFamily="34" charset="-120"/>
                         </a:rPr>
-                        <a:t>2020–2024</a:t>
+                        <a:t>Jan–Dec 2024</a:t>
                       </a:r>
                       <a:endParaRPr lang="en-US" sz="1050" dirty="0">
                         <a:latin typeface="Calibri" charset="0"/>
@@ -13919,7 +15596,7 @@
                           <a:ea typeface="Calibri" pitchFamily="34" charset="-122"/>
                           <a:cs typeface="Calibri" pitchFamily="34" charset="-120"/>
                         </a:rPr>
-                        <a:t>R&amp;D spending grows from €800m to €987m a year</a:t>
+                        <a:t>R&amp;D spending: €987m</a:t>
                       </a:r>
                       <a:endParaRPr lang="en-US" sz="1050" dirty="0">
                         <a:latin typeface="Calibri" charset="0"/>
@@ -14193,7 +15870,7 @@
                           <a:ea typeface="Calibri" pitchFamily="34" charset="-122"/>
                           <a:cs typeface="Calibri" pitchFamily="34" charset="-120"/>
                         </a:rPr>
-                        <a:t>Target €800m savings in 3 years; €200m saved and 4,300 jobs gone by Dec 2024; €850m restructuring costs in 2024</a:t>
+                        <a:t>4,300 jobs gone by Dec 2024: profit vs host-country employment</a:t>
                       </a:r>
                       <a:endParaRPr lang="en-US" sz="1050" dirty="0">
                         <a:latin typeface="Calibri" charset="0"/>
@@ -14399,7 +16076,7 @@
                           <a:ea typeface="Calibri" pitchFamily="34" charset="-122"/>
                           <a:cs typeface="Calibri" pitchFamily="34" charset="-120"/>
                         </a:rPr>
-                        <a:t>Protected assets for 2½ years, but clashed with home and host politics</a:t>
+                        <a:t>Protected assets, but clashed with home and host politics</a:t>
                       </a:r>
                       <a:endParaRPr lang="en-US" sz="1050" dirty="0">
                         <a:latin typeface="Calibri" charset="0"/>
@@ -14675,7 +16352,7 @@
                           <a:ea typeface="Calibri" pitchFamily="34" charset="-122"/>
                           <a:cs typeface="Calibri" pitchFamily="34" charset="-120"/>
                         </a:rPr>
-                        <a:t>Apr 2025</a:t>
+                        <a:t>Dec 2025</a:t>
                       </a:r>
                       <a:endParaRPr lang="en-US" sz="1050" dirty="0">
                         <a:latin typeface="Calibri" charset="0"/>
@@ -14743,213 +16420,7 @@
                           <a:ea typeface="Calibri" pitchFamily="34" charset="-122"/>
                           <a:cs typeface="Calibri" pitchFamily="34" charset="-120"/>
                         </a:rPr>
-                        <a:t>Hindustan Unilever buys 90.5% of Minimalist (Rs 2,670 crore; announced Jan 2025)</a:t>
-                      </a:r>
-                      <a:endParaRPr lang="en-US" sz="1050" dirty="0">
-                        <a:latin typeface="Calibri" charset="0"/>
-                        <a:ea typeface="Calibri" charset="0"/>
-                        <a:cs typeface="Calibri" charset="0"/>
-                      </a:endParaRPr>
-                    </a:p>
-                  </a:txBody>
-                  <a:tcPr marL="63500" marR="63500" marT="38100" marB="38100" anchor="ctr">
-                    <a:lnL w="6350" cap="flat" cmpd="sng" algn="ctr">
-                      <a:solidFill>
-                        <a:srgbClr val="D1D5DB"/>
-                      </a:solidFill>
-                      <a:prstDash val="solid"/>
-                      <a:round/>
-                      <a:headEnd type="none" w="med" len="med"/>
-                      <a:tailEnd type="none" w="med" len="med"/>
-                    </a:lnL>
-                    <a:lnR w="6350" cap="flat" cmpd="sng" algn="ctr">
-                      <a:solidFill>
-                        <a:srgbClr val="D1D5DB"/>
-                      </a:solidFill>
-                      <a:prstDash val="solid"/>
-                      <a:round/>
-                      <a:headEnd type="none" w="med" len="med"/>
-                      <a:tailEnd type="none" w="med" len="med"/>
-                    </a:lnR>
-                    <a:lnT w="6350" cap="flat" cmpd="sng" algn="ctr">
-                      <a:solidFill>
-                        <a:srgbClr val="D1D5DB"/>
-                      </a:solidFill>
-                      <a:prstDash val="solid"/>
-                      <a:round/>
-                      <a:headEnd type="none" w="med" len="med"/>
-                      <a:tailEnd type="none" w="med" len="med"/>
-                    </a:lnT>
-                    <a:lnB w="6350" cap="flat" cmpd="sng" algn="ctr">
-                      <a:solidFill>
-                        <a:srgbClr val="D1D5DB"/>
-                      </a:solidFill>
-                      <a:prstDash val="solid"/>
-                      <a:round/>
-                      <a:headEnd type="none" w="med" len="med"/>
-                      <a:tailEnd type="none" w="med" len="med"/>
-                    </a:lnB>
-                    <a:solidFill>
-                      <a:srgbClr val="FFFFFF"/>
-                    </a:solidFill>
-                  </a:tcPr>
-                </a:tc>
-                <a:tc>
-                  <a:txBody>
-                    <a:bodyPr/>
-                    <a:lstStyle/>
-                    <a:p>
-                      <a:pPr indent="0" marL="0">
-                        <a:buNone/>
-                      </a:pPr>
-                      <a:r>
-                        <a:rPr lang="en-US" sz="1050" dirty="0">
-                          <a:solidFill>
-                            <a:srgbClr val="1A1F36"/>
-                          </a:solidFill>
-                          <a:latin typeface="Calibri" pitchFamily="34" charset="0"/>
-                          <a:ea typeface="Calibri" pitchFamily="34" charset="-122"/>
-                          <a:cs typeface="Calibri" pitchFamily="34" charset="-120"/>
-                        </a:rPr>
-                        <a:t>Moves Beauty &amp; Wellbeing in India towards faster-growing spaces</a:t>
-                      </a:r>
-                      <a:endParaRPr lang="en-US" sz="1050" dirty="0">
-                        <a:latin typeface="Calibri" charset="0"/>
-                        <a:ea typeface="Calibri" charset="0"/>
-                        <a:cs typeface="Calibri" charset="0"/>
-                      </a:endParaRPr>
-                    </a:p>
-                  </a:txBody>
-                  <a:tcPr marL="63500" marR="63500" marT="38100" marB="38100" anchor="ctr">
-                    <a:lnL w="6350" cap="flat" cmpd="sng" algn="ctr">
-                      <a:solidFill>
-                        <a:srgbClr val="D1D5DB"/>
-                      </a:solidFill>
-                      <a:prstDash val="solid"/>
-                      <a:round/>
-                      <a:headEnd type="none" w="med" len="med"/>
-                      <a:tailEnd type="none" w="med" len="med"/>
-                    </a:lnL>
-                    <a:lnR w="6350" cap="flat" cmpd="sng" algn="ctr">
-                      <a:solidFill>
-                        <a:srgbClr val="D1D5DB"/>
-                      </a:solidFill>
-                      <a:prstDash val="solid"/>
-                      <a:round/>
-                      <a:headEnd type="none" w="med" len="med"/>
-                      <a:tailEnd type="none" w="med" len="med"/>
-                    </a:lnR>
-                    <a:lnT w="6350" cap="flat" cmpd="sng" algn="ctr">
-                      <a:solidFill>
-                        <a:srgbClr val="D1D5DB"/>
-                      </a:solidFill>
-                      <a:prstDash val="solid"/>
-                      <a:round/>
-                      <a:headEnd type="none" w="med" len="med"/>
-                      <a:tailEnd type="none" w="med" len="med"/>
-                    </a:lnT>
-                    <a:lnB w="6350" cap="flat" cmpd="sng" algn="ctr">
-                      <a:solidFill>
-                        <a:srgbClr val="D1D5DB"/>
-                      </a:solidFill>
-                      <a:prstDash val="solid"/>
-                      <a:round/>
-                      <a:headEnd type="none" w="med" len="med"/>
-                      <a:tailEnd type="none" w="med" len="med"/>
-                    </a:lnB>
-                    <a:solidFill>
-                      <a:srgbClr val="FFFFFF"/>
-                    </a:solidFill>
-                  </a:tcPr>
-                </a:tc>
-              </a:tr>
-              <a:tr h="0">
-                <a:tc>
-                  <a:txBody>
-                    <a:bodyPr/>
-                    <a:lstStyle/>
-                    <a:p>
-                      <a:pPr indent="0" marL="0">
-                        <a:buNone/>
-                      </a:pPr>
-                      <a:r>
-                        <a:rPr lang="en-US" sz="1050" b="1" dirty="0">
-                          <a:solidFill>
-                            <a:srgbClr val="D9822B"/>
-                          </a:solidFill>
-                          <a:latin typeface="Calibri" pitchFamily="34" charset="0"/>
-                          <a:ea typeface="Calibri" pitchFamily="34" charset="-122"/>
-                          <a:cs typeface="Calibri" pitchFamily="34" charset="-120"/>
-                        </a:rPr>
-                        <a:t>Dec 2025</a:t>
-                      </a:r>
-                      <a:endParaRPr lang="en-US" sz="1050" dirty="0">
-                        <a:latin typeface="Calibri" charset="0"/>
-                        <a:ea typeface="Calibri" charset="0"/>
-                        <a:cs typeface="Calibri" charset="0"/>
-                      </a:endParaRPr>
-                    </a:p>
-                  </a:txBody>
-                  <a:tcPr marL="63500" marR="63500" marT="38100" marB="38100" anchor="ctr">
-                    <a:lnL w="6350" cap="flat" cmpd="sng" algn="ctr">
-                      <a:solidFill>
-                        <a:srgbClr val="D1D5DB"/>
-                      </a:solidFill>
-                      <a:prstDash val="solid"/>
-                      <a:round/>
-                      <a:headEnd type="none" w="med" len="med"/>
-                      <a:tailEnd type="none" w="med" len="med"/>
-                    </a:lnL>
-                    <a:lnR w="6350" cap="flat" cmpd="sng" algn="ctr">
-                      <a:solidFill>
-                        <a:srgbClr val="D1D5DB"/>
-                      </a:solidFill>
-                      <a:prstDash val="solid"/>
-                      <a:round/>
-                      <a:headEnd type="none" w="med" len="med"/>
-                      <a:tailEnd type="none" w="med" len="med"/>
-                    </a:lnR>
-                    <a:lnT w="6350" cap="flat" cmpd="sng" algn="ctr">
-                      <a:solidFill>
-                        <a:srgbClr val="D1D5DB"/>
-                      </a:solidFill>
-                      <a:prstDash val="solid"/>
-                      <a:round/>
-                      <a:headEnd type="none" w="med" len="med"/>
-                      <a:tailEnd type="none" w="med" len="med"/>
-                    </a:lnT>
-                    <a:lnB w="6350" cap="flat" cmpd="sng" algn="ctr">
-                      <a:solidFill>
-                        <a:srgbClr val="D1D5DB"/>
-                      </a:solidFill>
-                      <a:prstDash val="solid"/>
-                      <a:round/>
-                      <a:headEnd type="none" w="med" len="med"/>
-                      <a:tailEnd type="none" w="med" len="med"/>
-                    </a:lnB>
-                    <a:solidFill>
-                      <a:srgbClr val="FFFFFF"/>
-                    </a:solidFill>
-                  </a:tcPr>
-                </a:tc>
-                <a:tc>
-                  <a:txBody>
-                    <a:bodyPr/>
-                    <a:lstStyle/>
-                    <a:p>
-                      <a:pPr indent="0" marL="0">
-                        <a:buNone/>
-                      </a:pPr>
-                      <a:r>
-                        <a:rPr lang="en-US" sz="1050" dirty="0">
-                          <a:solidFill>
-                            <a:srgbClr val="1A1F36"/>
-                          </a:solidFill>
-                          <a:latin typeface="Calibri" pitchFamily="34" charset="0"/>
-                          <a:ea typeface="Calibri" pitchFamily="34" charset="-122"/>
-                          <a:cs typeface="Calibri" pitchFamily="34" charset="-120"/>
-                        </a:rPr>
-                        <a:t>30 Power Brands make 78% of turnover</a:t>
+                        <a:t>30 Power Brands make 78% of turnover (Jan–Dec 2025)</a:t>
                       </a:r>
                       <a:endParaRPr lang="en-US" sz="1050" dirty="0">
                         <a:latin typeface="Calibri" charset="0"/>
@@ -15186,7 +16657,7 @@
                 <a:ea typeface="Calibri" pitchFamily="34" charset="-122"/>
                 <a:cs typeface="Calibri" pitchFamily="34" charset="-120"/>
               </a:rPr>
-              <a:t>Sources: Unilever PLC (2021; 2025a; 2025b; 2026a; 2026b); Entrackr (2025).</a:t>
+              <a:t>Sources: Unilever PLC (2025a; 2025b; 2026a; 2026b).</a:t>
             </a:r>
             <a:endParaRPr lang="en-US" sz="800" dirty="0"/>
           </a:p>

--- a/content/busi1763/files/Unilever_Group_EN.pptx
+++ b/content/busi1763/files/Unilever_Group_EN.pptx
@@ -1157,7 +1157,7 @@
           <a:p>
             <a:r>
               <a:rPr lang="en-US" dirty="0"/>
-              <a:t>Now, CSR, corporate social responsibility. Host countries want a clean environment and fair wages, so CSR is an MNE's licence to operate. Unilever's CSR framework is the Unilever Compass. It was introduced in March 2021, after the Sustainable Living Plan ended in December 2020. What did it achieve? In June 2020, it promised net zero emissions by 2039, and in May 2021, 99.6 percent of shareholders voted for its climate plan. By December 2025, emissions from its own operations were 77 percent lower than in 2015. But there is a critical side. In January 2022, the fund manager Terry Smith said Unilever had lost the plot by defining a purpose for Hellmann's mayonnaise. In April 2024, Unilever lowered its plastic target. It had planned to halve virgin plastic by 2025, but by December 2025 it had cut it by only 29 percent. So CSR keeps Unilever's licence to operate and investor support, but missed targets bring accusations of greenwashing. For the future, Unilever's own targets are zero emissions from its own operations by 2030, and net zero across the value chain by 2039. These are targets, not results. My conclusion: Unilever's advantages come from being an advanced-economy MNE. On CSR, it has done well on climate but gone backwards on plastics, so it must balance profit, jobs, politics and sustainability. Next, our last speaker will explain Unilever's FDI in the United States.</a:t>
+              <a:t>Now, CSR, corporate social responsibility. Host countries want a clean environment and fair wages, so CSR is an MNE's licence to operate. Unilever's CSR framework is the Unilever Compass. It was introduced in March 2021, after the Sustainable Living Plan ended in December 2020. What did it achieve? In June 2020, it made a long-term promise to reach net zero emissions, and in May 2021, 99.6 percent of shareholders voted for its climate plan. By December 2025, emissions from its own operations were 77 percent lower than in 2015. But there is a critical side. In January 2022, the fund manager Terry Smith said Unilever had lost the plot by defining a purpose for Hellmann's mayonnaise. In April 2024, Unilever lowered its plastic target. It had planned to halve virgin plastic by 2025, but by December 2025 it had cut it by only 29 percent. So CSR keeps Unilever's licence to operate and investor support, but missed targets bring accusations of greenwashing. Looking ahead, the key question is whether Unilever can keep its climate promises, after it lowered its plastic target. My conclusion: Unilever's advantages come from being an advanced-economy MNE. On CSR, it has done well on climate but gone backwards on plastics, so it must balance profit, jobs, politics and sustainability. Next, our last speaker will explain Unilever's FDI in the United States.</a:t>
             </a:r>
             <a:endParaRPr lang="en-US" dirty="0"/>
           </a:p>
@@ -2213,7 +2213,7 @@
           <a:p>
             <a:r>
               <a:rPr lang="en-US" dirty="0"/>
-              <a:t>Now, Unilever in Mexico. In May 2025, Unilever said Mexico is one of its ten largest markets, with more than 7,000 employees. In February 2023, Unilever announced a new beauty and personal care factory in Nuevo León, near the US border, for 400 million dollars. In April 2025, it doubled the investment to 800 million dollars, and said the plant is mainly for exports to the US and Canada. In May 2025, Unilever announced an even bigger plan: 30 billion pesos, about 1.5 billion dollars, for Mexico from 2025 to 2028. So what are the benefits for Unilever? First, market access. Products that meet USMCA rules can enter the US with no tariffs, and the US is Unilever's biggest market, with 10.5 billion euros of turnover in the year to December 2025. Second, protection from tariffs. In March 2025, the US put a 25 percent tariff on Mexico, but goods that qualify under USMCA were exempted. One month later, Unilever doubled its investment. Third, lower costs and speed. Making products next to the US is cheaper and faster than shipping them from far away. This is trade creation inside North America. But there are limits. From January to December 2024, only about half of US imports from Mexico qualified for USMCA, and US trade policy can change quickly. Unilever has not said publicly that USMCA is the reason for its investment, so this is our own analysis. My conclusion: through USMCA, Mexico gives Unilever a low-cost base with tariff-free access to its biggest market. But the benefit depends on the rules of origin and on US politics. Next, my teammate will explain Unilever as an MNE from an advanced economy.</a:t>
+              <a:t>Now, Unilever in Mexico. In May 2025, Unilever said Mexico is one of its ten largest markets, with more than 7,000 employees. In February 2023, Unilever announced a new beauty and personal care factory in Nuevo León, near the US border, for 400 million dollars. In April 2025, it doubled the investment to 800 million dollars, and said the plant is mainly for exports to the US and Canada. So what are the benefits for Unilever? First, market access. Products that meet USMCA rules can enter the US with no tariffs, and the US is Unilever's biggest market, with 10.5 billion euros of turnover in the year to December 2025. Second, protection from tariffs. In March 2025, the US put a 25 percent tariff on Mexico, but goods that qualify under USMCA were exempted. One month later, Unilever doubled its investment. Third, lower costs and speed. Making products next to the US is cheaper and faster than shipping them from far away. This is trade creation inside North America. But there are limits. From January to December 2024, only about half of US imports from Mexico qualified for USMCA, and US trade policy can change quickly. Unilever has not said publicly that USMCA is the reason for its investment, so this is our own analysis. My conclusion: through USMCA, Mexico gives Unilever a low-cost base with tariff-free access to its biggest market. But the benefit depends on the rules of origin and on US politics. Next, my teammate will explain Unilever as an MNE from an advanced economy.</a:t>
             </a:r>
             <a:endParaRPr lang="en-US" dirty="0"/>
           </a:p>
@@ -3185,7 +3185,7 @@
                 <a:ea typeface="Calibri" pitchFamily="34" charset="-122"/>
                 <a:cs typeface="Calibri" pitchFamily="34" charset="-120"/>
               </a:rPr>
-              <a:t>BUSI 1763 Dynamics of Global Business · Group presentation · 14 November 2026</a:t>
+              <a:t>BUSI 1763 Dynamics of Global Business · Group presentation</a:t>
             </a:r>
             <a:endParaRPr lang="en-US" sz="1200" dirty="0"/>
           </a:p>
@@ -3672,7 +3672,7 @@
                           <a:ea typeface="Calibri" pitchFamily="34" charset="-122"/>
                           <a:cs typeface="Calibri" pitchFamily="34" charset="-120"/>
                         </a:rPr>
-                        <a:t>Commits to net zero emissions by 2039; €1bn Climate &amp; Nature Fund</a:t>
+                        <a:t>Makes a long-term promise to reach net zero emissions; €1bn Climate &amp; Nature Fund</a:t>
                       </a:r>
                       <a:endParaRPr lang="en-US" sz="1000" dirty="0">
                         <a:latin typeface="Calibri" charset="0"/>
@@ -4496,7 +4496,7 @@
                           <a:ea typeface="Calibri" pitchFamily="34" charset="-122"/>
                           <a:cs typeface="Calibri" pitchFamily="34" charset="-120"/>
                         </a:rPr>
-                        <a:t>Plastic target lowered: virgin plastic −30% by 2026, −40% by 2028 (was −50% by 2025)</a:t>
+                        <a:t>Plastic target lowered (it had planned to halve virgin plastic by 2025)</a:t>
                       </a:r>
                       <a:endParaRPr lang="en-US" sz="1000" dirty="0">
                         <a:latin typeface="Calibri" charset="0"/>
@@ -4900,7 +4900,7 @@
                 <a:ea typeface="Calibri" pitchFamily="34" charset="-122"/>
                 <a:cs typeface="Calibri" pitchFamily="34" charset="-120"/>
               </a:rPr>
-              <a:t>CSR keeps Unilever's licence to operate, but missed targets bring greenwashing claims. Future (company targets, not results): zero own emissions by 2030; net zero by 2039.</a:t>
+              <a:t>CSR keeps Unilever's licence to operate, but missed targets bring greenwashing claims. Key question: can it keep its climate promises?</a:t>
             </a:r>
             <a:endParaRPr lang="en-US" sz="1150" dirty="0"/>
           </a:p>
